--- a/docs/MIRL LAB Honours Project Bi-Weekly Update.pptx
+++ b/docs/MIRL LAB Honours Project Bi-Weekly Update.pptx
@@ -26,14 +26,22 @@
     <p:sldId id="270" r:id="rId22"/>
     <p:sldId id="271" r:id="rId23"/>
     <p:sldId id="272" r:id="rId24"/>
+    <p:sldId id="273" r:id="rId25"/>
+    <p:sldId id="274" r:id="rId26"/>
+    <p:sldId id="275" r:id="rId27"/>
+    <p:sldId id="276" r:id="rId28"/>
+    <p:sldId id="277" r:id="rId29"/>
+    <p:sldId id="278" r:id="rId30"/>
+    <p:sldId id="279" r:id="rId31"/>
+    <p:sldId id="280" r:id="rId32"/>
   </p:sldIdLst>
   <p:sldSz cy="5143500" cx="9144000"/>
   <p:notesSz cx="6858000" cy="9144000"/>
   <p:embeddedFontLst>
     <p:embeddedFont>
       <p:font typeface="Play"/>
-      <p:regular r:id="rId25"/>
-      <p:bold r:id="rId26"/>
+      <p:regular r:id="rId33"/>
+      <p:bold r:id="rId34"/>
     </p:embeddedFont>
   </p:embeddedFontLst>
   <p:defaultTextStyle>
@@ -1601,6 +1609,204 @@
 </p:notes>
 </file>
 
+<file path=ppt/notesSlides/notesSlide18.xml><?xml version="1.0" encoding="utf-8"?>
+<p:notes xmlns:a="http://schemas.openxmlformats.org/drawingml/2006/main" xmlns:r="http://schemas.openxmlformats.org/officeDocument/2006/relationships" xmlns:mc="http://schemas.openxmlformats.org/markup-compatibility/2006" xmlns:mv="urn:schemas-microsoft-com:mac:vml" xmlns:p="http://schemas.openxmlformats.org/presentationml/2006/main" xmlns:c="http://schemas.openxmlformats.org/drawingml/2006/chart" xmlns:dgm="http://schemas.openxmlformats.org/drawingml/2006/diagram" xmlns:o="urn:schemas-microsoft-com:office:office" xmlns:v="urn:schemas-microsoft-com:vml" xmlns:pvml="urn:schemas-microsoft-com:office:powerpoint" xmlns:com="http://schemas.openxmlformats.org/drawingml/2006/compatibility" xmlns:p14="http://schemas.microsoft.com/office/powerpoint/2010/main" xmlns:p15="http://schemas.microsoft.com/office/powerpoint/2012/main" xmlns:ahyp="http://schemas.microsoft.com/office/drawing/2018/hyperlinkcolor" showMasterPhAnim="0" showMasterSp="0">
+  <p:cSld>
+    <p:spTree>
+      <p:nvGrpSpPr>
+        <p:cNvPr id="232" name="Shape 232"/>
+        <p:cNvGrpSpPr/>
+        <p:nvPr/>
+      </p:nvGrpSpPr>
+      <p:grpSpPr>
+        <a:xfrm>
+          <a:off x="0" y="0"/>
+          <a:ext cx="0" cy="0"/>
+          <a:chOff x="0" y="0"/>
+          <a:chExt cx="0" cy="0"/>
+        </a:xfrm>
+      </p:grpSpPr>
+      <p:sp>
+        <p:nvSpPr>
+          <p:cNvPr id="233" name="Google Shape;233;g38c8274f9e2_0_0:notes"/>
+          <p:cNvSpPr/>
+          <p:nvPr>
+            <p:ph idx="2" type="sldImg"/>
+          </p:nvPr>
+        </p:nvSpPr>
+        <p:spPr>
+          <a:xfrm>
+            <a:off x="381300" y="685800"/>
+            <a:ext cx="6096000" cy="3429000"/>
+          </a:xfrm>
+          <a:custGeom>
+            <a:rect b="b" l="l" r="r" t="t"/>
+            <a:pathLst>
+              <a:path extrusionOk="0" h="120000" w="120000">
+                <a:moveTo>
+                  <a:pt x="0" y="0"/>
+                </a:moveTo>
+                <a:lnTo>
+                  <a:pt x="120000" y="0"/>
+                </a:lnTo>
+                <a:lnTo>
+                  <a:pt x="120000" y="120000"/>
+                </a:lnTo>
+                <a:lnTo>
+                  <a:pt x="0" y="120000"/>
+                </a:lnTo>
+                <a:close/>
+              </a:path>
+            </a:pathLst>
+          </a:custGeom>
+        </p:spPr>
+      </p:sp>
+      <p:sp>
+        <p:nvSpPr>
+          <p:cNvPr id="234" name="Google Shape;234;g38c8274f9e2_0_0:notes"/>
+          <p:cNvSpPr txBox="1"/>
+          <p:nvPr>
+            <p:ph idx="1" type="body"/>
+          </p:nvPr>
+        </p:nvSpPr>
+        <p:spPr>
+          <a:xfrm>
+            <a:off x="685800" y="4343400"/>
+            <a:ext cx="5486400" cy="4114800"/>
+          </a:xfrm>
+          <a:prstGeom prst="rect">
+            <a:avLst/>
+          </a:prstGeom>
+        </p:spPr>
+        <p:txBody>
+          <a:bodyPr anchorCtr="0" anchor="t" bIns="91425" lIns="91425" spcFirstLastPara="1" rIns="91425" wrap="square" tIns="91425">
+            <a:noAutofit/>
+          </a:bodyPr>
+          <a:lstStyle/>
+          <a:p>
+            <a:pPr indent="0" lvl="0" marL="0" rtl="0" algn="l">
+              <a:spcBef>
+                <a:spcPts val="0"/>
+              </a:spcBef>
+              <a:spcAft>
+                <a:spcPts val="0"/>
+              </a:spcAft>
+              <a:buNone/>
+            </a:pPr>
+            <a:r>
+              <a:t/>
+            </a:r>
+            <a:endParaRPr/>
+          </a:p>
+        </p:txBody>
+      </p:sp>
+    </p:spTree>
+  </p:cSld>
+  <p:clrMapOvr>
+    <a:masterClrMapping/>
+  </p:clrMapOvr>
+</p:notes>
+</file>
+
+<file path=ppt/notesSlides/notesSlide19.xml><?xml version="1.0" encoding="utf-8"?>
+<p:notes xmlns:a="http://schemas.openxmlformats.org/drawingml/2006/main" xmlns:r="http://schemas.openxmlformats.org/officeDocument/2006/relationships" xmlns:mc="http://schemas.openxmlformats.org/markup-compatibility/2006" xmlns:mv="urn:schemas-microsoft-com:mac:vml" xmlns:p="http://schemas.openxmlformats.org/presentationml/2006/main" xmlns:c="http://schemas.openxmlformats.org/drawingml/2006/chart" xmlns:dgm="http://schemas.openxmlformats.org/drawingml/2006/diagram" xmlns:o="urn:schemas-microsoft-com:office:office" xmlns:v="urn:schemas-microsoft-com:vml" xmlns:pvml="urn:schemas-microsoft-com:office:powerpoint" xmlns:com="http://schemas.openxmlformats.org/drawingml/2006/compatibility" xmlns:p14="http://schemas.microsoft.com/office/powerpoint/2010/main" xmlns:p15="http://schemas.microsoft.com/office/powerpoint/2012/main" xmlns:ahyp="http://schemas.microsoft.com/office/drawing/2018/hyperlinkcolor" showMasterPhAnim="0" showMasterSp="0">
+  <p:cSld>
+    <p:spTree>
+      <p:nvGrpSpPr>
+        <p:cNvPr id="237" name="Shape 237"/>
+        <p:cNvGrpSpPr/>
+        <p:nvPr/>
+      </p:nvGrpSpPr>
+      <p:grpSpPr>
+        <a:xfrm>
+          <a:off x="0" y="0"/>
+          <a:ext cx="0" cy="0"/>
+          <a:chOff x="0" y="0"/>
+          <a:chExt cx="0" cy="0"/>
+        </a:xfrm>
+      </p:grpSpPr>
+      <p:sp>
+        <p:nvSpPr>
+          <p:cNvPr id="238" name="Google Shape;238;g38c8274f9e2_0_4:notes"/>
+          <p:cNvSpPr txBox="1"/>
+          <p:nvPr>
+            <p:ph idx="1" type="body"/>
+          </p:nvPr>
+        </p:nvSpPr>
+        <p:spPr>
+          <a:xfrm>
+            <a:off x="685800" y="4343400"/>
+            <a:ext cx="5486400" cy="4114800"/>
+          </a:xfrm>
+          <a:prstGeom prst="rect">
+            <a:avLst/>
+          </a:prstGeom>
+        </p:spPr>
+        <p:txBody>
+          <a:bodyPr anchorCtr="0" anchor="t" bIns="91425" lIns="91425" spcFirstLastPara="1" rIns="91425" wrap="square" tIns="91425">
+            <a:noAutofit/>
+          </a:bodyPr>
+          <a:lstStyle/>
+          <a:p>
+            <a:pPr indent="0" lvl="0" marL="0" rtl="0" algn="l">
+              <a:spcBef>
+                <a:spcPts val="0"/>
+              </a:spcBef>
+              <a:spcAft>
+                <a:spcPts val="0"/>
+              </a:spcAft>
+              <a:buNone/>
+            </a:pPr>
+            <a:r>
+              <a:t/>
+            </a:r>
+            <a:endParaRPr/>
+          </a:p>
+        </p:txBody>
+      </p:sp>
+      <p:sp>
+        <p:nvSpPr>
+          <p:cNvPr id="239" name="Google Shape;239;g38c8274f9e2_0_4:notes"/>
+          <p:cNvSpPr/>
+          <p:nvPr>
+            <p:ph idx="2" type="sldImg"/>
+          </p:nvPr>
+        </p:nvSpPr>
+        <p:spPr>
+          <a:xfrm>
+            <a:off x="1143225" y="685800"/>
+            <a:ext cx="4572300" cy="3429000"/>
+          </a:xfrm>
+          <a:custGeom>
+            <a:rect b="b" l="l" r="r" t="t"/>
+            <a:pathLst>
+              <a:path extrusionOk="0" h="120000" w="120000">
+                <a:moveTo>
+                  <a:pt x="0" y="0"/>
+                </a:moveTo>
+                <a:lnTo>
+                  <a:pt x="120000" y="0"/>
+                </a:lnTo>
+                <a:lnTo>
+                  <a:pt x="120000" y="120000"/>
+                </a:lnTo>
+                <a:lnTo>
+                  <a:pt x="0" y="120000"/>
+                </a:lnTo>
+                <a:close/>
+              </a:path>
+            </a:pathLst>
+          </a:custGeom>
+        </p:spPr>
+      </p:sp>
+    </p:spTree>
+  </p:cSld>
+  <p:clrMapOvr>
+    <a:masterClrMapping/>
+  </p:clrMapOvr>
+</p:notes>
+</file>
+
 <file path=ppt/notesSlides/notesSlide2.xml><?xml version="1.0" encoding="utf-8"?>
 <p:notes xmlns:a="http://schemas.openxmlformats.org/drawingml/2006/main" xmlns:r="http://schemas.openxmlformats.org/officeDocument/2006/relationships" xmlns:mc="http://schemas.openxmlformats.org/markup-compatibility/2006" xmlns:mv="urn:schemas-microsoft-com:mac:vml" xmlns:p="http://schemas.openxmlformats.org/presentationml/2006/main" xmlns:c="http://schemas.openxmlformats.org/drawingml/2006/chart" xmlns:dgm="http://schemas.openxmlformats.org/drawingml/2006/diagram" xmlns:o="urn:schemas-microsoft-com:office:office" xmlns:v="urn:schemas-microsoft-com:vml" xmlns:pvml="urn:schemas-microsoft-com:office:powerpoint" xmlns:com="http://schemas.openxmlformats.org/drawingml/2006/compatibility" xmlns:p14="http://schemas.microsoft.com/office/powerpoint/2010/main" xmlns:p15="http://schemas.microsoft.com/office/powerpoint/2012/main" xmlns:ahyp="http://schemas.microsoft.com/office/drawing/2018/hyperlinkcolor" showMasterPhAnim="0" showMasterSp="0">
   <p:cSld>
@@ -1669,6 +1875,600 @@
           <a:xfrm>
             <a:off x="1143225" y="685800"/>
             <a:ext cx="4572225" cy="3429000"/>
+          </a:xfrm>
+          <a:custGeom>
+            <a:rect b="b" l="l" r="r" t="t"/>
+            <a:pathLst>
+              <a:path extrusionOk="0" h="120000" w="120000">
+                <a:moveTo>
+                  <a:pt x="0" y="0"/>
+                </a:moveTo>
+                <a:lnTo>
+                  <a:pt x="120000" y="0"/>
+                </a:lnTo>
+                <a:lnTo>
+                  <a:pt x="120000" y="120000"/>
+                </a:lnTo>
+                <a:lnTo>
+                  <a:pt x="0" y="120000"/>
+                </a:lnTo>
+                <a:close/>
+              </a:path>
+            </a:pathLst>
+          </a:custGeom>
+        </p:spPr>
+      </p:sp>
+    </p:spTree>
+  </p:cSld>
+  <p:clrMapOvr>
+    <a:masterClrMapping/>
+  </p:clrMapOvr>
+</p:notes>
+</file>
+
+<file path=ppt/notesSlides/notesSlide20.xml><?xml version="1.0" encoding="utf-8"?>
+<p:notes xmlns:a="http://schemas.openxmlformats.org/drawingml/2006/main" xmlns:r="http://schemas.openxmlformats.org/officeDocument/2006/relationships" xmlns:mc="http://schemas.openxmlformats.org/markup-compatibility/2006" xmlns:mv="urn:schemas-microsoft-com:mac:vml" xmlns:p="http://schemas.openxmlformats.org/presentationml/2006/main" xmlns:c="http://schemas.openxmlformats.org/drawingml/2006/chart" xmlns:dgm="http://schemas.openxmlformats.org/drawingml/2006/diagram" xmlns:o="urn:schemas-microsoft-com:office:office" xmlns:v="urn:schemas-microsoft-com:vml" xmlns:pvml="urn:schemas-microsoft-com:office:powerpoint" xmlns:com="http://schemas.openxmlformats.org/drawingml/2006/compatibility" xmlns:p14="http://schemas.microsoft.com/office/powerpoint/2010/main" xmlns:p15="http://schemas.microsoft.com/office/powerpoint/2012/main" xmlns:ahyp="http://schemas.microsoft.com/office/drawing/2018/hyperlinkcolor" showMasterPhAnim="0" showMasterSp="0">
+  <p:cSld>
+    <p:spTree>
+      <p:nvGrpSpPr>
+        <p:cNvPr id="243" name="Shape 243"/>
+        <p:cNvGrpSpPr/>
+        <p:nvPr/>
+      </p:nvGrpSpPr>
+      <p:grpSpPr>
+        <a:xfrm>
+          <a:off x="0" y="0"/>
+          <a:ext cx="0" cy="0"/>
+          <a:chOff x="0" y="0"/>
+          <a:chExt cx="0" cy="0"/>
+        </a:xfrm>
+      </p:grpSpPr>
+      <p:sp>
+        <p:nvSpPr>
+          <p:cNvPr id="244" name="Google Shape;244;g38c8274f9e2_0_9:notes"/>
+          <p:cNvSpPr txBox="1"/>
+          <p:nvPr>
+            <p:ph idx="1" type="body"/>
+          </p:nvPr>
+        </p:nvSpPr>
+        <p:spPr>
+          <a:xfrm>
+            <a:off x="685800" y="4343400"/>
+            <a:ext cx="5486400" cy="4114800"/>
+          </a:xfrm>
+          <a:prstGeom prst="rect">
+            <a:avLst/>
+          </a:prstGeom>
+        </p:spPr>
+        <p:txBody>
+          <a:bodyPr anchorCtr="0" anchor="t" bIns="91425" lIns="91425" spcFirstLastPara="1" rIns="91425" wrap="square" tIns="91425">
+            <a:noAutofit/>
+          </a:bodyPr>
+          <a:lstStyle/>
+          <a:p>
+            <a:pPr indent="0" lvl="0" marL="0" rtl="0" algn="l">
+              <a:spcBef>
+                <a:spcPts val="0"/>
+              </a:spcBef>
+              <a:spcAft>
+                <a:spcPts val="0"/>
+              </a:spcAft>
+              <a:buNone/>
+            </a:pPr>
+            <a:r>
+              <a:t/>
+            </a:r>
+            <a:endParaRPr/>
+          </a:p>
+        </p:txBody>
+      </p:sp>
+      <p:sp>
+        <p:nvSpPr>
+          <p:cNvPr id="245" name="Google Shape;245;g38c8274f9e2_0_9:notes"/>
+          <p:cNvSpPr/>
+          <p:nvPr>
+            <p:ph idx="2" type="sldImg"/>
+          </p:nvPr>
+        </p:nvSpPr>
+        <p:spPr>
+          <a:xfrm>
+            <a:off x="1143225" y="685800"/>
+            <a:ext cx="4572300" cy="3429000"/>
+          </a:xfrm>
+          <a:custGeom>
+            <a:rect b="b" l="l" r="r" t="t"/>
+            <a:pathLst>
+              <a:path extrusionOk="0" h="120000" w="120000">
+                <a:moveTo>
+                  <a:pt x="0" y="0"/>
+                </a:moveTo>
+                <a:lnTo>
+                  <a:pt x="120000" y="0"/>
+                </a:lnTo>
+                <a:lnTo>
+                  <a:pt x="120000" y="120000"/>
+                </a:lnTo>
+                <a:lnTo>
+                  <a:pt x="0" y="120000"/>
+                </a:lnTo>
+                <a:close/>
+              </a:path>
+            </a:pathLst>
+          </a:custGeom>
+        </p:spPr>
+      </p:sp>
+    </p:spTree>
+  </p:cSld>
+  <p:clrMapOvr>
+    <a:masterClrMapping/>
+  </p:clrMapOvr>
+</p:notes>
+</file>
+
+<file path=ppt/notesSlides/notesSlide21.xml><?xml version="1.0" encoding="utf-8"?>
+<p:notes xmlns:a="http://schemas.openxmlformats.org/drawingml/2006/main" xmlns:r="http://schemas.openxmlformats.org/officeDocument/2006/relationships" xmlns:mc="http://schemas.openxmlformats.org/markup-compatibility/2006" xmlns:mv="urn:schemas-microsoft-com:mac:vml" xmlns:p="http://schemas.openxmlformats.org/presentationml/2006/main" xmlns:c="http://schemas.openxmlformats.org/drawingml/2006/chart" xmlns:dgm="http://schemas.openxmlformats.org/drawingml/2006/diagram" xmlns:o="urn:schemas-microsoft-com:office:office" xmlns:v="urn:schemas-microsoft-com:vml" xmlns:pvml="urn:schemas-microsoft-com:office:powerpoint" xmlns:com="http://schemas.openxmlformats.org/drawingml/2006/compatibility" xmlns:p14="http://schemas.microsoft.com/office/powerpoint/2010/main" xmlns:p15="http://schemas.microsoft.com/office/powerpoint/2012/main" xmlns:ahyp="http://schemas.microsoft.com/office/drawing/2018/hyperlinkcolor" showMasterPhAnim="0" showMasterSp="0">
+  <p:cSld>
+    <p:spTree>
+      <p:nvGrpSpPr>
+        <p:cNvPr id="249" name="Shape 249"/>
+        <p:cNvGrpSpPr/>
+        <p:nvPr/>
+      </p:nvGrpSpPr>
+      <p:grpSpPr>
+        <a:xfrm>
+          <a:off x="0" y="0"/>
+          <a:ext cx="0" cy="0"/>
+          <a:chOff x="0" y="0"/>
+          <a:chExt cx="0" cy="0"/>
+        </a:xfrm>
+      </p:grpSpPr>
+      <p:sp>
+        <p:nvSpPr>
+          <p:cNvPr id="250" name="Google Shape;250;g38c8274f9e2_0_14:notes"/>
+          <p:cNvSpPr txBox="1"/>
+          <p:nvPr>
+            <p:ph idx="1" type="body"/>
+          </p:nvPr>
+        </p:nvSpPr>
+        <p:spPr>
+          <a:xfrm>
+            <a:off x="685800" y="4343400"/>
+            <a:ext cx="5486400" cy="4114800"/>
+          </a:xfrm>
+          <a:prstGeom prst="rect">
+            <a:avLst/>
+          </a:prstGeom>
+        </p:spPr>
+        <p:txBody>
+          <a:bodyPr anchorCtr="0" anchor="t" bIns="91425" lIns="91425" spcFirstLastPara="1" rIns="91425" wrap="square" tIns="91425">
+            <a:noAutofit/>
+          </a:bodyPr>
+          <a:lstStyle/>
+          <a:p>
+            <a:pPr indent="0" lvl="0" marL="0" rtl="0" algn="l">
+              <a:spcBef>
+                <a:spcPts val="0"/>
+              </a:spcBef>
+              <a:spcAft>
+                <a:spcPts val="0"/>
+              </a:spcAft>
+              <a:buNone/>
+            </a:pPr>
+            <a:r>
+              <a:t/>
+            </a:r>
+            <a:endParaRPr/>
+          </a:p>
+        </p:txBody>
+      </p:sp>
+      <p:sp>
+        <p:nvSpPr>
+          <p:cNvPr id="251" name="Google Shape;251;g38c8274f9e2_0_14:notes"/>
+          <p:cNvSpPr/>
+          <p:nvPr>
+            <p:ph idx="2" type="sldImg"/>
+          </p:nvPr>
+        </p:nvSpPr>
+        <p:spPr>
+          <a:xfrm>
+            <a:off x="1143225" y="685800"/>
+            <a:ext cx="4572300" cy="3429000"/>
+          </a:xfrm>
+          <a:custGeom>
+            <a:rect b="b" l="l" r="r" t="t"/>
+            <a:pathLst>
+              <a:path extrusionOk="0" h="120000" w="120000">
+                <a:moveTo>
+                  <a:pt x="0" y="0"/>
+                </a:moveTo>
+                <a:lnTo>
+                  <a:pt x="120000" y="0"/>
+                </a:lnTo>
+                <a:lnTo>
+                  <a:pt x="120000" y="120000"/>
+                </a:lnTo>
+                <a:lnTo>
+                  <a:pt x="0" y="120000"/>
+                </a:lnTo>
+                <a:close/>
+              </a:path>
+            </a:pathLst>
+          </a:custGeom>
+        </p:spPr>
+      </p:sp>
+    </p:spTree>
+  </p:cSld>
+  <p:clrMapOvr>
+    <a:masterClrMapping/>
+  </p:clrMapOvr>
+</p:notes>
+</file>
+
+<file path=ppt/notesSlides/notesSlide22.xml><?xml version="1.0" encoding="utf-8"?>
+<p:notes xmlns:a="http://schemas.openxmlformats.org/drawingml/2006/main" xmlns:r="http://schemas.openxmlformats.org/officeDocument/2006/relationships" xmlns:mc="http://schemas.openxmlformats.org/markup-compatibility/2006" xmlns:mv="urn:schemas-microsoft-com:mac:vml" xmlns:p="http://schemas.openxmlformats.org/presentationml/2006/main" xmlns:c="http://schemas.openxmlformats.org/drawingml/2006/chart" xmlns:dgm="http://schemas.openxmlformats.org/drawingml/2006/diagram" xmlns:o="urn:schemas-microsoft-com:office:office" xmlns:v="urn:schemas-microsoft-com:vml" xmlns:pvml="urn:schemas-microsoft-com:office:powerpoint" xmlns:com="http://schemas.openxmlformats.org/drawingml/2006/compatibility" xmlns:p14="http://schemas.microsoft.com/office/powerpoint/2010/main" xmlns:p15="http://schemas.microsoft.com/office/powerpoint/2012/main" xmlns:ahyp="http://schemas.microsoft.com/office/drawing/2018/hyperlinkcolor" showMasterPhAnim="0" showMasterSp="0">
+  <p:cSld>
+    <p:spTree>
+      <p:nvGrpSpPr>
+        <p:cNvPr id="255" name="Shape 255"/>
+        <p:cNvGrpSpPr/>
+        <p:nvPr/>
+      </p:nvGrpSpPr>
+      <p:grpSpPr>
+        <a:xfrm>
+          <a:off x="0" y="0"/>
+          <a:ext cx="0" cy="0"/>
+          <a:chOff x="0" y="0"/>
+          <a:chExt cx="0" cy="0"/>
+        </a:xfrm>
+      </p:grpSpPr>
+      <p:sp>
+        <p:nvSpPr>
+          <p:cNvPr id="256" name="Google Shape;256;g38c8274f9e2_0_19:notes"/>
+          <p:cNvSpPr txBox="1"/>
+          <p:nvPr>
+            <p:ph idx="1" type="body"/>
+          </p:nvPr>
+        </p:nvSpPr>
+        <p:spPr>
+          <a:xfrm>
+            <a:off x="685800" y="4343400"/>
+            <a:ext cx="5486400" cy="4114800"/>
+          </a:xfrm>
+          <a:prstGeom prst="rect">
+            <a:avLst/>
+          </a:prstGeom>
+        </p:spPr>
+        <p:txBody>
+          <a:bodyPr anchorCtr="0" anchor="t" bIns="91425" lIns="91425" spcFirstLastPara="1" rIns="91425" wrap="square" tIns="91425">
+            <a:noAutofit/>
+          </a:bodyPr>
+          <a:lstStyle/>
+          <a:p>
+            <a:pPr indent="0" lvl="0" marL="0" rtl="0" algn="l">
+              <a:spcBef>
+                <a:spcPts val="0"/>
+              </a:spcBef>
+              <a:spcAft>
+                <a:spcPts val="0"/>
+              </a:spcAft>
+              <a:buNone/>
+            </a:pPr>
+            <a:r>
+              <a:t/>
+            </a:r>
+            <a:endParaRPr/>
+          </a:p>
+        </p:txBody>
+      </p:sp>
+      <p:sp>
+        <p:nvSpPr>
+          <p:cNvPr id="257" name="Google Shape;257;g38c8274f9e2_0_19:notes"/>
+          <p:cNvSpPr/>
+          <p:nvPr>
+            <p:ph idx="2" type="sldImg"/>
+          </p:nvPr>
+        </p:nvSpPr>
+        <p:spPr>
+          <a:xfrm>
+            <a:off x="1143225" y="685800"/>
+            <a:ext cx="4572300" cy="3429000"/>
+          </a:xfrm>
+          <a:custGeom>
+            <a:rect b="b" l="l" r="r" t="t"/>
+            <a:pathLst>
+              <a:path extrusionOk="0" h="120000" w="120000">
+                <a:moveTo>
+                  <a:pt x="0" y="0"/>
+                </a:moveTo>
+                <a:lnTo>
+                  <a:pt x="120000" y="0"/>
+                </a:lnTo>
+                <a:lnTo>
+                  <a:pt x="120000" y="120000"/>
+                </a:lnTo>
+                <a:lnTo>
+                  <a:pt x="0" y="120000"/>
+                </a:lnTo>
+                <a:close/>
+              </a:path>
+            </a:pathLst>
+          </a:custGeom>
+        </p:spPr>
+      </p:sp>
+    </p:spTree>
+  </p:cSld>
+  <p:clrMapOvr>
+    <a:masterClrMapping/>
+  </p:clrMapOvr>
+</p:notes>
+</file>
+
+<file path=ppt/notesSlides/notesSlide23.xml><?xml version="1.0" encoding="utf-8"?>
+<p:notes xmlns:a="http://schemas.openxmlformats.org/drawingml/2006/main" xmlns:r="http://schemas.openxmlformats.org/officeDocument/2006/relationships" xmlns:mc="http://schemas.openxmlformats.org/markup-compatibility/2006" xmlns:mv="urn:schemas-microsoft-com:mac:vml" xmlns:p="http://schemas.openxmlformats.org/presentationml/2006/main" xmlns:c="http://schemas.openxmlformats.org/drawingml/2006/chart" xmlns:dgm="http://schemas.openxmlformats.org/drawingml/2006/diagram" xmlns:o="urn:schemas-microsoft-com:office:office" xmlns:v="urn:schemas-microsoft-com:vml" xmlns:pvml="urn:schemas-microsoft-com:office:powerpoint" xmlns:com="http://schemas.openxmlformats.org/drawingml/2006/compatibility" xmlns:p14="http://schemas.microsoft.com/office/powerpoint/2010/main" xmlns:p15="http://schemas.microsoft.com/office/powerpoint/2012/main" xmlns:ahyp="http://schemas.microsoft.com/office/drawing/2018/hyperlinkcolor" showMasterPhAnim="0" showMasterSp="0">
+  <p:cSld>
+    <p:spTree>
+      <p:nvGrpSpPr>
+        <p:cNvPr id="261" name="Shape 261"/>
+        <p:cNvGrpSpPr/>
+        <p:nvPr/>
+      </p:nvGrpSpPr>
+      <p:grpSpPr>
+        <a:xfrm>
+          <a:off x="0" y="0"/>
+          <a:ext cx="0" cy="0"/>
+          <a:chOff x="0" y="0"/>
+          <a:chExt cx="0" cy="0"/>
+        </a:xfrm>
+      </p:grpSpPr>
+      <p:sp>
+        <p:nvSpPr>
+          <p:cNvPr id="262" name="Google Shape;262;g38c8274f9e2_0_24:notes"/>
+          <p:cNvSpPr txBox="1"/>
+          <p:nvPr>
+            <p:ph idx="1" type="body"/>
+          </p:nvPr>
+        </p:nvSpPr>
+        <p:spPr>
+          <a:xfrm>
+            <a:off x="685800" y="4343400"/>
+            <a:ext cx="5486400" cy="4114800"/>
+          </a:xfrm>
+          <a:prstGeom prst="rect">
+            <a:avLst/>
+          </a:prstGeom>
+        </p:spPr>
+        <p:txBody>
+          <a:bodyPr anchorCtr="0" anchor="t" bIns="91425" lIns="91425" spcFirstLastPara="1" rIns="91425" wrap="square" tIns="91425">
+            <a:noAutofit/>
+          </a:bodyPr>
+          <a:lstStyle/>
+          <a:p>
+            <a:pPr indent="0" lvl="0" marL="0" rtl="0" algn="l">
+              <a:spcBef>
+                <a:spcPts val="0"/>
+              </a:spcBef>
+              <a:spcAft>
+                <a:spcPts val="0"/>
+              </a:spcAft>
+              <a:buNone/>
+            </a:pPr>
+            <a:r>
+              <a:t/>
+            </a:r>
+            <a:endParaRPr/>
+          </a:p>
+        </p:txBody>
+      </p:sp>
+      <p:sp>
+        <p:nvSpPr>
+          <p:cNvPr id="263" name="Google Shape;263;g38c8274f9e2_0_24:notes"/>
+          <p:cNvSpPr/>
+          <p:nvPr>
+            <p:ph idx="2" type="sldImg"/>
+          </p:nvPr>
+        </p:nvSpPr>
+        <p:spPr>
+          <a:xfrm>
+            <a:off x="1143225" y="685800"/>
+            <a:ext cx="4572300" cy="3429000"/>
+          </a:xfrm>
+          <a:custGeom>
+            <a:rect b="b" l="l" r="r" t="t"/>
+            <a:pathLst>
+              <a:path extrusionOk="0" h="120000" w="120000">
+                <a:moveTo>
+                  <a:pt x="0" y="0"/>
+                </a:moveTo>
+                <a:lnTo>
+                  <a:pt x="120000" y="0"/>
+                </a:lnTo>
+                <a:lnTo>
+                  <a:pt x="120000" y="120000"/>
+                </a:lnTo>
+                <a:lnTo>
+                  <a:pt x="0" y="120000"/>
+                </a:lnTo>
+                <a:close/>
+              </a:path>
+            </a:pathLst>
+          </a:custGeom>
+        </p:spPr>
+      </p:sp>
+    </p:spTree>
+  </p:cSld>
+  <p:clrMapOvr>
+    <a:masterClrMapping/>
+  </p:clrMapOvr>
+</p:notes>
+</file>
+
+<file path=ppt/notesSlides/notesSlide24.xml><?xml version="1.0" encoding="utf-8"?>
+<p:notes xmlns:a="http://schemas.openxmlformats.org/drawingml/2006/main" xmlns:r="http://schemas.openxmlformats.org/officeDocument/2006/relationships" xmlns:mc="http://schemas.openxmlformats.org/markup-compatibility/2006" xmlns:mv="urn:schemas-microsoft-com:mac:vml" xmlns:p="http://schemas.openxmlformats.org/presentationml/2006/main" xmlns:c="http://schemas.openxmlformats.org/drawingml/2006/chart" xmlns:dgm="http://schemas.openxmlformats.org/drawingml/2006/diagram" xmlns:o="urn:schemas-microsoft-com:office:office" xmlns:v="urn:schemas-microsoft-com:vml" xmlns:pvml="urn:schemas-microsoft-com:office:powerpoint" xmlns:com="http://schemas.openxmlformats.org/drawingml/2006/compatibility" xmlns:p14="http://schemas.microsoft.com/office/powerpoint/2010/main" xmlns:p15="http://schemas.microsoft.com/office/powerpoint/2012/main" xmlns:ahyp="http://schemas.microsoft.com/office/drawing/2018/hyperlinkcolor" showMasterPhAnim="0" showMasterSp="0">
+  <p:cSld>
+    <p:spTree>
+      <p:nvGrpSpPr>
+        <p:cNvPr id="267" name="Shape 267"/>
+        <p:cNvGrpSpPr/>
+        <p:nvPr/>
+      </p:nvGrpSpPr>
+      <p:grpSpPr>
+        <a:xfrm>
+          <a:off x="0" y="0"/>
+          <a:ext cx="0" cy="0"/>
+          <a:chOff x="0" y="0"/>
+          <a:chExt cx="0" cy="0"/>
+        </a:xfrm>
+      </p:grpSpPr>
+      <p:sp>
+        <p:nvSpPr>
+          <p:cNvPr id="268" name="Google Shape;268;g38c8274f9e2_0_29:notes"/>
+          <p:cNvSpPr txBox="1"/>
+          <p:nvPr>
+            <p:ph idx="1" type="body"/>
+          </p:nvPr>
+        </p:nvSpPr>
+        <p:spPr>
+          <a:xfrm>
+            <a:off x="685800" y="4343400"/>
+            <a:ext cx="5486400" cy="4114800"/>
+          </a:xfrm>
+          <a:prstGeom prst="rect">
+            <a:avLst/>
+          </a:prstGeom>
+        </p:spPr>
+        <p:txBody>
+          <a:bodyPr anchorCtr="0" anchor="t" bIns="91425" lIns="91425" spcFirstLastPara="1" rIns="91425" wrap="square" tIns="91425">
+            <a:noAutofit/>
+          </a:bodyPr>
+          <a:lstStyle/>
+          <a:p>
+            <a:pPr indent="0" lvl="0" marL="0" rtl="0" algn="l">
+              <a:spcBef>
+                <a:spcPts val="0"/>
+              </a:spcBef>
+              <a:spcAft>
+                <a:spcPts val="0"/>
+              </a:spcAft>
+              <a:buNone/>
+            </a:pPr>
+            <a:r>
+              <a:t/>
+            </a:r>
+            <a:endParaRPr/>
+          </a:p>
+        </p:txBody>
+      </p:sp>
+      <p:sp>
+        <p:nvSpPr>
+          <p:cNvPr id="269" name="Google Shape;269;g38c8274f9e2_0_29:notes"/>
+          <p:cNvSpPr/>
+          <p:nvPr>
+            <p:ph idx="2" type="sldImg"/>
+          </p:nvPr>
+        </p:nvSpPr>
+        <p:spPr>
+          <a:xfrm>
+            <a:off x="1143225" y="685800"/>
+            <a:ext cx="4572300" cy="3429000"/>
+          </a:xfrm>
+          <a:custGeom>
+            <a:rect b="b" l="l" r="r" t="t"/>
+            <a:pathLst>
+              <a:path extrusionOk="0" h="120000" w="120000">
+                <a:moveTo>
+                  <a:pt x="0" y="0"/>
+                </a:moveTo>
+                <a:lnTo>
+                  <a:pt x="120000" y="0"/>
+                </a:lnTo>
+                <a:lnTo>
+                  <a:pt x="120000" y="120000"/>
+                </a:lnTo>
+                <a:lnTo>
+                  <a:pt x="0" y="120000"/>
+                </a:lnTo>
+                <a:close/>
+              </a:path>
+            </a:pathLst>
+          </a:custGeom>
+        </p:spPr>
+      </p:sp>
+    </p:spTree>
+  </p:cSld>
+  <p:clrMapOvr>
+    <a:masterClrMapping/>
+  </p:clrMapOvr>
+</p:notes>
+</file>
+
+<file path=ppt/notesSlides/notesSlide25.xml><?xml version="1.0" encoding="utf-8"?>
+<p:notes xmlns:a="http://schemas.openxmlformats.org/drawingml/2006/main" xmlns:r="http://schemas.openxmlformats.org/officeDocument/2006/relationships" xmlns:mc="http://schemas.openxmlformats.org/markup-compatibility/2006" xmlns:mv="urn:schemas-microsoft-com:mac:vml" xmlns:p="http://schemas.openxmlformats.org/presentationml/2006/main" xmlns:c="http://schemas.openxmlformats.org/drawingml/2006/chart" xmlns:dgm="http://schemas.openxmlformats.org/drawingml/2006/diagram" xmlns:o="urn:schemas-microsoft-com:office:office" xmlns:v="urn:schemas-microsoft-com:vml" xmlns:pvml="urn:schemas-microsoft-com:office:powerpoint" xmlns:com="http://schemas.openxmlformats.org/drawingml/2006/compatibility" xmlns:p14="http://schemas.microsoft.com/office/powerpoint/2010/main" xmlns:p15="http://schemas.microsoft.com/office/powerpoint/2012/main" xmlns:ahyp="http://schemas.microsoft.com/office/drawing/2018/hyperlinkcolor" showMasterPhAnim="0" showMasterSp="0">
+  <p:cSld>
+    <p:spTree>
+      <p:nvGrpSpPr>
+        <p:cNvPr id="273" name="Shape 273"/>
+        <p:cNvGrpSpPr/>
+        <p:nvPr/>
+      </p:nvGrpSpPr>
+      <p:grpSpPr>
+        <a:xfrm>
+          <a:off x="0" y="0"/>
+          <a:ext cx="0" cy="0"/>
+          <a:chOff x="0" y="0"/>
+          <a:chExt cx="0" cy="0"/>
+        </a:xfrm>
+      </p:grpSpPr>
+      <p:sp>
+        <p:nvSpPr>
+          <p:cNvPr id="274" name="Google Shape;274;g38c8274f9e2_0_34:notes"/>
+          <p:cNvSpPr txBox="1"/>
+          <p:nvPr>
+            <p:ph idx="1" type="body"/>
+          </p:nvPr>
+        </p:nvSpPr>
+        <p:spPr>
+          <a:xfrm>
+            <a:off x="685800" y="4343400"/>
+            <a:ext cx="5486400" cy="4114800"/>
+          </a:xfrm>
+          <a:prstGeom prst="rect">
+            <a:avLst/>
+          </a:prstGeom>
+        </p:spPr>
+        <p:txBody>
+          <a:bodyPr anchorCtr="0" anchor="t" bIns="91425" lIns="91425" spcFirstLastPara="1" rIns="91425" wrap="square" tIns="91425">
+            <a:noAutofit/>
+          </a:bodyPr>
+          <a:lstStyle/>
+          <a:p>
+            <a:pPr indent="0" lvl="0" marL="0" rtl="0" algn="l">
+              <a:spcBef>
+                <a:spcPts val="0"/>
+              </a:spcBef>
+              <a:spcAft>
+                <a:spcPts val="0"/>
+              </a:spcAft>
+              <a:buNone/>
+            </a:pPr>
+            <a:r>
+              <a:t/>
+            </a:r>
+            <a:endParaRPr/>
+          </a:p>
+        </p:txBody>
+      </p:sp>
+      <p:sp>
+        <p:nvSpPr>
+          <p:cNvPr id="275" name="Google Shape;275;g38c8274f9e2_0_34:notes"/>
+          <p:cNvSpPr/>
+          <p:nvPr>
+            <p:ph idx="2" type="sldImg"/>
+          </p:nvPr>
+        </p:nvSpPr>
+        <p:spPr>
+          <a:xfrm>
+            <a:off x="1143225" y="685800"/>
+            <a:ext cx="4572300" cy="3429000"/>
           </a:xfrm>
           <a:custGeom>
             <a:rect b="b" l="l" r="r" t="t"/>
@@ -17102,7 +17902,7 @@
                   <a:schemeClr val="lt1"/>
                 </a:solidFill>
               </a:rPr>
-              <a:t>Week 1</a:t>
+              <a:t>Week 1-2</a:t>
             </a:r>
             <a:endParaRPr sz="4200">
               <a:solidFill>
@@ -17225,7 +18025,7 @@
                   <a:schemeClr val="lt1"/>
                 </a:solidFill>
               </a:rPr>
-              <a:t>Week 2</a:t>
+              <a:t>Week 2-4</a:t>
             </a:r>
             <a:endParaRPr sz="4200">
               <a:solidFill>
@@ -17268,7 +18068,7 @@
                   <a:schemeClr val="lt1"/>
                 </a:solidFill>
               </a:rPr>
-              <a:t>Single-Agent Hover</a:t>
+              <a:t>Z and YZ Single-Agent Hover</a:t>
             </a:r>
             <a:endParaRPr sz="4200">
               <a:solidFill>
@@ -18962,7 +19762,7 @@
             <a:tbl>
               <a:tblPr bandRow="1" firstRow="1">
                 <a:noFill/>
-                <a:tableStyleId>{DDB1B1F9-9234-4F01-9741-F30DABF958EB}</a:tableStyleId>
+                <a:tableStyleId>{1B8563D4-BB8A-4F7E-A35C-4C2900C004D8}</a:tableStyleId>
               </a:tblPr>
               <a:tblGrid>
                 <a:gridCol w="1531600"/>
@@ -19438,7 +20238,7 @@
                       </a:pPr>
                       <a:r>
                         <a:rPr lang="en"/>
-                        <a:t>Refind YZ hover and move to XYZ, explore MAPPO theory</a:t>
+                        <a:t>Refine YZ hover and move to XYZ, explore MAPPO theory</a:t>
                       </a:r>
                       <a:endParaRPr/>
                     </a:p>
@@ -19578,6 +20378,371 @@
 </p:sld>
 </file>
 
+<file path=ppt/slides/slide18.xml><?xml version="1.0" encoding="utf-8"?>
+<p:sld xmlns:a="http://schemas.openxmlformats.org/drawingml/2006/main" xmlns:r="http://schemas.openxmlformats.org/officeDocument/2006/relationships" xmlns:mc="http://schemas.openxmlformats.org/markup-compatibility/2006" xmlns:mv="urn:schemas-microsoft-com:mac:vml" xmlns:p="http://schemas.openxmlformats.org/presentationml/2006/main" xmlns:c="http://schemas.openxmlformats.org/drawingml/2006/chart" xmlns:dgm="http://schemas.openxmlformats.org/drawingml/2006/diagram" xmlns:o="urn:schemas-microsoft-com:office:office" xmlns:v="urn:schemas-microsoft-com:vml" xmlns:pvml="urn:schemas-microsoft-com:office:powerpoint" xmlns:com="http://schemas.openxmlformats.org/drawingml/2006/compatibility" xmlns:p14="http://schemas.microsoft.com/office/powerpoint/2010/main" xmlns:p15="http://schemas.microsoft.com/office/powerpoint/2012/main" xmlns:ahyp="http://schemas.microsoft.com/office/drawing/2018/hyperlinkcolor">
+  <p:cSld>
+    <p:bg>
+      <p:bgPr>
+        <a:solidFill>
+          <a:schemeClr val="dk1"/>
+        </a:solidFill>
+      </p:bgPr>
+    </p:bg>
+    <p:spTree>
+      <p:nvGrpSpPr>
+        <p:cNvPr id="235" name="Shape 235"/>
+        <p:cNvGrpSpPr/>
+        <p:nvPr/>
+      </p:nvGrpSpPr>
+      <p:grpSpPr>
+        <a:xfrm>
+          <a:off x="0" y="0"/>
+          <a:ext cx="0" cy="0"/>
+          <a:chOff x="0" y="0"/>
+          <a:chExt cx="0" cy="0"/>
+        </a:xfrm>
+      </p:grpSpPr>
+      <p:sp>
+        <p:nvSpPr>
+          <p:cNvPr id="236" name="Google Shape;236;p42"/>
+          <p:cNvSpPr txBox="1"/>
+          <p:nvPr>
+            <p:ph idx="1" type="body"/>
+          </p:nvPr>
+        </p:nvSpPr>
+        <p:spPr>
+          <a:xfrm>
+            <a:off x="628650" y="1369219"/>
+            <a:ext cx="7886700" cy="3263400"/>
+          </a:xfrm>
+          <a:prstGeom prst="rect">
+            <a:avLst/>
+          </a:prstGeom>
+        </p:spPr>
+        <p:txBody>
+          <a:bodyPr anchorCtr="0" anchor="t" bIns="34275" lIns="68575" spcFirstLastPara="1" rIns="68575" wrap="square" tIns="34275">
+            <a:normAutofit/>
+          </a:bodyPr>
+          <a:lstStyle/>
+          <a:p>
+            <a:pPr indent="0" lvl="0" marL="0" rtl="0" algn="ctr">
+              <a:spcBef>
+                <a:spcPts val="800"/>
+              </a:spcBef>
+              <a:spcAft>
+                <a:spcPts val="0"/>
+              </a:spcAft>
+              <a:buNone/>
+            </a:pPr>
+            <a:r>
+              <a:rPr lang="en" sz="4200">
+                <a:solidFill>
+                  <a:schemeClr val="lt1"/>
+                </a:solidFill>
+              </a:rPr>
+              <a:t>Week 4-6</a:t>
+            </a:r>
+            <a:endParaRPr sz="4200">
+              <a:solidFill>
+                <a:schemeClr val="lt1"/>
+              </a:solidFill>
+            </a:endParaRPr>
+          </a:p>
+          <a:p>
+            <a:pPr indent="0" lvl="0" marL="0" rtl="0" algn="ctr">
+              <a:spcBef>
+                <a:spcPts val="800"/>
+              </a:spcBef>
+              <a:spcAft>
+                <a:spcPts val="0"/>
+              </a:spcAft>
+              <a:buNone/>
+            </a:pPr>
+            <a:r>
+              <a:t/>
+            </a:r>
+            <a:endParaRPr sz="4200">
+              <a:solidFill>
+                <a:schemeClr val="lt1"/>
+              </a:solidFill>
+            </a:endParaRPr>
+          </a:p>
+          <a:p>
+            <a:pPr indent="0" lvl="0" marL="0" rtl="0" algn="ctr">
+              <a:spcBef>
+                <a:spcPts val="800"/>
+              </a:spcBef>
+              <a:spcAft>
+                <a:spcPts val="0"/>
+              </a:spcAft>
+              <a:buNone/>
+            </a:pPr>
+            <a:r>
+              <a:rPr lang="en" sz="4200">
+                <a:solidFill>
+                  <a:schemeClr val="lt1"/>
+                </a:solidFill>
+              </a:rPr>
+              <a:t>XYZ hover within small ranges for a single agent</a:t>
+            </a:r>
+            <a:endParaRPr sz="4200">
+              <a:solidFill>
+                <a:schemeClr val="lt1"/>
+              </a:solidFill>
+            </a:endParaRPr>
+          </a:p>
+        </p:txBody>
+      </p:sp>
+    </p:spTree>
+  </p:cSld>
+  <p:clrMapOvr>
+    <a:masterClrMapping/>
+  </p:clrMapOvr>
+</p:sld>
+</file>
+
+<file path=ppt/slides/slide19.xml><?xml version="1.0" encoding="utf-8"?>
+<p:sld xmlns:a="http://schemas.openxmlformats.org/drawingml/2006/main" xmlns:r="http://schemas.openxmlformats.org/officeDocument/2006/relationships" xmlns:mc="http://schemas.openxmlformats.org/markup-compatibility/2006" xmlns:mv="urn:schemas-microsoft-com:mac:vml" xmlns:p="http://schemas.openxmlformats.org/presentationml/2006/main" xmlns:c="http://schemas.openxmlformats.org/drawingml/2006/chart" xmlns:dgm="http://schemas.openxmlformats.org/drawingml/2006/diagram" xmlns:o="urn:schemas-microsoft-com:office:office" xmlns:v="urn:schemas-microsoft-com:vml" xmlns:pvml="urn:schemas-microsoft-com:office:powerpoint" xmlns:com="http://schemas.openxmlformats.org/drawingml/2006/compatibility" xmlns:p14="http://schemas.microsoft.com/office/powerpoint/2010/main" xmlns:p15="http://schemas.microsoft.com/office/powerpoint/2012/main" xmlns:ahyp="http://schemas.microsoft.com/office/drawing/2018/hyperlinkcolor">
+  <p:cSld>
+    <p:spTree>
+      <p:nvGrpSpPr>
+        <p:cNvPr id="240" name="Shape 240"/>
+        <p:cNvGrpSpPr/>
+        <p:nvPr/>
+      </p:nvGrpSpPr>
+      <p:grpSpPr>
+        <a:xfrm>
+          <a:off x="0" y="0"/>
+          <a:ext cx="0" cy="0"/>
+          <a:chOff x="0" y="0"/>
+          <a:chExt cx="0" cy="0"/>
+        </a:xfrm>
+      </p:grpSpPr>
+      <p:sp>
+        <p:nvSpPr>
+          <p:cNvPr id="241" name="Google Shape;241;p43"/>
+          <p:cNvSpPr txBox="1"/>
+          <p:nvPr>
+            <p:ph type="ctrTitle"/>
+          </p:nvPr>
+        </p:nvSpPr>
+        <p:spPr>
+          <a:xfrm>
+            <a:off x="1143000" y="841772"/>
+            <a:ext cx="6858000" cy="1790700"/>
+          </a:xfrm>
+          <a:prstGeom prst="rect">
+            <a:avLst/>
+          </a:prstGeom>
+          <a:noFill/>
+          <a:ln>
+            <a:noFill/>
+          </a:ln>
+        </p:spPr>
+        <p:txBody>
+          <a:bodyPr anchorCtr="0" anchor="b" bIns="34275" lIns="68575" spcFirstLastPara="1" rIns="68575" wrap="square" tIns="34275">
+            <a:normAutofit fontScale="90000"/>
+          </a:bodyPr>
+          <a:lstStyle/>
+          <a:p>
+            <a:pPr indent="0" lvl="0" marL="0" rtl="0" algn="ctr">
+              <a:lnSpc>
+                <a:spcPct val="90000"/>
+              </a:lnSpc>
+              <a:spcBef>
+                <a:spcPts val="0"/>
+              </a:spcBef>
+              <a:spcAft>
+                <a:spcPts val="0"/>
+              </a:spcAft>
+              <a:buClr>
+                <a:schemeClr val="dk1"/>
+              </a:buClr>
+              <a:buSzPct val="100000"/>
+              <a:buFont typeface="Play"/>
+              <a:buNone/>
+            </a:pPr>
+            <a:r>
+              <a:rPr lang="en"/>
+              <a:t>MIRL LAB Honours Project Bi-Weekly Update</a:t>
+            </a:r>
+            <a:endParaRPr/>
+          </a:p>
+          <a:p>
+            <a:pPr indent="0" lvl="0" marL="0" rtl="0" algn="ctr">
+              <a:lnSpc>
+                <a:spcPct val="90000"/>
+              </a:lnSpc>
+              <a:spcBef>
+                <a:spcPts val="0"/>
+              </a:spcBef>
+              <a:spcAft>
+                <a:spcPts val="0"/>
+              </a:spcAft>
+              <a:buClr>
+                <a:schemeClr val="dk1"/>
+              </a:buClr>
+              <a:buSzPct val="100000"/>
+              <a:buFont typeface="Play"/>
+              <a:buNone/>
+            </a:pPr>
+            <a:r>
+              <a:t/>
+            </a:r>
+            <a:endParaRPr/>
+          </a:p>
+        </p:txBody>
+      </p:sp>
+      <p:sp>
+        <p:nvSpPr>
+          <p:cNvPr id="242" name="Google Shape;242;p43"/>
+          <p:cNvSpPr txBox="1"/>
+          <p:nvPr>
+            <p:ph idx="1" type="subTitle"/>
+          </p:nvPr>
+        </p:nvSpPr>
+        <p:spPr>
+          <a:xfrm>
+            <a:off x="961950" y="2701524"/>
+            <a:ext cx="7220100" cy="1790700"/>
+          </a:xfrm>
+          <a:prstGeom prst="rect">
+            <a:avLst/>
+          </a:prstGeom>
+          <a:noFill/>
+          <a:ln>
+            <a:noFill/>
+          </a:ln>
+        </p:spPr>
+        <p:txBody>
+          <a:bodyPr anchorCtr="0" anchor="t" bIns="34275" lIns="68575" spcFirstLastPara="1" rIns="68575" wrap="square" tIns="34275">
+            <a:noAutofit/>
+          </a:bodyPr>
+          <a:lstStyle/>
+          <a:p>
+            <a:pPr indent="0" lvl="0" marL="0" rtl="0" algn="ctr">
+              <a:lnSpc>
+                <a:spcPct val="90000"/>
+              </a:lnSpc>
+              <a:spcBef>
+                <a:spcPts val="0"/>
+              </a:spcBef>
+              <a:spcAft>
+                <a:spcPts val="0"/>
+              </a:spcAft>
+              <a:buClr>
+                <a:schemeClr val="dk1"/>
+              </a:buClr>
+              <a:buSzPts val="1200"/>
+              <a:buNone/>
+            </a:pPr>
+            <a:r>
+              <a:rPr lang="en" sz="1700"/>
+              <a:t>MARL Crazyflie</a:t>
+            </a:r>
+            <a:endParaRPr sz="1700"/>
+          </a:p>
+          <a:p>
+            <a:pPr indent="0" lvl="0" marL="0" rtl="0" algn="ctr">
+              <a:lnSpc>
+                <a:spcPct val="90000"/>
+              </a:lnSpc>
+              <a:spcBef>
+                <a:spcPts val="800"/>
+              </a:spcBef>
+              <a:spcAft>
+                <a:spcPts val="0"/>
+              </a:spcAft>
+              <a:buClr>
+                <a:schemeClr val="dk1"/>
+              </a:buClr>
+              <a:buSzPts val="1200"/>
+              <a:buNone/>
+            </a:pPr>
+            <a:r>
+              <a:rPr lang="en" sz="1700"/>
+              <a:t>Michael O’Sullivan, Aydin Yalcinkaya</a:t>
+            </a:r>
+            <a:endParaRPr sz="1700"/>
+          </a:p>
+          <a:p>
+            <a:pPr indent="0" lvl="0" marL="0" rtl="0" algn="ctr">
+              <a:lnSpc>
+                <a:spcPct val="90000"/>
+              </a:lnSpc>
+              <a:spcBef>
+                <a:spcPts val="800"/>
+              </a:spcBef>
+              <a:spcAft>
+                <a:spcPts val="0"/>
+              </a:spcAft>
+              <a:buClr>
+                <a:schemeClr val="dk1"/>
+              </a:buClr>
+              <a:buSzPts val="1200"/>
+              <a:buNone/>
+            </a:pPr>
+            <a:r>
+              <a:rPr lang="en" sz="1700"/>
+              <a:t>Using MARL to learn safe take-off and hover policies for Crazyflie drones</a:t>
+            </a:r>
+            <a:endParaRPr sz="1700"/>
+          </a:p>
+          <a:p>
+            <a:pPr indent="0" lvl="0" marL="0" rtl="0" algn="ctr">
+              <a:lnSpc>
+                <a:spcPct val="90000"/>
+              </a:lnSpc>
+              <a:spcBef>
+                <a:spcPts val="800"/>
+              </a:spcBef>
+              <a:spcAft>
+                <a:spcPts val="0"/>
+              </a:spcAft>
+              <a:buClr>
+                <a:schemeClr val="dk1"/>
+              </a:buClr>
+              <a:buSzPts val="1200"/>
+              <a:buNone/>
+            </a:pPr>
+            <a:r>
+              <a:rPr lang="en" sz="1700"/>
+              <a:t>CrazyFlie, MuJuCo, Gymnasium, PyTorch</a:t>
+            </a:r>
+            <a:endParaRPr sz="1700"/>
+          </a:p>
+          <a:p>
+            <a:pPr indent="0" lvl="0" marL="0" rtl="0" algn="ctr">
+              <a:lnSpc>
+                <a:spcPct val="90000"/>
+              </a:lnSpc>
+              <a:spcBef>
+                <a:spcPts val="800"/>
+              </a:spcBef>
+              <a:spcAft>
+                <a:spcPts val="0"/>
+              </a:spcAft>
+              <a:buClr>
+                <a:schemeClr val="dk1"/>
+              </a:buClr>
+              <a:buSzPts val="1800"/>
+              <a:buNone/>
+            </a:pPr>
+            <a:r>
+              <a:t/>
+            </a:r>
+            <a:endParaRPr sz="1100"/>
+          </a:p>
+        </p:txBody>
+      </p:sp>
+    </p:spTree>
+  </p:cSld>
+  <p:clrMapOvr>
+    <a:masterClrMapping/>
+  </p:clrMapOvr>
+</p:sld>
+</file>
+
 <file path=ppt/slides/slide2.xml><?xml version="1.0" encoding="utf-8"?>
 <p:sld xmlns:a="http://schemas.openxmlformats.org/drawingml/2006/main" xmlns:r="http://schemas.openxmlformats.org/officeDocument/2006/relationships" xmlns:mc="http://schemas.openxmlformats.org/markup-compatibility/2006" xmlns:mv="urn:schemas-microsoft-com:mac:vml" xmlns:p="http://schemas.openxmlformats.org/presentationml/2006/main" xmlns:c="http://schemas.openxmlformats.org/drawingml/2006/chart" xmlns:dgm="http://schemas.openxmlformats.org/drawingml/2006/diagram" xmlns:o="urn:schemas-microsoft-com:office:office" xmlns:v="urn:schemas-microsoft-com:vml" xmlns:pvml="urn:schemas-microsoft-com:office:powerpoint" xmlns:com="http://schemas.openxmlformats.org/drawingml/2006/compatibility" xmlns:p14="http://schemas.microsoft.com/office/powerpoint/2010/main" xmlns:p15="http://schemas.microsoft.com/office/powerpoint/2012/main" xmlns:ahyp="http://schemas.microsoft.com/office/drawing/2018/hyperlinkcolor">
   <p:cSld>
@@ -19812,6 +20977,2031 @@
           </a:p>
         </p:txBody>
       </p:sp>
+    </p:spTree>
+  </p:cSld>
+  <p:clrMapOvr>
+    <a:masterClrMapping/>
+  </p:clrMapOvr>
+</p:sld>
+</file>
+
+<file path=ppt/slides/slide20.xml><?xml version="1.0" encoding="utf-8"?>
+<p:sld xmlns:a="http://schemas.openxmlformats.org/drawingml/2006/main" xmlns:r="http://schemas.openxmlformats.org/officeDocument/2006/relationships" xmlns:mc="http://schemas.openxmlformats.org/markup-compatibility/2006" xmlns:mv="urn:schemas-microsoft-com:mac:vml" xmlns:p="http://schemas.openxmlformats.org/presentationml/2006/main" xmlns:c="http://schemas.openxmlformats.org/drawingml/2006/chart" xmlns:dgm="http://schemas.openxmlformats.org/drawingml/2006/diagram" xmlns:o="urn:schemas-microsoft-com:office:office" xmlns:v="urn:schemas-microsoft-com:vml" xmlns:pvml="urn:schemas-microsoft-com:office:powerpoint" xmlns:com="http://schemas.openxmlformats.org/drawingml/2006/compatibility" xmlns:p14="http://schemas.microsoft.com/office/powerpoint/2010/main" xmlns:p15="http://schemas.microsoft.com/office/powerpoint/2012/main" xmlns:ahyp="http://schemas.microsoft.com/office/drawing/2018/hyperlinkcolor">
+  <p:cSld>
+    <p:spTree>
+      <p:nvGrpSpPr>
+        <p:cNvPr id="246" name="Shape 246"/>
+        <p:cNvGrpSpPr/>
+        <p:nvPr/>
+      </p:nvGrpSpPr>
+      <p:grpSpPr>
+        <a:xfrm>
+          <a:off x="0" y="0"/>
+          <a:ext cx="0" cy="0"/>
+          <a:chOff x="0" y="0"/>
+          <a:chExt cx="0" cy="0"/>
+        </a:xfrm>
+      </p:grpSpPr>
+      <p:sp>
+        <p:nvSpPr>
+          <p:cNvPr id="247" name="Google Shape;247;p44"/>
+          <p:cNvSpPr txBox="1"/>
+          <p:nvPr>
+            <p:ph type="title"/>
+          </p:nvPr>
+        </p:nvSpPr>
+        <p:spPr>
+          <a:xfrm>
+            <a:off x="628650" y="273844"/>
+            <a:ext cx="7886700" cy="994200"/>
+          </a:xfrm>
+          <a:prstGeom prst="rect">
+            <a:avLst/>
+          </a:prstGeom>
+          <a:noFill/>
+          <a:ln>
+            <a:noFill/>
+          </a:ln>
+        </p:spPr>
+        <p:txBody>
+          <a:bodyPr anchorCtr="0" anchor="ctr" bIns="34275" lIns="68575" spcFirstLastPara="1" rIns="68575" wrap="square" tIns="34275">
+            <a:normAutofit/>
+          </a:bodyPr>
+          <a:lstStyle/>
+          <a:p>
+            <a:pPr indent="0" lvl="0" marL="0" rtl="0" algn="l">
+              <a:lnSpc>
+                <a:spcPct val="90000"/>
+              </a:lnSpc>
+              <a:spcBef>
+                <a:spcPts val="0"/>
+              </a:spcBef>
+              <a:spcAft>
+                <a:spcPts val="0"/>
+              </a:spcAft>
+              <a:buClr>
+                <a:schemeClr val="dk1"/>
+              </a:buClr>
+              <a:buSzPts val="3300"/>
+              <a:buFont typeface="Play"/>
+              <a:buNone/>
+            </a:pPr>
+            <a:r>
+              <a:rPr lang="en"/>
+              <a:t>Progress Recap</a:t>
+            </a:r>
+            <a:endParaRPr/>
+          </a:p>
+        </p:txBody>
+      </p:sp>
+      <p:sp>
+        <p:nvSpPr>
+          <p:cNvPr id="248" name="Google Shape;248;p44"/>
+          <p:cNvSpPr txBox="1"/>
+          <p:nvPr>
+            <p:ph idx="1" type="body"/>
+          </p:nvPr>
+        </p:nvSpPr>
+        <p:spPr>
+          <a:xfrm>
+            <a:off x="417400" y="1369225"/>
+            <a:ext cx="8267400" cy="3263400"/>
+          </a:xfrm>
+          <a:prstGeom prst="rect">
+            <a:avLst/>
+          </a:prstGeom>
+          <a:noFill/>
+          <a:ln>
+            <a:noFill/>
+          </a:ln>
+        </p:spPr>
+        <p:txBody>
+          <a:bodyPr anchorCtr="0" anchor="t" bIns="34275" lIns="68575" spcFirstLastPara="1" rIns="68575" wrap="square" tIns="34275">
+            <a:normAutofit/>
+          </a:bodyPr>
+          <a:lstStyle/>
+          <a:p>
+            <a:pPr indent="0" lvl="0" marL="0" rtl="0" algn="l">
+              <a:spcBef>
+                <a:spcPts val="800"/>
+              </a:spcBef>
+              <a:spcAft>
+                <a:spcPts val="0"/>
+              </a:spcAft>
+              <a:buNone/>
+            </a:pPr>
+            <a:r>
+              <a:rPr b="1" lang="en" sz="1800"/>
+              <a:t>Goal</a:t>
+            </a:r>
+            <a:r>
+              <a:rPr lang="en" sz="1800"/>
+              <a:t>: Implementing MARL on Crazyflie drones for safe hovering and navigation</a:t>
+            </a:r>
+            <a:endParaRPr sz="1800"/>
+          </a:p>
+          <a:p>
+            <a:pPr indent="0" lvl="0" marL="0" rtl="0" algn="l">
+              <a:spcBef>
+                <a:spcPts val="800"/>
+              </a:spcBef>
+              <a:spcAft>
+                <a:spcPts val="0"/>
+              </a:spcAft>
+              <a:buNone/>
+            </a:pPr>
+            <a:r>
+              <a:t/>
+            </a:r>
+            <a:endParaRPr sz="1800"/>
+          </a:p>
+          <a:p>
+            <a:pPr indent="0" lvl="0" marL="0" rtl="0" algn="l">
+              <a:spcBef>
+                <a:spcPts val="800"/>
+              </a:spcBef>
+              <a:spcAft>
+                <a:spcPts val="0"/>
+              </a:spcAft>
+              <a:buNone/>
+            </a:pPr>
+            <a:r>
+              <a:rPr lang="en" sz="1800"/>
+              <a:t>Progress</a:t>
+            </a:r>
+            <a:endParaRPr sz="1800"/>
+          </a:p>
+          <a:p>
+            <a:pPr indent="-342900" lvl="0" marL="457200" rtl="0" algn="l">
+              <a:spcBef>
+                <a:spcPts val="800"/>
+              </a:spcBef>
+              <a:spcAft>
+                <a:spcPts val="0"/>
+              </a:spcAft>
+              <a:buSzPts val="1800"/>
+              <a:buChar char="●"/>
+            </a:pPr>
+            <a:r>
+              <a:rPr lang="en" sz="1800"/>
+              <a:t>Base environment for training a single drone to hover at a target</a:t>
+            </a:r>
+            <a:endParaRPr sz="1800"/>
+          </a:p>
+          <a:p>
+            <a:pPr indent="-342900" lvl="0" marL="457200" rtl="0" algn="l">
+              <a:spcBef>
+                <a:spcPts val="800"/>
+              </a:spcBef>
+              <a:spcAft>
+                <a:spcPts val="0"/>
+              </a:spcAft>
+              <a:buSzPts val="1800"/>
+              <a:buChar char="●"/>
+            </a:pPr>
+            <a:r>
+              <a:rPr lang="en" sz="1800"/>
+              <a:t>Vectorized single agent PPO-Clip that interacts with the environment</a:t>
+            </a:r>
+            <a:endParaRPr sz="1800"/>
+          </a:p>
+          <a:p>
+            <a:pPr indent="-342900" lvl="1" marL="914400" rtl="0" algn="l">
+              <a:spcBef>
+                <a:spcPts val="400"/>
+              </a:spcBef>
+              <a:spcAft>
+                <a:spcPts val="0"/>
+              </a:spcAft>
+              <a:buSzPts val="1800"/>
+              <a:buChar char="○"/>
+            </a:pPr>
+            <a:r>
+              <a:rPr lang="en"/>
+              <a:t>Runs 1 or more environments in parallel for better sampling</a:t>
+            </a:r>
+            <a:endParaRPr/>
+          </a:p>
+          <a:p>
+            <a:pPr indent="-342900" lvl="0" marL="457200" rtl="0" algn="l">
+              <a:spcBef>
+                <a:spcPts val="800"/>
+              </a:spcBef>
+              <a:spcAft>
+                <a:spcPts val="0"/>
+              </a:spcAft>
+              <a:buSzPts val="1800"/>
+              <a:buChar char="●"/>
+            </a:pPr>
+            <a:r>
+              <a:rPr lang="en" sz="1800"/>
+              <a:t>Engineered features to help the agent understand observation relationships</a:t>
+            </a:r>
+            <a:endParaRPr sz="1800"/>
+          </a:p>
+          <a:p>
+            <a:pPr indent="-342900" lvl="0" marL="457200" rtl="0" algn="l">
+              <a:spcBef>
+                <a:spcPts val="800"/>
+              </a:spcBef>
+              <a:spcAft>
+                <a:spcPts val="0"/>
+              </a:spcAft>
+              <a:buSzPts val="1800"/>
+              <a:buChar char="●"/>
+            </a:pPr>
+            <a:r>
+              <a:rPr lang="en" sz="1800"/>
+              <a:t>Single agent XYZ hover within small ranges ~1m</a:t>
+            </a:r>
+            <a:endParaRPr sz="1800"/>
+          </a:p>
+        </p:txBody>
+      </p:sp>
+    </p:spTree>
+  </p:cSld>
+  <p:clrMapOvr>
+    <a:masterClrMapping/>
+  </p:clrMapOvr>
+</p:sld>
+</file>
+
+<file path=ppt/slides/slide21.xml><?xml version="1.0" encoding="utf-8"?>
+<p:sld xmlns:a="http://schemas.openxmlformats.org/drawingml/2006/main" xmlns:r="http://schemas.openxmlformats.org/officeDocument/2006/relationships" xmlns:mc="http://schemas.openxmlformats.org/markup-compatibility/2006" xmlns:mv="urn:schemas-microsoft-com:mac:vml" xmlns:p="http://schemas.openxmlformats.org/presentationml/2006/main" xmlns:c="http://schemas.openxmlformats.org/drawingml/2006/chart" xmlns:dgm="http://schemas.openxmlformats.org/drawingml/2006/diagram" xmlns:o="urn:schemas-microsoft-com:office:office" xmlns:v="urn:schemas-microsoft-com:vml" xmlns:pvml="urn:schemas-microsoft-com:office:powerpoint" xmlns:com="http://schemas.openxmlformats.org/drawingml/2006/compatibility" xmlns:p14="http://schemas.microsoft.com/office/powerpoint/2010/main" xmlns:p15="http://schemas.microsoft.com/office/powerpoint/2012/main" xmlns:ahyp="http://schemas.microsoft.com/office/drawing/2018/hyperlinkcolor">
+  <p:cSld>
+    <p:spTree>
+      <p:nvGrpSpPr>
+        <p:cNvPr id="252" name="Shape 252"/>
+        <p:cNvGrpSpPr/>
+        <p:nvPr/>
+      </p:nvGrpSpPr>
+      <p:grpSpPr>
+        <a:xfrm>
+          <a:off x="0" y="0"/>
+          <a:ext cx="0" cy="0"/>
+          <a:chOff x="0" y="0"/>
+          <a:chExt cx="0" cy="0"/>
+        </a:xfrm>
+      </p:grpSpPr>
+      <p:sp>
+        <p:nvSpPr>
+          <p:cNvPr id="253" name="Google Shape;253;p45"/>
+          <p:cNvSpPr txBox="1"/>
+          <p:nvPr>
+            <p:ph type="title"/>
+          </p:nvPr>
+        </p:nvSpPr>
+        <p:spPr>
+          <a:xfrm>
+            <a:off x="628650" y="273844"/>
+            <a:ext cx="7886700" cy="994200"/>
+          </a:xfrm>
+          <a:prstGeom prst="rect">
+            <a:avLst/>
+          </a:prstGeom>
+          <a:noFill/>
+          <a:ln>
+            <a:noFill/>
+          </a:ln>
+        </p:spPr>
+        <p:txBody>
+          <a:bodyPr anchorCtr="0" anchor="ctr" bIns="34275" lIns="68575" spcFirstLastPara="1" rIns="68575" wrap="square" tIns="34275">
+            <a:normAutofit/>
+          </a:bodyPr>
+          <a:lstStyle/>
+          <a:p>
+            <a:pPr indent="0" lvl="0" marL="0" rtl="0" algn="l">
+              <a:lnSpc>
+                <a:spcPct val="90000"/>
+              </a:lnSpc>
+              <a:spcBef>
+                <a:spcPts val="0"/>
+              </a:spcBef>
+              <a:spcAft>
+                <a:spcPts val="0"/>
+              </a:spcAft>
+              <a:buClr>
+                <a:schemeClr val="dk1"/>
+              </a:buClr>
+              <a:buSzPts val="3300"/>
+              <a:buFont typeface="Play"/>
+              <a:buNone/>
+            </a:pPr>
+            <a:r>
+              <a:rPr lang="en"/>
+              <a:t>Progress Since Last Meeting </a:t>
+            </a:r>
+            <a:endParaRPr/>
+          </a:p>
+        </p:txBody>
+      </p:sp>
+      <p:sp>
+        <p:nvSpPr>
+          <p:cNvPr id="254" name="Google Shape;254;p45"/>
+          <p:cNvSpPr txBox="1"/>
+          <p:nvPr>
+            <p:ph idx="1" type="body"/>
+          </p:nvPr>
+        </p:nvSpPr>
+        <p:spPr>
+          <a:xfrm>
+            <a:off x="511650" y="1268050"/>
+            <a:ext cx="8119200" cy="3660000"/>
+          </a:xfrm>
+          <a:prstGeom prst="rect">
+            <a:avLst/>
+          </a:prstGeom>
+          <a:noFill/>
+          <a:ln>
+            <a:noFill/>
+          </a:ln>
+        </p:spPr>
+        <p:txBody>
+          <a:bodyPr anchorCtr="0" anchor="t" bIns="34275" lIns="68575" spcFirstLastPara="1" rIns="68575" wrap="square" tIns="34275">
+            <a:noAutofit/>
+          </a:bodyPr>
+          <a:lstStyle/>
+          <a:p>
+            <a:pPr indent="-342900" lvl="0" marL="457200" rtl="0" algn="l">
+              <a:lnSpc>
+                <a:spcPct val="115000"/>
+              </a:lnSpc>
+              <a:spcBef>
+                <a:spcPts val="800"/>
+              </a:spcBef>
+              <a:spcAft>
+                <a:spcPts val="0"/>
+              </a:spcAft>
+              <a:buSzPts val="1800"/>
+              <a:buChar char="●"/>
+            </a:pPr>
+            <a:r>
+              <a:rPr b="1" lang="en" sz="1800"/>
+              <a:t>New reward system</a:t>
+            </a:r>
+            <a:endParaRPr b="1" sz="1800"/>
+          </a:p>
+          <a:p>
+            <a:pPr indent="-342900" lvl="1" marL="914400" rtl="0" algn="l">
+              <a:lnSpc>
+                <a:spcPct val="115000"/>
+              </a:lnSpc>
+              <a:spcBef>
+                <a:spcPts val="0"/>
+              </a:spcBef>
+              <a:spcAft>
+                <a:spcPts val="0"/>
+              </a:spcAft>
+              <a:buSzPts val="1800"/>
+              <a:buChar char="○"/>
+            </a:pPr>
+            <a:r>
+              <a:rPr lang="en"/>
+              <a:t>R = survival + w1 * distance_improvement + w2 * target_proximity</a:t>
+            </a:r>
+            <a:endParaRPr/>
+          </a:p>
+          <a:p>
+            <a:pPr indent="-342900" lvl="0" marL="457200" rtl="0" algn="l">
+              <a:lnSpc>
+                <a:spcPct val="115000"/>
+              </a:lnSpc>
+              <a:spcBef>
+                <a:spcPts val="0"/>
+              </a:spcBef>
+              <a:spcAft>
+                <a:spcPts val="0"/>
+              </a:spcAft>
+              <a:buSzPts val="1800"/>
+              <a:buChar char="●"/>
+            </a:pPr>
+            <a:r>
+              <a:rPr b="1" lang="en" sz="1800"/>
+              <a:t>Taking 10 MuJoCo physics steps per 1 env step</a:t>
+            </a:r>
+            <a:endParaRPr b="1" sz="1800"/>
+          </a:p>
+          <a:p>
+            <a:pPr indent="-342900" lvl="1" marL="914400" rtl="0" algn="l">
+              <a:lnSpc>
+                <a:spcPct val="115000"/>
+              </a:lnSpc>
+              <a:spcBef>
+                <a:spcPts val="0"/>
+              </a:spcBef>
+              <a:spcAft>
+                <a:spcPts val="0"/>
+              </a:spcAft>
+              <a:buSzPts val="1800"/>
+              <a:buChar char="○"/>
+            </a:pPr>
+            <a:r>
+              <a:rPr lang="en"/>
+              <a:t>Previously, env / MuJoCo steps were one-to-one</a:t>
+            </a:r>
+            <a:endParaRPr/>
+          </a:p>
+          <a:p>
+            <a:pPr indent="-342900" lvl="1" marL="914400" rtl="0" algn="l">
+              <a:lnSpc>
+                <a:spcPct val="115000"/>
+              </a:lnSpc>
+              <a:spcBef>
+                <a:spcPts val="0"/>
+              </a:spcBef>
+              <a:spcAft>
+                <a:spcPts val="0"/>
+              </a:spcAft>
+              <a:buSzPts val="1800"/>
+              <a:buChar char="○"/>
+            </a:pPr>
+            <a:r>
+              <a:rPr lang="en"/>
+              <a:t>The observation delay allows less reactive commands (roll/pitch/yaw) to have a more visible effect to the agent, and simulates actual control-observation delay</a:t>
+            </a:r>
+            <a:endParaRPr/>
+          </a:p>
+          <a:p>
+            <a:pPr indent="-342900" lvl="0" marL="457200" rtl="0" algn="l">
+              <a:lnSpc>
+                <a:spcPct val="115000"/>
+              </a:lnSpc>
+              <a:spcBef>
+                <a:spcPts val="0"/>
+              </a:spcBef>
+              <a:spcAft>
+                <a:spcPts val="0"/>
+              </a:spcAft>
+              <a:buSzPts val="1800"/>
+              <a:buChar char="●"/>
+            </a:pPr>
+            <a:r>
+              <a:rPr b="1" lang="en" sz="1800"/>
+              <a:t>Curriculum of gradually increasing difficulty</a:t>
+            </a:r>
+            <a:endParaRPr b="1" sz="1800"/>
+          </a:p>
+          <a:p>
+            <a:pPr indent="-342900" lvl="1" marL="914400" rtl="0" algn="l">
+              <a:lnSpc>
+                <a:spcPct val="115000"/>
+              </a:lnSpc>
+              <a:spcBef>
+                <a:spcPts val="0"/>
+              </a:spcBef>
+              <a:spcAft>
+                <a:spcPts val="0"/>
+              </a:spcAft>
+              <a:buSzPts val="1800"/>
+              <a:buChar char="○"/>
+            </a:pPr>
+            <a:r>
+              <a:rPr lang="en"/>
+              <a:t>During training, gradually scale up the drone’s random initial position, rotation, and velocities</a:t>
+            </a:r>
+            <a:endParaRPr/>
+          </a:p>
+          <a:p>
+            <a:pPr indent="-342900" lvl="0" marL="457200" rtl="0" algn="l">
+              <a:lnSpc>
+                <a:spcPct val="115000"/>
+              </a:lnSpc>
+              <a:spcBef>
+                <a:spcPts val="0"/>
+              </a:spcBef>
+              <a:spcAft>
+                <a:spcPts val="0"/>
+              </a:spcAft>
+              <a:buSzPts val="1800"/>
+              <a:buChar char="●"/>
+            </a:pPr>
+            <a:r>
+              <a:rPr b="1" lang="en" sz="1800"/>
+              <a:t>Results</a:t>
+            </a:r>
+            <a:r>
+              <a:rPr lang="en" sz="1800"/>
+              <a:t>: Successful XYZ hover within ~1m (crashes when further)</a:t>
+            </a:r>
+            <a:endParaRPr sz="1800"/>
+          </a:p>
+        </p:txBody>
+      </p:sp>
+    </p:spTree>
+  </p:cSld>
+  <p:clrMapOvr>
+    <a:masterClrMapping/>
+  </p:clrMapOvr>
+</p:sld>
+</file>
+
+<file path=ppt/slides/slide22.xml><?xml version="1.0" encoding="utf-8"?>
+<p:sld xmlns:a="http://schemas.openxmlformats.org/drawingml/2006/main" xmlns:r="http://schemas.openxmlformats.org/officeDocument/2006/relationships" xmlns:mc="http://schemas.openxmlformats.org/markup-compatibility/2006" xmlns:mv="urn:schemas-microsoft-com:mac:vml" xmlns:p="http://schemas.openxmlformats.org/presentationml/2006/main" xmlns:c="http://schemas.openxmlformats.org/drawingml/2006/chart" xmlns:dgm="http://schemas.openxmlformats.org/drawingml/2006/diagram" xmlns:o="urn:schemas-microsoft-com:office:office" xmlns:v="urn:schemas-microsoft-com:vml" xmlns:pvml="urn:schemas-microsoft-com:office:powerpoint" xmlns:com="http://schemas.openxmlformats.org/drawingml/2006/compatibility" xmlns:p14="http://schemas.microsoft.com/office/powerpoint/2010/main" xmlns:p15="http://schemas.microsoft.com/office/powerpoint/2012/main" xmlns:ahyp="http://schemas.microsoft.com/office/drawing/2018/hyperlinkcolor">
+  <p:cSld>
+    <p:spTree>
+      <p:nvGrpSpPr>
+        <p:cNvPr id="258" name="Shape 258"/>
+        <p:cNvGrpSpPr/>
+        <p:nvPr/>
+      </p:nvGrpSpPr>
+      <p:grpSpPr>
+        <a:xfrm>
+          <a:off x="0" y="0"/>
+          <a:ext cx="0" cy="0"/>
+          <a:chOff x="0" y="0"/>
+          <a:chExt cx="0" cy="0"/>
+        </a:xfrm>
+      </p:grpSpPr>
+      <p:sp>
+        <p:nvSpPr>
+          <p:cNvPr id="259" name="Google Shape;259;p46"/>
+          <p:cNvSpPr txBox="1"/>
+          <p:nvPr>
+            <p:ph type="title"/>
+          </p:nvPr>
+        </p:nvSpPr>
+        <p:spPr>
+          <a:xfrm>
+            <a:off x="628650" y="273844"/>
+            <a:ext cx="7886700" cy="994200"/>
+          </a:xfrm>
+          <a:prstGeom prst="rect">
+            <a:avLst/>
+          </a:prstGeom>
+          <a:noFill/>
+          <a:ln>
+            <a:noFill/>
+          </a:ln>
+        </p:spPr>
+        <p:txBody>
+          <a:bodyPr anchorCtr="0" anchor="ctr" bIns="34275" lIns="68575" spcFirstLastPara="1" rIns="68575" wrap="square" tIns="34275">
+            <a:normAutofit/>
+          </a:bodyPr>
+          <a:lstStyle/>
+          <a:p>
+            <a:pPr indent="0" lvl="0" marL="0" rtl="0" algn="l">
+              <a:lnSpc>
+                <a:spcPct val="90000"/>
+              </a:lnSpc>
+              <a:spcBef>
+                <a:spcPts val="0"/>
+              </a:spcBef>
+              <a:spcAft>
+                <a:spcPts val="0"/>
+              </a:spcAft>
+              <a:buClr>
+                <a:schemeClr val="dk1"/>
+              </a:buClr>
+              <a:buSzPts val="3300"/>
+              <a:buFont typeface="Play"/>
+              <a:buNone/>
+            </a:pPr>
+            <a:r>
+              <a:rPr lang="en"/>
+              <a:t>Plan for the Next Two Weeks</a:t>
+            </a:r>
+            <a:endParaRPr/>
+          </a:p>
+        </p:txBody>
+      </p:sp>
+      <p:sp>
+        <p:nvSpPr>
+          <p:cNvPr id="260" name="Google Shape;260;p46"/>
+          <p:cNvSpPr txBox="1"/>
+          <p:nvPr>
+            <p:ph idx="1" type="body"/>
+          </p:nvPr>
+        </p:nvSpPr>
+        <p:spPr>
+          <a:xfrm>
+            <a:off x="628650" y="1369219"/>
+            <a:ext cx="7886700" cy="3263400"/>
+          </a:xfrm>
+          <a:prstGeom prst="rect">
+            <a:avLst/>
+          </a:prstGeom>
+          <a:noFill/>
+          <a:ln>
+            <a:noFill/>
+          </a:ln>
+        </p:spPr>
+        <p:txBody>
+          <a:bodyPr anchorCtr="0" anchor="t" bIns="34275" lIns="68575" spcFirstLastPara="1" rIns="68575" wrap="square" tIns="34275">
+            <a:normAutofit/>
+          </a:bodyPr>
+          <a:lstStyle/>
+          <a:p>
+            <a:pPr indent="0" lvl="0" marL="0" rtl="0" algn="l">
+              <a:lnSpc>
+                <a:spcPct val="90000"/>
+              </a:lnSpc>
+              <a:spcBef>
+                <a:spcPts val="0"/>
+              </a:spcBef>
+              <a:spcAft>
+                <a:spcPts val="0"/>
+              </a:spcAft>
+              <a:buNone/>
+            </a:pPr>
+            <a:r>
+              <a:t/>
+            </a:r>
+            <a:endParaRPr/>
+          </a:p>
+          <a:p>
+            <a:pPr indent="-171450" lvl="0" marL="177800" rtl="0" algn="l">
+              <a:lnSpc>
+                <a:spcPct val="90000"/>
+              </a:lnSpc>
+              <a:spcBef>
+                <a:spcPts val="800"/>
+              </a:spcBef>
+              <a:spcAft>
+                <a:spcPts val="0"/>
+              </a:spcAft>
+              <a:buClr>
+                <a:schemeClr val="dk1"/>
+              </a:buClr>
+              <a:buSzPts val="2100"/>
+              <a:buChar char="●"/>
+            </a:pPr>
+            <a:r>
+              <a:rPr lang="en"/>
+              <a:t>Goals</a:t>
+            </a:r>
+            <a:endParaRPr/>
+          </a:p>
+          <a:p>
+            <a:pPr indent="-177800" lvl="1" marL="520700" rtl="0" algn="l">
+              <a:lnSpc>
+                <a:spcPct val="90000"/>
+              </a:lnSpc>
+              <a:spcBef>
+                <a:spcPts val="800"/>
+              </a:spcBef>
+              <a:spcAft>
+                <a:spcPts val="0"/>
+              </a:spcAft>
+              <a:buSzPts val="1400"/>
+              <a:buChar char="○"/>
+            </a:pPr>
+            <a:r>
+              <a:rPr lang="en"/>
+              <a:t>Extend XYZ hover to greater distances</a:t>
+            </a:r>
+            <a:endParaRPr/>
+          </a:p>
+          <a:p>
+            <a:pPr indent="-177800" lvl="1" marL="520700" rtl="0" algn="l">
+              <a:lnSpc>
+                <a:spcPct val="90000"/>
+              </a:lnSpc>
+              <a:spcBef>
+                <a:spcPts val="800"/>
+              </a:spcBef>
+              <a:spcAft>
+                <a:spcPts val="0"/>
+              </a:spcAft>
+              <a:buSzPts val="1400"/>
+              <a:buChar char="○"/>
+            </a:pPr>
+            <a:r>
+              <a:rPr lang="en"/>
+              <a:t>Learn about MAPPO theory, begin implementation</a:t>
+            </a:r>
+            <a:endParaRPr/>
+          </a:p>
+          <a:p>
+            <a:pPr indent="-171450" lvl="0" marL="177800" rtl="0" algn="l">
+              <a:lnSpc>
+                <a:spcPct val="90000"/>
+              </a:lnSpc>
+              <a:spcBef>
+                <a:spcPts val="800"/>
+              </a:spcBef>
+              <a:spcAft>
+                <a:spcPts val="0"/>
+              </a:spcAft>
+              <a:buClr>
+                <a:schemeClr val="dk1"/>
+              </a:buClr>
+              <a:buSzPts val="2100"/>
+              <a:buChar char="●"/>
+            </a:pPr>
+            <a:r>
+              <a:rPr lang="en"/>
+              <a:t>Dependencies</a:t>
+            </a:r>
+            <a:endParaRPr/>
+          </a:p>
+          <a:p>
+            <a:pPr indent="-177800" lvl="1" marL="520700" rtl="0" algn="l">
+              <a:lnSpc>
+                <a:spcPct val="90000"/>
+              </a:lnSpc>
+              <a:spcBef>
+                <a:spcPts val="800"/>
+              </a:spcBef>
+              <a:spcAft>
+                <a:spcPts val="0"/>
+              </a:spcAft>
+              <a:buSzPts val="1400"/>
+              <a:buChar char="○"/>
+            </a:pPr>
+            <a:r>
+              <a:rPr lang="en"/>
+              <a:t>Research dynamic XYZ hover strategies and MAPPO</a:t>
+            </a:r>
+            <a:endParaRPr/>
+          </a:p>
+        </p:txBody>
+      </p:sp>
+    </p:spTree>
+  </p:cSld>
+  <p:clrMapOvr>
+    <a:masterClrMapping/>
+  </p:clrMapOvr>
+</p:sld>
+</file>
+
+<file path=ppt/slides/slide23.xml><?xml version="1.0" encoding="utf-8"?>
+<p:sld xmlns:a="http://schemas.openxmlformats.org/drawingml/2006/main" xmlns:r="http://schemas.openxmlformats.org/officeDocument/2006/relationships" xmlns:mc="http://schemas.openxmlformats.org/markup-compatibility/2006" xmlns:mv="urn:schemas-microsoft-com:mac:vml" xmlns:p="http://schemas.openxmlformats.org/presentationml/2006/main" xmlns:c="http://schemas.openxmlformats.org/drawingml/2006/chart" xmlns:dgm="http://schemas.openxmlformats.org/drawingml/2006/diagram" xmlns:o="urn:schemas-microsoft-com:office:office" xmlns:v="urn:schemas-microsoft-com:vml" xmlns:pvml="urn:schemas-microsoft-com:office:powerpoint" xmlns:com="http://schemas.openxmlformats.org/drawingml/2006/compatibility" xmlns:p14="http://schemas.microsoft.com/office/powerpoint/2010/main" xmlns:p15="http://schemas.microsoft.com/office/powerpoint/2012/main" xmlns:ahyp="http://schemas.microsoft.com/office/drawing/2018/hyperlinkcolor">
+  <p:cSld>
+    <p:spTree>
+      <p:nvGrpSpPr>
+        <p:cNvPr id="264" name="Shape 264"/>
+        <p:cNvGrpSpPr/>
+        <p:nvPr/>
+      </p:nvGrpSpPr>
+      <p:grpSpPr>
+        <a:xfrm>
+          <a:off x="0" y="0"/>
+          <a:ext cx="0" cy="0"/>
+          <a:chOff x="0" y="0"/>
+          <a:chExt cx="0" cy="0"/>
+        </a:xfrm>
+      </p:grpSpPr>
+      <p:sp>
+        <p:nvSpPr>
+          <p:cNvPr id="265" name="Google Shape;265;p47"/>
+          <p:cNvSpPr txBox="1"/>
+          <p:nvPr>
+            <p:ph type="title"/>
+          </p:nvPr>
+        </p:nvSpPr>
+        <p:spPr>
+          <a:xfrm>
+            <a:off x="628650" y="273844"/>
+            <a:ext cx="7886700" cy="994200"/>
+          </a:xfrm>
+          <a:prstGeom prst="rect">
+            <a:avLst/>
+          </a:prstGeom>
+          <a:noFill/>
+          <a:ln>
+            <a:noFill/>
+          </a:ln>
+        </p:spPr>
+        <p:txBody>
+          <a:bodyPr anchorCtr="0" anchor="ctr" bIns="34275" lIns="68575" spcFirstLastPara="1" rIns="68575" wrap="square" tIns="34275">
+            <a:normAutofit/>
+          </a:bodyPr>
+          <a:lstStyle/>
+          <a:p>
+            <a:pPr indent="0" lvl="0" marL="0" rtl="0" algn="l">
+              <a:lnSpc>
+                <a:spcPct val="90000"/>
+              </a:lnSpc>
+              <a:spcBef>
+                <a:spcPts val="0"/>
+              </a:spcBef>
+              <a:spcAft>
+                <a:spcPts val="0"/>
+              </a:spcAft>
+              <a:buClr>
+                <a:schemeClr val="dk1"/>
+              </a:buClr>
+              <a:buSzPts val="3300"/>
+              <a:buFont typeface="Play"/>
+              <a:buNone/>
+            </a:pPr>
+            <a:r>
+              <a:rPr lang="en"/>
+              <a:t>Roadmap Checkpoint</a:t>
+            </a:r>
+            <a:endParaRPr/>
+          </a:p>
+        </p:txBody>
+      </p:sp>
+      <p:sp>
+        <p:nvSpPr>
+          <p:cNvPr id="266" name="Google Shape;266;p47"/>
+          <p:cNvSpPr txBox="1"/>
+          <p:nvPr>
+            <p:ph idx="1" type="body"/>
+          </p:nvPr>
+        </p:nvSpPr>
+        <p:spPr>
+          <a:xfrm>
+            <a:off x="628650" y="1369226"/>
+            <a:ext cx="7886700" cy="3545400"/>
+          </a:xfrm>
+          <a:prstGeom prst="rect">
+            <a:avLst/>
+          </a:prstGeom>
+          <a:noFill/>
+          <a:ln>
+            <a:noFill/>
+          </a:ln>
+        </p:spPr>
+        <p:txBody>
+          <a:bodyPr anchorCtr="0" anchor="t" bIns="34275" lIns="68575" spcFirstLastPara="1" rIns="68575" wrap="square" tIns="34275">
+            <a:noAutofit/>
+          </a:bodyPr>
+          <a:lstStyle/>
+          <a:p>
+            <a:pPr indent="-342900" lvl="0" marL="457200" rtl="0" algn="l">
+              <a:lnSpc>
+                <a:spcPct val="115000"/>
+              </a:lnSpc>
+              <a:spcBef>
+                <a:spcPts val="800"/>
+              </a:spcBef>
+              <a:spcAft>
+                <a:spcPts val="0"/>
+              </a:spcAft>
+              <a:buSzPts val="1800"/>
+              <a:buChar char="●"/>
+            </a:pPr>
+            <a:r>
+              <a:rPr lang="en" sz="1800"/>
+              <a:t>Week 2: Imperfect single agent hovering at target on Z axis</a:t>
+            </a:r>
+            <a:endParaRPr sz="1800"/>
+          </a:p>
+          <a:p>
+            <a:pPr indent="-342900" lvl="0" marL="457200" rtl="0" algn="l">
+              <a:lnSpc>
+                <a:spcPct val="115000"/>
+              </a:lnSpc>
+              <a:spcBef>
+                <a:spcPts val="0"/>
+              </a:spcBef>
+              <a:spcAft>
+                <a:spcPts val="0"/>
+              </a:spcAft>
+              <a:buSzPts val="1800"/>
+              <a:buChar char="●"/>
+            </a:pPr>
+            <a:r>
+              <a:rPr lang="en" sz="1800"/>
+              <a:t>Week 4: Successful [0, 0, Z] hover, imperfect [0, Y, Z] hover</a:t>
+            </a:r>
+            <a:endParaRPr sz="1800"/>
+          </a:p>
+          <a:p>
+            <a:pPr indent="-342900" lvl="0" marL="457200" rtl="0" algn="l">
+              <a:lnSpc>
+                <a:spcPct val="115000"/>
+              </a:lnSpc>
+              <a:spcBef>
+                <a:spcPts val="0"/>
+              </a:spcBef>
+              <a:spcAft>
+                <a:spcPts val="0"/>
+              </a:spcAft>
+              <a:buSzPts val="1800"/>
+              <a:buChar char="●"/>
+            </a:pPr>
+            <a:r>
+              <a:rPr lang="en" sz="1800"/>
+              <a:t>Week 6: Successful XYZ hover within small ranges</a:t>
+            </a:r>
+            <a:endParaRPr sz="1800"/>
+          </a:p>
+          <a:p>
+            <a:pPr indent="-342900" lvl="0" marL="457200" rtl="0" algn="l">
+              <a:lnSpc>
+                <a:spcPct val="115000"/>
+              </a:lnSpc>
+              <a:spcBef>
+                <a:spcPts val="0"/>
+              </a:spcBef>
+              <a:spcAft>
+                <a:spcPts val="0"/>
+              </a:spcAft>
+              <a:buSzPts val="1800"/>
+              <a:buChar char="●"/>
+            </a:pPr>
+            <a:r>
+              <a:rPr lang="en" sz="1800"/>
+              <a:t>Week 8: ___</a:t>
+            </a:r>
+            <a:endParaRPr sz="1800"/>
+          </a:p>
+          <a:p>
+            <a:pPr indent="0" lvl="0" marL="0" rtl="0" algn="l">
+              <a:lnSpc>
+                <a:spcPct val="115000"/>
+              </a:lnSpc>
+              <a:spcBef>
+                <a:spcPts val="800"/>
+              </a:spcBef>
+              <a:spcAft>
+                <a:spcPts val="0"/>
+              </a:spcAft>
+              <a:buNone/>
+            </a:pPr>
+            <a:r>
+              <a:t/>
+            </a:r>
+            <a:endParaRPr sz="1800"/>
+          </a:p>
+          <a:p>
+            <a:pPr indent="-342900" lvl="0" marL="457200" rtl="0" algn="l">
+              <a:lnSpc>
+                <a:spcPct val="115000"/>
+              </a:lnSpc>
+              <a:spcBef>
+                <a:spcPts val="800"/>
+              </a:spcBef>
+              <a:spcAft>
+                <a:spcPts val="0"/>
+              </a:spcAft>
+              <a:buSzPts val="1800"/>
+              <a:buChar char="●"/>
+            </a:pPr>
+            <a:r>
+              <a:rPr lang="en" sz="1800"/>
+              <a:t>Final deadline: Deliverables (e.g., report, demo, paper draft)</a:t>
+            </a:r>
+            <a:endParaRPr sz="1800"/>
+          </a:p>
+          <a:p>
+            <a:pPr indent="-342900" lvl="1" marL="914400" rtl="0" algn="l">
+              <a:lnSpc>
+                <a:spcPct val="115000"/>
+              </a:lnSpc>
+              <a:spcBef>
+                <a:spcPts val="0"/>
+              </a:spcBef>
+              <a:spcAft>
+                <a:spcPts val="0"/>
+              </a:spcAft>
+              <a:buSzPts val="1800"/>
+              <a:buChar char="○"/>
+            </a:pPr>
+            <a:r>
+              <a:rPr lang="en" sz="1800"/>
+              <a:t>Early December</a:t>
+            </a:r>
+            <a:endParaRPr sz="1800"/>
+          </a:p>
+          <a:p>
+            <a:pPr indent="-342900" lvl="0" marL="457200" rtl="0" algn="l">
+              <a:lnSpc>
+                <a:spcPct val="115000"/>
+              </a:lnSpc>
+              <a:spcBef>
+                <a:spcPts val="0"/>
+              </a:spcBef>
+              <a:spcAft>
+                <a:spcPts val="0"/>
+              </a:spcAft>
+              <a:buSzPts val="1800"/>
+              <a:buChar char="●"/>
+            </a:pPr>
+            <a:r>
+              <a:rPr lang="en" sz="1800"/>
+              <a:t>Shifts in schedule</a:t>
+            </a:r>
+            <a:endParaRPr sz="1800"/>
+          </a:p>
+          <a:p>
+            <a:pPr indent="-342900" lvl="1" marL="914400" rtl="0" algn="l">
+              <a:lnSpc>
+                <a:spcPct val="115000"/>
+              </a:lnSpc>
+              <a:spcBef>
+                <a:spcPts val="0"/>
+              </a:spcBef>
+              <a:spcAft>
+                <a:spcPts val="0"/>
+              </a:spcAft>
+              <a:buSzPts val="1800"/>
+              <a:buChar char="○"/>
+            </a:pPr>
+            <a:r>
+              <a:rPr lang="en"/>
+              <a:t>Relatively on track, hoping to get better ranges for XYZ and a baseline MAPPO implementation by next meeting</a:t>
+            </a:r>
+            <a:endParaRPr sz="1800"/>
+          </a:p>
+        </p:txBody>
+      </p:sp>
+    </p:spTree>
+  </p:cSld>
+  <p:clrMapOvr>
+    <a:masterClrMapping/>
+  </p:clrMapOvr>
+</p:sld>
+</file>
+
+<file path=ppt/slides/slide24.xml><?xml version="1.0" encoding="utf-8"?>
+<p:sld xmlns:a="http://schemas.openxmlformats.org/drawingml/2006/main" xmlns:r="http://schemas.openxmlformats.org/officeDocument/2006/relationships" xmlns:mc="http://schemas.openxmlformats.org/markup-compatibility/2006" xmlns:mv="urn:schemas-microsoft-com:mac:vml" xmlns:p="http://schemas.openxmlformats.org/presentationml/2006/main" xmlns:c="http://schemas.openxmlformats.org/drawingml/2006/chart" xmlns:dgm="http://schemas.openxmlformats.org/drawingml/2006/diagram" xmlns:o="urn:schemas-microsoft-com:office:office" xmlns:v="urn:schemas-microsoft-com:vml" xmlns:pvml="urn:schemas-microsoft-com:office:powerpoint" xmlns:com="http://schemas.openxmlformats.org/drawingml/2006/compatibility" xmlns:p14="http://schemas.microsoft.com/office/powerpoint/2010/main" xmlns:p15="http://schemas.microsoft.com/office/powerpoint/2012/main" xmlns:ahyp="http://schemas.microsoft.com/office/drawing/2018/hyperlinkcolor">
+  <p:cSld>
+    <p:spTree>
+      <p:nvGrpSpPr>
+        <p:cNvPr id="270" name="Shape 270"/>
+        <p:cNvGrpSpPr/>
+        <p:nvPr/>
+      </p:nvGrpSpPr>
+      <p:grpSpPr>
+        <a:xfrm>
+          <a:off x="0" y="0"/>
+          <a:ext cx="0" cy="0"/>
+          <a:chOff x="0" y="0"/>
+          <a:chExt cx="0" cy="0"/>
+        </a:xfrm>
+      </p:grpSpPr>
+      <p:sp>
+        <p:nvSpPr>
+          <p:cNvPr id="271" name="Google Shape;271;p48"/>
+          <p:cNvSpPr txBox="1"/>
+          <p:nvPr>
+            <p:ph type="title"/>
+          </p:nvPr>
+        </p:nvSpPr>
+        <p:spPr>
+          <a:xfrm>
+            <a:off x="628650" y="273844"/>
+            <a:ext cx="7886700" cy="994200"/>
+          </a:xfrm>
+          <a:prstGeom prst="rect">
+            <a:avLst/>
+          </a:prstGeom>
+          <a:noFill/>
+          <a:ln>
+            <a:noFill/>
+          </a:ln>
+        </p:spPr>
+        <p:txBody>
+          <a:bodyPr anchorCtr="0" anchor="ctr" bIns="34275" lIns="68575" spcFirstLastPara="1" rIns="68575" wrap="square" tIns="34275">
+            <a:normAutofit/>
+          </a:bodyPr>
+          <a:lstStyle/>
+          <a:p>
+            <a:pPr indent="0" lvl="0" marL="0" rtl="0" algn="l">
+              <a:lnSpc>
+                <a:spcPct val="90000"/>
+              </a:lnSpc>
+              <a:spcBef>
+                <a:spcPts val="0"/>
+              </a:spcBef>
+              <a:spcAft>
+                <a:spcPts val="0"/>
+              </a:spcAft>
+              <a:buClr>
+                <a:schemeClr val="dk1"/>
+              </a:buClr>
+              <a:buSzPts val="3300"/>
+              <a:buFont typeface="Play"/>
+              <a:buNone/>
+            </a:pPr>
+            <a:r>
+              <a:rPr lang="en"/>
+              <a:t>Discussion Points / Questions </a:t>
+            </a:r>
+            <a:endParaRPr/>
+          </a:p>
+        </p:txBody>
+      </p:sp>
+      <p:sp>
+        <p:nvSpPr>
+          <p:cNvPr id="272" name="Google Shape;272;p48"/>
+          <p:cNvSpPr txBox="1"/>
+          <p:nvPr>
+            <p:ph idx="1" type="body"/>
+          </p:nvPr>
+        </p:nvSpPr>
+        <p:spPr>
+          <a:xfrm>
+            <a:off x="628650" y="1171425"/>
+            <a:ext cx="7886700" cy="3648900"/>
+          </a:xfrm>
+          <a:prstGeom prst="rect">
+            <a:avLst/>
+          </a:prstGeom>
+          <a:noFill/>
+          <a:ln>
+            <a:noFill/>
+          </a:ln>
+        </p:spPr>
+        <p:txBody>
+          <a:bodyPr anchorCtr="0" anchor="t" bIns="34275" lIns="68575" spcFirstLastPara="1" rIns="68575" wrap="square" tIns="34275">
+            <a:normAutofit lnSpcReduction="20000"/>
+          </a:bodyPr>
+          <a:lstStyle/>
+          <a:p>
+            <a:pPr indent="-158750" lvl="0" marL="177800" rtl="0" algn="l">
+              <a:lnSpc>
+                <a:spcPct val="115000"/>
+              </a:lnSpc>
+              <a:spcBef>
+                <a:spcPts val="0"/>
+              </a:spcBef>
+              <a:spcAft>
+                <a:spcPts val="0"/>
+              </a:spcAft>
+              <a:buClr>
+                <a:schemeClr val="dk1"/>
+              </a:buClr>
+              <a:buSzPts val="1900"/>
+              <a:buChar char="●"/>
+            </a:pPr>
+            <a:r>
+              <a:rPr b="1" lang="en" sz="1900"/>
+              <a:t>Extending to any range in XYZ?</a:t>
+            </a:r>
+            <a:endParaRPr b="1" sz="1900"/>
+          </a:p>
+          <a:p>
+            <a:pPr indent="-209550" lvl="1" marL="520700" rtl="0" algn="l">
+              <a:lnSpc>
+                <a:spcPct val="115000"/>
+              </a:lnSpc>
+              <a:spcBef>
+                <a:spcPts val="0"/>
+              </a:spcBef>
+              <a:spcAft>
+                <a:spcPts val="0"/>
+              </a:spcAft>
+              <a:buSzPts val="1900"/>
+              <a:buChar char="○"/>
+            </a:pPr>
+            <a:r>
+              <a:rPr lang="en" sz="1900"/>
+              <a:t>Currently, the curriculum scales the initial starting position up to 0.5m (10 curriculum stages, start at 0.05m, +0.05m each stage)</a:t>
+            </a:r>
+            <a:endParaRPr sz="1900"/>
+          </a:p>
+          <a:p>
+            <a:pPr indent="-209550" lvl="2" marL="863600" rtl="0" algn="l">
+              <a:lnSpc>
+                <a:spcPct val="115000"/>
+              </a:lnSpc>
+              <a:spcBef>
+                <a:spcPts val="0"/>
+              </a:spcBef>
+              <a:spcAft>
+                <a:spcPts val="0"/>
+              </a:spcAft>
+              <a:buSzPts val="1900"/>
+              <a:buChar char="■"/>
+            </a:pPr>
+            <a:r>
+              <a:rPr lang="en" sz="1900"/>
+              <a:t>Extending the curriculum has helped, but this linearly scales the training time and does not generalize to any XYZ</a:t>
+            </a:r>
+            <a:endParaRPr sz="1900"/>
+          </a:p>
+          <a:p>
+            <a:pPr indent="-209550" lvl="2" marL="863600" rtl="0" algn="l">
+              <a:lnSpc>
+                <a:spcPct val="115000"/>
+              </a:lnSpc>
+              <a:spcBef>
+                <a:spcPts val="0"/>
+              </a:spcBef>
+              <a:spcAft>
+                <a:spcPts val="0"/>
+              </a:spcAft>
+              <a:buSzPts val="1900"/>
+              <a:buChar char="■"/>
+            </a:pPr>
+            <a:r>
+              <a:rPr lang="en" sz="1900"/>
+              <a:t>Currently, successful XYZ hover within ~1m takes ~15 minutes</a:t>
+            </a:r>
+            <a:endParaRPr sz="1900"/>
+          </a:p>
+          <a:p>
+            <a:pPr indent="-209550" lvl="3" marL="1206500" rtl="0" algn="l">
+              <a:lnSpc>
+                <a:spcPct val="115000"/>
+              </a:lnSpc>
+              <a:spcBef>
+                <a:spcPts val="0"/>
+              </a:spcBef>
+              <a:spcAft>
+                <a:spcPts val="0"/>
+              </a:spcAft>
+              <a:buSzPts val="1900"/>
+              <a:buChar char="●"/>
+            </a:pPr>
+            <a:r>
+              <a:rPr lang="en" sz="1900"/>
+              <a:t>8 parallel environments, 600k steps per env, 4.6 million total</a:t>
+            </a:r>
+            <a:endParaRPr sz="1900"/>
+          </a:p>
+          <a:p>
+            <a:pPr indent="-209550" lvl="1" marL="520700" rtl="0" algn="l">
+              <a:lnSpc>
+                <a:spcPct val="115000"/>
+              </a:lnSpc>
+              <a:spcBef>
+                <a:spcPts val="0"/>
+              </a:spcBef>
+              <a:spcAft>
+                <a:spcPts val="0"/>
+              </a:spcAft>
+              <a:buSzPts val="1900"/>
+              <a:buChar char="○"/>
+            </a:pPr>
+            <a:r>
+              <a:rPr lang="en" sz="1900"/>
+              <a:t>Strategies?</a:t>
+            </a:r>
+            <a:endParaRPr sz="1900"/>
+          </a:p>
+          <a:p>
+            <a:pPr indent="-209550" lvl="2" marL="863600" rtl="0" algn="l">
+              <a:lnSpc>
+                <a:spcPct val="115000"/>
+              </a:lnSpc>
+              <a:spcBef>
+                <a:spcPts val="0"/>
+              </a:spcBef>
+              <a:spcAft>
+                <a:spcPts val="0"/>
+              </a:spcAft>
+              <a:buSzPts val="1900"/>
+              <a:buChar char="■"/>
+            </a:pPr>
+            <a:r>
+              <a:rPr lang="en" sz="1900"/>
+              <a:t>Break up large </a:t>
+            </a:r>
+            <a:r>
+              <a:rPr lang="en" sz="1900"/>
+              <a:t>journeys</a:t>
+            </a:r>
+            <a:r>
+              <a:rPr lang="en" sz="1900"/>
+              <a:t> + pathfinding between checkpoints?</a:t>
+            </a:r>
+            <a:endParaRPr sz="1900"/>
+          </a:p>
+          <a:p>
+            <a:pPr indent="-209550" lvl="2" marL="863600" rtl="0" algn="l">
+              <a:lnSpc>
+                <a:spcPct val="115000"/>
+              </a:lnSpc>
+              <a:spcBef>
+                <a:spcPts val="0"/>
+              </a:spcBef>
+              <a:spcAft>
+                <a:spcPts val="0"/>
+              </a:spcAft>
+              <a:buSzPts val="1900"/>
+              <a:buChar char="■"/>
+            </a:pPr>
+            <a:r>
+              <a:rPr lang="en" sz="1900"/>
+              <a:t>Reshape rewards and/or observations for longer journeys?</a:t>
+            </a:r>
+            <a:endParaRPr sz="1900"/>
+          </a:p>
+          <a:p>
+            <a:pPr indent="-209550" lvl="3" marL="1206500" rtl="0" algn="l">
+              <a:lnSpc>
+                <a:spcPct val="115000"/>
+              </a:lnSpc>
+              <a:spcBef>
+                <a:spcPts val="0"/>
+              </a:spcBef>
+              <a:spcAft>
+                <a:spcPts val="0"/>
+              </a:spcAft>
+              <a:buSzPts val="1900"/>
+              <a:buChar char="●"/>
+            </a:pPr>
+            <a:r>
+              <a:rPr lang="en" sz="1900"/>
+              <a:t>E.g. rewarding stable flight </a:t>
+            </a:r>
+            <a:r>
+              <a:rPr lang="en" sz="1900"/>
+              <a:t>throughout</a:t>
+            </a:r>
+            <a:r>
+              <a:rPr lang="en" sz="1900"/>
+              <a:t> entire journey might help drone navigate to far targets without crashing (?)</a:t>
+            </a:r>
+            <a:endParaRPr sz="1900"/>
+          </a:p>
+        </p:txBody>
+      </p:sp>
+    </p:spTree>
+  </p:cSld>
+  <p:clrMapOvr>
+    <a:masterClrMapping/>
+  </p:clrMapOvr>
+</p:sld>
+</file>
+
+<file path=ppt/slides/slide25.xml><?xml version="1.0" encoding="utf-8"?>
+<p:sld xmlns:a="http://schemas.openxmlformats.org/drawingml/2006/main" xmlns:r="http://schemas.openxmlformats.org/officeDocument/2006/relationships" xmlns:mc="http://schemas.openxmlformats.org/markup-compatibility/2006" xmlns:mv="urn:schemas-microsoft-com:mac:vml" xmlns:p="http://schemas.openxmlformats.org/presentationml/2006/main" xmlns:c="http://schemas.openxmlformats.org/drawingml/2006/chart" xmlns:dgm="http://schemas.openxmlformats.org/drawingml/2006/diagram" xmlns:o="urn:schemas-microsoft-com:office:office" xmlns:v="urn:schemas-microsoft-com:vml" xmlns:pvml="urn:schemas-microsoft-com:office:powerpoint" xmlns:com="http://schemas.openxmlformats.org/drawingml/2006/compatibility" xmlns:p14="http://schemas.microsoft.com/office/powerpoint/2010/main" xmlns:p15="http://schemas.microsoft.com/office/powerpoint/2012/main" xmlns:ahyp="http://schemas.microsoft.com/office/drawing/2018/hyperlinkcolor">
+  <p:cSld>
+    <p:spTree>
+      <p:nvGrpSpPr>
+        <p:cNvPr id="276" name="Shape 276"/>
+        <p:cNvGrpSpPr/>
+        <p:nvPr/>
+      </p:nvGrpSpPr>
+      <p:grpSpPr>
+        <a:xfrm>
+          <a:off x="0" y="0"/>
+          <a:ext cx="0" cy="0"/>
+          <a:chOff x="0" y="0"/>
+          <a:chExt cx="0" cy="0"/>
+        </a:xfrm>
+      </p:grpSpPr>
+      <p:sp>
+        <p:nvSpPr>
+          <p:cNvPr id="277" name="Google Shape;277;p49"/>
+          <p:cNvSpPr txBox="1"/>
+          <p:nvPr>
+            <p:ph type="title"/>
+          </p:nvPr>
+        </p:nvSpPr>
+        <p:spPr>
+          <a:xfrm>
+            <a:off x="628650" y="152119"/>
+            <a:ext cx="7886700" cy="994200"/>
+          </a:xfrm>
+          <a:prstGeom prst="rect">
+            <a:avLst/>
+          </a:prstGeom>
+          <a:noFill/>
+          <a:ln>
+            <a:noFill/>
+          </a:ln>
+        </p:spPr>
+        <p:txBody>
+          <a:bodyPr anchorCtr="0" anchor="ctr" bIns="34275" lIns="68575" spcFirstLastPara="1" rIns="68575" wrap="square" tIns="34275">
+            <a:normAutofit/>
+          </a:bodyPr>
+          <a:lstStyle/>
+          <a:p>
+            <a:pPr indent="0" lvl="0" marL="0" rtl="0" algn="l">
+              <a:lnSpc>
+                <a:spcPct val="90000"/>
+              </a:lnSpc>
+              <a:spcBef>
+                <a:spcPts val="0"/>
+              </a:spcBef>
+              <a:spcAft>
+                <a:spcPts val="0"/>
+              </a:spcAft>
+              <a:buClr>
+                <a:schemeClr val="dk1"/>
+              </a:buClr>
+              <a:buSzPts val="3300"/>
+              <a:buFont typeface="Play"/>
+              <a:buNone/>
+            </a:pPr>
+            <a:r>
+              <a:rPr lang="en"/>
+              <a:t>Log Snapshot (Cumulative)</a:t>
+            </a:r>
+            <a:endParaRPr/>
+          </a:p>
+        </p:txBody>
+      </p:sp>
+      <p:graphicFrame>
+        <p:nvGraphicFramePr>
+          <p:cNvPr id="278" name="Google Shape;278;p49"/>
+          <p:cNvGraphicFramePr/>
+          <p:nvPr/>
+        </p:nvGraphicFramePr>
+        <p:xfrm>
+          <a:off x="1071015" y="1146336"/>
+          <a:ext cx="3000000" cy="3000000"/>
+        </p:xfrm>
+        <a:graphic>
+          <a:graphicData uri="http://schemas.openxmlformats.org/drawingml/2006/table">
+            <a:tbl>
+              <a:tblPr bandRow="1" firstRow="1">
+                <a:noFill/>
+                <a:tableStyleId>{1B8563D4-BB8A-4F7E-A35C-4C2900C004D8}</a:tableStyleId>
+              </a:tblPr>
+              <a:tblGrid>
+                <a:gridCol w="1531600"/>
+                <a:gridCol w="1531600"/>
+                <a:gridCol w="1531600"/>
+                <a:gridCol w="1531600"/>
+              </a:tblGrid>
+              <a:tr h="602150">
+                <a:tc>
+                  <a:txBody>
+                    <a:bodyPr/>
+                    <a:lstStyle/>
+                    <a:p>
+                      <a:pPr indent="0" lvl="0" marL="0" marR="0" rtl="0" algn="ctr">
+                        <a:lnSpc>
+                          <a:spcPct val="100000"/>
+                        </a:lnSpc>
+                        <a:spcBef>
+                          <a:spcPts val="0"/>
+                        </a:spcBef>
+                        <a:spcAft>
+                          <a:spcPts val="0"/>
+                        </a:spcAft>
+                        <a:buClr>
+                          <a:schemeClr val="dk1"/>
+                        </a:buClr>
+                        <a:buSzPts val="1400"/>
+                        <a:buFont typeface="Arial"/>
+                        <a:buNone/>
+                      </a:pPr>
+                      <a:r>
+                        <a:rPr b="1" lang="en" sz="1400" u="none" cap="none" strike="noStrike"/>
+                        <a:t>Date</a:t>
+                      </a:r>
+                      <a:endParaRPr sz="1400" u="none" cap="none" strike="noStrike"/>
+                    </a:p>
+                  </a:txBody>
+                  <a:tcPr marT="34300" marB="34300" marR="68600" marL="68600"/>
+                </a:tc>
+                <a:tc>
+                  <a:txBody>
+                    <a:bodyPr/>
+                    <a:lstStyle/>
+                    <a:p>
+                      <a:pPr indent="0" lvl="0" marL="0" marR="0" rtl="0" algn="l">
+                        <a:spcBef>
+                          <a:spcPts val="0"/>
+                        </a:spcBef>
+                        <a:spcAft>
+                          <a:spcPts val="0"/>
+                        </a:spcAft>
+                        <a:buClr>
+                          <a:srgbClr val="FFFFFF"/>
+                        </a:buClr>
+                        <a:buSzPts val="1400"/>
+                        <a:buFont typeface="Arial"/>
+                        <a:buNone/>
+                      </a:pPr>
+                      <a:r>
+                        <a:rPr b="1" i="0" lang="en" sz="1400" u="none" cap="none" strike="noStrike">
+                          <a:solidFill>
+                            <a:srgbClr val="FFFFFF"/>
+                          </a:solidFill>
+                          <a:latin typeface="Arial"/>
+                          <a:ea typeface="Arial"/>
+                          <a:cs typeface="Arial"/>
+                          <a:sym typeface="Arial"/>
+                        </a:rPr>
+                        <a:t>Progress  Summary</a:t>
+                      </a:r>
+                      <a:endParaRPr sz="1100"/>
+                    </a:p>
+                  </a:txBody>
+                  <a:tcPr marT="34300" marB="34300" marR="68600" marL="68600"/>
+                </a:tc>
+                <a:tc>
+                  <a:txBody>
+                    <a:bodyPr/>
+                    <a:lstStyle/>
+                    <a:p>
+                      <a:pPr indent="0" lvl="0" marL="0" marR="0" rtl="0" algn="ctr">
+                        <a:lnSpc>
+                          <a:spcPct val="100000"/>
+                        </a:lnSpc>
+                        <a:spcBef>
+                          <a:spcPts val="0"/>
+                        </a:spcBef>
+                        <a:spcAft>
+                          <a:spcPts val="0"/>
+                        </a:spcAft>
+                        <a:buClr>
+                          <a:srgbClr val="FFFFFF"/>
+                        </a:buClr>
+                        <a:buSzPts val="1400"/>
+                        <a:buFont typeface="Arial"/>
+                        <a:buNone/>
+                      </a:pPr>
+                      <a:r>
+                        <a:rPr b="1" i="0" lang="en" sz="1400" u="none" cap="none" strike="noStrike">
+                          <a:solidFill>
+                            <a:srgbClr val="FFFFFF"/>
+                          </a:solidFill>
+                          <a:latin typeface="Arial"/>
+                          <a:ea typeface="Arial"/>
+                          <a:cs typeface="Arial"/>
+                          <a:sym typeface="Arial"/>
+                        </a:rPr>
+                        <a:t>Next Steps</a:t>
+                      </a:r>
+                      <a:endParaRPr sz="1100"/>
+                    </a:p>
+                    <a:p>
+                      <a:pPr indent="0" lvl="0" marL="0" marR="0" rtl="0" algn="l">
+                        <a:spcBef>
+                          <a:spcPts val="0"/>
+                        </a:spcBef>
+                        <a:spcAft>
+                          <a:spcPts val="0"/>
+                        </a:spcAft>
+                        <a:buClr>
+                          <a:schemeClr val="dk1"/>
+                        </a:buClr>
+                        <a:buSzPts val="1400"/>
+                        <a:buFont typeface="Arial"/>
+                        <a:buNone/>
+                      </a:pPr>
+                      <a:r>
+                        <a:t/>
+                      </a:r>
+                      <a:endParaRPr sz="1400" u="none" cap="none" strike="noStrike"/>
+                    </a:p>
+                  </a:txBody>
+                  <a:tcPr marT="34300" marB="34300" marR="68600" marL="68600"/>
+                </a:tc>
+                <a:tc>
+                  <a:txBody>
+                    <a:bodyPr/>
+                    <a:lstStyle/>
+                    <a:p>
+                      <a:pPr indent="0" lvl="0" marL="0" marR="0" rtl="0" algn="l">
+                        <a:spcBef>
+                          <a:spcPts val="0"/>
+                        </a:spcBef>
+                        <a:spcAft>
+                          <a:spcPts val="0"/>
+                        </a:spcAft>
+                        <a:buClr>
+                          <a:srgbClr val="FFFFFF"/>
+                        </a:buClr>
+                        <a:buSzPts val="1400"/>
+                        <a:buFont typeface="Arial"/>
+                        <a:buNone/>
+                      </a:pPr>
+                      <a:r>
+                        <a:rPr b="1" i="0" lang="en" sz="1400" u="none" cap="none" strike="noStrike">
+                          <a:solidFill>
+                            <a:srgbClr val="FFFFFF"/>
+                          </a:solidFill>
+                          <a:latin typeface="Arial"/>
+                          <a:ea typeface="Arial"/>
+                          <a:cs typeface="Arial"/>
+                          <a:sym typeface="Arial"/>
+                        </a:rPr>
+                        <a:t>Notes</a:t>
+                      </a:r>
+                      <a:endParaRPr sz="1400" u="none" cap="none" strike="noStrike"/>
+                    </a:p>
+                  </a:txBody>
+                  <a:tcPr marT="34300" marB="34300" marR="68600" marL="68600"/>
+                </a:tc>
+              </a:tr>
+              <a:tr h="760450">
+                <a:tc>
+                  <a:txBody>
+                    <a:bodyPr/>
+                    <a:lstStyle/>
+                    <a:p>
+                      <a:pPr indent="0" lvl="0" marL="0" marR="0" rtl="0" algn="l">
+                        <a:spcBef>
+                          <a:spcPts val="0"/>
+                        </a:spcBef>
+                        <a:spcAft>
+                          <a:spcPts val="0"/>
+                        </a:spcAft>
+                        <a:buClr>
+                          <a:schemeClr val="dk1"/>
+                        </a:buClr>
+                        <a:buSzPts val="1400"/>
+                        <a:buFont typeface="Arial"/>
+                        <a:buNone/>
+                      </a:pPr>
+                      <a:r>
+                        <a:rPr lang="en" sz="1400" u="none" cap="none" strike="noStrike"/>
+                        <a:t>Sept. 1</a:t>
+                      </a:r>
+                      <a:r>
+                        <a:rPr lang="en"/>
+                        <a:t>6</a:t>
+                      </a:r>
+                      <a:endParaRPr sz="1100"/>
+                    </a:p>
+                  </a:txBody>
+                  <a:tcPr marT="34300" marB="34300" marR="68600" marL="68600"/>
+                </a:tc>
+                <a:tc>
+                  <a:txBody>
+                    <a:bodyPr/>
+                    <a:lstStyle/>
+                    <a:p>
+                      <a:pPr indent="0" lvl="0" marL="0" marR="0" rtl="0" algn="l">
+                        <a:lnSpc>
+                          <a:spcPct val="100000"/>
+                        </a:lnSpc>
+                        <a:spcBef>
+                          <a:spcPts val="0"/>
+                        </a:spcBef>
+                        <a:spcAft>
+                          <a:spcPts val="0"/>
+                        </a:spcAft>
+                        <a:buClr>
+                          <a:schemeClr val="dk1"/>
+                        </a:buClr>
+                        <a:buSzPts val="1400"/>
+                        <a:buFont typeface="Arial"/>
+                        <a:buNone/>
+                      </a:pPr>
+                      <a:r>
+                        <a:rPr lang="en" sz="1400" u="none" cap="none" strike="noStrike"/>
+                        <a:t>Set up MuJoCo sim; baseline PPO-Clip training</a:t>
+                      </a:r>
+                      <a:endParaRPr sz="1100"/>
+                    </a:p>
+                    <a:p>
+                      <a:pPr indent="0" lvl="0" marL="0" marR="0" rtl="0" algn="l">
+                        <a:spcBef>
+                          <a:spcPts val="0"/>
+                        </a:spcBef>
+                        <a:spcAft>
+                          <a:spcPts val="0"/>
+                        </a:spcAft>
+                        <a:buClr>
+                          <a:schemeClr val="dk1"/>
+                        </a:buClr>
+                        <a:buSzPts val="1400"/>
+                        <a:buFont typeface="Arial"/>
+                        <a:buNone/>
+                      </a:pPr>
+                      <a:r>
+                        <a:t/>
+                      </a:r>
+                      <a:endParaRPr sz="1400" u="none" cap="none" strike="noStrike"/>
+                    </a:p>
+                  </a:txBody>
+                  <a:tcPr marT="34300" marB="34300" marR="68600" marL="68600"/>
+                </a:tc>
+                <a:tc>
+                  <a:txBody>
+                    <a:bodyPr/>
+                    <a:lstStyle/>
+                    <a:p>
+                      <a:pPr indent="0" lvl="0" marL="0" marR="0" rtl="0" algn="l">
+                        <a:lnSpc>
+                          <a:spcPct val="100000"/>
+                        </a:lnSpc>
+                        <a:spcBef>
+                          <a:spcPts val="0"/>
+                        </a:spcBef>
+                        <a:spcAft>
+                          <a:spcPts val="0"/>
+                        </a:spcAft>
+                        <a:buClr>
+                          <a:schemeClr val="dk1"/>
+                        </a:buClr>
+                        <a:buSzPts val="1400"/>
+                        <a:buFont typeface="Arial"/>
+                        <a:buNone/>
+                      </a:pPr>
+                      <a:r>
+                        <a:rPr lang="en">
+                          <a:latin typeface="Arial"/>
+                          <a:ea typeface="Arial"/>
+                          <a:cs typeface="Arial"/>
+                          <a:sym typeface="Arial"/>
+                        </a:rPr>
+                        <a:t>Refine current setup, explore MAPPO theory</a:t>
+                      </a:r>
+                      <a:endParaRPr sz="1100"/>
+                    </a:p>
+                    <a:p>
+                      <a:pPr indent="0" lvl="0" marL="0" marR="0" rtl="0" algn="l">
+                        <a:spcBef>
+                          <a:spcPts val="0"/>
+                        </a:spcBef>
+                        <a:spcAft>
+                          <a:spcPts val="0"/>
+                        </a:spcAft>
+                        <a:buClr>
+                          <a:schemeClr val="dk1"/>
+                        </a:buClr>
+                        <a:buSzPts val="1400"/>
+                        <a:buFont typeface="Arial"/>
+                        <a:buNone/>
+                      </a:pPr>
+                      <a:r>
+                        <a:t/>
+                      </a:r>
+                      <a:endParaRPr sz="1400" u="none" cap="none" strike="noStrike"/>
+                    </a:p>
+                  </a:txBody>
+                  <a:tcPr marT="34300" marB="34300" marR="68600" marL="68600"/>
+                </a:tc>
+                <a:tc>
+                  <a:txBody>
+                    <a:bodyPr/>
+                    <a:lstStyle/>
+                    <a:p>
+                      <a:pPr indent="0" lvl="0" marL="0" marR="0" rtl="0" algn="l">
+                        <a:lnSpc>
+                          <a:spcPct val="100000"/>
+                        </a:lnSpc>
+                        <a:spcBef>
+                          <a:spcPts val="0"/>
+                        </a:spcBef>
+                        <a:spcAft>
+                          <a:spcPts val="0"/>
+                        </a:spcAft>
+                        <a:buClr>
+                          <a:schemeClr val="dk1"/>
+                        </a:buClr>
+                        <a:buSzPts val="1400"/>
+                        <a:buFont typeface="Arial"/>
+                        <a:buNone/>
+                      </a:pPr>
+                      <a:r>
+                        <a:rPr lang="en">
+                          <a:latin typeface="Arial"/>
+                          <a:ea typeface="Arial"/>
+                          <a:cs typeface="Arial"/>
+                          <a:sym typeface="Arial"/>
+                        </a:rPr>
+                        <a:t>Policy / env is current imperfect / inconsistent</a:t>
+                      </a:r>
+                      <a:endParaRPr sz="1100"/>
+                    </a:p>
+                    <a:p>
+                      <a:pPr indent="0" lvl="0" marL="0" marR="0" rtl="0" algn="l">
+                        <a:spcBef>
+                          <a:spcPts val="0"/>
+                        </a:spcBef>
+                        <a:spcAft>
+                          <a:spcPts val="0"/>
+                        </a:spcAft>
+                        <a:buClr>
+                          <a:schemeClr val="dk1"/>
+                        </a:buClr>
+                        <a:buSzPts val="1400"/>
+                        <a:buFont typeface="Arial"/>
+                        <a:buNone/>
+                      </a:pPr>
+                      <a:r>
+                        <a:t/>
+                      </a:r>
+                      <a:endParaRPr sz="1400" u="none" cap="none" strike="noStrike"/>
+                    </a:p>
+                  </a:txBody>
+                  <a:tcPr marT="34300" marB="34300" marR="68600" marL="68600"/>
+                </a:tc>
+              </a:tr>
+              <a:tr h="811225">
+                <a:tc>
+                  <a:txBody>
+                    <a:bodyPr/>
+                    <a:lstStyle/>
+                    <a:p>
+                      <a:pPr indent="0" lvl="0" marL="0" marR="0" rtl="0" algn="l">
+                        <a:spcBef>
+                          <a:spcPts val="0"/>
+                        </a:spcBef>
+                        <a:spcAft>
+                          <a:spcPts val="0"/>
+                        </a:spcAft>
+                        <a:buNone/>
+                      </a:pPr>
+                      <a:r>
+                        <a:rPr lang="en" sz="1400" u="none" cap="none" strike="noStrike"/>
+                        <a:t>Sept. 30</a:t>
+                      </a:r>
+                      <a:endParaRPr sz="1100"/>
+                    </a:p>
+                  </a:txBody>
+                  <a:tcPr marT="34300" marB="34300" marR="68600" marL="68600"/>
+                </a:tc>
+                <a:tc>
+                  <a:txBody>
+                    <a:bodyPr/>
+                    <a:lstStyle/>
+                    <a:p>
+                      <a:pPr indent="0" lvl="0" marL="0" marR="0" rtl="0" algn="l">
+                        <a:lnSpc>
+                          <a:spcPct val="100000"/>
+                        </a:lnSpc>
+                        <a:spcBef>
+                          <a:spcPts val="0"/>
+                        </a:spcBef>
+                        <a:spcAft>
+                          <a:spcPts val="0"/>
+                        </a:spcAft>
+                        <a:buClr>
+                          <a:schemeClr val="dk1"/>
+                        </a:buClr>
+                        <a:buSzPts val="1400"/>
+                        <a:buFont typeface="Arial"/>
+                        <a:buNone/>
+                      </a:pPr>
+                      <a:r>
+                        <a:rPr lang="en"/>
+                        <a:t>Successful Z hover.</a:t>
+                      </a:r>
+                      <a:endParaRPr/>
+                    </a:p>
+                    <a:p>
+                      <a:pPr indent="0" lvl="0" marL="0" marR="0" rtl="0" algn="l">
+                        <a:lnSpc>
+                          <a:spcPct val="100000"/>
+                        </a:lnSpc>
+                        <a:spcBef>
+                          <a:spcPts val="0"/>
+                        </a:spcBef>
+                        <a:spcAft>
+                          <a:spcPts val="0"/>
+                        </a:spcAft>
+                        <a:buClr>
+                          <a:schemeClr val="dk1"/>
+                        </a:buClr>
+                        <a:buSzPts val="1400"/>
+                        <a:buFont typeface="Arial"/>
+                        <a:buNone/>
+                      </a:pPr>
+                      <a:r>
+                        <a:rPr lang="en"/>
+                        <a:t>Semi-successful YZ hover</a:t>
+                      </a:r>
+                      <a:endParaRPr/>
+                    </a:p>
+                  </a:txBody>
+                  <a:tcPr marT="34300" marB="34300" marR="68600" marL="68600"/>
+                </a:tc>
+                <a:tc>
+                  <a:txBody>
+                    <a:bodyPr/>
+                    <a:lstStyle/>
+                    <a:p>
+                      <a:pPr indent="0" lvl="0" marL="0" marR="0" rtl="0" algn="l">
+                        <a:lnSpc>
+                          <a:spcPct val="100000"/>
+                        </a:lnSpc>
+                        <a:spcBef>
+                          <a:spcPts val="0"/>
+                        </a:spcBef>
+                        <a:spcAft>
+                          <a:spcPts val="0"/>
+                        </a:spcAft>
+                        <a:buClr>
+                          <a:schemeClr val="dk1"/>
+                        </a:buClr>
+                        <a:buSzPts val="1400"/>
+                        <a:buFont typeface="Arial"/>
+                        <a:buNone/>
+                      </a:pPr>
+                      <a:r>
+                        <a:rPr lang="en"/>
+                        <a:t>Refine YZ hover and move to XYZ, explore MAPPO theory</a:t>
+                      </a:r>
+                      <a:endParaRPr/>
+                    </a:p>
+                  </a:txBody>
+                  <a:tcPr marT="34300" marB="34300" marR="68600" marL="68600"/>
+                </a:tc>
+                <a:tc>
+                  <a:txBody>
+                    <a:bodyPr/>
+                    <a:lstStyle/>
+                    <a:p>
+                      <a:pPr indent="0" lvl="0" marL="0" marR="0" rtl="0" algn="l">
+                        <a:lnSpc>
+                          <a:spcPct val="100000"/>
+                        </a:lnSpc>
+                        <a:spcBef>
+                          <a:spcPts val="0"/>
+                        </a:spcBef>
+                        <a:spcAft>
+                          <a:spcPts val="0"/>
+                        </a:spcAft>
+                        <a:buClr>
+                          <a:schemeClr val="dk1"/>
+                        </a:buClr>
+                        <a:buSzPts val="1400"/>
+                        <a:buFont typeface="Arial"/>
+                        <a:buNone/>
+                      </a:pPr>
+                      <a:r>
+                        <a:t/>
+                      </a:r>
+                      <a:endParaRPr sz="1100"/>
+                    </a:p>
+                  </a:txBody>
+                  <a:tcPr marT="34300" marB="34300" marR="68600" marL="68600"/>
+                </a:tc>
+              </a:tr>
+              <a:tr h="342775">
+                <a:tc>
+                  <a:txBody>
+                    <a:bodyPr/>
+                    <a:lstStyle/>
+                    <a:p>
+                      <a:pPr indent="0" lvl="0" marL="0" marR="0" rtl="0" algn="l">
+                        <a:spcBef>
+                          <a:spcPts val="0"/>
+                        </a:spcBef>
+                        <a:spcAft>
+                          <a:spcPts val="0"/>
+                        </a:spcAft>
+                        <a:buNone/>
+                      </a:pPr>
+                      <a:r>
+                        <a:rPr lang="en"/>
+                        <a:t>Oct. 14</a:t>
+                      </a:r>
+                      <a:endParaRPr sz="1400"/>
+                    </a:p>
+                  </a:txBody>
+                  <a:tcPr marT="34300" marB="34300" marR="68600" marL="68600"/>
+                </a:tc>
+                <a:tc>
+                  <a:txBody>
+                    <a:bodyPr/>
+                    <a:lstStyle/>
+                    <a:p>
+                      <a:pPr indent="0" lvl="0" marL="0" marR="0" rtl="0" algn="l">
+                        <a:spcBef>
+                          <a:spcPts val="0"/>
+                        </a:spcBef>
+                        <a:spcAft>
+                          <a:spcPts val="0"/>
+                        </a:spcAft>
+                        <a:buNone/>
+                      </a:pPr>
+                      <a:r>
+                        <a:rPr lang="en"/>
+                        <a:t>Small XYZ hover</a:t>
+                      </a:r>
+                      <a:endParaRPr sz="1400"/>
+                    </a:p>
+                  </a:txBody>
+                  <a:tcPr marT="34300" marB="34300" marR="68600" marL="68600"/>
+                </a:tc>
+                <a:tc>
+                  <a:txBody>
+                    <a:bodyPr/>
+                    <a:lstStyle/>
+                    <a:p>
+                      <a:pPr indent="0" lvl="0" marL="0" marR="0" rtl="0" algn="l">
+                        <a:spcBef>
+                          <a:spcPts val="0"/>
+                        </a:spcBef>
+                        <a:spcAft>
+                          <a:spcPts val="0"/>
+                        </a:spcAft>
+                        <a:buNone/>
+                      </a:pPr>
+                      <a:r>
+                        <a:rPr lang="en"/>
+                        <a:t>Full XYZ hover and MAPPO implementation</a:t>
+                      </a:r>
+                      <a:endParaRPr sz="1400"/>
+                    </a:p>
+                  </a:txBody>
+                  <a:tcPr marT="34300" marB="34300" marR="68600" marL="68600"/>
+                </a:tc>
+                <a:tc>
+                  <a:txBody>
+                    <a:bodyPr/>
+                    <a:lstStyle/>
+                    <a:p>
+                      <a:pPr indent="0" lvl="0" marL="0" marR="0" rtl="0" algn="l">
+                        <a:spcBef>
+                          <a:spcPts val="0"/>
+                        </a:spcBef>
+                        <a:spcAft>
+                          <a:spcPts val="0"/>
+                        </a:spcAft>
+                        <a:buNone/>
+                      </a:pPr>
+                      <a:r>
+                        <a:t/>
+                      </a:r>
+                      <a:endParaRPr sz="1400"/>
+                    </a:p>
+                  </a:txBody>
+                  <a:tcPr marT="34300" marB="34300" marR="68600" marL="68600"/>
+                </a:tc>
+              </a:tr>
+            </a:tbl>
+          </a:graphicData>
+        </a:graphic>
+      </p:graphicFrame>
     </p:spTree>
   </p:cSld>
   <p:clrMapOvr>
@@ -21733,7 +24923,7 @@
             <a:tbl>
               <a:tblPr bandRow="1" firstRow="1">
                 <a:noFill/>
-                <a:tableStyleId>{DDB1B1F9-9234-4F01-9741-F30DABF958EB}</a:tableStyleId>
+                <a:tableStyleId>{1B8563D4-BB8A-4F7E-A35C-4C2900C004D8}</a:tableStyleId>
               </a:tblPr>
               <a:tblGrid>
                 <a:gridCol w="1531600"/>
@@ -22599,6 +25789,285 @@
 </file>
 
 <file path=ppt/theme/theme2.xml><?xml version="1.0" encoding="utf-8"?>
+<a:theme xmlns:a="http://schemas.openxmlformats.org/drawingml/2006/main" xmlns:r="http://schemas.openxmlformats.org/officeDocument/2006/relationships" name="Simple Light">
+  <a:themeElements>
+    <a:clrScheme name="Simple Light">
+      <a:dk1>
+        <a:srgbClr val="000000"/>
+      </a:dk1>
+      <a:lt1>
+        <a:srgbClr val="FFFFFF"/>
+      </a:lt1>
+      <a:dk2>
+        <a:srgbClr val="595959"/>
+      </a:dk2>
+      <a:lt2>
+        <a:srgbClr val="EEEEEE"/>
+      </a:lt2>
+      <a:accent1>
+        <a:srgbClr val="4285F4"/>
+      </a:accent1>
+      <a:accent2>
+        <a:srgbClr val="212121"/>
+      </a:accent2>
+      <a:accent3>
+        <a:srgbClr val="78909C"/>
+      </a:accent3>
+      <a:accent4>
+        <a:srgbClr val="FFAB40"/>
+      </a:accent4>
+      <a:accent5>
+        <a:srgbClr val="0097A7"/>
+      </a:accent5>
+      <a:accent6>
+        <a:srgbClr val="EEFF41"/>
+      </a:accent6>
+      <a:hlink>
+        <a:srgbClr val="0097A7"/>
+      </a:hlink>
+      <a:folHlink>
+        <a:srgbClr val="0097A7"/>
+      </a:folHlink>
+    </a:clrScheme>
+    <a:fontScheme name="Office">
+      <a:majorFont>
+        <a:latin typeface="Arial"/>
+        <a:ea typeface=""/>
+        <a:cs typeface=""/>
+        <a:font script="Jpan" typeface="ＭＳ Ｐゴシック"/>
+        <a:font script="Hang" typeface="맑은 고딕"/>
+        <a:font script="Hans" typeface="宋体"/>
+        <a:font script="Hant" typeface="新細明體"/>
+        <a:font script="Arab" typeface="Times New Roman"/>
+        <a:font script="Hebr" typeface="Times New Roman"/>
+        <a:font script="Thai" typeface="Angsana New"/>
+        <a:font script="Ethi" typeface="Nyala"/>
+        <a:font script="Beng" typeface="Vrinda"/>
+        <a:font script="Gujr" typeface="Shruti"/>
+        <a:font script="Khmr" typeface="MoolBoran"/>
+        <a:font script="Knda" typeface="Tunga"/>
+        <a:font script="Guru" typeface="Raavi"/>
+        <a:font script="Cans" typeface="Euphemia"/>
+        <a:font script="Cher" typeface="Plantagenet Cherokee"/>
+        <a:font script="Yiii" typeface="Microsoft Yi Baiti"/>
+        <a:font script="Tibt" typeface="Microsoft Himalaya"/>
+        <a:font script="Thaa" typeface="MV Boli"/>
+        <a:font script="Deva" typeface="Mangal"/>
+        <a:font script="Telu" typeface="Gautami"/>
+        <a:font script="Taml" typeface="Latha"/>
+        <a:font script="Syrc" typeface="Estrangelo Edessa"/>
+        <a:font script="Orya" typeface="Kalinga"/>
+        <a:font script="Mlym" typeface="Kartika"/>
+        <a:font script="Laoo" typeface="DokChampa"/>
+        <a:font script="Sinh" typeface="Iskoola Pota"/>
+        <a:font script="Mong" typeface="Mongolian Baiti"/>
+        <a:font script="Viet" typeface="Times New Roman"/>
+        <a:font script="Uigh" typeface="Microsoft Uighur"/>
+        <a:font script="Geor" typeface="Sylfaen"/>
+      </a:majorFont>
+      <a:minorFont>
+        <a:latin typeface="Arial"/>
+        <a:ea typeface=""/>
+        <a:cs typeface=""/>
+        <a:font script="Jpan" typeface="ＭＳ Ｐゴシック"/>
+        <a:font script="Hang" typeface="맑은 고딕"/>
+        <a:font script="Hans" typeface="宋体"/>
+        <a:font script="Hant" typeface="新細明體"/>
+        <a:font script="Arab" typeface="Arial"/>
+        <a:font script="Hebr" typeface="Arial"/>
+        <a:font script="Thai" typeface="Cordia New"/>
+        <a:font script="Ethi" typeface="Nyala"/>
+        <a:font script="Beng" typeface="Vrinda"/>
+        <a:font script="Gujr" typeface="Shruti"/>
+        <a:font script="Khmr" typeface="DaunPenh"/>
+        <a:font script="Knda" typeface="Tunga"/>
+        <a:font script="Guru" typeface="Raavi"/>
+        <a:font script="Cans" typeface="Euphemia"/>
+        <a:font script="Cher" typeface="Plantagenet Cherokee"/>
+        <a:font script="Yiii" typeface="Microsoft Yi Baiti"/>
+        <a:font script="Tibt" typeface="Microsoft Himalaya"/>
+        <a:font script="Thaa" typeface="MV Boli"/>
+        <a:font script="Deva" typeface="Mangal"/>
+        <a:font script="Telu" typeface="Gautami"/>
+        <a:font script="Taml" typeface="Latha"/>
+        <a:font script="Syrc" typeface="Estrangelo Edessa"/>
+        <a:font script="Orya" typeface="Kalinga"/>
+        <a:font script="Mlym" typeface="Kartika"/>
+        <a:font script="Laoo" typeface="DokChampa"/>
+        <a:font script="Sinh" typeface="Iskoola Pota"/>
+        <a:font script="Mong" typeface="Mongolian Baiti"/>
+        <a:font script="Viet" typeface="Arial"/>
+        <a:font script="Uigh" typeface="Microsoft Uighur"/>
+        <a:font script="Geor" typeface="Sylfaen"/>
+      </a:minorFont>
+    </a:fontScheme>
+    <a:fmtScheme name="Office">
+      <a:fillStyleLst>
+        <a:solidFill>
+          <a:schemeClr val="phClr"/>
+        </a:solidFill>
+        <a:gradFill rotWithShape="1">
+          <a:gsLst>
+            <a:gs pos="0">
+              <a:schemeClr val="phClr">
+                <a:tint val="50000"/>
+                <a:satMod val="300000"/>
+              </a:schemeClr>
+            </a:gs>
+            <a:gs pos="35000">
+              <a:schemeClr val="phClr">
+                <a:tint val="37000"/>
+                <a:satMod val="300000"/>
+              </a:schemeClr>
+            </a:gs>
+            <a:gs pos="100000">
+              <a:schemeClr val="phClr">
+                <a:tint val="15000"/>
+                <a:satMod val="350000"/>
+              </a:schemeClr>
+            </a:gs>
+          </a:gsLst>
+          <a:lin ang="16200000" scaled="1"/>
+        </a:gradFill>
+        <a:gradFill rotWithShape="1">
+          <a:gsLst>
+            <a:gs pos="0">
+              <a:schemeClr val="phClr">
+                <a:tint val="100000"/>
+                <a:shade val="100000"/>
+                <a:satMod val="130000"/>
+              </a:schemeClr>
+            </a:gs>
+            <a:gs pos="100000">
+              <a:schemeClr val="phClr">
+                <a:tint val="50000"/>
+                <a:shade val="100000"/>
+                <a:satMod val="350000"/>
+              </a:schemeClr>
+            </a:gs>
+          </a:gsLst>
+          <a:lin ang="16200000" scaled="0"/>
+        </a:gradFill>
+      </a:fillStyleLst>
+      <a:lnStyleLst>
+        <a:ln w="9525" cap="flat" cmpd="sng" algn="ctr">
+          <a:solidFill>
+            <a:schemeClr val="phClr">
+              <a:shade val="95000"/>
+              <a:satMod val="105000"/>
+            </a:schemeClr>
+          </a:solidFill>
+          <a:prstDash val="solid"/>
+        </a:ln>
+        <a:ln w="25400" cap="flat" cmpd="sng" algn="ctr">
+          <a:solidFill>
+            <a:schemeClr val="phClr"/>
+          </a:solidFill>
+          <a:prstDash val="solid"/>
+        </a:ln>
+        <a:ln w="38100" cap="flat" cmpd="sng" algn="ctr">
+          <a:solidFill>
+            <a:schemeClr val="phClr"/>
+          </a:solidFill>
+          <a:prstDash val="solid"/>
+        </a:ln>
+      </a:lnStyleLst>
+      <a:effectStyleLst>
+        <a:effectStyle>
+          <a:effectLst>
+            <a:outerShdw blurRad="40000" dist="20000" dir="5400000" rotWithShape="0">
+              <a:srgbClr val="000000">
+                <a:alpha val="38000"/>
+              </a:srgbClr>
+            </a:outerShdw>
+          </a:effectLst>
+        </a:effectStyle>
+        <a:effectStyle>
+          <a:effectLst>
+            <a:outerShdw blurRad="40000" dist="23000" dir="5400000" rotWithShape="0">
+              <a:srgbClr val="000000">
+                <a:alpha val="35000"/>
+              </a:srgbClr>
+            </a:outerShdw>
+          </a:effectLst>
+        </a:effectStyle>
+        <a:effectStyle>
+          <a:effectLst>
+            <a:outerShdw blurRad="40000" dist="23000" dir="5400000" rotWithShape="0">
+              <a:srgbClr val="000000">
+                <a:alpha val="35000"/>
+              </a:srgbClr>
+            </a:outerShdw>
+          </a:effectLst>
+          <a:scene3d>
+            <a:camera prst="orthographicFront">
+              <a:rot lat="0" lon="0" rev="0"/>
+            </a:camera>
+            <a:lightRig rig="threePt" dir="t">
+              <a:rot lat="0" lon="0" rev="1200000"/>
+            </a:lightRig>
+          </a:scene3d>
+          <a:sp3d>
+            <a:bevelT w="63500" h="25400"/>
+          </a:sp3d>
+        </a:effectStyle>
+      </a:effectStyleLst>
+      <a:bgFillStyleLst>
+        <a:solidFill>
+          <a:schemeClr val="phClr"/>
+        </a:solidFill>
+        <a:gradFill rotWithShape="1">
+          <a:gsLst>
+            <a:gs pos="0">
+              <a:schemeClr val="phClr">
+                <a:tint val="40000"/>
+                <a:satMod val="350000"/>
+              </a:schemeClr>
+            </a:gs>
+            <a:gs pos="40000">
+              <a:schemeClr val="phClr">
+                <a:tint val="45000"/>
+                <a:shade val="99000"/>
+                <a:satMod val="350000"/>
+              </a:schemeClr>
+            </a:gs>
+            <a:gs pos="100000">
+              <a:schemeClr val="phClr">
+                <a:shade val="20000"/>
+                <a:satMod val="255000"/>
+              </a:schemeClr>
+            </a:gs>
+          </a:gsLst>
+          <a:path path="circle">
+            <a:fillToRect l="50000" t="-80000" r="50000" b="180000"/>
+          </a:path>
+        </a:gradFill>
+        <a:gradFill rotWithShape="1">
+          <a:gsLst>
+            <a:gs pos="0">
+              <a:schemeClr val="phClr">
+                <a:tint val="80000"/>
+                <a:satMod val="300000"/>
+              </a:schemeClr>
+            </a:gs>
+            <a:gs pos="100000">
+              <a:schemeClr val="phClr">
+                <a:shade val="30000"/>
+                <a:satMod val="200000"/>
+              </a:schemeClr>
+            </a:gs>
+          </a:gsLst>
+          <a:path path="circle">
+            <a:fillToRect l="50000" t="50000" r="50000" b="50000"/>
+          </a:path>
+        </a:gradFill>
+      </a:bgFillStyleLst>
+    </a:fmtScheme>
+  </a:themeElements>
+</a:theme>
+</file>
+
+<file path=ppt/theme/theme3.xml><?xml version="1.0" encoding="utf-8"?>
 <a:theme xmlns:a="http://schemas.openxmlformats.org/drawingml/2006/main" xmlns:r="http://schemas.openxmlformats.org/officeDocument/2006/relationships">
   <a:themeElements>
     <a:clrScheme name="Default">
@@ -22875,283 +26344,4 @@
     </a:fmtScheme>
   </a:themeElements>
 </a:theme>
-</file>
-
-<file path=ppt/theme/theme3.xml><?xml version="1.0" encoding="utf-8"?>
-<a:theme xmlns:a="http://schemas.openxmlformats.org/drawingml/2006/main" xmlns:r="http://schemas.openxmlformats.org/officeDocument/2006/relationships" name="Simple Light">
-  <a:themeElements>
-    <a:clrScheme name="Simple Light">
-      <a:dk1>
-        <a:srgbClr val="000000"/>
-      </a:dk1>
-      <a:lt1>
-        <a:srgbClr val="FFFFFF"/>
-      </a:lt1>
-      <a:dk2>
-        <a:srgbClr val="595959"/>
-      </a:dk2>
-      <a:lt2>
-        <a:srgbClr val="EEEEEE"/>
-      </a:lt2>
-      <a:accent1>
-        <a:srgbClr val="4285F4"/>
-      </a:accent1>
-      <a:accent2>
-        <a:srgbClr val="212121"/>
-      </a:accent2>
-      <a:accent3>
-        <a:srgbClr val="78909C"/>
-      </a:accent3>
-      <a:accent4>
-        <a:srgbClr val="FFAB40"/>
-      </a:accent4>
-      <a:accent5>
-        <a:srgbClr val="0097A7"/>
-      </a:accent5>
-      <a:accent6>
-        <a:srgbClr val="EEFF41"/>
-      </a:accent6>
-      <a:hlink>
-        <a:srgbClr val="0097A7"/>
-      </a:hlink>
-      <a:folHlink>
-        <a:srgbClr val="0097A7"/>
-      </a:folHlink>
-    </a:clrScheme>
-    <a:fontScheme name="Office">
-      <a:majorFont>
-        <a:latin typeface="Arial"/>
-        <a:ea typeface=""/>
-        <a:cs typeface=""/>
-        <a:font script="Jpan" typeface="ＭＳ Ｐゴシック"/>
-        <a:font script="Hang" typeface="맑은 고딕"/>
-        <a:font script="Hans" typeface="宋体"/>
-        <a:font script="Hant" typeface="新細明體"/>
-        <a:font script="Arab" typeface="Times New Roman"/>
-        <a:font script="Hebr" typeface="Times New Roman"/>
-        <a:font script="Thai" typeface="Angsana New"/>
-        <a:font script="Ethi" typeface="Nyala"/>
-        <a:font script="Beng" typeface="Vrinda"/>
-        <a:font script="Gujr" typeface="Shruti"/>
-        <a:font script="Khmr" typeface="MoolBoran"/>
-        <a:font script="Knda" typeface="Tunga"/>
-        <a:font script="Guru" typeface="Raavi"/>
-        <a:font script="Cans" typeface="Euphemia"/>
-        <a:font script="Cher" typeface="Plantagenet Cherokee"/>
-        <a:font script="Yiii" typeface="Microsoft Yi Baiti"/>
-        <a:font script="Tibt" typeface="Microsoft Himalaya"/>
-        <a:font script="Thaa" typeface="MV Boli"/>
-        <a:font script="Deva" typeface="Mangal"/>
-        <a:font script="Telu" typeface="Gautami"/>
-        <a:font script="Taml" typeface="Latha"/>
-        <a:font script="Syrc" typeface="Estrangelo Edessa"/>
-        <a:font script="Orya" typeface="Kalinga"/>
-        <a:font script="Mlym" typeface="Kartika"/>
-        <a:font script="Laoo" typeface="DokChampa"/>
-        <a:font script="Sinh" typeface="Iskoola Pota"/>
-        <a:font script="Mong" typeface="Mongolian Baiti"/>
-        <a:font script="Viet" typeface="Times New Roman"/>
-        <a:font script="Uigh" typeface="Microsoft Uighur"/>
-        <a:font script="Geor" typeface="Sylfaen"/>
-      </a:majorFont>
-      <a:minorFont>
-        <a:latin typeface="Arial"/>
-        <a:ea typeface=""/>
-        <a:cs typeface=""/>
-        <a:font script="Jpan" typeface="ＭＳ Ｐゴシック"/>
-        <a:font script="Hang" typeface="맑은 고딕"/>
-        <a:font script="Hans" typeface="宋体"/>
-        <a:font script="Hant" typeface="新細明體"/>
-        <a:font script="Arab" typeface="Arial"/>
-        <a:font script="Hebr" typeface="Arial"/>
-        <a:font script="Thai" typeface="Cordia New"/>
-        <a:font script="Ethi" typeface="Nyala"/>
-        <a:font script="Beng" typeface="Vrinda"/>
-        <a:font script="Gujr" typeface="Shruti"/>
-        <a:font script="Khmr" typeface="DaunPenh"/>
-        <a:font script="Knda" typeface="Tunga"/>
-        <a:font script="Guru" typeface="Raavi"/>
-        <a:font script="Cans" typeface="Euphemia"/>
-        <a:font script="Cher" typeface="Plantagenet Cherokee"/>
-        <a:font script="Yiii" typeface="Microsoft Yi Baiti"/>
-        <a:font script="Tibt" typeface="Microsoft Himalaya"/>
-        <a:font script="Thaa" typeface="MV Boli"/>
-        <a:font script="Deva" typeface="Mangal"/>
-        <a:font script="Telu" typeface="Gautami"/>
-        <a:font script="Taml" typeface="Latha"/>
-        <a:font script="Syrc" typeface="Estrangelo Edessa"/>
-        <a:font script="Orya" typeface="Kalinga"/>
-        <a:font script="Mlym" typeface="Kartika"/>
-        <a:font script="Laoo" typeface="DokChampa"/>
-        <a:font script="Sinh" typeface="Iskoola Pota"/>
-        <a:font script="Mong" typeface="Mongolian Baiti"/>
-        <a:font script="Viet" typeface="Arial"/>
-        <a:font script="Uigh" typeface="Microsoft Uighur"/>
-        <a:font script="Geor" typeface="Sylfaen"/>
-      </a:minorFont>
-    </a:fontScheme>
-    <a:fmtScheme name="Office">
-      <a:fillStyleLst>
-        <a:solidFill>
-          <a:schemeClr val="phClr"/>
-        </a:solidFill>
-        <a:gradFill rotWithShape="1">
-          <a:gsLst>
-            <a:gs pos="0">
-              <a:schemeClr val="phClr">
-                <a:tint val="50000"/>
-                <a:satMod val="300000"/>
-              </a:schemeClr>
-            </a:gs>
-            <a:gs pos="35000">
-              <a:schemeClr val="phClr">
-                <a:tint val="37000"/>
-                <a:satMod val="300000"/>
-              </a:schemeClr>
-            </a:gs>
-            <a:gs pos="100000">
-              <a:schemeClr val="phClr">
-                <a:tint val="15000"/>
-                <a:satMod val="350000"/>
-              </a:schemeClr>
-            </a:gs>
-          </a:gsLst>
-          <a:lin ang="16200000" scaled="1"/>
-        </a:gradFill>
-        <a:gradFill rotWithShape="1">
-          <a:gsLst>
-            <a:gs pos="0">
-              <a:schemeClr val="phClr">
-                <a:tint val="100000"/>
-                <a:shade val="100000"/>
-                <a:satMod val="130000"/>
-              </a:schemeClr>
-            </a:gs>
-            <a:gs pos="100000">
-              <a:schemeClr val="phClr">
-                <a:tint val="50000"/>
-                <a:shade val="100000"/>
-                <a:satMod val="350000"/>
-              </a:schemeClr>
-            </a:gs>
-          </a:gsLst>
-          <a:lin ang="16200000" scaled="0"/>
-        </a:gradFill>
-      </a:fillStyleLst>
-      <a:lnStyleLst>
-        <a:ln w="9525" cap="flat" cmpd="sng" algn="ctr">
-          <a:solidFill>
-            <a:schemeClr val="phClr">
-              <a:shade val="95000"/>
-              <a:satMod val="105000"/>
-            </a:schemeClr>
-          </a:solidFill>
-          <a:prstDash val="solid"/>
-        </a:ln>
-        <a:ln w="25400" cap="flat" cmpd="sng" algn="ctr">
-          <a:solidFill>
-            <a:schemeClr val="phClr"/>
-          </a:solidFill>
-          <a:prstDash val="solid"/>
-        </a:ln>
-        <a:ln w="38100" cap="flat" cmpd="sng" algn="ctr">
-          <a:solidFill>
-            <a:schemeClr val="phClr"/>
-          </a:solidFill>
-          <a:prstDash val="solid"/>
-        </a:ln>
-      </a:lnStyleLst>
-      <a:effectStyleLst>
-        <a:effectStyle>
-          <a:effectLst>
-            <a:outerShdw blurRad="40000" dist="20000" dir="5400000" rotWithShape="0">
-              <a:srgbClr val="000000">
-                <a:alpha val="38000"/>
-              </a:srgbClr>
-            </a:outerShdw>
-          </a:effectLst>
-        </a:effectStyle>
-        <a:effectStyle>
-          <a:effectLst>
-            <a:outerShdw blurRad="40000" dist="23000" dir="5400000" rotWithShape="0">
-              <a:srgbClr val="000000">
-                <a:alpha val="35000"/>
-              </a:srgbClr>
-            </a:outerShdw>
-          </a:effectLst>
-        </a:effectStyle>
-        <a:effectStyle>
-          <a:effectLst>
-            <a:outerShdw blurRad="40000" dist="23000" dir="5400000" rotWithShape="0">
-              <a:srgbClr val="000000">
-                <a:alpha val="35000"/>
-              </a:srgbClr>
-            </a:outerShdw>
-          </a:effectLst>
-          <a:scene3d>
-            <a:camera prst="orthographicFront">
-              <a:rot lat="0" lon="0" rev="0"/>
-            </a:camera>
-            <a:lightRig rig="threePt" dir="t">
-              <a:rot lat="0" lon="0" rev="1200000"/>
-            </a:lightRig>
-          </a:scene3d>
-          <a:sp3d>
-            <a:bevelT w="63500" h="25400"/>
-          </a:sp3d>
-        </a:effectStyle>
-      </a:effectStyleLst>
-      <a:bgFillStyleLst>
-        <a:solidFill>
-          <a:schemeClr val="phClr"/>
-        </a:solidFill>
-        <a:gradFill rotWithShape="1">
-          <a:gsLst>
-            <a:gs pos="0">
-              <a:schemeClr val="phClr">
-                <a:tint val="40000"/>
-                <a:satMod val="350000"/>
-              </a:schemeClr>
-            </a:gs>
-            <a:gs pos="40000">
-              <a:schemeClr val="phClr">
-                <a:tint val="45000"/>
-                <a:shade val="99000"/>
-                <a:satMod val="350000"/>
-              </a:schemeClr>
-            </a:gs>
-            <a:gs pos="100000">
-              <a:schemeClr val="phClr">
-                <a:shade val="20000"/>
-                <a:satMod val="255000"/>
-              </a:schemeClr>
-            </a:gs>
-          </a:gsLst>
-          <a:path path="circle">
-            <a:fillToRect l="50000" t="-80000" r="50000" b="180000"/>
-          </a:path>
-        </a:gradFill>
-        <a:gradFill rotWithShape="1">
-          <a:gsLst>
-            <a:gs pos="0">
-              <a:schemeClr val="phClr">
-                <a:tint val="80000"/>
-                <a:satMod val="300000"/>
-              </a:schemeClr>
-            </a:gs>
-            <a:gs pos="100000">
-              <a:schemeClr val="phClr">
-                <a:shade val="30000"/>
-                <a:satMod val="200000"/>
-              </a:schemeClr>
-            </a:gs>
-          </a:gsLst>
-          <a:path path="circle">
-            <a:fillToRect l="50000" t="50000" r="50000" b="50000"/>
-          </a:path>
-        </a:gradFill>
-      </a:bgFillStyleLst>
-    </a:fmtScheme>
-  </a:themeElements>
-</a:theme>
 </file>
--- a/docs/MIRL LAB Honours Project Bi-Weekly Update.pptx
+++ b/docs/MIRL LAB Honours Project Bi-Weekly Update.pptx
@@ -34,14 +34,25 @@
     <p:sldId id="278" r:id="rId30"/>
     <p:sldId id="279" r:id="rId31"/>
     <p:sldId id="280" r:id="rId32"/>
+    <p:sldId id="281" r:id="rId33"/>
+    <p:sldId id="282" r:id="rId34"/>
+    <p:sldId id="283" r:id="rId35"/>
+    <p:sldId id="284" r:id="rId36"/>
+    <p:sldId id="285" r:id="rId37"/>
+    <p:sldId id="286" r:id="rId38"/>
+    <p:sldId id="287" r:id="rId39"/>
+    <p:sldId id="288" r:id="rId40"/>
+    <p:sldId id="289" r:id="rId41"/>
+    <p:sldId id="290" r:id="rId42"/>
+    <p:sldId id="291" r:id="rId43"/>
   </p:sldIdLst>
   <p:sldSz cy="5143500" cx="9144000"/>
   <p:notesSz cx="6858000" cy="9144000"/>
   <p:embeddedFontLst>
     <p:embeddedFont>
       <p:font typeface="Play"/>
-      <p:regular r:id="rId33"/>
-      <p:bold r:id="rId34"/>
+      <p:regular r:id="rId44"/>
+      <p:bold r:id="rId45"/>
     </p:embeddedFont>
   </p:embeddedFontLst>
   <p:defaultTextStyle>
@@ -2500,6 +2511,402 @@
 </p:notes>
 </file>
 
+<file path=ppt/notesSlides/notesSlide26.xml><?xml version="1.0" encoding="utf-8"?>
+<p:notes xmlns:a="http://schemas.openxmlformats.org/drawingml/2006/main" xmlns:r="http://schemas.openxmlformats.org/officeDocument/2006/relationships" xmlns:mc="http://schemas.openxmlformats.org/markup-compatibility/2006" xmlns:mv="urn:schemas-microsoft-com:mac:vml" xmlns:p="http://schemas.openxmlformats.org/presentationml/2006/main" xmlns:c="http://schemas.openxmlformats.org/drawingml/2006/chart" xmlns:dgm="http://schemas.openxmlformats.org/drawingml/2006/diagram" xmlns:o="urn:schemas-microsoft-com:office:office" xmlns:v="urn:schemas-microsoft-com:vml" xmlns:pvml="urn:schemas-microsoft-com:office:powerpoint" xmlns:com="http://schemas.openxmlformats.org/drawingml/2006/compatibility" xmlns:p14="http://schemas.microsoft.com/office/powerpoint/2010/main" xmlns:p15="http://schemas.microsoft.com/office/powerpoint/2012/main" xmlns:ahyp="http://schemas.microsoft.com/office/drawing/2018/hyperlinkcolor" showMasterPhAnim="0" showMasterSp="0">
+  <p:cSld>
+    <p:spTree>
+      <p:nvGrpSpPr>
+        <p:cNvPr id="279" name="Shape 279"/>
+        <p:cNvGrpSpPr/>
+        <p:nvPr/>
+      </p:nvGrpSpPr>
+      <p:grpSpPr>
+        <a:xfrm>
+          <a:off x="0" y="0"/>
+          <a:ext cx="0" cy="0"/>
+          <a:chOff x="0" y="0"/>
+          <a:chExt cx="0" cy="0"/>
+        </a:xfrm>
+      </p:grpSpPr>
+      <p:sp>
+        <p:nvSpPr>
+          <p:cNvPr id="280" name="Google Shape;280;g39d8d293228_0_5:notes"/>
+          <p:cNvSpPr/>
+          <p:nvPr>
+            <p:ph idx="2" type="sldImg"/>
+          </p:nvPr>
+        </p:nvSpPr>
+        <p:spPr>
+          <a:xfrm>
+            <a:off x="381300" y="685800"/>
+            <a:ext cx="6096000" cy="3429000"/>
+          </a:xfrm>
+          <a:custGeom>
+            <a:rect b="b" l="l" r="r" t="t"/>
+            <a:pathLst>
+              <a:path extrusionOk="0" h="120000" w="120000">
+                <a:moveTo>
+                  <a:pt x="0" y="0"/>
+                </a:moveTo>
+                <a:lnTo>
+                  <a:pt x="120000" y="0"/>
+                </a:lnTo>
+                <a:lnTo>
+                  <a:pt x="120000" y="120000"/>
+                </a:lnTo>
+                <a:lnTo>
+                  <a:pt x="0" y="120000"/>
+                </a:lnTo>
+                <a:close/>
+              </a:path>
+            </a:pathLst>
+          </a:custGeom>
+        </p:spPr>
+      </p:sp>
+      <p:sp>
+        <p:nvSpPr>
+          <p:cNvPr id="281" name="Google Shape;281;g39d8d293228_0_5:notes"/>
+          <p:cNvSpPr txBox="1"/>
+          <p:nvPr>
+            <p:ph idx="1" type="body"/>
+          </p:nvPr>
+        </p:nvSpPr>
+        <p:spPr>
+          <a:xfrm>
+            <a:off x="685800" y="4343400"/>
+            <a:ext cx="5486400" cy="4114800"/>
+          </a:xfrm>
+          <a:prstGeom prst="rect">
+            <a:avLst/>
+          </a:prstGeom>
+        </p:spPr>
+        <p:txBody>
+          <a:bodyPr anchorCtr="0" anchor="t" bIns="91425" lIns="91425" spcFirstLastPara="1" rIns="91425" wrap="square" tIns="91425">
+            <a:noAutofit/>
+          </a:bodyPr>
+          <a:lstStyle/>
+          <a:p>
+            <a:pPr indent="0" lvl="0" marL="0" rtl="0" algn="l">
+              <a:spcBef>
+                <a:spcPts val="0"/>
+              </a:spcBef>
+              <a:spcAft>
+                <a:spcPts val="0"/>
+              </a:spcAft>
+              <a:buNone/>
+            </a:pPr>
+            <a:r>
+              <a:t/>
+            </a:r>
+            <a:endParaRPr/>
+          </a:p>
+        </p:txBody>
+      </p:sp>
+    </p:spTree>
+  </p:cSld>
+  <p:clrMapOvr>
+    <a:masterClrMapping/>
+  </p:clrMapOvr>
+</p:notes>
+</file>
+
+<file path=ppt/notesSlides/notesSlide27.xml><?xml version="1.0" encoding="utf-8"?>
+<p:notes xmlns:a="http://schemas.openxmlformats.org/drawingml/2006/main" xmlns:r="http://schemas.openxmlformats.org/officeDocument/2006/relationships" xmlns:mc="http://schemas.openxmlformats.org/markup-compatibility/2006" xmlns:mv="urn:schemas-microsoft-com:mac:vml" xmlns:p="http://schemas.openxmlformats.org/presentationml/2006/main" xmlns:c="http://schemas.openxmlformats.org/drawingml/2006/chart" xmlns:dgm="http://schemas.openxmlformats.org/drawingml/2006/diagram" xmlns:o="urn:schemas-microsoft-com:office:office" xmlns:v="urn:schemas-microsoft-com:vml" xmlns:pvml="urn:schemas-microsoft-com:office:powerpoint" xmlns:com="http://schemas.openxmlformats.org/drawingml/2006/compatibility" xmlns:p14="http://schemas.microsoft.com/office/powerpoint/2010/main" xmlns:p15="http://schemas.microsoft.com/office/powerpoint/2012/main" xmlns:ahyp="http://schemas.microsoft.com/office/drawing/2018/hyperlinkcolor" showMasterPhAnim="0" showMasterSp="0">
+  <p:cSld>
+    <p:spTree>
+      <p:nvGrpSpPr>
+        <p:cNvPr id="284" name="Shape 284"/>
+        <p:cNvGrpSpPr/>
+        <p:nvPr/>
+      </p:nvGrpSpPr>
+      <p:grpSpPr>
+        <a:xfrm>
+          <a:off x="0" y="0"/>
+          <a:ext cx="0" cy="0"/>
+          <a:chOff x="0" y="0"/>
+          <a:chExt cx="0" cy="0"/>
+        </a:xfrm>
+      </p:grpSpPr>
+      <p:sp>
+        <p:nvSpPr>
+          <p:cNvPr id="285" name="Google Shape;285;g39d8d293228_0_9:notes"/>
+          <p:cNvSpPr txBox="1"/>
+          <p:nvPr>
+            <p:ph idx="1" type="body"/>
+          </p:nvPr>
+        </p:nvSpPr>
+        <p:spPr>
+          <a:xfrm>
+            <a:off x="685800" y="4343400"/>
+            <a:ext cx="5486400" cy="4114800"/>
+          </a:xfrm>
+          <a:prstGeom prst="rect">
+            <a:avLst/>
+          </a:prstGeom>
+        </p:spPr>
+        <p:txBody>
+          <a:bodyPr anchorCtr="0" anchor="t" bIns="91425" lIns="91425" spcFirstLastPara="1" rIns="91425" wrap="square" tIns="91425">
+            <a:noAutofit/>
+          </a:bodyPr>
+          <a:lstStyle/>
+          <a:p>
+            <a:pPr indent="0" lvl="0" marL="0" rtl="0" algn="l">
+              <a:spcBef>
+                <a:spcPts val="0"/>
+              </a:spcBef>
+              <a:spcAft>
+                <a:spcPts val="0"/>
+              </a:spcAft>
+              <a:buNone/>
+            </a:pPr>
+            <a:r>
+              <a:t/>
+            </a:r>
+            <a:endParaRPr/>
+          </a:p>
+        </p:txBody>
+      </p:sp>
+      <p:sp>
+        <p:nvSpPr>
+          <p:cNvPr id="286" name="Google Shape;286;g39d8d293228_0_9:notes"/>
+          <p:cNvSpPr/>
+          <p:nvPr>
+            <p:ph idx="2" type="sldImg"/>
+          </p:nvPr>
+        </p:nvSpPr>
+        <p:spPr>
+          <a:xfrm>
+            <a:off x="1143225" y="685800"/>
+            <a:ext cx="4572300" cy="3429000"/>
+          </a:xfrm>
+          <a:custGeom>
+            <a:rect b="b" l="l" r="r" t="t"/>
+            <a:pathLst>
+              <a:path extrusionOk="0" h="120000" w="120000">
+                <a:moveTo>
+                  <a:pt x="0" y="0"/>
+                </a:moveTo>
+                <a:lnTo>
+                  <a:pt x="120000" y="0"/>
+                </a:lnTo>
+                <a:lnTo>
+                  <a:pt x="120000" y="120000"/>
+                </a:lnTo>
+                <a:lnTo>
+                  <a:pt x="0" y="120000"/>
+                </a:lnTo>
+                <a:close/>
+              </a:path>
+            </a:pathLst>
+          </a:custGeom>
+        </p:spPr>
+      </p:sp>
+    </p:spTree>
+  </p:cSld>
+  <p:clrMapOvr>
+    <a:masterClrMapping/>
+  </p:clrMapOvr>
+</p:notes>
+</file>
+
+<file path=ppt/notesSlides/notesSlide28.xml><?xml version="1.0" encoding="utf-8"?>
+<p:notes xmlns:a="http://schemas.openxmlformats.org/drawingml/2006/main" xmlns:r="http://schemas.openxmlformats.org/officeDocument/2006/relationships" xmlns:mc="http://schemas.openxmlformats.org/markup-compatibility/2006" xmlns:mv="urn:schemas-microsoft-com:mac:vml" xmlns:p="http://schemas.openxmlformats.org/presentationml/2006/main" xmlns:c="http://schemas.openxmlformats.org/drawingml/2006/chart" xmlns:dgm="http://schemas.openxmlformats.org/drawingml/2006/diagram" xmlns:o="urn:schemas-microsoft-com:office:office" xmlns:v="urn:schemas-microsoft-com:vml" xmlns:pvml="urn:schemas-microsoft-com:office:powerpoint" xmlns:com="http://schemas.openxmlformats.org/drawingml/2006/compatibility" xmlns:p14="http://schemas.microsoft.com/office/powerpoint/2010/main" xmlns:p15="http://schemas.microsoft.com/office/powerpoint/2012/main" xmlns:ahyp="http://schemas.microsoft.com/office/drawing/2018/hyperlinkcolor" showMasterPhAnim="0" showMasterSp="0">
+  <p:cSld>
+    <p:spTree>
+      <p:nvGrpSpPr>
+        <p:cNvPr id="290" name="Shape 290"/>
+        <p:cNvGrpSpPr/>
+        <p:nvPr/>
+      </p:nvGrpSpPr>
+      <p:grpSpPr>
+        <a:xfrm>
+          <a:off x="0" y="0"/>
+          <a:ext cx="0" cy="0"/>
+          <a:chOff x="0" y="0"/>
+          <a:chExt cx="0" cy="0"/>
+        </a:xfrm>
+      </p:grpSpPr>
+      <p:sp>
+        <p:nvSpPr>
+          <p:cNvPr id="291" name="Google Shape;291;g39d8d293228_0_14:notes"/>
+          <p:cNvSpPr txBox="1"/>
+          <p:nvPr>
+            <p:ph idx="1" type="body"/>
+          </p:nvPr>
+        </p:nvSpPr>
+        <p:spPr>
+          <a:xfrm>
+            <a:off x="685800" y="4343400"/>
+            <a:ext cx="5486400" cy="4114800"/>
+          </a:xfrm>
+          <a:prstGeom prst="rect">
+            <a:avLst/>
+          </a:prstGeom>
+        </p:spPr>
+        <p:txBody>
+          <a:bodyPr anchorCtr="0" anchor="t" bIns="91425" lIns="91425" spcFirstLastPara="1" rIns="91425" wrap="square" tIns="91425">
+            <a:noAutofit/>
+          </a:bodyPr>
+          <a:lstStyle/>
+          <a:p>
+            <a:pPr indent="0" lvl="0" marL="0" rtl="0" algn="l">
+              <a:spcBef>
+                <a:spcPts val="0"/>
+              </a:spcBef>
+              <a:spcAft>
+                <a:spcPts val="0"/>
+              </a:spcAft>
+              <a:buNone/>
+            </a:pPr>
+            <a:r>
+              <a:t/>
+            </a:r>
+            <a:endParaRPr/>
+          </a:p>
+        </p:txBody>
+      </p:sp>
+      <p:sp>
+        <p:nvSpPr>
+          <p:cNvPr id="292" name="Google Shape;292;g39d8d293228_0_14:notes"/>
+          <p:cNvSpPr/>
+          <p:nvPr>
+            <p:ph idx="2" type="sldImg"/>
+          </p:nvPr>
+        </p:nvSpPr>
+        <p:spPr>
+          <a:xfrm>
+            <a:off x="1143225" y="685800"/>
+            <a:ext cx="4572300" cy="3429000"/>
+          </a:xfrm>
+          <a:custGeom>
+            <a:rect b="b" l="l" r="r" t="t"/>
+            <a:pathLst>
+              <a:path extrusionOk="0" h="120000" w="120000">
+                <a:moveTo>
+                  <a:pt x="0" y="0"/>
+                </a:moveTo>
+                <a:lnTo>
+                  <a:pt x="120000" y="0"/>
+                </a:lnTo>
+                <a:lnTo>
+                  <a:pt x="120000" y="120000"/>
+                </a:lnTo>
+                <a:lnTo>
+                  <a:pt x="0" y="120000"/>
+                </a:lnTo>
+                <a:close/>
+              </a:path>
+            </a:pathLst>
+          </a:custGeom>
+        </p:spPr>
+      </p:sp>
+    </p:spTree>
+  </p:cSld>
+  <p:clrMapOvr>
+    <a:masterClrMapping/>
+  </p:clrMapOvr>
+</p:notes>
+</file>
+
+<file path=ppt/notesSlides/notesSlide29.xml><?xml version="1.0" encoding="utf-8"?>
+<p:notes xmlns:a="http://schemas.openxmlformats.org/drawingml/2006/main" xmlns:r="http://schemas.openxmlformats.org/officeDocument/2006/relationships" xmlns:mc="http://schemas.openxmlformats.org/markup-compatibility/2006" xmlns:mv="urn:schemas-microsoft-com:mac:vml" xmlns:p="http://schemas.openxmlformats.org/presentationml/2006/main" xmlns:c="http://schemas.openxmlformats.org/drawingml/2006/chart" xmlns:dgm="http://schemas.openxmlformats.org/drawingml/2006/diagram" xmlns:o="urn:schemas-microsoft-com:office:office" xmlns:v="urn:schemas-microsoft-com:vml" xmlns:pvml="urn:schemas-microsoft-com:office:powerpoint" xmlns:com="http://schemas.openxmlformats.org/drawingml/2006/compatibility" xmlns:p14="http://schemas.microsoft.com/office/powerpoint/2010/main" xmlns:p15="http://schemas.microsoft.com/office/powerpoint/2012/main" xmlns:ahyp="http://schemas.microsoft.com/office/drawing/2018/hyperlinkcolor" showMasterPhAnim="0" showMasterSp="0">
+  <p:cSld>
+    <p:spTree>
+      <p:nvGrpSpPr>
+        <p:cNvPr id="296" name="Shape 296"/>
+        <p:cNvGrpSpPr/>
+        <p:nvPr/>
+      </p:nvGrpSpPr>
+      <p:grpSpPr>
+        <a:xfrm>
+          <a:off x="0" y="0"/>
+          <a:ext cx="0" cy="0"/>
+          <a:chOff x="0" y="0"/>
+          <a:chExt cx="0" cy="0"/>
+        </a:xfrm>
+      </p:grpSpPr>
+      <p:sp>
+        <p:nvSpPr>
+          <p:cNvPr id="297" name="Google Shape;297;g39d8d293228_0_19:notes"/>
+          <p:cNvSpPr txBox="1"/>
+          <p:nvPr>
+            <p:ph idx="1" type="body"/>
+          </p:nvPr>
+        </p:nvSpPr>
+        <p:spPr>
+          <a:xfrm>
+            <a:off x="685800" y="4343400"/>
+            <a:ext cx="5486400" cy="4114800"/>
+          </a:xfrm>
+          <a:prstGeom prst="rect">
+            <a:avLst/>
+          </a:prstGeom>
+        </p:spPr>
+        <p:txBody>
+          <a:bodyPr anchorCtr="0" anchor="t" bIns="91425" lIns="91425" spcFirstLastPara="1" rIns="91425" wrap="square" tIns="91425">
+            <a:noAutofit/>
+          </a:bodyPr>
+          <a:lstStyle/>
+          <a:p>
+            <a:pPr indent="0" lvl="0" marL="0" rtl="0" algn="l">
+              <a:spcBef>
+                <a:spcPts val="0"/>
+              </a:spcBef>
+              <a:spcAft>
+                <a:spcPts val="0"/>
+              </a:spcAft>
+              <a:buNone/>
+            </a:pPr>
+            <a:r>
+              <a:t/>
+            </a:r>
+            <a:endParaRPr/>
+          </a:p>
+        </p:txBody>
+      </p:sp>
+      <p:sp>
+        <p:nvSpPr>
+          <p:cNvPr id="298" name="Google Shape;298;g39d8d293228_0_19:notes"/>
+          <p:cNvSpPr/>
+          <p:nvPr>
+            <p:ph idx="2" type="sldImg"/>
+          </p:nvPr>
+        </p:nvSpPr>
+        <p:spPr>
+          <a:xfrm>
+            <a:off x="1143225" y="685800"/>
+            <a:ext cx="4572300" cy="3429000"/>
+          </a:xfrm>
+          <a:custGeom>
+            <a:rect b="b" l="l" r="r" t="t"/>
+            <a:pathLst>
+              <a:path extrusionOk="0" h="120000" w="120000">
+                <a:moveTo>
+                  <a:pt x="0" y="0"/>
+                </a:moveTo>
+                <a:lnTo>
+                  <a:pt x="120000" y="0"/>
+                </a:lnTo>
+                <a:lnTo>
+                  <a:pt x="120000" y="120000"/>
+                </a:lnTo>
+                <a:lnTo>
+                  <a:pt x="0" y="120000"/>
+                </a:lnTo>
+                <a:close/>
+              </a:path>
+            </a:pathLst>
+          </a:custGeom>
+        </p:spPr>
+      </p:sp>
+    </p:spTree>
+  </p:cSld>
+  <p:clrMapOvr>
+    <a:masterClrMapping/>
+  </p:clrMapOvr>
+</p:notes>
+</file>
+
 <file path=ppt/notesSlides/notesSlide3.xml><?xml version="1.0" encoding="utf-8"?>
 <p:notes xmlns:a="http://schemas.openxmlformats.org/drawingml/2006/main" xmlns:r="http://schemas.openxmlformats.org/officeDocument/2006/relationships" xmlns:mc="http://schemas.openxmlformats.org/markup-compatibility/2006" xmlns:mv="urn:schemas-microsoft-com:mac:vml" xmlns:p="http://schemas.openxmlformats.org/presentationml/2006/main" xmlns:c="http://schemas.openxmlformats.org/drawingml/2006/chart" xmlns:dgm="http://schemas.openxmlformats.org/drawingml/2006/diagram" xmlns:o="urn:schemas-microsoft-com:office:office" xmlns:v="urn:schemas-microsoft-com:vml" xmlns:pvml="urn:schemas-microsoft-com:office:powerpoint" xmlns:com="http://schemas.openxmlformats.org/drawingml/2006/compatibility" xmlns:p14="http://schemas.microsoft.com/office/powerpoint/2010/main" xmlns:p15="http://schemas.microsoft.com/office/powerpoint/2012/main" xmlns:ahyp="http://schemas.microsoft.com/office/drawing/2018/hyperlinkcolor" showMasterPhAnim="0" showMasterSp="0">
   <p:cSld>
@@ -2568,6 +2975,699 @@
           <a:xfrm>
             <a:off x="1143225" y="685800"/>
             <a:ext cx="4572225" cy="3429000"/>
+          </a:xfrm>
+          <a:custGeom>
+            <a:rect b="b" l="l" r="r" t="t"/>
+            <a:pathLst>
+              <a:path extrusionOk="0" h="120000" w="120000">
+                <a:moveTo>
+                  <a:pt x="0" y="0"/>
+                </a:moveTo>
+                <a:lnTo>
+                  <a:pt x="120000" y="0"/>
+                </a:lnTo>
+                <a:lnTo>
+                  <a:pt x="120000" y="120000"/>
+                </a:lnTo>
+                <a:lnTo>
+                  <a:pt x="0" y="120000"/>
+                </a:lnTo>
+                <a:close/>
+              </a:path>
+            </a:pathLst>
+          </a:custGeom>
+        </p:spPr>
+      </p:sp>
+    </p:spTree>
+  </p:cSld>
+  <p:clrMapOvr>
+    <a:masterClrMapping/>
+  </p:clrMapOvr>
+</p:notes>
+</file>
+
+<file path=ppt/notesSlides/notesSlide30.xml><?xml version="1.0" encoding="utf-8"?>
+<p:notes xmlns:a="http://schemas.openxmlformats.org/drawingml/2006/main" xmlns:r="http://schemas.openxmlformats.org/officeDocument/2006/relationships" xmlns:mc="http://schemas.openxmlformats.org/markup-compatibility/2006" xmlns:mv="urn:schemas-microsoft-com:mac:vml" xmlns:p="http://schemas.openxmlformats.org/presentationml/2006/main" xmlns:c="http://schemas.openxmlformats.org/drawingml/2006/chart" xmlns:dgm="http://schemas.openxmlformats.org/drawingml/2006/diagram" xmlns:o="urn:schemas-microsoft-com:office:office" xmlns:v="urn:schemas-microsoft-com:vml" xmlns:pvml="urn:schemas-microsoft-com:office:powerpoint" xmlns:com="http://schemas.openxmlformats.org/drawingml/2006/compatibility" xmlns:p14="http://schemas.microsoft.com/office/powerpoint/2010/main" xmlns:p15="http://schemas.microsoft.com/office/powerpoint/2012/main" xmlns:ahyp="http://schemas.microsoft.com/office/drawing/2018/hyperlinkcolor" showMasterPhAnim="0" showMasterSp="0">
+  <p:cSld>
+    <p:spTree>
+      <p:nvGrpSpPr>
+        <p:cNvPr id="302" name="Shape 302"/>
+        <p:cNvGrpSpPr/>
+        <p:nvPr/>
+      </p:nvGrpSpPr>
+      <p:grpSpPr>
+        <a:xfrm>
+          <a:off x="0" y="0"/>
+          <a:ext cx="0" cy="0"/>
+          <a:chOff x="0" y="0"/>
+          <a:chExt cx="0" cy="0"/>
+        </a:xfrm>
+      </p:grpSpPr>
+      <p:sp>
+        <p:nvSpPr>
+          <p:cNvPr id="303" name="Google Shape;303;g39d8d293228_0_24:notes"/>
+          <p:cNvSpPr txBox="1"/>
+          <p:nvPr>
+            <p:ph idx="1" type="body"/>
+          </p:nvPr>
+        </p:nvSpPr>
+        <p:spPr>
+          <a:xfrm>
+            <a:off x="685800" y="4343400"/>
+            <a:ext cx="5486400" cy="4114800"/>
+          </a:xfrm>
+          <a:prstGeom prst="rect">
+            <a:avLst/>
+          </a:prstGeom>
+        </p:spPr>
+        <p:txBody>
+          <a:bodyPr anchorCtr="0" anchor="t" bIns="91425" lIns="91425" spcFirstLastPara="1" rIns="91425" wrap="square" tIns="91425">
+            <a:noAutofit/>
+          </a:bodyPr>
+          <a:lstStyle/>
+          <a:p>
+            <a:pPr indent="0" lvl="0" marL="0" rtl="0" algn="l">
+              <a:spcBef>
+                <a:spcPts val="0"/>
+              </a:spcBef>
+              <a:spcAft>
+                <a:spcPts val="0"/>
+              </a:spcAft>
+              <a:buNone/>
+            </a:pPr>
+            <a:r>
+              <a:t/>
+            </a:r>
+            <a:endParaRPr/>
+          </a:p>
+        </p:txBody>
+      </p:sp>
+      <p:sp>
+        <p:nvSpPr>
+          <p:cNvPr id="304" name="Google Shape;304;g39d8d293228_0_24:notes"/>
+          <p:cNvSpPr/>
+          <p:nvPr>
+            <p:ph idx="2" type="sldImg"/>
+          </p:nvPr>
+        </p:nvSpPr>
+        <p:spPr>
+          <a:xfrm>
+            <a:off x="1143225" y="685800"/>
+            <a:ext cx="4572300" cy="3429000"/>
+          </a:xfrm>
+          <a:custGeom>
+            <a:rect b="b" l="l" r="r" t="t"/>
+            <a:pathLst>
+              <a:path extrusionOk="0" h="120000" w="120000">
+                <a:moveTo>
+                  <a:pt x="0" y="0"/>
+                </a:moveTo>
+                <a:lnTo>
+                  <a:pt x="120000" y="0"/>
+                </a:lnTo>
+                <a:lnTo>
+                  <a:pt x="120000" y="120000"/>
+                </a:lnTo>
+                <a:lnTo>
+                  <a:pt x="0" y="120000"/>
+                </a:lnTo>
+                <a:close/>
+              </a:path>
+            </a:pathLst>
+          </a:custGeom>
+        </p:spPr>
+      </p:sp>
+    </p:spTree>
+  </p:cSld>
+  <p:clrMapOvr>
+    <a:masterClrMapping/>
+  </p:clrMapOvr>
+</p:notes>
+</file>
+
+<file path=ppt/notesSlides/notesSlide31.xml><?xml version="1.0" encoding="utf-8"?>
+<p:notes xmlns:a="http://schemas.openxmlformats.org/drawingml/2006/main" xmlns:r="http://schemas.openxmlformats.org/officeDocument/2006/relationships" xmlns:mc="http://schemas.openxmlformats.org/markup-compatibility/2006" xmlns:mv="urn:schemas-microsoft-com:mac:vml" xmlns:p="http://schemas.openxmlformats.org/presentationml/2006/main" xmlns:c="http://schemas.openxmlformats.org/drawingml/2006/chart" xmlns:dgm="http://schemas.openxmlformats.org/drawingml/2006/diagram" xmlns:o="urn:schemas-microsoft-com:office:office" xmlns:v="urn:schemas-microsoft-com:vml" xmlns:pvml="urn:schemas-microsoft-com:office:powerpoint" xmlns:com="http://schemas.openxmlformats.org/drawingml/2006/compatibility" xmlns:p14="http://schemas.microsoft.com/office/powerpoint/2010/main" xmlns:p15="http://schemas.microsoft.com/office/powerpoint/2012/main" xmlns:ahyp="http://schemas.microsoft.com/office/drawing/2018/hyperlinkcolor" showMasterPhAnim="0" showMasterSp="0">
+  <p:cSld>
+    <p:spTree>
+      <p:nvGrpSpPr>
+        <p:cNvPr id="308" name="Shape 308"/>
+        <p:cNvGrpSpPr/>
+        <p:nvPr/>
+      </p:nvGrpSpPr>
+      <p:grpSpPr>
+        <a:xfrm>
+          <a:off x="0" y="0"/>
+          <a:ext cx="0" cy="0"/>
+          <a:chOff x="0" y="0"/>
+          <a:chExt cx="0" cy="0"/>
+        </a:xfrm>
+      </p:grpSpPr>
+      <p:sp>
+        <p:nvSpPr>
+          <p:cNvPr id="309" name="Google Shape;309;g39d8d293228_0_29:notes"/>
+          <p:cNvSpPr txBox="1"/>
+          <p:nvPr>
+            <p:ph idx="1" type="body"/>
+          </p:nvPr>
+        </p:nvSpPr>
+        <p:spPr>
+          <a:xfrm>
+            <a:off x="685800" y="4343400"/>
+            <a:ext cx="5486400" cy="4114800"/>
+          </a:xfrm>
+          <a:prstGeom prst="rect">
+            <a:avLst/>
+          </a:prstGeom>
+        </p:spPr>
+        <p:txBody>
+          <a:bodyPr anchorCtr="0" anchor="t" bIns="91425" lIns="91425" spcFirstLastPara="1" rIns="91425" wrap="square" tIns="91425">
+            <a:noAutofit/>
+          </a:bodyPr>
+          <a:lstStyle/>
+          <a:p>
+            <a:pPr indent="0" lvl="0" marL="0" rtl="0" algn="l">
+              <a:spcBef>
+                <a:spcPts val="0"/>
+              </a:spcBef>
+              <a:spcAft>
+                <a:spcPts val="0"/>
+              </a:spcAft>
+              <a:buNone/>
+            </a:pPr>
+            <a:r>
+              <a:t/>
+            </a:r>
+            <a:endParaRPr/>
+          </a:p>
+        </p:txBody>
+      </p:sp>
+      <p:sp>
+        <p:nvSpPr>
+          <p:cNvPr id="310" name="Google Shape;310;g39d8d293228_0_29:notes"/>
+          <p:cNvSpPr/>
+          <p:nvPr>
+            <p:ph idx="2" type="sldImg"/>
+          </p:nvPr>
+        </p:nvSpPr>
+        <p:spPr>
+          <a:xfrm>
+            <a:off x="1143225" y="685800"/>
+            <a:ext cx="4572300" cy="3429000"/>
+          </a:xfrm>
+          <a:custGeom>
+            <a:rect b="b" l="l" r="r" t="t"/>
+            <a:pathLst>
+              <a:path extrusionOk="0" h="120000" w="120000">
+                <a:moveTo>
+                  <a:pt x="0" y="0"/>
+                </a:moveTo>
+                <a:lnTo>
+                  <a:pt x="120000" y="0"/>
+                </a:lnTo>
+                <a:lnTo>
+                  <a:pt x="120000" y="120000"/>
+                </a:lnTo>
+                <a:lnTo>
+                  <a:pt x="0" y="120000"/>
+                </a:lnTo>
+                <a:close/>
+              </a:path>
+            </a:pathLst>
+          </a:custGeom>
+        </p:spPr>
+      </p:sp>
+    </p:spTree>
+  </p:cSld>
+  <p:clrMapOvr>
+    <a:masterClrMapping/>
+  </p:clrMapOvr>
+</p:notes>
+</file>
+
+<file path=ppt/notesSlides/notesSlide32.xml><?xml version="1.0" encoding="utf-8"?>
+<p:notes xmlns:a="http://schemas.openxmlformats.org/drawingml/2006/main" xmlns:r="http://schemas.openxmlformats.org/officeDocument/2006/relationships" xmlns:mc="http://schemas.openxmlformats.org/markup-compatibility/2006" xmlns:mv="urn:schemas-microsoft-com:mac:vml" xmlns:p="http://schemas.openxmlformats.org/presentationml/2006/main" xmlns:c="http://schemas.openxmlformats.org/drawingml/2006/chart" xmlns:dgm="http://schemas.openxmlformats.org/drawingml/2006/diagram" xmlns:o="urn:schemas-microsoft-com:office:office" xmlns:v="urn:schemas-microsoft-com:vml" xmlns:pvml="urn:schemas-microsoft-com:office:powerpoint" xmlns:com="http://schemas.openxmlformats.org/drawingml/2006/compatibility" xmlns:p14="http://schemas.microsoft.com/office/powerpoint/2010/main" xmlns:p15="http://schemas.microsoft.com/office/powerpoint/2012/main" xmlns:ahyp="http://schemas.microsoft.com/office/drawing/2018/hyperlinkcolor" showMasterPhAnim="0" showMasterSp="0">
+  <p:cSld>
+    <p:spTree>
+      <p:nvGrpSpPr>
+        <p:cNvPr id="314" name="Shape 314"/>
+        <p:cNvGrpSpPr/>
+        <p:nvPr/>
+      </p:nvGrpSpPr>
+      <p:grpSpPr>
+        <a:xfrm>
+          <a:off x="0" y="0"/>
+          <a:ext cx="0" cy="0"/>
+          <a:chOff x="0" y="0"/>
+          <a:chExt cx="0" cy="0"/>
+        </a:xfrm>
+      </p:grpSpPr>
+      <p:sp>
+        <p:nvSpPr>
+          <p:cNvPr id="315" name="Google Shape;315;g39d8d293228_1_0:notes"/>
+          <p:cNvSpPr txBox="1"/>
+          <p:nvPr>
+            <p:ph idx="1" type="body"/>
+          </p:nvPr>
+        </p:nvSpPr>
+        <p:spPr>
+          <a:xfrm>
+            <a:off x="685800" y="4343400"/>
+            <a:ext cx="5486400" cy="4114800"/>
+          </a:xfrm>
+          <a:prstGeom prst="rect">
+            <a:avLst/>
+          </a:prstGeom>
+        </p:spPr>
+        <p:txBody>
+          <a:bodyPr anchorCtr="0" anchor="t" bIns="91425" lIns="91425" spcFirstLastPara="1" rIns="91425" wrap="square" tIns="91425">
+            <a:noAutofit/>
+          </a:bodyPr>
+          <a:lstStyle/>
+          <a:p>
+            <a:pPr indent="0" lvl="0" marL="0" rtl="0" algn="l">
+              <a:spcBef>
+                <a:spcPts val="0"/>
+              </a:spcBef>
+              <a:spcAft>
+                <a:spcPts val="0"/>
+              </a:spcAft>
+              <a:buNone/>
+            </a:pPr>
+            <a:r>
+              <a:t/>
+            </a:r>
+            <a:endParaRPr/>
+          </a:p>
+        </p:txBody>
+      </p:sp>
+      <p:sp>
+        <p:nvSpPr>
+          <p:cNvPr id="316" name="Google Shape;316;g39d8d293228_1_0:notes"/>
+          <p:cNvSpPr/>
+          <p:nvPr>
+            <p:ph idx="2" type="sldImg"/>
+          </p:nvPr>
+        </p:nvSpPr>
+        <p:spPr>
+          <a:xfrm>
+            <a:off x="1143225" y="685800"/>
+            <a:ext cx="4572300" cy="3429000"/>
+          </a:xfrm>
+          <a:custGeom>
+            <a:rect b="b" l="l" r="r" t="t"/>
+            <a:pathLst>
+              <a:path extrusionOk="0" h="120000" w="120000">
+                <a:moveTo>
+                  <a:pt x="0" y="0"/>
+                </a:moveTo>
+                <a:lnTo>
+                  <a:pt x="120000" y="0"/>
+                </a:lnTo>
+                <a:lnTo>
+                  <a:pt x="120000" y="120000"/>
+                </a:lnTo>
+                <a:lnTo>
+                  <a:pt x="0" y="120000"/>
+                </a:lnTo>
+                <a:close/>
+              </a:path>
+            </a:pathLst>
+          </a:custGeom>
+        </p:spPr>
+      </p:sp>
+    </p:spTree>
+  </p:cSld>
+  <p:clrMapOvr>
+    <a:masterClrMapping/>
+  </p:clrMapOvr>
+</p:notes>
+</file>
+
+<file path=ppt/notesSlides/notesSlide33.xml><?xml version="1.0" encoding="utf-8"?>
+<p:notes xmlns:a="http://schemas.openxmlformats.org/drawingml/2006/main" xmlns:r="http://schemas.openxmlformats.org/officeDocument/2006/relationships" xmlns:mc="http://schemas.openxmlformats.org/markup-compatibility/2006" xmlns:mv="urn:schemas-microsoft-com:mac:vml" xmlns:p="http://schemas.openxmlformats.org/presentationml/2006/main" xmlns:c="http://schemas.openxmlformats.org/drawingml/2006/chart" xmlns:dgm="http://schemas.openxmlformats.org/drawingml/2006/diagram" xmlns:o="urn:schemas-microsoft-com:office:office" xmlns:v="urn:schemas-microsoft-com:vml" xmlns:pvml="urn:schemas-microsoft-com:office:powerpoint" xmlns:com="http://schemas.openxmlformats.org/drawingml/2006/compatibility" xmlns:p14="http://schemas.microsoft.com/office/powerpoint/2010/main" xmlns:p15="http://schemas.microsoft.com/office/powerpoint/2012/main" xmlns:ahyp="http://schemas.microsoft.com/office/drawing/2018/hyperlinkcolor" showMasterPhAnim="0" showMasterSp="0">
+  <p:cSld>
+    <p:spTree>
+      <p:nvGrpSpPr>
+        <p:cNvPr id="320" name="Shape 320"/>
+        <p:cNvGrpSpPr/>
+        <p:nvPr/>
+      </p:nvGrpSpPr>
+      <p:grpSpPr>
+        <a:xfrm>
+          <a:off x="0" y="0"/>
+          <a:ext cx="0" cy="0"/>
+          <a:chOff x="0" y="0"/>
+          <a:chExt cx="0" cy="0"/>
+        </a:xfrm>
+      </p:grpSpPr>
+      <p:sp>
+        <p:nvSpPr>
+          <p:cNvPr id="321" name="Google Shape;321;g39d8d293228_0_34:notes"/>
+          <p:cNvSpPr txBox="1"/>
+          <p:nvPr>
+            <p:ph idx="1" type="body"/>
+          </p:nvPr>
+        </p:nvSpPr>
+        <p:spPr>
+          <a:xfrm>
+            <a:off x="685800" y="4343400"/>
+            <a:ext cx="5486400" cy="4114800"/>
+          </a:xfrm>
+          <a:prstGeom prst="rect">
+            <a:avLst/>
+          </a:prstGeom>
+        </p:spPr>
+        <p:txBody>
+          <a:bodyPr anchorCtr="0" anchor="t" bIns="91425" lIns="91425" spcFirstLastPara="1" rIns="91425" wrap="square" tIns="91425">
+            <a:noAutofit/>
+          </a:bodyPr>
+          <a:lstStyle/>
+          <a:p>
+            <a:pPr indent="0" lvl="0" marL="0" rtl="0" algn="l">
+              <a:spcBef>
+                <a:spcPts val="0"/>
+              </a:spcBef>
+              <a:spcAft>
+                <a:spcPts val="0"/>
+              </a:spcAft>
+              <a:buNone/>
+            </a:pPr>
+            <a:r>
+              <a:t/>
+            </a:r>
+            <a:endParaRPr/>
+          </a:p>
+        </p:txBody>
+      </p:sp>
+      <p:sp>
+        <p:nvSpPr>
+          <p:cNvPr id="322" name="Google Shape;322;g39d8d293228_0_34:notes"/>
+          <p:cNvSpPr/>
+          <p:nvPr>
+            <p:ph idx="2" type="sldImg"/>
+          </p:nvPr>
+        </p:nvSpPr>
+        <p:spPr>
+          <a:xfrm>
+            <a:off x="1143225" y="685800"/>
+            <a:ext cx="4572300" cy="3429000"/>
+          </a:xfrm>
+          <a:custGeom>
+            <a:rect b="b" l="l" r="r" t="t"/>
+            <a:pathLst>
+              <a:path extrusionOk="0" h="120000" w="120000">
+                <a:moveTo>
+                  <a:pt x="0" y="0"/>
+                </a:moveTo>
+                <a:lnTo>
+                  <a:pt x="120000" y="0"/>
+                </a:lnTo>
+                <a:lnTo>
+                  <a:pt x="120000" y="120000"/>
+                </a:lnTo>
+                <a:lnTo>
+                  <a:pt x="0" y="120000"/>
+                </a:lnTo>
+                <a:close/>
+              </a:path>
+            </a:pathLst>
+          </a:custGeom>
+        </p:spPr>
+      </p:sp>
+    </p:spTree>
+  </p:cSld>
+  <p:clrMapOvr>
+    <a:masterClrMapping/>
+  </p:clrMapOvr>
+</p:notes>
+</file>
+
+<file path=ppt/notesSlides/notesSlide34.xml><?xml version="1.0" encoding="utf-8"?>
+<p:notes xmlns:a="http://schemas.openxmlformats.org/drawingml/2006/main" xmlns:r="http://schemas.openxmlformats.org/officeDocument/2006/relationships" xmlns:mc="http://schemas.openxmlformats.org/markup-compatibility/2006" xmlns:mv="urn:schemas-microsoft-com:mac:vml" xmlns:p="http://schemas.openxmlformats.org/presentationml/2006/main" xmlns:c="http://schemas.openxmlformats.org/drawingml/2006/chart" xmlns:dgm="http://schemas.openxmlformats.org/drawingml/2006/diagram" xmlns:o="urn:schemas-microsoft-com:office:office" xmlns:v="urn:schemas-microsoft-com:vml" xmlns:pvml="urn:schemas-microsoft-com:office:powerpoint" xmlns:com="http://schemas.openxmlformats.org/drawingml/2006/compatibility" xmlns:p14="http://schemas.microsoft.com/office/powerpoint/2010/main" xmlns:p15="http://schemas.microsoft.com/office/powerpoint/2012/main" xmlns:ahyp="http://schemas.microsoft.com/office/drawing/2018/hyperlinkcolor" showMasterPhAnim="0" showMasterSp="0">
+  <p:cSld>
+    <p:spTree>
+      <p:nvGrpSpPr>
+        <p:cNvPr id="326" name="Shape 326"/>
+        <p:cNvGrpSpPr/>
+        <p:nvPr/>
+      </p:nvGrpSpPr>
+      <p:grpSpPr>
+        <a:xfrm>
+          <a:off x="0" y="0"/>
+          <a:ext cx="0" cy="0"/>
+          <a:chOff x="0" y="0"/>
+          <a:chExt cx="0" cy="0"/>
+        </a:xfrm>
+      </p:grpSpPr>
+      <p:sp>
+        <p:nvSpPr>
+          <p:cNvPr id="327" name="Google Shape;327;g39d8d293228_1_5:notes"/>
+          <p:cNvSpPr/>
+          <p:nvPr>
+            <p:ph idx="2" type="sldImg"/>
+          </p:nvPr>
+        </p:nvSpPr>
+        <p:spPr>
+          <a:xfrm>
+            <a:off x="381300" y="685800"/>
+            <a:ext cx="6096000" cy="3429000"/>
+          </a:xfrm>
+          <a:custGeom>
+            <a:rect b="b" l="l" r="r" t="t"/>
+            <a:pathLst>
+              <a:path extrusionOk="0" h="120000" w="120000">
+                <a:moveTo>
+                  <a:pt x="0" y="0"/>
+                </a:moveTo>
+                <a:lnTo>
+                  <a:pt x="120000" y="0"/>
+                </a:lnTo>
+                <a:lnTo>
+                  <a:pt x="120000" y="120000"/>
+                </a:lnTo>
+                <a:lnTo>
+                  <a:pt x="0" y="120000"/>
+                </a:lnTo>
+                <a:close/>
+              </a:path>
+            </a:pathLst>
+          </a:custGeom>
+        </p:spPr>
+      </p:sp>
+      <p:sp>
+        <p:nvSpPr>
+          <p:cNvPr id="328" name="Google Shape;328;g39d8d293228_1_5:notes"/>
+          <p:cNvSpPr txBox="1"/>
+          <p:nvPr>
+            <p:ph idx="1" type="body"/>
+          </p:nvPr>
+        </p:nvSpPr>
+        <p:spPr>
+          <a:xfrm>
+            <a:off x="685800" y="4343400"/>
+            <a:ext cx="5486400" cy="4114800"/>
+          </a:xfrm>
+          <a:prstGeom prst="rect">
+            <a:avLst/>
+          </a:prstGeom>
+        </p:spPr>
+        <p:txBody>
+          <a:bodyPr anchorCtr="0" anchor="t" bIns="91425" lIns="91425" spcFirstLastPara="1" rIns="91425" wrap="square" tIns="91425">
+            <a:noAutofit/>
+          </a:bodyPr>
+          <a:lstStyle/>
+          <a:p>
+            <a:pPr indent="0" lvl="0" marL="0" rtl="0" algn="l">
+              <a:spcBef>
+                <a:spcPts val="0"/>
+              </a:spcBef>
+              <a:spcAft>
+                <a:spcPts val="0"/>
+              </a:spcAft>
+              <a:buNone/>
+            </a:pPr>
+            <a:r>
+              <a:t/>
+            </a:r>
+            <a:endParaRPr/>
+          </a:p>
+        </p:txBody>
+      </p:sp>
+    </p:spTree>
+  </p:cSld>
+  <p:clrMapOvr>
+    <a:masterClrMapping/>
+  </p:clrMapOvr>
+</p:notes>
+</file>
+
+<file path=ppt/notesSlides/notesSlide35.xml><?xml version="1.0" encoding="utf-8"?>
+<p:notes xmlns:a="http://schemas.openxmlformats.org/drawingml/2006/main" xmlns:r="http://schemas.openxmlformats.org/officeDocument/2006/relationships" xmlns:mc="http://schemas.openxmlformats.org/markup-compatibility/2006" xmlns:mv="urn:schemas-microsoft-com:mac:vml" xmlns:p="http://schemas.openxmlformats.org/presentationml/2006/main" xmlns:c="http://schemas.openxmlformats.org/drawingml/2006/chart" xmlns:dgm="http://schemas.openxmlformats.org/drawingml/2006/diagram" xmlns:o="urn:schemas-microsoft-com:office:office" xmlns:v="urn:schemas-microsoft-com:vml" xmlns:pvml="urn:schemas-microsoft-com:office:powerpoint" xmlns:com="http://schemas.openxmlformats.org/drawingml/2006/compatibility" xmlns:p14="http://schemas.microsoft.com/office/powerpoint/2010/main" xmlns:p15="http://schemas.microsoft.com/office/powerpoint/2012/main" xmlns:ahyp="http://schemas.microsoft.com/office/drawing/2018/hyperlinkcolor" showMasterPhAnim="0" showMasterSp="0">
+  <p:cSld>
+    <p:spTree>
+      <p:nvGrpSpPr>
+        <p:cNvPr id="332" name="Shape 332"/>
+        <p:cNvGrpSpPr/>
+        <p:nvPr/>
+      </p:nvGrpSpPr>
+      <p:grpSpPr>
+        <a:xfrm>
+          <a:off x="0" y="0"/>
+          <a:ext cx="0" cy="0"/>
+          <a:chOff x="0" y="0"/>
+          <a:chExt cx="0" cy="0"/>
+        </a:xfrm>
+      </p:grpSpPr>
+      <p:sp>
+        <p:nvSpPr>
+          <p:cNvPr id="333" name="Google Shape;333;g36cfc18a1a3_0_5:notes"/>
+          <p:cNvSpPr/>
+          <p:nvPr>
+            <p:ph idx="2" type="sldImg"/>
+          </p:nvPr>
+        </p:nvSpPr>
+        <p:spPr>
+          <a:xfrm>
+            <a:off x="381300" y="685800"/>
+            <a:ext cx="6096000" cy="3429000"/>
+          </a:xfrm>
+          <a:custGeom>
+            <a:rect b="b" l="l" r="r" t="t"/>
+            <a:pathLst>
+              <a:path extrusionOk="0" h="120000" w="120000">
+                <a:moveTo>
+                  <a:pt x="0" y="0"/>
+                </a:moveTo>
+                <a:lnTo>
+                  <a:pt x="120000" y="0"/>
+                </a:lnTo>
+                <a:lnTo>
+                  <a:pt x="120000" y="120000"/>
+                </a:lnTo>
+                <a:lnTo>
+                  <a:pt x="0" y="120000"/>
+                </a:lnTo>
+                <a:close/>
+              </a:path>
+            </a:pathLst>
+          </a:custGeom>
+        </p:spPr>
+      </p:sp>
+      <p:sp>
+        <p:nvSpPr>
+          <p:cNvPr id="334" name="Google Shape;334;g36cfc18a1a3_0_5:notes"/>
+          <p:cNvSpPr txBox="1"/>
+          <p:nvPr>
+            <p:ph idx="1" type="body"/>
+          </p:nvPr>
+        </p:nvSpPr>
+        <p:spPr>
+          <a:xfrm>
+            <a:off x="685800" y="4343400"/>
+            <a:ext cx="5486400" cy="4114800"/>
+          </a:xfrm>
+          <a:prstGeom prst="rect">
+            <a:avLst/>
+          </a:prstGeom>
+        </p:spPr>
+        <p:txBody>
+          <a:bodyPr anchorCtr="0" anchor="t" bIns="91425" lIns="91425" spcFirstLastPara="1" rIns="91425" wrap="square" tIns="91425">
+            <a:noAutofit/>
+          </a:bodyPr>
+          <a:lstStyle/>
+          <a:p>
+            <a:pPr indent="0" lvl="0" marL="0" rtl="0" algn="l">
+              <a:spcBef>
+                <a:spcPts val="0"/>
+              </a:spcBef>
+              <a:spcAft>
+                <a:spcPts val="0"/>
+              </a:spcAft>
+              <a:buNone/>
+            </a:pPr>
+            <a:r>
+              <a:t/>
+            </a:r>
+            <a:endParaRPr/>
+          </a:p>
+        </p:txBody>
+      </p:sp>
+    </p:spTree>
+  </p:cSld>
+  <p:clrMapOvr>
+    <a:masterClrMapping/>
+  </p:clrMapOvr>
+</p:notes>
+</file>
+
+<file path=ppt/notesSlides/notesSlide36.xml><?xml version="1.0" encoding="utf-8"?>
+<p:notes xmlns:a="http://schemas.openxmlformats.org/drawingml/2006/main" xmlns:r="http://schemas.openxmlformats.org/officeDocument/2006/relationships" xmlns:mc="http://schemas.openxmlformats.org/markup-compatibility/2006" xmlns:mv="urn:schemas-microsoft-com:mac:vml" xmlns:p="http://schemas.openxmlformats.org/presentationml/2006/main" xmlns:c="http://schemas.openxmlformats.org/drawingml/2006/chart" xmlns:dgm="http://schemas.openxmlformats.org/drawingml/2006/diagram" xmlns:o="urn:schemas-microsoft-com:office:office" xmlns:v="urn:schemas-microsoft-com:vml" xmlns:pvml="urn:schemas-microsoft-com:office:powerpoint" xmlns:com="http://schemas.openxmlformats.org/drawingml/2006/compatibility" xmlns:p14="http://schemas.microsoft.com/office/powerpoint/2010/main" xmlns:p15="http://schemas.microsoft.com/office/powerpoint/2012/main" xmlns:ahyp="http://schemas.microsoft.com/office/drawing/2018/hyperlinkcolor" showMasterPhAnim="0" showMasterSp="0">
+  <p:cSld>
+    <p:spTree>
+      <p:nvGrpSpPr>
+        <p:cNvPr id="338" name="Shape 338"/>
+        <p:cNvGrpSpPr/>
+        <p:nvPr/>
+      </p:nvGrpSpPr>
+      <p:grpSpPr>
+        <a:xfrm>
+          <a:off x="0" y="0"/>
+          <a:ext cx="0" cy="0"/>
+          <a:chOff x="0" y="0"/>
+          <a:chExt cx="0" cy="0"/>
+        </a:xfrm>
+      </p:grpSpPr>
+      <p:sp>
+        <p:nvSpPr>
+          <p:cNvPr id="339" name="Google Shape;339;g39d8d293228_0_39:notes"/>
+          <p:cNvSpPr txBox="1"/>
+          <p:nvPr>
+            <p:ph idx="1" type="body"/>
+          </p:nvPr>
+        </p:nvSpPr>
+        <p:spPr>
+          <a:xfrm>
+            <a:off x="685800" y="4343400"/>
+            <a:ext cx="5486400" cy="4114800"/>
+          </a:xfrm>
+          <a:prstGeom prst="rect">
+            <a:avLst/>
+          </a:prstGeom>
+        </p:spPr>
+        <p:txBody>
+          <a:bodyPr anchorCtr="0" anchor="t" bIns="91425" lIns="91425" spcFirstLastPara="1" rIns="91425" wrap="square" tIns="91425">
+            <a:noAutofit/>
+          </a:bodyPr>
+          <a:lstStyle/>
+          <a:p>
+            <a:pPr indent="0" lvl="0" marL="0" rtl="0" algn="l">
+              <a:spcBef>
+                <a:spcPts val="0"/>
+              </a:spcBef>
+              <a:spcAft>
+                <a:spcPts val="0"/>
+              </a:spcAft>
+              <a:buNone/>
+            </a:pPr>
+            <a:r>
+              <a:t/>
+            </a:r>
+            <a:endParaRPr/>
+          </a:p>
+        </p:txBody>
+      </p:sp>
+      <p:sp>
+        <p:nvSpPr>
+          <p:cNvPr id="340" name="Google Shape;340;g39d8d293228_0_39:notes"/>
+          <p:cNvSpPr/>
+          <p:nvPr>
+            <p:ph idx="2" type="sldImg"/>
+          </p:nvPr>
+        </p:nvSpPr>
+        <p:spPr>
+          <a:xfrm>
+            <a:off x="1143225" y="685800"/>
+            <a:ext cx="4572300" cy="3429000"/>
           </a:xfrm>
           <a:custGeom>
             <a:rect b="b" l="l" r="r" t="t"/>
@@ -19762,7 +20862,7 @@
             <a:tbl>
               <a:tblPr bandRow="1" firstRow="1">
                 <a:noFill/>
-                <a:tableStyleId>{1B8563D4-BB8A-4F7E-A35C-4C2900C004D8}</a:tableStyleId>
+                <a:tableStyleId>{33C79BD9-4D4F-410C-A80E-0E65E8C5DBDC}</a:tableStyleId>
               </a:tblPr>
               <a:tblGrid>
                 <a:gridCol w="1531600"/>
@@ -22395,7 +23495,7 @@
             <a:tbl>
               <a:tblPr bandRow="1" firstRow="1">
                 <a:noFill/>
-                <a:tableStyleId>{1B8563D4-BB8A-4F7E-A35C-4C2900C004D8}</a:tableStyleId>
+                <a:tableStyleId>{33C79BD9-4D4F-410C-A80E-0E65E8C5DBDC}</a:tableStyleId>
               </a:tblPr>
               <a:tblGrid>
                 <a:gridCol w="1531600"/>
@@ -23010,6 +24110,958 @@
 </p:sld>
 </file>
 
+<file path=ppt/slides/slide26.xml><?xml version="1.0" encoding="utf-8"?>
+<p:sld xmlns:a="http://schemas.openxmlformats.org/drawingml/2006/main" xmlns:r="http://schemas.openxmlformats.org/officeDocument/2006/relationships" xmlns:mc="http://schemas.openxmlformats.org/markup-compatibility/2006" xmlns:mv="urn:schemas-microsoft-com:mac:vml" xmlns:p="http://schemas.openxmlformats.org/presentationml/2006/main" xmlns:c="http://schemas.openxmlformats.org/drawingml/2006/chart" xmlns:dgm="http://schemas.openxmlformats.org/drawingml/2006/diagram" xmlns:o="urn:schemas-microsoft-com:office:office" xmlns:v="urn:schemas-microsoft-com:vml" xmlns:pvml="urn:schemas-microsoft-com:office:powerpoint" xmlns:com="http://schemas.openxmlformats.org/drawingml/2006/compatibility" xmlns:p14="http://schemas.microsoft.com/office/powerpoint/2010/main" xmlns:p15="http://schemas.microsoft.com/office/powerpoint/2012/main" xmlns:ahyp="http://schemas.microsoft.com/office/drawing/2018/hyperlinkcolor">
+  <p:cSld>
+    <p:bg>
+      <p:bgPr>
+        <a:solidFill>
+          <a:schemeClr val="dk1"/>
+        </a:solidFill>
+      </p:bgPr>
+    </p:bg>
+    <p:spTree>
+      <p:nvGrpSpPr>
+        <p:cNvPr id="282" name="Shape 282"/>
+        <p:cNvGrpSpPr/>
+        <p:nvPr/>
+      </p:nvGrpSpPr>
+      <p:grpSpPr>
+        <a:xfrm>
+          <a:off x="0" y="0"/>
+          <a:ext cx="0" cy="0"/>
+          <a:chOff x="0" y="0"/>
+          <a:chExt cx="0" cy="0"/>
+        </a:xfrm>
+      </p:grpSpPr>
+      <p:sp>
+        <p:nvSpPr>
+          <p:cNvPr id="283" name="Google Shape;283;p50"/>
+          <p:cNvSpPr txBox="1"/>
+          <p:nvPr>
+            <p:ph idx="1" type="body"/>
+          </p:nvPr>
+        </p:nvSpPr>
+        <p:spPr>
+          <a:xfrm>
+            <a:off x="628650" y="1369219"/>
+            <a:ext cx="7886700" cy="3263400"/>
+          </a:xfrm>
+          <a:prstGeom prst="rect">
+            <a:avLst/>
+          </a:prstGeom>
+        </p:spPr>
+        <p:txBody>
+          <a:bodyPr anchorCtr="0" anchor="t" bIns="34275" lIns="68575" spcFirstLastPara="1" rIns="68575" wrap="square" tIns="34275">
+            <a:normAutofit/>
+          </a:bodyPr>
+          <a:lstStyle/>
+          <a:p>
+            <a:pPr indent="0" lvl="0" marL="0" rtl="0" algn="ctr">
+              <a:spcBef>
+                <a:spcPts val="800"/>
+              </a:spcBef>
+              <a:spcAft>
+                <a:spcPts val="0"/>
+              </a:spcAft>
+              <a:buNone/>
+            </a:pPr>
+            <a:r>
+              <a:rPr lang="en" sz="4200">
+                <a:solidFill>
+                  <a:schemeClr val="lt1"/>
+                </a:solidFill>
+              </a:rPr>
+              <a:t>Week 6-8</a:t>
+            </a:r>
+            <a:endParaRPr sz="4200">
+              <a:solidFill>
+                <a:schemeClr val="lt1"/>
+              </a:solidFill>
+            </a:endParaRPr>
+          </a:p>
+          <a:p>
+            <a:pPr indent="0" lvl="0" marL="0" rtl="0" algn="ctr">
+              <a:spcBef>
+                <a:spcPts val="800"/>
+              </a:spcBef>
+              <a:spcAft>
+                <a:spcPts val="0"/>
+              </a:spcAft>
+              <a:buNone/>
+            </a:pPr>
+            <a:r>
+              <a:t/>
+            </a:r>
+            <a:endParaRPr sz="4200">
+              <a:solidFill>
+                <a:schemeClr val="lt1"/>
+              </a:solidFill>
+            </a:endParaRPr>
+          </a:p>
+          <a:p>
+            <a:pPr indent="0" lvl="0" marL="0" rtl="0" algn="ctr">
+              <a:spcBef>
+                <a:spcPts val="800"/>
+              </a:spcBef>
+              <a:spcAft>
+                <a:spcPts val="0"/>
+              </a:spcAft>
+              <a:buNone/>
+            </a:pPr>
+            <a:r>
+              <a:rPr lang="en" sz="4200">
+                <a:solidFill>
+                  <a:schemeClr val="lt1"/>
+                </a:solidFill>
+              </a:rPr>
+              <a:t>XYZ hover within any range + Baseline MARL implementation</a:t>
+            </a:r>
+            <a:endParaRPr sz="4200">
+              <a:solidFill>
+                <a:schemeClr val="lt1"/>
+              </a:solidFill>
+            </a:endParaRPr>
+          </a:p>
+        </p:txBody>
+      </p:sp>
+    </p:spTree>
+  </p:cSld>
+  <p:clrMapOvr>
+    <a:masterClrMapping/>
+  </p:clrMapOvr>
+</p:sld>
+</file>
+
+<file path=ppt/slides/slide27.xml><?xml version="1.0" encoding="utf-8"?>
+<p:sld xmlns:a="http://schemas.openxmlformats.org/drawingml/2006/main" xmlns:r="http://schemas.openxmlformats.org/officeDocument/2006/relationships" xmlns:mc="http://schemas.openxmlformats.org/markup-compatibility/2006" xmlns:mv="urn:schemas-microsoft-com:mac:vml" xmlns:p="http://schemas.openxmlformats.org/presentationml/2006/main" xmlns:c="http://schemas.openxmlformats.org/drawingml/2006/chart" xmlns:dgm="http://schemas.openxmlformats.org/drawingml/2006/diagram" xmlns:o="urn:schemas-microsoft-com:office:office" xmlns:v="urn:schemas-microsoft-com:vml" xmlns:pvml="urn:schemas-microsoft-com:office:powerpoint" xmlns:com="http://schemas.openxmlformats.org/drawingml/2006/compatibility" xmlns:p14="http://schemas.microsoft.com/office/powerpoint/2010/main" xmlns:p15="http://schemas.microsoft.com/office/powerpoint/2012/main" xmlns:ahyp="http://schemas.microsoft.com/office/drawing/2018/hyperlinkcolor">
+  <p:cSld>
+    <p:spTree>
+      <p:nvGrpSpPr>
+        <p:cNvPr id="287" name="Shape 287"/>
+        <p:cNvGrpSpPr/>
+        <p:nvPr/>
+      </p:nvGrpSpPr>
+      <p:grpSpPr>
+        <a:xfrm>
+          <a:off x="0" y="0"/>
+          <a:ext cx="0" cy="0"/>
+          <a:chOff x="0" y="0"/>
+          <a:chExt cx="0" cy="0"/>
+        </a:xfrm>
+      </p:grpSpPr>
+      <p:sp>
+        <p:nvSpPr>
+          <p:cNvPr id="288" name="Google Shape;288;p51"/>
+          <p:cNvSpPr txBox="1"/>
+          <p:nvPr>
+            <p:ph type="ctrTitle"/>
+          </p:nvPr>
+        </p:nvSpPr>
+        <p:spPr>
+          <a:xfrm>
+            <a:off x="1143000" y="841772"/>
+            <a:ext cx="6858000" cy="1790700"/>
+          </a:xfrm>
+          <a:prstGeom prst="rect">
+            <a:avLst/>
+          </a:prstGeom>
+          <a:noFill/>
+          <a:ln>
+            <a:noFill/>
+          </a:ln>
+        </p:spPr>
+        <p:txBody>
+          <a:bodyPr anchorCtr="0" anchor="b" bIns="34275" lIns="68575" spcFirstLastPara="1" rIns="68575" wrap="square" tIns="34275">
+            <a:normAutofit fontScale="90000"/>
+          </a:bodyPr>
+          <a:lstStyle/>
+          <a:p>
+            <a:pPr indent="0" lvl="0" marL="0" rtl="0" algn="ctr">
+              <a:lnSpc>
+                <a:spcPct val="90000"/>
+              </a:lnSpc>
+              <a:spcBef>
+                <a:spcPts val="0"/>
+              </a:spcBef>
+              <a:spcAft>
+                <a:spcPts val="0"/>
+              </a:spcAft>
+              <a:buClr>
+                <a:schemeClr val="dk1"/>
+              </a:buClr>
+              <a:buSzPct val="100000"/>
+              <a:buFont typeface="Play"/>
+              <a:buNone/>
+            </a:pPr>
+            <a:r>
+              <a:rPr lang="en"/>
+              <a:t>MIRL LAB Honours Project Bi-Weekly Update</a:t>
+            </a:r>
+            <a:endParaRPr/>
+          </a:p>
+          <a:p>
+            <a:pPr indent="0" lvl="0" marL="0" rtl="0" algn="ctr">
+              <a:lnSpc>
+                <a:spcPct val="90000"/>
+              </a:lnSpc>
+              <a:spcBef>
+                <a:spcPts val="0"/>
+              </a:spcBef>
+              <a:spcAft>
+                <a:spcPts val="0"/>
+              </a:spcAft>
+              <a:buClr>
+                <a:schemeClr val="dk1"/>
+              </a:buClr>
+              <a:buSzPct val="100000"/>
+              <a:buFont typeface="Play"/>
+              <a:buNone/>
+            </a:pPr>
+            <a:r>
+              <a:t/>
+            </a:r>
+            <a:endParaRPr/>
+          </a:p>
+        </p:txBody>
+      </p:sp>
+      <p:sp>
+        <p:nvSpPr>
+          <p:cNvPr id="289" name="Google Shape;289;p51"/>
+          <p:cNvSpPr txBox="1"/>
+          <p:nvPr>
+            <p:ph idx="1" type="subTitle"/>
+          </p:nvPr>
+        </p:nvSpPr>
+        <p:spPr>
+          <a:xfrm>
+            <a:off x="961950" y="2701524"/>
+            <a:ext cx="7220100" cy="1790700"/>
+          </a:xfrm>
+          <a:prstGeom prst="rect">
+            <a:avLst/>
+          </a:prstGeom>
+          <a:noFill/>
+          <a:ln>
+            <a:noFill/>
+          </a:ln>
+        </p:spPr>
+        <p:txBody>
+          <a:bodyPr anchorCtr="0" anchor="t" bIns="34275" lIns="68575" spcFirstLastPara="1" rIns="68575" wrap="square" tIns="34275">
+            <a:noAutofit/>
+          </a:bodyPr>
+          <a:lstStyle/>
+          <a:p>
+            <a:pPr indent="0" lvl="0" marL="0" rtl="0" algn="ctr">
+              <a:lnSpc>
+                <a:spcPct val="90000"/>
+              </a:lnSpc>
+              <a:spcBef>
+                <a:spcPts val="0"/>
+              </a:spcBef>
+              <a:spcAft>
+                <a:spcPts val="0"/>
+              </a:spcAft>
+              <a:buClr>
+                <a:schemeClr val="dk1"/>
+              </a:buClr>
+              <a:buSzPts val="1200"/>
+              <a:buNone/>
+            </a:pPr>
+            <a:r>
+              <a:rPr lang="en" sz="1700"/>
+              <a:t>MARL Crazyflie</a:t>
+            </a:r>
+            <a:endParaRPr sz="1700"/>
+          </a:p>
+          <a:p>
+            <a:pPr indent="0" lvl="0" marL="0" rtl="0" algn="ctr">
+              <a:lnSpc>
+                <a:spcPct val="90000"/>
+              </a:lnSpc>
+              <a:spcBef>
+                <a:spcPts val="800"/>
+              </a:spcBef>
+              <a:spcAft>
+                <a:spcPts val="0"/>
+              </a:spcAft>
+              <a:buClr>
+                <a:schemeClr val="dk1"/>
+              </a:buClr>
+              <a:buSzPts val="1200"/>
+              <a:buNone/>
+            </a:pPr>
+            <a:r>
+              <a:rPr lang="en" sz="1700"/>
+              <a:t>Michael O’Sullivan, Aydin Yalcinkaya</a:t>
+            </a:r>
+            <a:endParaRPr sz="1700"/>
+          </a:p>
+          <a:p>
+            <a:pPr indent="0" lvl="0" marL="0" rtl="0" algn="ctr">
+              <a:lnSpc>
+                <a:spcPct val="90000"/>
+              </a:lnSpc>
+              <a:spcBef>
+                <a:spcPts val="800"/>
+              </a:spcBef>
+              <a:spcAft>
+                <a:spcPts val="0"/>
+              </a:spcAft>
+              <a:buClr>
+                <a:schemeClr val="dk1"/>
+              </a:buClr>
+              <a:buSzPts val="1200"/>
+              <a:buNone/>
+            </a:pPr>
+            <a:r>
+              <a:rPr lang="en" sz="1700"/>
+              <a:t>Using MARL to learn safe take-off and hover policies for Crazyflie drones</a:t>
+            </a:r>
+            <a:endParaRPr sz="1700"/>
+          </a:p>
+          <a:p>
+            <a:pPr indent="0" lvl="0" marL="0" rtl="0" algn="ctr">
+              <a:lnSpc>
+                <a:spcPct val="90000"/>
+              </a:lnSpc>
+              <a:spcBef>
+                <a:spcPts val="800"/>
+              </a:spcBef>
+              <a:spcAft>
+                <a:spcPts val="0"/>
+              </a:spcAft>
+              <a:buClr>
+                <a:schemeClr val="dk1"/>
+              </a:buClr>
+              <a:buSzPts val="1200"/>
+              <a:buNone/>
+            </a:pPr>
+            <a:r>
+              <a:rPr lang="en" sz="1700"/>
+              <a:t>CrazyFlie, MuJuCo, Gymnasium, PyTorch</a:t>
+            </a:r>
+            <a:endParaRPr sz="1700"/>
+          </a:p>
+          <a:p>
+            <a:pPr indent="0" lvl="0" marL="0" rtl="0" algn="ctr">
+              <a:lnSpc>
+                <a:spcPct val="90000"/>
+              </a:lnSpc>
+              <a:spcBef>
+                <a:spcPts val="800"/>
+              </a:spcBef>
+              <a:spcAft>
+                <a:spcPts val="0"/>
+              </a:spcAft>
+              <a:buClr>
+                <a:schemeClr val="dk1"/>
+              </a:buClr>
+              <a:buSzPts val="1800"/>
+              <a:buNone/>
+            </a:pPr>
+            <a:r>
+              <a:t/>
+            </a:r>
+            <a:endParaRPr sz="1100"/>
+          </a:p>
+        </p:txBody>
+      </p:sp>
+    </p:spTree>
+  </p:cSld>
+  <p:clrMapOvr>
+    <a:masterClrMapping/>
+  </p:clrMapOvr>
+</p:sld>
+</file>
+
+<file path=ppt/slides/slide28.xml><?xml version="1.0" encoding="utf-8"?>
+<p:sld xmlns:a="http://schemas.openxmlformats.org/drawingml/2006/main" xmlns:r="http://schemas.openxmlformats.org/officeDocument/2006/relationships" xmlns:mc="http://schemas.openxmlformats.org/markup-compatibility/2006" xmlns:mv="urn:schemas-microsoft-com:mac:vml" xmlns:p="http://schemas.openxmlformats.org/presentationml/2006/main" xmlns:c="http://schemas.openxmlformats.org/drawingml/2006/chart" xmlns:dgm="http://schemas.openxmlformats.org/drawingml/2006/diagram" xmlns:o="urn:schemas-microsoft-com:office:office" xmlns:v="urn:schemas-microsoft-com:vml" xmlns:pvml="urn:schemas-microsoft-com:office:powerpoint" xmlns:com="http://schemas.openxmlformats.org/drawingml/2006/compatibility" xmlns:p14="http://schemas.microsoft.com/office/powerpoint/2010/main" xmlns:p15="http://schemas.microsoft.com/office/powerpoint/2012/main" xmlns:ahyp="http://schemas.microsoft.com/office/drawing/2018/hyperlinkcolor">
+  <p:cSld>
+    <p:spTree>
+      <p:nvGrpSpPr>
+        <p:cNvPr id="293" name="Shape 293"/>
+        <p:cNvGrpSpPr/>
+        <p:nvPr/>
+      </p:nvGrpSpPr>
+      <p:grpSpPr>
+        <a:xfrm>
+          <a:off x="0" y="0"/>
+          <a:ext cx="0" cy="0"/>
+          <a:chOff x="0" y="0"/>
+          <a:chExt cx="0" cy="0"/>
+        </a:xfrm>
+      </p:grpSpPr>
+      <p:sp>
+        <p:nvSpPr>
+          <p:cNvPr id="294" name="Google Shape;294;p52"/>
+          <p:cNvSpPr txBox="1"/>
+          <p:nvPr>
+            <p:ph type="title"/>
+          </p:nvPr>
+        </p:nvSpPr>
+        <p:spPr>
+          <a:xfrm>
+            <a:off x="628650" y="273844"/>
+            <a:ext cx="7886700" cy="994200"/>
+          </a:xfrm>
+          <a:prstGeom prst="rect">
+            <a:avLst/>
+          </a:prstGeom>
+          <a:noFill/>
+          <a:ln>
+            <a:noFill/>
+          </a:ln>
+        </p:spPr>
+        <p:txBody>
+          <a:bodyPr anchorCtr="0" anchor="ctr" bIns="34275" lIns="68575" spcFirstLastPara="1" rIns="68575" wrap="square" tIns="34275">
+            <a:normAutofit/>
+          </a:bodyPr>
+          <a:lstStyle/>
+          <a:p>
+            <a:pPr indent="0" lvl="0" marL="0" rtl="0" algn="l">
+              <a:lnSpc>
+                <a:spcPct val="90000"/>
+              </a:lnSpc>
+              <a:spcBef>
+                <a:spcPts val="0"/>
+              </a:spcBef>
+              <a:spcAft>
+                <a:spcPts val="0"/>
+              </a:spcAft>
+              <a:buClr>
+                <a:schemeClr val="dk1"/>
+              </a:buClr>
+              <a:buSzPts val="3300"/>
+              <a:buFont typeface="Play"/>
+              <a:buNone/>
+            </a:pPr>
+            <a:r>
+              <a:rPr lang="en"/>
+              <a:t>Progress Recap</a:t>
+            </a:r>
+            <a:endParaRPr/>
+          </a:p>
+        </p:txBody>
+      </p:sp>
+      <p:sp>
+        <p:nvSpPr>
+          <p:cNvPr id="295" name="Google Shape;295;p52"/>
+          <p:cNvSpPr txBox="1"/>
+          <p:nvPr>
+            <p:ph idx="1" type="body"/>
+          </p:nvPr>
+        </p:nvSpPr>
+        <p:spPr>
+          <a:xfrm>
+            <a:off x="417400" y="1369225"/>
+            <a:ext cx="8267400" cy="3263400"/>
+          </a:xfrm>
+          <a:prstGeom prst="rect">
+            <a:avLst/>
+          </a:prstGeom>
+          <a:noFill/>
+          <a:ln>
+            <a:noFill/>
+          </a:ln>
+        </p:spPr>
+        <p:txBody>
+          <a:bodyPr anchorCtr="0" anchor="t" bIns="34275" lIns="68575" spcFirstLastPara="1" rIns="68575" wrap="square" tIns="34275">
+            <a:normAutofit/>
+          </a:bodyPr>
+          <a:lstStyle/>
+          <a:p>
+            <a:pPr indent="0" lvl="0" marL="0" rtl="0" algn="l">
+              <a:spcBef>
+                <a:spcPts val="800"/>
+              </a:spcBef>
+              <a:spcAft>
+                <a:spcPts val="0"/>
+              </a:spcAft>
+              <a:buNone/>
+            </a:pPr>
+            <a:r>
+              <a:rPr b="1" lang="en" sz="1800"/>
+              <a:t>Goal</a:t>
+            </a:r>
+            <a:r>
+              <a:rPr lang="en" sz="1800"/>
+              <a:t>: Implementing MARL on Crazyflie drones for safe hovering and navigation</a:t>
+            </a:r>
+            <a:endParaRPr sz="1800"/>
+          </a:p>
+          <a:p>
+            <a:pPr indent="0" lvl="0" marL="0" rtl="0" algn="l">
+              <a:spcBef>
+                <a:spcPts val="800"/>
+              </a:spcBef>
+              <a:spcAft>
+                <a:spcPts val="0"/>
+              </a:spcAft>
+              <a:buNone/>
+            </a:pPr>
+            <a:r>
+              <a:t/>
+            </a:r>
+            <a:endParaRPr sz="1800"/>
+          </a:p>
+          <a:p>
+            <a:pPr indent="0" lvl="0" marL="0" rtl="0" algn="l">
+              <a:spcBef>
+                <a:spcPts val="800"/>
+              </a:spcBef>
+              <a:spcAft>
+                <a:spcPts val="0"/>
+              </a:spcAft>
+              <a:buNone/>
+            </a:pPr>
+            <a:r>
+              <a:rPr lang="en" sz="1800"/>
+              <a:t>Progress</a:t>
+            </a:r>
+            <a:endParaRPr sz="1800"/>
+          </a:p>
+          <a:p>
+            <a:pPr indent="-342900" lvl="0" marL="457200" rtl="0" algn="l">
+              <a:spcBef>
+                <a:spcPts val="800"/>
+              </a:spcBef>
+              <a:spcAft>
+                <a:spcPts val="0"/>
+              </a:spcAft>
+              <a:buSzPts val="1800"/>
+              <a:buChar char="●"/>
+            </a:pPr>
+            <a:r>
+              <a:rPr lang="en" sz="1800"/>
+              <a:t>Base environment for training a single drone to hover at a target</a:t>
+            </a:r>
+            <a:endParaRPr sz="1800"/>
+          </a:p>
+          <a:p>
+            <a:pPr indent="-342900" lvl="0" marL="457200" rtl="0" algn="l">
+              <a:spcBef>
+                <a:spcPts val="800"/>
+              </a:spcBef>
+              <a:spcAft>
+                <a:spcPts val="0"/>
+              </a:spcAft>
+              <a:buSzPts val="1800"/>
+              <a:buChar char="●"/>
+            </a:pPr>
+            <a:r>
+              <a:rPr lang="en" sz="1800"/>
+              <a:t>Vectorized single agent PPO-Clip that interacts with the environment</a:t>
+            </a:r>
+            <a:endParaRPr sz="1800"/>
+          </a:p>
+          <a:p>
+            <a:pPr indent="-342900" lvl="1" marL="914400" rtl="0" algn="l">
+              <a:spcBef>
+                <a:spcPts val="400"/>
+              </a:spcBef>
+              <a:spcAft>
+                <a:spcPts val="0"/>
+              </a:spcAft>
+              <a:buSzPts val="1800"/>
+              <a:buChar char="○"/>
+            </a:pPr>
+            <a:r>
+              <a:rPr lang="en"/>
+              <a:t>Runs 1 or more environments in parallel for better sampling</a:t>
+            </a:r>
+            <a:endParaRPr/>
+          </a:p>
+          <a:p>
+            <a:pPr indent="-342900" lvl="0" marL="457200" rtl="0" algn="l">
+              <a:spcBef>
+                <a:spcPts val="800"/>
+              </a:spcBef>
+              <a:spcAft>
+                <a:spcPts val="0"/>
+              </a:spcAft>
+              <a:buSzPts val="1800"/>
+              <a:buChar char="●"/>
+            </a:pPr>
+            <a:r>
+              <a:rPr lang="en" sz="1800"/>
+              <a:t>Engineered features to help the agent understand observation relationships</a:t>
+            </a:r>
+            <a:endParaRPr sz="1800"/>
+          </a:p>
+          <a:p>
+            <a:pPr indent="-342900" lvl="0" marL="457200" rtl="0" algn="l">
+              <a:spcBef>
+                <a:spcPts val="800"/>
+              </a:spcBef>
+              <a:spcAft>
+                <a:spcPts val="0"/>
+              </a:spcAft>
+              <a:buSzPts val="1800"/>
+              <a:buChar char="●"/>
+            </a:pPr>
+            <a:r>
+              <a:rPr lang="en" sz="1800"/>
+              <a:t>Single agent XYZ hover within most ranges (high success rate, not perfect)</a:t>
+            </a:r>
+            <a:endParaRPr sz="1800"/>
+          </a:p>
+          <a:p>
+            <a:pPr indent="-342900" lvl="0" marL="457200" rtl="0" algn="l">
+              <a:spcBef>
+                <a:spcPts val="800"/>
+              </a:spcBef>
+              <a:spcAft>
+                <a:spcPts val="0"/>
+              </a:spcAft>
+              <a:buSzPts val="1800"/>
+              <a:buChar char="●"/>
+            </a:pPr>
+            <a:r>
+              <a:rPr lang="en" sz="1800"/>
+              <a:t>Baseline MAPPO </a:t>
+            </a:r>
+            <a:r>
+              <a:rPr lang="en" sz="1800"/>
+              <a:t>implementation</a:t>
+            </a:r>
+            <a:r>
+              <a:rPr lang="en" sz="1800"/>
+              <a:t> with sparse success rates</a:t>
+            </a:r>
+            <a:endParaRPr sz="1800"/>
+          </a:p>
+        </p:txBody>
+      </p:sp>
+    </p:spTree>
+  </p:cSld>
+  <p:clrMapOvr>
+    <a:masterClrMapping/>
+  </p:clrMapOvr>
+</p:sld>
+</file>
+
+<file path=ppt/slides/slide29.xml><?xml version="1.0" encoding="utf-8"?>
+<p:sld xmlns:a="http://schemas.openxmlformats.org/drawingml/2006/main" xmlns:r="http://schemas.openxmlformats.org/officeDocument/2006/relationships" xmlns:mc="http://schemas.openxmlformats.org/markup-compatibility/2006" xmlns:mv="urn:schemas-microsoft-com:mac:vml" xmlns:p="http://schemas.openxmlformats.org/presentationml/2006/main" xmlns:c="http://schemas.openxmlformats.org/drawingml/2006/chart" xmlns:dgm="http://schemas.openxmlformats.org/drawingml/2006/diagram" xmlns:o="urn:schemas-microsoft-com:office:office" xmlns:v="urn:schemas-microsoft-com:vml" xmlns:pvml="urn:schemas-microsoft-com:office:powerpoint" xmlns:com="http://schemas.openxmlformats.org/drawingml/2006/compatibility" xmlns:p14="http://schemas.microsoft.com/office/powerpoint/2010/main" xmlns:p15="http://schemas.microsoft.com/office/powerpoint/2012/main" xmlns:ahyp="http://schemas.microsoft.com/office/drawing/2018/hyperlinkcolor">
+  <p:cSld>
+    <p:spTree>
+      <p:nvGrpSpPr>
+        <p:cNvPr id="299" name="Shape 299"/>
+        <p:cNvGrpSpPr/>
+        <p:nvPr/>
+      </p:nvGrpSpPr>
+      <p:grpSpPr>
+        <a:xfrm>
+          <a:off x="0" y="0"/>
+          <a:ext cx="0" cy="0"/>
+          <a:chOff x="0" y="0"/>
+          <a:chExt cx="0" cy="0"/>
+        </a:xfrm>
+      </p:grpSpPr>
+      <p:sp>
+        <p:nvSpPr>
+          <p:cNvPr id="300" name="Google Shape;300;p53"/>
+          <p:cNvSpPr txBox="1"/>
+          <p:nvPr>
+            <p:ph type="title"/>
+          </p:nvPr>
+        </p:nvSpPr>
+        <p:spPr>
+          <a:xfrm>
+            <a:off x="628650" y="273844"/>
+            <a:ext cx="7886700" cy="994200"/>
+          </a:xfrm>
+          <a:prstGeom prst="rect">
+            <a:avLst/>
+          </a:prstGeom>
+          <a:noFill/>
+          <a:ln>
+            <a:noFill/>
+          </a:ln>
+        </p:spPr>
+        <p:txBody>
+          <a:bodyPr anchorCtr="0" anchor="ctr" bIns="34275" lIns="68575" spcFirstLastPara="1" rIns="68575" wrap="square" tIns="34275">
+            <a:normAutofit/>
+          </a:bodyPr>
+          <a:lstStyle/>
+          <a:p>
+            <a:pPr indent="0" lvl="0" marL="0" rtl="0" algn="l">
+              <a:lnSpc>
+                <a:spcPct val="90000"/>
+              </a:lnSpc>
+              <a:spcBef>
+                <a:spcPts val="0"/>
+              </a:spcBef>
+              <a:spcAft>
+                <a:spcPts val="0"/>
+              </a:spcAft>
+              <a:buClr>
+                <a:schemeClr val="dk1"/>
+              </a:buClr>
+              <a:buSzPts val="3300"/>
+              <a:buFont typeface="Play"/>
+              <a:buNone/>
+            </a:pPr>
+            <a:r>
+              <a:rPr lang="en"/>
+              <a:t>Progress Since Last Meeting </a:t>
+            </a:r>
+            <a:endParaRPr/>
+          </a:p>
+        </p:txBody>
+      </p:sp>
+      <p:sp>
+        <p:nvSpPr>
+          <p:cNvPr id="301" name="Google Shape;301;p53"/>
+          <p:cNvSpPr txBox="1"/>
+          <p:nvPr>
+            <p:ph idx="1" type="body"/>
+          </p:nvPr>
+        </p:nvSpPr>
+        <p:spPr>
+          <a:xfrm>
+            <a:off x="511650" y="1268050"/>
+            <a:ext cx="8119200" cy="3660000"/>
+          </a:xfrm>
+          <a:prstGeom prst="rect">
+            <a:avLst/>
+          </a:prstGeom>
+          <a:noFill/>
+          <a:ln>
+            <a:noFill/>
+          </a:ln>
+        </p:spPr>
+        <p:txBody>
+          <a:bodyPr anchorCtr="0" anchor="t" bIns="34275" lIns="68575" spcFirstLastPara="1" rIns="68575" wrap="square" tIns="34275">
+            <a:noAutofit/>
+          </a:bodyPr>
+          <a:lstStyle/>
+          <a:p>
+            <a:pPr indent="-342900" lvl="0" marL="457200" rtl="0" algn="l">
+              <a:lnSpc>
+                <a:spcPct val="115000"/>
+              </a:lnSpc>
+              <a:spcBef>
+                <a:spcPts val="800"/>
+              </a:spcBef>
+              <a:spcAft>
+                <a:spcPts val="0"/>
+              </a:spcAft>
+              <a:buSzPts val="1800"/>
+              <a:buChar char="●"/>
+            </a:pPr>
+            <a:r>
+              <a:rPr b="1" lang="en" sz="1800"/>
+              <a:t>MAPPO implementation</a:t>
+            </a:r>
+            <a:endParaRPr b="1" sz="1800"/>
+          </a:p>
+          <a:p>
+            <a:pPr indent="-342900" lvl="1" marL="914400" rtl="0" algn="l">
+              <a:lnSpc>
+                <a:spcPct val="115000"/>
+              </a:lnSpc>
+              <a:spcBef>
+                <a:spcPts val="0"/>
+              </a:spcBef>
+              <a:spcAft>
+                <a:spcPts val="0"/>
+              </a:spcAft>
+              <a:buSzPts val="1800"/>
+              <a:buChar char="○"/>
+            </a:pPr>
+            <a:r>
+              <a:rPr lang="en"/>
+              <a:t>Centralized critic (sees all obs), Decentralized actors (see their obs)</a:t>
+            </a:r>
+            <a:endParaRPr/>
+          </a:p>
+          <a:p>
+            <a:pPr indent="-342900" lvl="0" marL="457200" rtl="0" algn="l">
+              <a:lnSpc>
+                <a:spcPct val="115000"/>
+              </a:lnSpc>
+              <a:spcBef>
+                <a:spcPts val="0"/>
+              </a:spcBef>
+              <a:spcAft>
+                <a:spcPts val="0"/>
+              </a:spcAft>
+              <a:buSzPts val="1800"/>
+              <a:buChar char="●"/>
+            </a:pPr>
+            <a:r>
+              <a:rPr b="1" lang="en" sz="1800"/>
+              <a:t>Multi-agent rewards</a:t>
+            </a:r>
+            <a:endParaRPr b="1" sz="1800"/>
+          </a:p>
+          <a:p>
+            <a:pPr indent="-342900" lvl="1" marL="914400" rtl="0" algn="l">
+              <a:lnSpc>
+                <a:spcPct val="115000"/>
+              </a:lnSpc>
+              <a:spcBef>
+                <a:spcPts val="0"/>
+              </a:spcBef>
+              <a:spcAft>
+                <a:spcPts val="0"/>
+              </a:spcAft>
+              <a:buSzPts val="1800"/>
+              <a:buChar char="○"/>
+            </a:pPr>
+            <a:r>
+              <a:rPr lang="en"/>
+              <a:t>-n1 for drone </a:t>
+            </a:r>
+            <a:r>
+              <a:rPr lang="en"/>
+              <a:t>collision</a:t>
+            </a:r>
+            <a:r>
+              <a:rPr lang="en"/>
+              <a:t> (terminal), </a:t>
+            </a:r>
+            <a:r>
+              <a:rPr lang="en"/>
+              <a:t>-n2 for proximity to other drone(s)</a:t>
+            </a:r>
+            <a:endParaRPr/>
+          </a:p>
+          <a:p>
+            <a:pPr indent="-342900" lvl="0" marL="457200" rtl="0" algn="l">
+              <a:lnSpc>
+                <a:spcPct val="115000"/>
+              </a:lnSpc>
+              <a:spcBef>
+                <a:spcPts val="0"/>
+              </a:spcBef>
+              <a:spcAft>
+                <a:spcPts val="0"/>
+              </a:spcAft>
+              <a:buSzPts val="1800"/>
+              <a:buChar char="●"/>
+            </a:pPr>
+            <a:r>
+              <a:rPr b="1" lang="en" sz="1800"/>
+              <a:t>New training setup for single/multi drones</a:t>
+            </a:r>
+            <a:endParaRPr b="1" sz="1800"/>
+          </a:p>
+          <a:p>
+            <a:pPr indent="-342900" lvl="1" marL="914400" rtl="0" algn="l">
+              <a:lnSpc>
+                <a:spcPct val="115000"/>
+              </a:lnSpc>
+              <a:spcBef>
+                <a:spcPts val="0"/>
+              </a:spcBef>
+              <a:spcAft>
+                <a:spcPts val="0"/>
+              </a:spcAft>
+              <a:buSzPts val="1800"/>
+              <a:buChar char="○"/>
+            </a:pPr>
+            <a:r>
+              <a:rPr lang="en"/>
+              <a:t>No curriculum, sampling from normal distribution for pos/quat/vel</a:t>
+            </a:r>
+            <a:endParaRPr/>
+          </a:p>
+          <a:p>
+            <a:pPr indent="-342900" lvl="0" marL="457200" rtl="0" algn="l">
+              <a:lnSpc>
+                <a:spcPct val="115000"/>
+              </a:lnSpc>
+              <a:spcBef>
+                <a:spcPts val="0"/>
+              </a:spcBef>
+              <a:spcAft>
+                <a:spcPts val="0"/>
+              </a:spcAft>
+              <a:buSzPts val="1800"/>
+              <a:buChar char="●"/>
+            </a:pPr>
+            <a:r>
+              <a:rPr b="1" lang="en" sz="1800"/>
+              <a:t>Results</a:t>
+            </a:r>
+            <a:r>
+              <a:rPr lang="en" sz="1800"/>
+              <a:t>: Successful single XYZ hover within most* XYZ (tested ~7m)</a:t>
+            </a:r>
+            <a:endParaRPr sz="1800"/>
+          </a:p>
+          <a:p>
+            <a:pPr indent="-342900" lvl="1" marL="914400" rtl="0" algn="l">
+              <a:lnSpc>
+                <a:spcPct val="115000"/>
+              </a:lnSpc>
+              <a:spcBef>
+                <a:spcPts val="0"/>
+              </a:spcBef>
+              <a:spcAft>
+                <a:spcPts val="0"/>
+              </a:spcAft>
+              <a:buSzPts val="1800"/>
+              <a:buChar char="○"/>
+            </a:pPr>
+            <a:r>
+              <a:rPr lang="en"/>
+              <a:t>Multi-agent hover rarely truncates (succeeds), drones often hover about the target for a while before one of the collides/crashes</a:t>
+            </a:r>
+            <a:endParaRPr/>
+          </a:p>
+          <a:p>
+            <a:pPr indent="-317500" lvl="1" marL="914400" rtl="0" algn="l">
+              <a:lnSpc>
+                <a:spcPct val="115000"/>
+              </a:lnSpc>
+              <a:spcBef>
+                <a:spcPts val="0"/>
+              </a:spcBef>
+              <a:spcAft>
+                <a:spcPts val="0"/>
+              </a:spcAft>
+              <a:buSzPts val="1400"/>
+              <a:buChar char="○"/>
+            </a:pPr>
+            <a:r>
+              <a:rPr lang="en"/>
+              <a:t>Any XYZ success largely due to “normalizing” relative pos to target</a:t>
+            </a:r>
+            <a:endParaRPr/>
+          </a:p>
+          <a:p>
+            <a:pPr indent="-317500" lvl="2" marL="1371600" rtl="0" algn="l">
+              <a:lnSpc>
+                <a:spcPct val="115000"/>
+              </a:lnSpc>
+              <a:spcBef>
+                <a:spcPts val="0"/>
+              </a:spcBef>
+              <a:spcAft>
+                <a:spcPts val="0"/>
+              </a:spcAft>
+              <a:buSzPts val="1400"/>
+              <a:buChar char="■"/>
+            </a:pPr>
+            <a:r>
+              <a:rPr lang="en"/>
+              <a:t>Feature: Relative pos in body coordinates / initial distance to target</a:t>
+            </a:r>
+            <a:endParaRPr/>
+          </a:p>
+        </p:txBody>
+      </p:sp>
+    </p:spTree>
+  </p:cSld>
+  <p:clrMapOvr>
+    <a:masterClrMapping/>
+  </p:clrMapOvr>
+</p:sld>
+</file>
+
 <file path=ppt/slides/slide3.xml><?xml version="1.0" encoding="utf-8"?>
 <p:sld xmlns:a="http://schemas.openxmlformats.org/drawingml/2006/main" xmlns:r="http://schemas.openxmlformats.org/officeDocument/2006/relationships" xmlns:mc="http://schemas.openxmlformats.org/markup-compatibility/2006" xmlns:mv="urn:schemas-microsoft-com:mac:vml" xmlns:p="http://schemas.openxmlformats.org/presentationml/2006/main" xmlns:c="http://schemas.openxmlformats.org/drawingml/2006/chart" xmlns:dgm="http://schemas.openxmlformats.org/drawingml/2006/diagram" xmlns:o="urn:schemas-microsoft-com:office:office" xmlns:v="urn:schemas-microsoft-com:vml" xmlns:pvml="urn:schemas-microsoft-com:office:powerpoint" xmlns:com="http://schemas.openxmlformats.org/drawingml/2006/compatibility" xmlns:p14="http://schemas.microsoft.com/office/powerpoint/2010/main" xmlns:p15="http://schemas.microsoft.com/office/powerpoint/2012/main" xmlns:ahyp="http://schemas.microsoft.com/office/drawing/2018/hyperlinkcolor">
   <p:cSld>
@@ -23225,6 +25277,2064 @@
           </a:p>
         </p:txBody>
       </p:sp>
+    </p:spTree>
+  </p:cSld>
+  <p:clrMapOvr>
+    <a:masterClrMapping/>
+  </p:clrMapOvr>
+</p:sld>
+</file>
+
+<file path=ppt/slides/slide30.xml><?xml version="1.0" encoding="utf-8"?>
+<p:sld xmlns:a="http://schemas.openxmlformats.org/drawingml/2006/main" xmlns:r="http://schemas.openxmlformats.org/officeDocument/2006/relationships" xmlns:mc="http://schemas.openxmlformats.org/markup-compatibility/2006" xmlns:mv="urn:schemas-microsoft-com:mac:vml" xmlns:p="http://schemas.openxmlformats.org/presentationml/2006/main" xmlns:c="http://schemas.openxmlformats.org/drawingml/2006/chart" xmlns:dgm="http://schemas.openxmlformats.org/drawingml/2006/diagram" xmlns:o="urn:schemas-microsoft-com:office:office" xmlns:v="urn:schemas-microsoft-com:vml" xmlns:pvml="urn:schemas-microsoft-com:office:powerpoint" xmlns:com="http://schemas.openxmlformats.org/drawingml/2006/compatibility" xmlns:p14="http://schemas.microsoft.com/office/powerpoint/2010/main" xmlns:p15="http://schemas.microsoft.com/office/powerpoint/2012/main" xmlns:ahyp="http://schemas.microsoft.com/office/drawing/2018/hyperlinkcolor">
+  <p:cSld>
+    <p:spTree>
+      <p:nvGrpSpPr>
+        <p:cNvPr id="305" name="Shape 305"/>
+        <p:cNvGrpSpPr/>
+        <p:nvPr/>
+      </p:nvGrpSpPr>
+      <p:grpSpPr>
+        <a:xfrm>
+          <a:off x="0" y="0"/>
+          <a:ext cx="0" cy="0"/>
+          <a:chOff x="0" y="0"/>
+          <a:chExt cx="0" cy="0"/>
+        </a:xfrm>
+      </p:grpSpPr>
+      <p:sp>
+        <p:nvSpPr>
+          <p:cNvPr id="306" name="Google Shape;306;p54"/>
+          <p:cNvSpPr txBox="1"/>
+          <p:nvPr>
+            <p:ph type="title"/>
+          </p:nvPr>
+        </p:nvSpPr>
+        <p:spPr>
+          <a:xfrm>
+            <a:off x="628650" y="273844"/>
+            <a:ext cx="7886700" cy="994200"/>
+          </a:xfrm>
+          <a:prstGeom prst="rect">
+            <a:avLst/>
+          </a:prstGeom>
+          <a:noFill/>
+          <a:ln>
+            <a:noFill/>
+          </a:ln>
+        </p:spPr>
+        <p:txBody>
+          <a:bodyPr anchorCtr="0" anchor="ctr" bIns="34275" lIns="68575" spcFirstLastPara="1" rIns="68575" wrap="square" tIns="34275">
+            <a:normAutofit/>
+          </a:bodyPr>
+          <a:lstStyle/>
+          <a:p>
+            <a:pPr indent="0" lvl="0" marL="0" rtl="0" algn="l">
+              <a:lnSpc>
+                <a:spcPct val="90000"/>
+              </a:lnSpc>
+              <a:spcBef>
+                <a:spcPts val="0"/>
+              </a:spcBef>
+              <a:spcAft>
+                <a:spcPts val="0"/>
+              </a:spcAft>
+              <a:buClr>
+                <a:schemeClr val="dk1"/>
+              </a:buClr>
+              <a:buSzPts val="3300"/>
+              <a:buFont typeface="Play"/>
+              <a:buNone/>
+            </a:pPr>
+            <a:r>
+              <a:rPr lang="en"/>
+              <a:t>Plan for the Next Two Weeks</a:t>
+            </a:r>
+            <a:endParaRPr/>
+          </a:p>
+        </p:txBody>
+      </p:sp>
+      <p:sp>
+        <p:nvSpPr>
+          <p:cNvPr id="307" name="Google Shape;307;p54"/>
+          <p:cNvSpPr txBox="1"/>
+          <p:nvPr>
+            <p:ph idx="1" type="body"/>
+          </p:nvPr>
+        </p:nvSpPr>
+        <p:spPr>
+          <a:xfrm>
+            <a:off x="628650" y="1369219"/>
+            <a:ext cx="7886700" cy="3263400"/>
+          </a:xfrm>
+          <a:prstGeom prst="rect">
+            <a:avLst/>
+          </a:prstGeom>
+          <a:noFill/>
+          <a:ln>
+            <a:noFill/>
+          </a:ln>
+        </p:spPr>
+        <p:txBody>
+          <a:bodyPr anchorCtr="0" anchor="t" bIns="34275" lIns="68575" spcFirstLastPara="1" rIns="68575" wrap="square" tIns="34275">
+            <a:normAutofit/>
+          </a:bodyPr>
+          <a:lstStyle/>
+          <a:p>
+            <a:pPr indent="0" lvl="0" marL="0" rtl="0" algn="l">
+              <a:lnSpc>
+                <a:spcPct val="90000"/>
+              </a:lnSpc>
+              <a:spcBef>
+                <a:spcPts val="0"/>
+              </a:spcBef>
+              <a:spcAft>
+                <a:spcPts val="0"/>
+              </a:spcAft>
+              <a:buNone/>
+            </a:pPr>
+            <a:r>
+              <a:t/>
+            </a:r>
+            <a:endParaRPr/>
+          </a:p>
+          <a:p>
+            <a:pPr indent="-171450" lvl="0" marL="177800" rtl="0" algn="l">
+              <a:lnSpc>
+                <a:spcPct val="90000"/>
+              </a:lnSpc>
+              <a:spcBef>
+                <a:spcPts val="800"/>
+              </a:spcBef>
+              <a:spcAft>
+                <a:spcPts val="0"/>
+              </a:spcAft>
+              <a:buClr>
+                <a:schemeClr val="dk1"/>
+              </a:buClr>
+              <a:buSzPts val="2100"/>
+              <a:buChar char="●"/>
+            </a:pPr>
+            <a:r>
+              <a:rPr lang="en"/>
+              <a:t>Goals</a:t>
+            </a:r>
+            <a:endParaRPr/>
+          </a:p>
+          <a:p>
+            <a:pPr indent="-177800" lvl="1" marL="520700" rtl="0" algn="l">
+              <a:lnSpc>
+                <a:spcPct val="90000"/>
+              </a:lnSpc>
+              <a:spcBef>
+                <a:spcPts val="800"/>
+              </a:spcBef>
+              <a:spcAft>
+                <a:spcPts val="0"/>
+              </a:spcAft>
+              <a:buSzPts val="1400"/>
+              <a:buChar char="○"/>
+            </a:pPr>
+            <a:r>
+              <a:rPr lang="en"/>
+              <a:t>Successful MARL for 2 drones (hovering at a target without colliding)</a:t>
+            </a:r>
+            <a:endParaRPr/>
+          </a:p>
+          <a:p>
+            <a:pPr indent="-177800" lvl="2" marL="863600" rtl="0" algn="l">
+              <a:lnSpc>
+                <a:spcPct val="90000"/>
+              </a:lnSpc>
+              <a:spcBef>
+                <a:spcPts val="800"/>
+              </a:spcBef>
+              <a:spcAft>
+                <a:spcPts val="0"/>
+              </a:spcAft>
+              <a:buSzPts val="1400"/>
+              <a:buChar char="■"/>
+            </a:pPr>
+            <a:r>
+              <a:rPr lang="en"/>
+              <a:t>Possibly adding / testing with domain randomization as well</a:t>
+            </a:r>
+            <a:endParaRPr/>
+          </a:p>
+          <a:p>
+            <a:pPr indent="-177800" lvl="1" marL="520700" rtl="0" algn="l">
+              <a:lnSpc>
+                <a:spcPct val="90000"/>
+              </a:lnSpc>
+              <a:spcBef>
+                <a:spcPts val="800"/>
+              </a:spcBef>
+              <a:spcAft>
+                <a:spcPts val="0"/>
+              </a:spcAft>
+              <a:buSzPts val="1400"/>
+              <a:buChar char="○"/>
+            </a:pPr>
+            <a:r>
+              <a:rPr lang="en"/>
+              <a:t>Prepare to test on actual drones</a:t>
+            </a:r>
+            <a:endParaRPr/>
+          </a:p>
+          <a:p>
+            <a:pPr indent="-177800" lvl="2" marL="863600" rtl="0" algn="l">
+              <a:lnSpc>
+                <a:spcPct val="90000"/>
+              </a:lnSpc>
+              <a:spcBef>
+                <a:spcPts val="800"/>
+              </a:spcBef>
+              <a:spcAft>
+                <a:spcPts val="0"/>
+              </a:spcAft>
+              <a:buSzPts val="1400"/>
+              <a:buChar char="■"/>
+            </a:pPr>
+            <a:r>
+              <a:rPr lang="en"/>
+              <a:t>Maybe test single-agent hover on actual drone</a:t>
+            </a:r>
+            <a:endParaRPr/>
+          </a:p>
+          <a:p>
+            <a:pPr indent="-171450" lvl="0" marL="177800" rtl="0" algn="l">
+              <a:lnSpc>
+                <a:spcPct val="90000"/>
+              </a:lnSpc>
+              <a:spcBef>
+                <a:spcPts val="800"/>
+              </a:spcBef>
+              <a:spcAft>
+                <a:spcPts val="0"/>
+              </a:spcAft>
+              <a:buClr>
+                <a:schemeClr val="dk1"/>
+              </a:buClr>
+              <a:buSzPts val="2100"/>
+              <a:buChar char="●"/>
+            </a:pPr>
+            <a:r>
+              <a:rPr lang="en"/>
+              <a:t>Dependencies</a:t>
+            </a:r>
+            <a:endParaRPr/>
+          </a:p>
+          <a:p>
+            <a:pPr indent="-177800" lvl="1" marL="520700" rtl="0" algn="l">
+              <a:lnSpc>
+                <a:spcPct val="90000"/>
+              </a:lnSpc>
+              <a:spcBef>
+                <a:spcPts val="800"/>
+              </a:spcBef>
+              <a:spcAft>
+                <a:spcPts val="0"/>
+              </a:spcAft>
+              <a:buSzPts val="1400"/>
+              <a:buChar char="○"/>
+            </a:pPr>
+            <a:r>
+              <a:rPr lang="en"/>
+              <a:t>None</a:t>
+            </a:r>
+            <a:endParaRPr/>
+          </a:p>
+        </p:txBody>
+      </p:sp>
+    </p:spTree>
+  </p:cSld>
+  <p:clrMapOvr>
+    <a:masterClrMapping/>
+  </p:clrMapOvr>
+</p:sld>
+</file>
+
+<file path=ppt/slides/slide31.xml><?xml version="1.0" encoding="utf-8"?>
+<p:sld xmlns:a="http://schemas.openxmlformats.org/drawingml/2006/main" xmlns:r="http://schemas.openxmlformats.org/officeDocument/2006/relationships" xmlns:mc="http://schemas.openxmlformats.org/markup-compatibility/2006" xmlns:mv="urn:schemas-microsoft-com:mac:vml" xmlns:p="http://schemas.openxmlformats.org/presentationml/2006/main" xmlns:c="http://schemas.openxmlformats.org/drawingml/2006/chart" xmlns:dgm="http://schemas.openxmlformats.org/drawingml/2006/diagram" xmlns:o="urn:schemas-microsoft-com:office:office" xmlns:v="urn:schemas-microsoft-com:vml" xmlns:pvml="urn:schemas-microsoft-com:office:powerpoint" xmlns:com="http://schemas.openxmlformats.org/drawingml/2006/compatibility" xmlns:p14="http://schemas.microsoft.com/office/powerpoint/2010/main" xmlns:p15="http://schemas.microsoft.com/office/powerpoint/2012/main" xmlns:ahyp="http://schemas.microsoft.com/office/drawing/2018/hyperlinkcolor">
+  <p:cSld>
+    <p:spTree>
+      <p:nvGrpSpPr>
+        <p:cNvPr id="311" name="Shape 311"/>
+        <p:cNvGrpSpPr/>
+        <p:nvPr/>
+      </p:nvGrpSpPr>
+      <p:grpSpPr>
+        <a:xfrm>
+          <a:off x="0" y="0"/>
+          <a:ext cx="0" cy="0"/>
+          <a:chOff x="0" y="0"/>
+          <a:chExt cx="0" cy="0"/>
+        </a:xfrm>
+      </p:grpSpPr>
+      <p:sp>
+        <p:nvSpPr>
+          <p:cNvPr id="312" name="Google Shape;312;p55"/>
+          <p:cNvSpPr txBox="1"/>
+          <p:nvPr>
+            <p:ph type="title"/>
+          </p:nvPr>
+        </p:nvSpPr>
+        <p:spPr>
+          <a:xfrm>
+            <a:off x="628650" y="273844"/>
+            <a:ext cx="7886700" cy="994200"/>
+          </a:xfrm>
+          <a:prstGeom prst="rect">
+            <a:avLst/>
+          </a:prstGeom>
+          <a:noFill/>
+          <a:ln>
+            <a:noFill/>
+          </a:ln>
+        </p:spPr>
+        <p:txBody>
+          <a:bodyPr anchorCtr="0" anchor="ctr" bIns="34275" lIns="68575" spcFirstLastPara="1" rIns="68575" wrap="square" tIns="34275">
+            <a:normAutofit/>
+          </a:bodyPr>
+          <a:lstStyle/>
+          <a:p>
+            <a:pPr indent="0" lvl="0" marL="0" rtl="0" algn="l">
+              <a:lnSpc>
+                <a:spcPct val="90000"/>
+              </a:lnSpc>
+              <a:spcBef>
+                <a:spcPts val="0"/>
+              </a:spcBef>
+              <a:spcAft>
+                <a:spcPts val="0"/>
+              </a:spcAft>
+              <a:buClr>
+                <a:schemeClr val="dk1"/>
+              </a:buClr>
+              <a:buSzPts val="3300"/>
+              <a:buFont typeface="Play"/>
+              <a:buNone/>
+            </a:pPr>
+            <a:r>
+              <a:rPr lang="en"/>
+              <a:t>Roadmap Checkpoint</a:t>
+            </a:r>
+            <a:endParaRPr/>
+          </a:p>
+        </p:txBody>
+      </p:sp>
+      <p:sp>
+        <p:nvSpPr>
+          <p:cNvPr id="313" name="Google Shape;313;p55"/>
+          <p:cNvSpPr txBox="1"/>
+          <p:nvPr>
+            <p:ph idx="1" type="body"/>
+          </p:nvPr>
+        </p:nvSpPr>
+        <p:spPr>
+          <a:xfrm>
+            <a:off x="628650" y="1369226"/>
+            <a:ext cx="7886700" cy="3545400"/>
+          </a:xfrm>
+          <a:prstGeom prst="rect">
+            <a:avLst/>
+          </a:prstGeom>
+          <a:noFill/>
+          <a:ln>
+            <a:noFill/>
+          </a:ln>
+        </p:spPr>
+        <p:txBody>
+          <a:bodyPr anchorCtr="0" anchor="t" bIns="34275" lIns="68575" spcFirstLastPara="1" rIns="68575" wrap="square" tIns="34275">
+            <a:noAutofit/>
+          </a:bodyPr>
+          <a:lstStyle/>
+          <a:p>
+            <a:pPr indent="-342900" lvl="0" marL="457200" rtl="0" algn="l">
+              <a:lnSpc>
+                <a:spcPct val="115000"/>
+              </a:lnSpc>
+              <a:spcBef>
+                <a:spcPts val="800"/>
+              </a:spcBef>
+              <a:spcAft>
+                <a:spcPts val="0"/>
+              </a:spcAft>
+              <a:buSzPts val="1800"/>
+              <a:buChar char="●"/>
+            </a:pPr>
+            <a:r>
+              <a:rPr lang="en" sz="1800"/>
+              <a:t>Week 2: Imperfect single agent hovering at target on Z axis</a:t>
+            </a:r>
+            <a:endParaRPr sz="1800"/>
+          </a:p>
+          <a:p>
+            <a:pPr indent="-342900" lvl="0" marL="457200" rtl="0" algn="l">
+              <a:lnSpc>
+                <a:spcPct val="115000"/>
+              </a:lnSpc>
+              <a:spcBef>
+                <a:spcPts val="0"/>
+              </a:spcBef>
+              <a:spcAft>
+                <a:spcPts val="0"/>
+              </a:spcAft>
+              <a:buSzPts val="1800"/>
+              <a:buChar char="●"/>
+            </a:pPr>
+            <a:r>
+              <a:rPr lang="en" sz="1800"/>
+              <a:t>Week 4: Successful [0, 0, Z] hover, imperfect [0, Y, Z] hover</a:t>
+            </a:r>
+            <a:endParaRPr sz="1800"/>
+          </a:p>
+          <a:p>
+            <a:pPr indent="-342900" lvl="0" marL="457200" rtl="0" algn="l">
+              <a:lnSpc>
+                <a:spcPct val="115000"/>
+              </a:lnSpc>
+              <a:spcBef>
+                <a:spcPts val="0"/>
+              </a:spcBef>
+              <a:spcAft>
+                <a:spcPts val="0"/>
+              </a:spcAft>
+              <a:buSzPts val="1800"/>
+              <a:buChar char="●"/>
+            </a:pPr>
+            <a:r>
+              <a:rPr lang="en" sz="1800"/>
+              <a:t>Week 6: Successful XYZ hover within small ranges</a:t>
+            </a:r>
+            <a:endParaRPr sz="1800"/>
+          </a:p>
+          <a:p>
+            <a:pPr indent="-342900" lvl="0" marL="457200" rtl="0" algn="l">
+              <a:lnSpc>
+                <a:spcPct val="115000"/>
+              </a:lnSpc>
+              <a:spcBef>
+                <a:spcPts val="0"/>
+              </a:spcBef>
+              <a:spcAft>
+                <a:spcPts val="0"/>
+              </a:spcAft>
+              <a:buSzPts val="1800"/>
+              <a:buChar char="●"/>
+            </a:pPr>
+            <a:r>
+              <a:rPr lang="en" sz="1800"/>
+              <a:t>Week 8: Successful XYZ hover within most ranges, </a:t>
+            </a:r>
+            <a:r>
+              <a:rPr lang="en" sz="1800"/>
+              <a:t>baseline</a:t>
+            </a:r>
+            <a:r>
+              <a:rPr lang="en" sz="1800"/>
+              <a:t> MARL</a:t>
+            </a:r>
+            <a:endParaRPr sz="1800"/>
+          </a:p>
+          <a:p>
+            <a:pPr indent="-342900" lvl="0" marL="457200" rtl="0" algn="l">
+              <a:lnSpc>
+                <a:spcPct val="115000"/>
+              </a:lnSpc>
+              <a:spcBef>
+                <a:spcPts val="0"/>
+              </a:spcBef>
+              <a:spcAft>
+                <a:spcPts val="0"/>
+              </a:spcAft>
+              <a:buSzPts val="1800"/>
+              <a:buChar char="●"/>
+            </a:pPr>
+            <a:r>
+              <a:rPr lang="en" sz="1800"/>
+              <a:t>Week 10: …</a:t>
+            </a:r>
+            <a:endParaRPr sz="1800"/>
+          </a:p>
+          <a:p>
+            <a:pPr indent="-342900" lvl="0" marL="457200" rtl="0" algn="l">
+              <a:lnSpc>
+                <a:spcPct val="115000"/>
+              </a:lnSpc>
+              <a:spcBef>
+                <a:spcPts val="0"/>
+              </a:spcBef>
+              <a:spcAft>
+                <a:spcPts val="0"/>
+              </a:spcAft>
+              <a:buSzPts val="1800"/>
+              <a:buChar char="●"/>
+            </a:pPr>
+            <a:r>
+              <a:rPr lang="en" sz="1800"/>
+              <a:t>Final deadline: Deliverables (e.g., report, demo, paper draft)</a:t>
+            </a:r>
+            <a:endParaRPr sz="1800"/>
+          </a:p>
+          <a:p>
+            <a:pPr indent="-342900" lvl="1" marL="914400" rtl="0" algn="l">
+              <a:lnSpc>
+                <a:spcPct val="115000"/>
+              </a:lnSpc>
+              <a:spcBef>
+                <a:spcPts val="0"/>
+              </a:spcBef>
+              <a:spcAft>
+                <a:spcPts val="0"/>
+              </a:spcAft>
+              <a:buSzPts val="1800"/>
+              <a:buChar char="○"/>
+            </a:pPr>
+            <a:r>
+              <a:rPr lang="en" sz="1800"/>
+              <a:t>Early December</a:t>
+            </a:r>
+            <a:endParaRPr sz="1800"/>
+          </a:p>
+          <a:p>
+            <a:pPr indent="-342900" lvl="0" marL="457200" rtl="0" algn="l">
+              <a:lnSpc>
+                <a:spcPct val="115000"/>
+              </a:lnSpc>
+              <a:spcBef>
+                <a:spcPts val="0"/>
+              </a:spcBef>
+              <a:spcAft>
+                <a:spcPts val="0"/>
+              </a:spcAft>
+              <a:buSzPts val="1800"/>
+              <a:buChar char="●"/>
+            </a:pPr>
+            <a:r>
+              <a:rPr lang="en" sz="1800"/>
+              <a:t>Shifts in schedule</a:t>
+            </a:r>
+            <a:endParaRPr sz="1800"/>
+          </a:p>
+          <a:p>
+            <a:pPr indent="-342900" lvl="1" marL="914400" rtl="0" algn="l">
+              <a:lnSpc>
+                <a:spcPct val="115000"/>
+              </a:lnSpc>
+              <a:spcBef>
+                <a:spcPts val="0"/>
+              </a:spcBef>
+              <a:spcAft>
+                <a:spcPts val="0"/>
+              </a:spcAft>
+              <a:buSzPts val="1800"/>
+              <a:buChar char="○"/>
+            </a:pPr>
+            <a:r>
+              <a:rPr lang="en"/>
+              <a:t>On track</a:t>
+            </a:r>
+            <a:endParaRPr sz="1800"/>
+          </a:p>
+        </p:txBody>
+      </p:sp>
+    </p:spTree>
+  </p:cSld>
+  <p:clrMapOvr>
+    <a:masterClrMapping/>
+  </p:clrMapOvr>
+</p:sld>
+</file>
+
+<file path=ppt/slides/slide32.xml><?xml version="1.0" encoding="utf-8"?>
+<p:sld xmlns:a="http://schemas.openxmlformats.org/drawingml/2006/main" xmlns:r="http://schemas.openxmlformats.org/officeDocument/2006/relationships" xmlns:mc="http://schemas.openxmlformats.org/markup-compatibility/2006" xmlns:mv="urn:schemas-microsoft-com:mac:vml" xmlns:p="http://schemas.openxmlformats.org/presentationml/2006/main" xmlns:c="http://schemas.openxmlformats.org/drawingml/2006/chart" xmlns:dgm="http://schemas.openxmlformats.org/drawingml/2006/diagram" xmlns:o="urn:schemas-microsoft-com:office:office" xmlns:v="urn:schemas-microsoft-com:vml" xmlns:pvml="urn:schemas-microsoft-com:office:powerpoint" xmlns:com="http://schemas.openxmlformats.org/drawingml/2006/compatibility" xmlns:p14="http://schemas.microsoft.com/office/powerpoint/2010/main" xmlns:p15="http://schemas.microsoft.com/office/powerpoint/2012/main" xmlns:ahyp="http://schemas.microsoft.com/office/drawing/2018/hyperlinkcolor">
+  <p:cSld>
+    <p:spTree>
+      <p:nvGrpSpPr>
+        <p:cNvPr id="317" name="Shape 317"/>
+        <p:cNvGrpSpPr/>
+        <p:nvPr/>
+      </p:nvGrpSpPr>
+      <p:grpSpPr>
+        <a:xfrm>
+          <a:off x="0" y="0"/>
+          <a:ext cx="0" cy="0"/>
+          <a:chOff x="0" y="0"/>
+          <a:chExt cx="0" cy="0"/>
+        </a:xfrm>
+      </p:grpSpPr>
+      <p:sp>
+        <p:nvSpPr>
+          <p:cNvPr id="318" name="Google Shape;318;p56"/>
+          <p:cNvSpPr txBox="1"/>
+          <p:nvPr>
+            <p:ph type="title"/>
+          </p:nvPr>
+        </p:nvSpPr>
+        <p:spPr>
+          <a:xfrm>
+            <a:off x="628650" y="273844"/>
+            <a:ext cx="7886700" cy="994200"/>
+          </a:xfrm>
+          <a:prstGeom prst="rect">
+            <a:avLst/>
+          </a:prstGeom>
+          <a:noFill/>
+          <a:ln>
+            <a:noFill/>
+          </a:ln>
+        </p:spPr>
+        <p:txBody>
+          <a:bodyPr anchorCtr="0" anchor="ctr" bIns="34275" lIns="68575" spcFirstLastPara="1" rIns="68575" wrap="square" tIns="34275">
+            <a:normAutofit/>
+          </a:bodyPr>
+          <a:lstStyle/>
+          <a:p>
+            <a:pPr indent="0" lvl="0" marL="0" rtl="0" algn="l">
+              <a:lnSpc>
+                <a:spcPct val="90000"/>
+              </a:lnSpc>
+              <a:spcBef>
+                <a:spcPts val="0"/>
+              </a:spcBef>
+              <a:spcAft>
+                <a:spcPts val="0"/>
+              </a:spcAft>
+              <a:buClr>
+                <a:schemeClr val="dk1"/>
+              </a:buClr>
+              <a:buSzPts val="3300"/>
+              <a:buFont typeface="Play"/>
+              <a:buNone/>
+            </a:pPr>
+            <a:r>
+              <a:rPr lang="en"/>
+              <a:t>Projected Progress for Final Meeting</a:t>
+            </a:r>
+            <a:endParaRPr/>
+          </a:p>
+        </p:txBody>
+      </p:sp>
+      <p:sp>
+        <p:nvSpPr>
+          <p:cNvPr id="319" name="Google Shape;319;p56"/>
+          <p:cNvSpPr txBox="1"/>
+          <p:nvPr>
+            <p:ph idx="1" type="body"/>
+          </p:nvPr>
+        </p:nvSpPr>
+        <p:spPr>
+          <a:xfrm>
+            <a:off x="628650" y="1369226"/>
+            <a:ext cx="7886700" cy="3545400"/>
+          </a:xfrm>
+          <a:prstGeom prst="rect">
+            <a:avLst/>
+          </a:prstGeom>
+          <a:noFill/>
+          <a:ln>
+            <a:noFill/>
+          </a:ln>
+        </p:spPr>
+        <p:txBody>
+          <a:bodyPr anchorCtr="0" anchor="t" bIns="34275" lIns="68575" spcFirstLastPara="1" rIns="68575" wrap="square" tIns="34275">
+            <a:noAutofit/>
+          </a:bodyPr>
+          <a:lstStyle/>
+          <a:p>
+            <a:pPr indent="-342900" lvl="0" marL="457200" rtl="0" algn="l">
+              <a:lnSpc>
+                <a:spcPct val="115000"/>
+              </a:lnSpc>
+              <a:spcBef>
+                <a:spcPts val="800"/>
+              </a:spcBef>
+              <a:spcAft>
+                <a:spcPts val="0"/>
+              </a:spcAft>
+              <a:buSzPts val="1800"/>
+              <a:buChar char="●"/>
+            </a:pPr>
+            <a:r>
+              <a:rPr lang="en" sz="1800"/>
+              <a:t>Now (end of October)</a:t>
+            </a:r>
+            <a:endParaRPr sz="1800"/>
+          </a:p>
+          <a:p>
+            <a:pPr indent="-342900" lvl="1" marL="914400" rtl="0" algn="l">
+              <a:lnSpc>
+                <a:spcPct val="115000"/>
+              </a:lnSpc>
+              <a:spcBef>
+                <a:spcPts val="0"/>
+              </a:spcBef>
+              <a:spcAft>
+                <a:spcPts val="0"/>
+              </a:spcAft>
+              <a:buSzPts val="1800"/>
+              <a:buChar char="○"/>
+            </a:pPr>
+            <a:r>
+              <a:rPr lang="en"/>
+              <a:t>In simulation, getting semi-successful multi-agent hover (getting successful hover might just be a compute issue)</a:t>
+            </a:r>
+            <a:endParaRPr/>
+          </a:p>
+          <a:p>
+            <a:pPr indent="-342900" lvl="0" marL="457200" rtl="0" algn="l">
+              <a:lnSpc>
+                <a:spcPct val="115000"/>
+              </a:lnSpc>
+              <a:spcBef>
+                <a:spcPts val="0"/>
+              </a:spcBef>
+              <a:spcAft>
+                <a:spcPts val="0"/>
+              </a:spcAft>
+              <a:buSzPts val="1800"/>
+              <a:buChar char="●"/>
+            </a:pPr>
+            <a:r>
+              <a:rPr lang="en" sz="1800"/>
+              <a:t>Final meeting (end of November)</a:t>
+            </a:r>
+            <a:endParaRPr sz="1800"/>
+          </a:p>
+          <a:p>
+            <a:pPr indent="-342900" lvl="1" marL="914400" rtl="0" algn="l">
+              <a:lnSpc>
+                <a:spcPct val="115000"/>
+              </a:lnSpc>
+              <a:spcBef>
+                <a:spcPts val="0"/>
+              </a:spcBef>
+              <a:spcAft>
+                <a:spcPts val="0"/>
+              </a:spcAft>
+              <a:buSzPts val="1800"/>
+              <a:buChar char="○"/>
+            </a:pPr>
+            <a:r>
+              <a:rPr lang="en"/>
+              <a:t>Successful multi-agent (2 drones) hover at a target in XYZ in simulation → Testing (and possibly success) on 2 real drones</a:t>
+            </a:r>
+            <a:endParaRPr sz="1800"/>
+          </a:p>
+        </p:txBody>
+      </p:sp>
+    </p:spTree>
+  </p:cSld>
+  <p:clrMapOvr>
+    <a:masterClrMapping/>
+  </p:clrMapOvr>
+</p:sld>
+</file>
+
+<file path=ppt/slides/slide33.xml><?xml version="1.0" encoding="utf-8"?>
+<p:sld xmlns:a="http://schemas.openxmlformats.org/drawingml/2006/main" xmlns:r="http://schemas.openxmlformats.org/officeDocument/2006/relationships" xmlns:mc="http://schemas.openxmlformats.org/markup-compatibility/2006" xmlns:mv="urn:schemas-microsoft-com:mac:vml" xmlns:p="http://schemas.openxmlformats.org/presentationml/2006/main" xmlns:c="http://schemas.openxmlformats.org/drawingml/2006/chart" xmlns:dgm="http://schemas.openxmlformats.org/drawingml/2006/diagram" xmlns:o="urn:schemas-microsoft-com:office:office" xmlns:v="urn:schemas-microsoft-com:vml" xmlns:pvml="urn:schemas-microsoft-com:office:powerpoint" xmlns:com="http://schemas.openxmlformats.org/drawingml/2006/compatibility" xmlns:p14="http://schemas.microsoft.com/office/powerpoint/2010/main" xmlns:p15="http://schemas.microsoft.com/office/powerpoint/2012/main" xmlns:ahyp="http://schemas.microsoft.com/office/drawing/2018/hyperlinkcolor">
+  <p:cSld>
+    <p:spTree>
+      <p:nvGrpSpPr>
+        <p:cNvPr id="323" name="Shape 323"/>
+        <p:cNvGrpSpPr/>
+        <p:nvPr/>
+      </p:nvGrpSpPr>
+      <p:grpSpPr>
+        <a:xfrm>
+          <a:off x="0" y="0"/>
+          <a:ext cx="0" cy="0"/>
+          <a:chOff x="0" y="0"/>
+          <a:chExt cx="0" cy="0"/>
+        </a:xfrm>
+      </p:grpSpPr>
+      <p:sp>
+        <p:nvSpPr>
+          <p:cNvPr id="324" name="Google Shape;324;p57"/>
+          <p:cNvSpPr txBox="1"/>
+          <p:nvPr>
+            <p:ph type="title"/>
+          </p:nvPr>
+        </p:nvSpPr>
+        <p:spPr>
+          <a:xfrm>
+            <a:off x="628650" y="273844"/>
+            <a:ext cx="7886700" cy="994200"/>
+          </a:xfrm>
+          <a:prstGeom prst="rect">
+            <a:avLst/>
+          </a:prstGeom>
+          <a:noFill/>
+          <a:ln>
+            <a:noFill/>
+          </a:ln>
+        </p:spPr>
+        <p:txBody>
+          <a:bodyPr anchorCtr="0" anchor="ctr" bIns="34275" lIns="68575" spcFirstLastPara="1" rIns="68575" wrap="square" tIns="34275">
+            <a:normAutofit/>
+          </a:bodyPr>
+          <a:lstStyle/>
+          <a:p>
+            <a:pPr indent="0" lvl="0" marL="0" rtl="0" algn="l">
+              <a:lnSpc>
+                <a:spcPct val="90000"/>
+              </a:lnSpc>
+              <a:spcBef>
+                <a:spcPts val="0"/>
+              </a:spcBef>
+              <a:spcAft>
+                <a:spcPts val="0"/>
+              </a:spcAft>
+              <a:buClr>
+                <a:schemeClr val="dk1"/>
+              </a:buClr>
+              <a:buSzPts val="3300"/>
+              <a:buFont typeface="Play"/>
+              <a:buNone/>
+            </a:pPr>
+            <a:r>
+              <a:rPr lang="en"/>
+              <a:t>Discussion Points / Questions </a:t>
+            </a:r>
+            <a:endParaRPr/>
+          </a:p>
+        </p:txBody>
+      </p:sp>
+      <p:sp>
+        <p:nvSpPr>
+          <p:cNvPr id="325" name="Google Shape;325;p57"/>
+          <p:cNvSpPr txBox="1"/>
+          <p:nvPr>
+            <p:ph idx="1" type="body"/>
+          </p:nvPr>
+        </p:nvSpPr>
+        <p:spPr>
+          <a:xfrm>
+            <a:off x="628650" y="1171425"/>
+            <a:ext cx="7886700" cy="3648900"/>
+          </a:xfrm>
+          <a:prstGeom prst="rect">
+            <a:avLst/>
+          </a:prstGeom>
+          <a:noFill/>
+          <a:ln>
+            <a:noFill/>
+          </a:ln>
+        </p:spPr>
+        <p:txBody>
+          <a:bodyPr anchorCtr="0" anchor="t" bIns="34275" lIns="68575" spcFirstLastPara="1" rIns="68575" wrap="square" tIns="34275">
+            <a:normAutofit lnSpcReduction="10000"/>
+          </a:bodyPr>
+          <a:lstStyle/>
+          <a:p>
+            <a:pPr indent="-209550" lvl="0" marL="177800" rtl="0" algn="l">
+              <a:lnSpc>
+                <a:spcPct val="115000"/>
+              </a:lnSpc>
+              <a:spcBef>
+                <a:spcPts val="0"/>
+              </a:spcBef>
+              <a:spcAft>
+                <a:spcPts val="0"/>
+              </a:spcAft>
+              <a:buSzPts val="1900"/>
+              <a:buChar char="●"/>
+            </a:pPr>
+            <a:r>
+              <a:rPr b="1" lang="en" sz="1900"/>
+              <a:t>Testing on actual drones</a:t>
+            </a:r>
+            <a:endParaRPr b="1" sz="1900"/>
+          </a:p>
+          <a:p>
+            <a:pPr indent="-209550" lvl="1" marL="520700" rtl="0" algn="l">
+              <a:lnSpc>
+                <a:spcPct val="115000"/>
+              </a:lnSpc>
+              <a:spcBef>
+                <a:spcPts val="0"/>
+              </a:spcBef>
+              <a:spcAft>
+                <a:spcPts val="0"/>
+              </a:spcAft>
+              <a:buSzPts val="1900"/>
+              <a:buChar char="○"/>
+            </a:pPr>
+            <a:r>
+              <a:rPr lang="en" sz="1900"/>
+              <a:t>Booking </a:t>
+            </a:r>
+            <a:r>
+              <a:rPr lang="en" sz="1900"/>
+              <a:t>time slots</a:t>
+            </a:r>
+            <a:r>
+              <a:rPr lang="en" sz="1900"/>
+              <a:t> (how / what is the setup like)?</a:t>
+            </a:r>
+            <a:endParaRPr sz="1900"/>
+          </a:p>
+          <a:p>
+            <a:pPr indent="-209550" lvl="1" marL="520700" rtl="0" algn="l">
+              <a:lnSpc>
+                <a:spcPct val="115000"/>
+              </a:lnSpc>
+              <a:spcBef>
+                <a:spcPts val="0"/>
+              </a:spcBef>
+              <a:spcAft>
+                <a:spcPts val="0"/>
+              </a:spcAft>
+              <a:buSzPts val="1900"/>
+              <a:buChar char="○"/>
+            </a:pPr>
+            <a:r>
+              <a:rPr lang="en" sz="1900"/>
+              <a:t>Safety considerations</a:t>
+            </a:r>
+            <a:endParaRPr sz="1900"/>
+          </a:p>
+          <a:p>
+            <a:pPr indent="-209550" lvl="2" marL="863600" rtl="0" algn="l">
+              <a:lnSpc>
+                <a:spcPct val="115000"/>
+              </a:lnSpc>
+              <a:spcBef>
+                <a:spcPts val="0"/>
+              </a:spcBef>
+              <a:spcAft>
+                <a:spcPts val="0"/>
+              </a:spcAft>
+              <a:buSzPts val="1900"/>
+              <a:buChar char="■"/>
+            </a:pPr>
+            <a:r>
+              <a:rPr lang="en" sz="1900"/>
+              <a:t>What kind of fallbacks should we program into the agent?</a:t>
+            </a:r>
+            <a:endParaRPr sz="1900"/>
+          </a:p>
+          <a:p>
+            <a:pPr indent="-209550" lvl="3" marL="1206500" rtl="0" algn="l">
+              <a:lnSpc>
+                <a:spcPct val="115000"/>
+              </a:lnSpc>
+              <a:spcBef>
+                <a:spcPts val="0"/>
+              </a:spcBef>
+              <a:spcAft>
+                <a:spcPts val="0"/>
+              </a:spcAft>
+              <a:buSzPts val="1900"/>
+              <a:buChar char="●"/>
+            </a:pPr>
+            <a:r>
+              <a:rPr lang="en" sz="1900"/>
+              <a:t>E.g. if pos/rot/vel &gt; n → Apply neutral hover control?</a:t>
+            </a:r>
+            <a:endParaRPr sz="1900"/>
+          </a:p>
+          <a:p>
+            <a:pPr indent="-209550" lvl="3" marL="1206500" rtl="0" algn="l">
+              <a:lnSpc>
+                <a:spcPct val="115000"/>
+              </a:lnSpc>
+              <a:spcBef>
+                <a:spcPts val="0"/>
+              </a:spcBef>
+              <a:spcAft>
+                <a:spcPts val="0"/>
+              </a:spcAft>
+              <a:buSzPts val="1900"/>
+              <a:buChar char="●"/>
+            </a:pPr>
+            <a:r>
+              <a:rPr lang="en" sz="1900"/>
+              <a:t>Physical safety constraints e.g. tether to drone?</a:t>
+            </a:r>
+            <a:endParaRPr sz="1900"/>
+          </a:p>
+          <a:p>
+            <a:pPr indent="-209550" lvl="2" marL="863600" rtl="0" algn="l">
+              <a:lnSpc>
+                <a:spcPct val="115000"/>
+              </a:lnSpc>
+              <a:spcBef>
+                <a:spcPts val="0"/>
+              </a:spcBef>
+              <a:spcAft>
+                <a:spcPts val="0"/>
+              </a:spcAft>
+              <a:buSzPts val="1900"/>
+              <a:buChar char="■"/>
+            </a:pPr>
+            <a:r>
+              <a:rPr lang="en" sz="1900"/>
+              <a:t>Landing → Run for t seconds then apply sub-neutral thrust?</a:t>
+            </a:r>
+            <a:endParaRPr sz="1900"/>
+          </a:p>
+          <a:p>
+            <a:pPr indent="-209550" lvl="3" marL="1206500" rtl="0" algn="l">
+              <a:lnSpc>
+                <a:spcPct val="115000"/>
+              </a:lnSpc>
+              <a:spcBef>
+                <a:spcPts val="0"/>
+              </a:spcBef>
+              <a:spcAft>
+                <a:spcPts val="0"/>
+              </a:spcAft>
+              <a:buSzPts val="1900"/>
+              <a:buChar char="●"/>
+            </a:pPr>
+            <a:r>
+              <a:rPr lang="en" sz="1900"/>
+              <a:t>E.g. after 10 seconds, apply (hover thrust - 0.01)?</a:t>
+            </a:r>
+            <a:endParaRPr sz="1900"/>
+          </a:p>
+          <a:p>
+            <a:pPr indent="-209550" lvl="0" marL="177800" rtl="0" algn="l">
+              <a:lnSpc>
+                <a:spcPct val="115000"/>
+              </a:lnSpc>
+              <a:spcBef>
+                <a:spcPts val="0"/>
+              </a:spcBef>
+              <a:spcAft>
+                <a:spcPts val="0"/>
+              </a:spcAft>
+              <a:buSzPts val="1900"/>
+              <a:buChar char="●"/>
+            </a:pPr>
+            <a:r>
+              <a:rPr b="1" lang="en" sz="1900"/>
+              <a:t>Multi-XYZ success → Improvement suggestions?</a:t>
+            </a:r>
+            <a:endParaRPr b="1" sz="1900"/>
+          </a:p>
+          <a:p>
+            <a:pPr indent="-209550" lvl="1" marL="520700" rtl="0" algn="l">
+              <a:lnSpc>
+                <a:spcPct val="115000"/>
+              </a:lnSpc>
+              <a:spcBef>
+                <a:spcPts val="0"/>
+              </a:spcBef>
+              <a:spcAft>
+                <a:spcPts val="0"/>
+              </a:spcAft>
+              <a:buSzPts val="1900"/>
+              <a:buChar char="○"/>
+            </a:pPr>
+            <a:r>
+              <a:rPr lang="en" sz="1900"/>
+              <a:t>Any other suggestions / ideas?</a:t>
+            </a:r>
+            <a:endParaRPr sz="1900"/>
+          </a:p>
+          <a:p>
+            <a:pPr indent="-209550" lvl="1" marL="520700" rtl="0" algn="l">
+              <a:lnSpc>
+                <a:spcPct val="115000"/>
+              </a:lnSpc>
+              <a:spcBef>
+                <a:spcPts val="0"/>
+              </a:spcBef>
+              <a:spcAft>
+                <a:spcPts val="0"/>
+              </a:spcAft>
+              <a:buSzPts val="1900"/>
+              <a:buChar char="○"/>
+            </a:pPr>
+            <a:r>
+              <a:rPr lang="en" sz="1900"/>
+              <a:t>Currently has ~50% success rate at best, see next slides</a:t>
+            </a:r>
+            <a:endParaRPr sz="1900"/>
+          </a:p>
+        </p:txBody>
+      </p:sp>
+    </p:spTree>
+  </p:cSld>
+  <p:clrMapOvr>
+    <a:masterClrMapping/>
+  </p:clrMapOvr>
+</p:sld>
+</file>
+
+<file path=ppt/slides/slide34.xml><?xml version="1.0" encoding="utf-8"?>
+<p:sld xmlns:a="http://schemas.openxmlformats.org/drawingml/2006/main" xmlns:r="http://schemas.openxmlformats.org/officeDocument/2006/relationships" xmlns:mc="http://schemas.openxmlformats.org/markup-compatibility/2006" xmlns:mv="urn:schemas-microsoft-com:mac:vml" xmlns:p="http://schemas.openxmlformats.org/presentationml/2006/main" xmlns:c="http://schemas.openxmlformats.org/drawingml/2006/chart" xmlns:dgm="http://schemas.openxmlformats.org/drawingml/2006/diagram" xmlns:o="urn:schemas-microsoft-com:office:office" xmlns:v="urn:schemas-microsoft-com:vml" xmlns:pvml="urn:schemas-microsoft-com:office:powerpoint" xmlns:com="http://schemas.openxmlformats.org/drawingml/2006/compatibility" xmlns:p14="http://schemas.microsoft.com/office/powerpoint/2010/main" xmlns:p15="http://schemas.microsoft.com/office/powerpoint/2012/main" xmlns:ahyp="http://schemas.microsoft.com/office/drawing/2018/hyperlinkcolor">
+  <p:cSld>
+    <p:spTree>
+      <p:nvGrpSpPr>
+        <p:cNvPr id="329" name="Shape 329"/>
+        <p:cNvGrpSpPr/>
+        <p:nvPr/>
+      </p:nvGrpSpPr>
+      <p:grpSpPr>
+        <a:xfrm>
+          <a:off x="0" y="0"/>
+          <a:ext cx="0" cy="0"/>
+          <a:chOff x="0" y="0"/>
+          <a:chExt cx="0" cy="0"/>
+        </a:xfrm>
+      </p:grpSpPr>
+      <p:sp>
+        <p:nvSpPr>
+          <p:cNvPr id="330" name="Google Shape;330;p58"/>
+          <p:cNvSpPr txBox="1"/>
+          <p:nvPr>
+            <p:ph type="title"/>
+          </p:nvPr>
+        </p:nvSpPr>
+        <p:spPr>
+          <a:xfrm>
+            <a:off x="628650" y="273850"/>
+            <a:ext cx="8055900" cy="994200"/>
+          </a:xfrm>
+          <a:prstGeom prst="rect">
+            <a:avLst/>
+          </a:prstGeom>
+        </p:spPr>
+        <p:txBody>
+          <a:bodyPr anchorCtr="0" anchor="ctr" bIns="34275" lIns="68575" spcFirstLastPara="1" rIns="68575" wrap="square" tIns="34275">
+            <a:normAutofit/>
+          </a:bodyPr>
+          <a:lstStyle/>
+          <a:p>
+            <a:pPr indent="0" lvl="0" marL="0" rtl="0" algn="l">
+              <a:spcBef>
+                <a:spcPts val="0"/>
+              </a:spcBef>
+              <a:spcAft>
+                <a:spcPts val="0"/>
+              </a:spcAft>
+              <a:buNone/>
+            </a:pPr>
+            <a:r>
+              <a:rPr lang="en" sz="2400"/>
+              <a:t>Multi-Agent training, 40 envs, 600k steps per → ~2hrs</a:t>
+            </a:r>
+            <a:endParaRPr sz="2400"/>
+          </a:p>
+        </p:txBody>
+      </p:sp>
+      <p:pic>
+        <p:nvPicPr>
+          <p:cNvPr id="331" name="Google Shape;331;p58" title="multi_40env.png"/>
+          <p:cNvPicPr preferRelativeResize="0"/>
+          <p:nvPr/>
+        </p:nvPicPr>
+        <p:blipFill>
+          <a:blip r:embed="rId3">
+            <a:alphaModFix/>
+          </a:blip>
+          <a:stretch>
+            <a:fillRect/>
+          </a:stretch>
+        </p:blipFill>
+        <p:spPr>
+          <a:xfrm>
+            <a:off x="741213" y="1097300"/>
+            <a:ext cx="7661575" cy="3830775"/>
+          </a:xfrm>
+          <a:prstGeom prst="rect">
+            <a:avLst/>
+          </a:prstGeom>
+          <a:noFill/>
+          <a:ln>
+            <a:noFill/>
+          </a:ln>
+        </p:spPr>
+      </p:pic>
+    </p:spTree>
+  </p:cSld>
+  <p:clrMapOvr>
+    <a:masterClrMapping/>
+  </p:clrMapOvr>
+</p:sld>
+</file>
+
+<file path=ppt/slides/slide35.xml><?xml version="1.0" encoding="utf-8"?>
+<p:sld xmlns:a="http://schemas.openxmlformats.org/drawingml/2006/main" xmlns:r="http://schemas.openxmlformats.org/officeDocument/2006/relationships" xmlns:mc="http://schemas.openxmlformats.org/markup-compatibility/2006" xmlns:mv="urn:schemas-microsoft-com:mac:vml" xmlns:p="http://schemas.openxmlformats.org/presentationml/2006/main" xmlns:c="http://schemas.openxmlformats.org/drawingml/2006/chart" xmlns:dgm="http://schemas.openxmlformats.org/drawingml/2006/diagram" xmlns:o="urn:schemas-microsoft-com:office:office" xmlns:v="urn:schemas-microsoft-com:vml" xmlns:pvml="urn:schemas-microsoft-com:office:powerpoint" xmlns:com="http://schemas.openxmlformats.org/drawingml/2006/compatibility" xmlns:p14="http://schemas.microsoft.com/office/powerpoint/2010/main" xmlns:p15="http://schemas.microsoft.com/office/powerpoint/2012/main" xmlns:ahyp="http://schemas.microsoft.com/office/drawing/2018/hyperlinkcolor">
+  <p:cSld>
+    <p:spTree>
+      <p:nvGrpSpPr>
+        <p:cNvPr id="335" name="Shape 335"/>
+        <p:cNvGrpSpPr/>
+        <p:nvPr/>
+      </p:nvGrpSpPr>
+      <p:grpSpPr>
+        <a:xfrm>
+          <a:off x="0" y="0"/>
+          <a:ext cx="0" cy="0"/>
+          <a:chOff x="0" y="0"/>
+          <a:chExt cx="0" cy="0"/>
+        </a:xfrm>
+      </p:grpSpPr>
+      <p:sp>
+        <p:nvSpPr>
+          <p:cNvPr id="336" name="Google Shape;336;p59"/>
+          <p:cNvSpPr txBox="1"/>
+          <p:nvPr>
+            <p:ph type="title"/>
+          </p:nvPr>
+        </p:nvSpPr>
+        <p:spPr>
+          <a:xfrm>
+            <a:off x="628650" y="273850"/>
+            <a:ext cx="8055900" cy="994200"/>
+          </a:xfrm>
+          <a:prstGeom prst="rect">
+            <a:avLst/>
+          </a:prstGeom>
+        </p:spPr>
+        <p:txBody>
+          <a:bodyPr anchorCtr="0" anchor="ctr" bIns="34275" lIns="68575" spcFirstLastPara="1" rIns="68575" wrap="square" tIns="34275">
+            <a:normAutofit/>
+          </a:bodyPr>
+          <a:lstStyle/>
+          <a:p>
+            <a:pPr indent="0" lvl="0" marL="0" rtl="0" algn="l">
+              <a:spcBef>
+                <a:spcPts val="0"/>
+              </a:spcBef>
+              <a:spcAft>
+                <a:spcPts val="0"/>
+              </a:spcAft>
+              <a:buNone/>
+            </a:pPr>
+            <a:r>
+              <a:rPr lang="en" sz="2400"/>
+              <a:t>Multi-Agent training, 40 envs, 2.4mil steps per → ~8hrs</a:t>
+            </a:r>
+            <a:endParaRPr sz="2400"/>
+          </a:p>
+        </p:txBody>
+      </p:sp>
+      <p:pic>
+        <p:nvPicPr>
+          <p:cNvPr id="337" name="Google Shape;337;p59" title="40env_2mil_400k_step.png"/>
+          <p:cNvPicPr preferRelativeResize="0"/>
+          <p:nvPr/>
+        </p:nvPicPr>
+        <p:blipFill>
+          <a:blip r:embed="rId3">
+            <a:alphaModFix/>
+          </a:blip>
+          <a:stretch>
+            <a:fillRect/>
+          </a:stretch>
+        </p:blipFill>
+        <p:spPr>
+          <a:xfrm>
+            <a:off x="1001350" y="1164625"/>
+            <a:ext cx="7141300" cy="3570650"/>
+          </a:xfrm>
+          <a:prstGeom prst="rect">
+            <a:avLst/>
+          </a:prstGeom>
+          <a:noFill/>
+          <a:ln>
+            <a:noFill/>
+          </a:ln>
+        </p:spPr>
+      </p:pic>
+    </p:spTree>
+  </p:cSld>
+  <p:clrMapOvr>
+    <a:masterClrMapping/>
+  </p:clrMapOvr>
+</p:sld>
+</file>
+
+<file path=ppt/slides/slide36.xml><?xml version="1.0" encoding="utf-8"?>
+<p:sld xmlns:a="http://schemas.openxmlformats.org/drawingml/2006/main" xmlns:r="http://schemas.openxmlformats.org/officeDocument/2006/relationships" xmlns:mc="http://schemas.openxmlformats.org/markup-compatibility/2006" xmlns:mv="urn:schemas-microsoft-com:mac:vml" xmlns:p="http://schemas.openxmlformats.org/presentationml/2006/main" xmlns:c="http://schemas.openxmlformats.org/drawingml/2006/chart" xmlns:dgm="http://schemas.openxmlformats.org/drawingml/2006/diagram" xmlns:o="urn:schemas-microsoft-com:office:office" xmlns:v="urn:schemas-microsoft-com:vml" xmlns:pvml="urn:schemas-microsoft-com:office:powerpoint" xmlns:com="http://schemas.openxmlformats.org/drawingml/2006/compatibility" xmlns:p14="http://schemas.microsoft.com/office/powerpoint/2010/main" xmlns:p15="http://schemas.microsoft.com/office/powerpoint/2012/main" xmlns:ahyp="http://schemas.microsoft.com/office/drawing/2018/hyperlinkcolor">
+  <p:cSld>
+    <p:spTree>
+      <p:nvGrpSpPr>
+        <p:cNvPr id="341" name="Shape 341"/>
+        <p:cNvGrpSpPr/>
+        <p:nvPr/>
+      </p:nvGrpSpPr>
+      <p:grpSpPr>
+        <a:xfrm>
+          <a:off x="0" y="0"/>
+          <a:ext cx="0" cy="0"/>
+          <a:chOff x="0" y="0"/>
+          <a:chExt cx="0" cy="0"/>
+        </a:xfrm>
+      </p:grpSpPr>
+      <p:sp>
+        <p:nvSpPr>
+          <p:cNvPr id="342" name="Google Shape;342;p60"/>
+          <p:cNvSpPr txBox="1"/>
+          <p:nvPr>
+            <p:ph type="title"/>
+          </p:nvPr>
+        </p:nvSpPr>
+        <p:spPr>
+          <a:xfrm>
+            <a:off x="628650" y="152123"/>
+            <a:ext cx="7886700" cy="696300"/>
+          </a:xfrm>
+          <a:prstGeom prst="rect">
+            <a:avLst/>
+          </a:prstGeom>
+          <a:noFill/>
+          <a:ln>
+            <a:noFill/>
+          </a:ln>
+        </p:spPr>
+        <p:txBody>
+          <a:bodyPr anchorCtr="0" anchor="ctr" bIns="34275" lIns="68575" spcFirstLastPara="1" rIns="68575" wrap="square" tIns="34275">
+            <a:normAutofit/>
+          </a:bodyPr>
+          <a:lstStyle/>
+          <a:p>
+            <a:pPr indent="0" lvl="0" marL="0" rtl="0" algn="l">
+              <a:lnSpc>
+                <a:spcPct val="90000"/>
+              </a:lnSpc>
+              <a:spcBef>
+                <a:spcPts val="0"/>
+              </a:spcBef>
+              <a:spcAft>
+                <a:spcPts val="0"/>
+              </a:spcAft>
+              <a:buClr>
+                <a:schemeClr val="dk1"/>
+              </a:buClr>
+              <a:buSzPts val="3300"/>
+              <a:buFont typeface="Play"/>
+              <a:buNone/>
+            </a:pPr>
+            <a:r>
+              <a:rPr lang="en" sz="2400"/>
+              <a:t>Log Snapshot (Cumulative)</a:t>
+            </a:r>
+            <a:endParaRPr sz="2400"/>
+          </a:p>
+        </p:txBody>
+      </p:sp>
+      <p:graphicFrame>
+        <p:nvGraphicFramePr>
+          <p:cNvPr id="343" name="Google Shape;343;p60"/>
+          <p:cNvGraphicFramePr/>
+          <p:nvPr/>
+        </p:nvGraphicFramePr>
+        <p:xfrm>
+          <a:off x="1071015" y="848436"/>
+          <a:ext cx="3000000" cy="3000000"/>
+        </p:xfrm>
+        <a:graphic>
+          <a:graphicData uri="http://schemas.openxmlformats.org/drawingml/2006/table">
+            <a:tbl>
+              <a:tblPr bandRow="1" firstRow="1">
+                <a:noFill/>
+                <a:tableStyleId>{33C79BD9-4D4F-410C-A80E-0E65E8C5DBDC}</a:tableStyleId>
+              </a:tblPr>
+              <a:tblGrid>
+                <a:gridCol w="1531600"/>
+                <a:gridCol w="1531600"/>
+                <a:gridCol w="1531600"/>
+                <a:gridCol w="1531600"/>
+              </a:tblGrid>
+              <a:tr h="602150">
+                <a:tc>
+                  <a:txBody>
+                    <a:bodyPr/>
+                    <a:lstStyle/>
+                    <a:p>
+                      <a:pPr indent="0" lvl="0" marL="0" marR="0" rtl="0" algn="ctr">
+                        <a:lnSpc>
+                          <a:spcPct val="100000"/>
+                        </a:lnSpc>
+                        <a:spcBef>
+                          <a:spcPts val="0"/>
+                        </a:spcBef>
+                        <a:spcAft>
+                          <a:spcPts val="0"/>
+                        </a:spcAft>
+                        <a:buClr>
+                          <a:schemeClr val="dk1"/>
+                        </a:buClr>
+                        <a:buSzPts val="1400"/>
+                        <a:buFont typeface="Arial"/>
+                        <a:buNone/>
+                      </a:pPr>
+                      <a:r>
+                        <a:rPr b="1" lang="en" sz="1400" u="none" cap="none" strike="noStrike"/>
+                        <a:t>Date</a:t>
+                      </a:r>
+                      <a:endParaRPr sz="1400" u="none" cap="none" strike="noStrike"/>
+                    </a:p>
+                  </a:txBody>
+                  <a:tcPr marT="34300" marB="34300" marR="68600" marL="68600"/>
+                </a:tc>
+                <a:tc>
+                  <a:txBody>
+                    <a:bodyPr/>
+                    <a:lstStyle/>
+                    <a:p>
+                      <a:pPr indent="0" lvl="0" marL="0" marR="0" rtl="0" algn="l">
+                        <a:spcBef>
+                          <a:spcPts val="0"/>
+                        </a:spcBef>
+                        <a:spcAft>
+                          <a:spcPts val="0"/>
+                        </a:spcAft>
+                        <a:buClr>
+                          <a:srgbClr val="FFFFFF"/>
+                        </a:buClr>
+                        <a:buSzPts val="1400"/>
+                        <a:buFont typeface="Arial"/>
+                        <a:buNone/>
+                      </a:pPr>
+                      <a:r>
+                        <a:rPr b="1" i="0" lang="en" sz="1400" u="none" cap="none" strike="noStrike">
+                          <a:solidFill>
+                            <a:srgbClr val="FFFFFF"/>
+                          </a:solidFill>
+                          <a:latin typeface="Arial"/>
+                          <a:ea typeface="Arial"/>
+                          <a:cs typeface="Arial"/>
+                          <a:sym typeface="Arial"/>
+                        </a:rPr>
+                        <a:t>Progress  Summary</a:t>
+                      </a:r>
+                      <a:endParaRPr sz="1100"/>
+                    </a:p>
+                  </a:txBody>
+                  <a:tcPr marT="34300" marB="34300" marR="68600" marL="68600"/>
+                </a:tc>
+                <a:tc>
+                  <a:txBody>
+                    <a:bodyPr/>
+                    <a:lstStyle/>
+                    <a:p>
+                      <a:pPr indent="0" lvl="0" marL="0" marR="0" rtl="0" algn="ctr">
+                        <a:lnSpc>
+                          <a:spcPct val="100000"/>
+                        </a:lnSpc>
+                        <a:spcBef>
+                          <a:spcPts val="0"/>
+                        </a:spcBef>
+                        <a:spcAft>
+                          <a:spcPts val="0"/>
+                        </a:spcAft>
+                        <a:buClr>
+                          <a:srgbClr val="FFFFFF"/>
+                        </a:buClr>
+                        <a:buSzPts val="1400"/>
+                        <a:buFont typeface="Arial"/>
+                        <a:buNone/>
+                      </a:pPr>
+                      <a:r>
+                        <a:rPr b="1" i="0" lang="en" sz="1400" u="none" cap="none" strike="noStrike">
+                          <a:solidFill>
+                            <a:srgbClr val="FFFFFF"/>
+                          </a:solidFill>
+                          <a:latin typeface="Arial"/>
+                          <a:ea typeface="Arial"/>
+                          <a:cs typeface="Arial"/>
+                          <a:sym typeface="Arial"/>
+                        </a:rPr>
+                        <a:t>Next Steps</a:t>
+                      </a:r>
+                      <a:endParaRPr sz="1100"/>
+                    </a:p>
+                    <a:p>
+                      <a:pPr indent="0" lvl="0" marL="0" marR="0" rtl="0" algn="l">
+                        <a:spcBef>
+                          <a:spcPts val="0"/>
+                        </a:spcBef>
+                        <a:spcAft>
+                          <a:spcPts val="0"/>
+                        </a:spcAft>
+                        <a:buClr>
+                          <a:schemeClr val="dk1"/>
+                        </a:buClr>
+                        <a:buSzPts val="1400"/>
+                        <a:buFont typeface="Arial"/>
+                        <a:buNone/>
+                      </a:pPr>
+                      <a:r>
+                        <a:t/>
+                      </a:r>
+                      <a:endParaRPr sz="1400" u="none" cap="none" strike="noStrike"/>
+                    </a:p>
+                  </a:txBody>
+                  <a:tcPr marT="34300" marB="34300" marR="68600" marL="68600"/>
+                </a:tc>
+                <a:tc>
+                  <a:txBody>
+                    <a:bodyPr/>
+                    <a:lstStyle/>
+                    <a:p>
+                      <a:pPr indent="0" lvl="0" marL="0" marR="0" rtl="0" algn="l">
+                        <a:spcBef>
+                          <a:spcPts val="0"/>
+                        </a:spcBef>
+                        <a:spcAft>
+                          <a:spcPts val="0"/>
+                        </a:spcAft>
+                        <a:buClr>
+                          <a:srgbClr val="FFFFFF"/>
+                        </a:buClr>
+                        <a:buSzPts val="1400"/>
+                        <a:buFont typeface="Arial"/>
+                        <a:buNone/>
+                      </a:pPr>
+                      <a:r>
+                        <a:rPr b="1" i="0" lang="en" sz="1400" u="none" cap="none" strike="noStrike">
+                          <a:solidFill>
+                            <a:srgbClr val="FFFFFF"/>
+                          </a:solidFill>
+                          <a:latin typeface="Arial"/>
+                          <a:ea typeface="Arial"/>
+                          <a:cs typeface="Arial"/>
+                          <a:sym typeface="Arial"/>
+                        </a:rPr>
+                        <a:t>Notes</a:t>
+                      </a:r>
+                      <a:endParaRPr sz="1400" u="none" cap="none" strike="noStrike"/>
+                    </a:p>
+                  </a:txBody>
+                  <a:tcPr marT="34300" marB="34300" marR="68600" marL="68600"/>
+                </a:tc>
+              </a:tr>
+              <a:tr h="823275">
+                <a:tc>
+                  <a:txBody>
+                    <a:bodyPr/>
+                    <a:lstStyle/>
+                    <a:p>
+                      <a:pPr indent="0" lvl="0" marL="0" marR="0" rtl="0" algn="l">
+                        <a:spcBef>
+                          <a:spcPts val="0"/>
+                        </a:spcBef>
+                        <a:spcAft>
+                          <a:spcPts val="0"/>
+                        </a:spcAft>
+                        <a:buClr>
+                          <a:schemeClr val="dk1"/>
+                        </a:buClr>
+                        <a:buSzPts val="1400"/>
+                        <a:buFont typeface="Arial"/>
+                        <a:buNone/>
+                      </a:pPr>
+                      <a:r>
+                        <a:rPr lang="en" sz="1400" u="none" cap="none" strike="noStrike"/>
+                        <a:t>Sept. 1</a:t>
+                      </a:r>
+                      <a:r>
+                        <a:rPr lang="en"/>
+                        <a:t>6</a:t>
+                      </a:r>
+                      <a:endParaRPr sz="1100"/>
+                    </a:p>
+                  </a:txBody>
+                  <a:tcPr marT="34300" marB="34300" marR="68600" marL="68600"/>
+                </a:tc>
+                <a:tc>
+                  <a:txBody>
+                    <a:bodyPr/>
+                    <a:lstStyle/>
+                    <a:p>
+                      <a:pPr indent="0" lvl="0" marL="0" marR="0" rtl="0" algn="l">
+                        <a:lnSpc>
+                          <a:spcPct val="100000"/>
+                        </a:lnSpc>
+                        <a:spcBef>
+                          <a:spcPts val="0"/>
+                        </a:spcBef>
+                        <a:spcAft>
+                          <a:spcPts val="0"/>
+                        </a:spcAft>
+                        <a:buClr>
+                          <a:schemeClr val="dk1"/>
+                        </a:buClr>
+                        <a:buSzPts val="1400"/>
+                        <a:buFont typeface="Arial"/>
+                        <a:buNone/>
+                      </a:pPr>
+                      <a:r>
+                        <a:rPr lang="en" sz="1400" u="none" cap="none" strike="noStrike"/>
+                        <a:t>Set up MuJoCo sim; baseline PPO-Clip training</a:t>
+                      </a:r>
+                      <a:endParaRPr sz="1100"/>
+                    </a:p>
+                    <a:p>
+                      <a:pPr indent="0" lvl="0" marL="0" marR="0" rtl="0" algn="l">
+                        <a:spcBef>
+                          <a:spcPts val="0"/>
+                        </a:spcBef>
+                        <a:spcAft>
+                          <a:spcPts val="0"/>
+                        </a:spcAft>
+                        <a:buClr>
+                          <a:schemeClr val="dk1"/>
+                        </a:buClr>
+                        <a:buSzPts val="1400"/>
+                        <a:buFont typeface="Arial"/>
+                        <a:buNone/>
+                      </a:pPr>
+                      <a:r>
+                        <a:t/>
+                      </a:r>
+                      <a:endParaRPr sz="1400" u="none" cap="none" strike="noStrike"/>
+                    </a:p>
+                  </a:txBody>
+                  <a:tcPr marT="34300" marB="34300" marR="68600" marL="68600"/>
+                </a:tc>
+                <a:tc>
+                  <a:txBody>
+                    <a:bodyPr/>
+                    <a:lstStyle/>
+                    <a:p>
+                      <a:pPr indent="0" lvl="0" marL="0" marR="0" rtl="0" algn="l">
+                        <a:lnSpc>
+                          <a:spcPct val="100000"/>
+                        </a:lnSpc>
+                        <a:spcBef>
+                          <a:spcPts val="0"/>
+                        </a:spcBef>
+                        <a:spcAft>
+                          <a:spcPts val="0"/>
+                        </a:spcAft>
+                        <a:buClr>
+                          <a:schemeClr val="dk1"/>
+                        </a:buClr>
+                        <a:buSzPts val="1400"/>
+                        <a:buFont typeface="Arial"/>
+                        <a:buNone/>
+                      </a:pPr>
+                      <a:r>
+                        <a:rPr lang="en">
+                          <a:latin typeface="Arial"/>
+                          <a:ea typeface="Arial"/>
+                          <a:cs typeface="Arial"/>
+                          <a:sym typeface="Arial"/>
+                        </a:rPr>
+                        <a:t>Refine current setup, explore MAPPO theory</a:t>
+                      </a:r>
+                      <a:endParaRPr sz="1100"/>
+                    </a:p>
+                    <a:p>
+                      <a:pPr indent="0" lvl="0" marL="0" marR="0" rtl="0" algn="l">
+                        <a:spcBef>
+                          <a:spcPts val="0"/>
+                        </a:spcBef>
+                        <a:spcAft>
+                          <a:spcPts val="0"/>
+                        </a:spcAft>
+                        <a:buClr>
+                          <a:schemeClr val="dk1"/>
+                        </a:buClr>
+                        <a:buSzPts val="1400"/>
+                        <a:buFont typeface="Arial"/>
+                        <a:buNone/>
+                      </a:pPr>
+                      <a:r>
+                        <a:t/>
+                      </a:r>
+                      <a:endParaRPr sz="1400" u="none" cap="none" strike="noStrike"/>
+                    </a:p>
+                  </a:txBody>
+                  <a:tcPr marT="34300" marB="34300" marR="68600" marL="68600"/>
+                </a:tc>
+                <a:tc>
+                  <a:txBody>
+                    <a:bodyPr/>
+                    <a:lstStyle/>
+                    <a:p>
+                      <a:pPr indent="0" lvl="0" marL="0" marR="0" rtl="0" algn="l">
+                        <a:lnSpc>
+                          <a:spcPct val="100000"/>
+                        </a:lnSpc>
+                        <a:spcBef>
+                          <a:spcPts val="0"/>
+                        </a:spcBef>
+                        <a:spcAft>
+                          <a:spcPts val="0"/>
+                        </a:spcAft>
+                        <a:buClr>
+                          <a:schemeClr val="dk1"/>
+                        </a:buClr>
+                        <a:buSzPts val="1400"/>
+                        <a:buFont typeface="Arial"/>
+                        <a:buNone/>
+                      </a:pPr>
+                      <a:r>
+                        <a:rPr lang="en">
+                          <a:latin typeface="Arial"/>
+                          <a:ea typeface="Arial"/>
+                          <a:cs typeface="Arial"/>
+                          <a:sym typeface="Arial"/>
+                        </a:rPr>
+                        <a:t>Policy / env is current imperfect / inconsistent</a:t>
+                      </a:r>
+                      <a:endParaRPr sz="1100"/>
+                    </a:p>
+                    <a:p>
+                      <a:pPr indent="0" lvl="0" marL="0" marR="0" rtl="0" algn="l">
+                        <a:spcBef>
+                          <a:spcPts val="0"/>
+                        </a:spcBef>
+                        <a:spcAft>
+                          <a:spcPts val="0"/>
+                        </a:spcAft>
+                        <a:buClr>
+                          <a:schemeClr val="dk1"/>
+                        </a:buClr>
+                        <a:buSzPts val="1400"/>
+                        <a:buFont typeface="Arial"/>
+                        <a:buNone/>
+                      </a:pPr>
+                      <a:r>
+                        <a:t/>
+                      </a:r>
+                      <a:endParaRPr sz="1400" u="none" cap="none" strike="noStrike"/>
+                    </a:p>
+                  </a:txBody>
+                  <a:tcPr marT="34300" marB="34300" marR="68600" marL="68600"/>
+                </a:tc>
+              </a:tr>
+              <a:tr h="811225">
+                <a:tc>
+                  <a:txBody>
+                    <a:bodyPr/>
+                    <a:lstStyle/>
+                    <a:p>
+                      <a:pPr indent="0" lvl="0" marL="0" marR="0" rtl="0" algn="l">
+                        <a:spcBef>
+                          <a:spcPts val="0"/>
+                        </a:spcBef>
+                        <a:spcAft>
+                          <a:spcPts val="0"/>
+                        </a:spcAft>
+                        <a:buNone/>
+                      </a:pPr>
+                      <a:r>
+                        <a:rPr lang="en" sz="1400" u="none" cap="none" strike="noStrike"/>
+                        <a:t>Sept. 30</a:t>
+                      </a:r>
+                      <a:endParaRPr sz="1100"/>
+                    </a:p>
+                  </a:txBody>
+                  <a:tcPr marT="34300" marB="34300" marR="68600" marL="68600"/>
+                </a:tc>
+                <a:tc>
+                  <a:txBody>
+                    <a:bodyPr/>
+                    <a:lstStyle/>
+                    <a:p>
+                      <a:pPr indent="0" lvl="0" marL="0" marR="0" rtl="0" algn="l">
+                        <a:lnSpc>
+                          <a:spcPct val="100000"/>
+                        </a:lnSpc>
+                        <a:spcBef>
+                          <a:spcPts val="0"/>
+                        </a:spcBef>
+                        <a:spcAft>
+                          <a:spcPts val="0"/>
+                        </a:spcAft>
+                        <a:buClr>
+                          <a:schemeClr val="dk1"/>
+                        </a:buClr>
+                        <a:buSzPts val="1400"/>
+                        <a:buFont typeface="Arial"/>
+                        <a:buNone/>
+                      </a:pPr>
+                      <a:r>
+                        <a:rPr lang="en"/>
+                        <a:t>Successful Z hover.</a:t>
+                      </a:r>
+                      <a:endParaRPr/>
+                    </a:p>
+                    <a:p>
+                      <a:pPr indent="0" lvl="0" marL="0" marR="0" rtl="0" algn="l">
+                        <a:lnSpc>
+                          <a:spcPct val="100000"/>
+                        </a:lnSpc>
+                        <a:spcBef>
+                          <a:spcPts val="0"/>
+                        </a:spcBef>
+                        <a:spcAft>
+                          <a:spcPts val="0"/>
+                        </a:spcAft>
+                        <a:buClr>
+                          <a:schemeClr val="dk1"/>
+                        </a:buClr>
+                        <a:buSzPts val="1400"/>
+                        <a:buFont typeface="Arial"/>
+                        <a:buNone/>
+                      </a:pPr>
+                      <a:r>
+                        <a:rPr lang="en"/>
+                        <a:t>Semi-successful YZ hover</a:t>
+                      </a:r>
+                      <a:endParaRPr/>
+                    </a:p>
+                  </a:txBody>
+                  <a:tcPr marT="34300" marB="34300" marR="68600" marL="68600"/>
+                </a:tc>
+                <a:tc>
+                  <a:txBody>
+                    <a:bodyPr/>
+                    <a:lstStyle/>
+                    <a:p>
+                      <a:pPr indent="0" lvl="0" marL="0" marR="0" rtl="0" algn="l">
+                        <a:lnSpc>
+                          <a:spcPct val="100000"/>
+                        </a:lnSpc>
+                        <a:spcBef>
+                          <a:spcPts val="0"/>
+                        </a:spcBef>
+                        <a:spcAft>
+                          <a:spcPts val="0"/>
+                        </a:spcAft>
+                        <a:buClr>
+                          <a:schemeClr val="dk1"/>
+                        </a:buClr>
+                        <a:buSzPts val="1400"/>
+                        <a:buFont typeface="Arial"/>
+                        <a:buNone/>
+                      </a:pPr>
+                      <a:r>
+                        <a:rPr lang="en"/>
+                        <a:t>Refine YZ hover and move to XYZ, explore MAPPO theory</a:t>
+                      </a:r>
+                      <a:endParaRPr/>
+                    </a:p>
+                  </a:txBody>
+                  <a:tcPr marT="34300" marB="34300" marR="68600" marL="68600"/>
+                </a:tc>
+                <a:tc>
+                  <a:txBody>
+                    <a:bodyPr/>
+                    <a:lstStyle/>
+                    <a:p>
+                      <a:pPr indent="0" lvl="0" marL="0" marR="0" rtl="0" algn="l">
+                        <a:lnSpc>
+                          <a:spcPct val="100000"/>
+                        </a:lnSpc>
+                        <a:spcBef>
+                          <a:spcPts val="0"/>
+                        </a:spcBef>
+                        <a:spcAft>
+                          <a:spcPts val="0"/>
+                        </a:spcAft>
+                        <a:buClr>
+                          <a:schemeClr val="dk1"/>
+                        </a:buClr>
+                        <a:buSzPts val="1400"/>
+                        <a:buFont typeface="Arial"/>
+                        <a:buNone/>
+                      </a:pPr>
+                      <a:r>
+                        <a:t/>
+                      </a:r>
+                      <a:endParaRPr sz="1100"/>
+                    </a:p>
+                  </a:txBody>
+                  <a:tcPr marT="34300" marB="34300" marR="68600" marL="68600"/>
+                </a:tc>
+              </a:tr>
+              <a:tr h="342775">
+                <a:tc>
+                  <a:txBody>
+                    <a:bodyPr/>
+                    <a:lstStyle/>
+                    <a:p>
+                      <a:pPr indent="0" lvl="0" marL="0" marR="0" rtl="0" algn="l">
+                        <a:spcBef>
+                          <a:spcPts val="0"/>
+                        </a:spcBef>
+                        <a:spcAft>
+                          <a:spcPts val="0"/>
+                        </a:spcAft>
+                        <a:buNone/>
+                      </a:pPr>
+                      <a:r>
+                        <a:rPr lang="en"/>
+                        <a:t>Oct. 14</a:t>
+                      </a:r>
+                      <a:endParaRPr sz="1400"/>
+                    </a:p>
+                  </a:txBody>
+                  <a:tcPr marT="34300" marB="34300" marR="68600" marL="68600"/>
+                </a:tc>
+                <a:tc>
+                  <a:txBody>
+                    <a:bodyPr/>
+                    <a:lstStyle/>
+                    <a:p>
+                      <a:pPr indent="0" lvl="0" marL="0" marR="0" rtl="0" algn="l">
+                        <a:spcBef>
+                          <a:spcPts val="0"/>
+                        </a:spcBef>
+                        <a:spcAft>
+                          <a:spcPts val="0"/>
+                        </a:spcAft>
+                        <a:buNone/>
+                      </a:pPr>
+                      <a:r>
+                        <a:rPr lang="en"/>
+                        <a:t>Small XYZ hover</a:t>
+                      </a:r>
+                      <a:endParaRPr sz="1400"/>
+                    </a:p>
+                  </a:txBody>
+                  <a:tcPr marT="34300" marB="34300" marR="68600" marL="68600"/>
+                </a:tc>
+                <a:tc>
+                  <a:txBody>
+                    <a:bodyPr/>
+                    <a:lstStyle/>
+                    <a:p>
+                      <a:pPr indent="0" lvl="0" marL="0" marR="0" rtl="0" algn="l">
+                        <a:spcBef>
+                          <a:spcPts val="0"/>
+                        </a:spcBef>
+                        <a:spcAft>
+                          <a:spcPts val="0"/>
+                        </a:spcAft>
+                        <a:buNone/>
+                      </a:pPr>
+                      <a:r>
+                        <a:rPr lang="en"/>
+                        <a:t>Full XYZ hover and MAPPO implementation</a:t>
+                      </a:r>
+                      <a:endParaRPr sz="1400"/>
+                    </a:p>
+                  </a:txBody>
+                  <a:tcPr marT="34300" marB="34300" marR="68600" marL="68600"/>
+                </a:tc>
+                <a:tc>
+                  <a:txBody>
+                    <a:bodyPr/>
+                    <a:lstStyle/>
+                    <a:p>
+                      <a:pPr indent="0" lvl="0" marL="0" marR="0" rtl="0" algn="l">
+                        <a:spcBef>
+                          <a:spcPts val="0"/>
+                        </a:spcBef>
+                        <a:spcAft>
+                          <a:spcPts val="0"/>
+                        </a:spcAft>
+                        <a:buNone/>
+                      </a:pPr>
+                      <a:r>
+                        <a:t/>
+                      </a:r>
+                      <a:endParaRPr sz="1400"/>
+                    </a:p>
+                  </a:txBody>
+                  <a:tcPr marT="34300" marB="34300" marR="68600" marL="68600"/>
+                </a:tc>
+              </a:tr>
+              <a:tr h="342775">
+                <a:tc>
+                  <a:txBody>
+                    <a:bodyPr/>
+                    <a:lstStyle/>
+                    <a:p>
+                      <a:pPr indent="0" lvl="0" marL="0" marR="0" rtl="0" algn="l">
+                        <a:spcBef>
+                          <a:spcPts val="0"/>
+                        </a:spcBef>
+                        <a:spcAft>
+                          <a:spcPts val="0"/>
+                        </a:spcAft>
+                        <a:buNone/>
+                      </a:pPr>
+                      <a:r>
+                        <a:rPr lang="en"/>
+                        <a:t>Oct 28</a:t>
+                      </a:r>
+                      <a:endParaRPr/>
+                    </a:p>
+                  </a:txBody>
+                  <a:tcPr marT="34300" marB="34300" marR="68600" marL="68600"/>
+                </a:tc>
+                <a:tc>
+                  <a:txBody>
+                    <a:bodyPr/>
+                    <a:lstStyle/>
+                    <a:p>
+                      <a:pPr indent="0" lvl="0" marL="0" marR="0" rtl="0" algn="l">
+                        <a:spcBef>
+                          <a:spcPts val="0"/>
+                        </a:spcBef>
+                        <a:spcAft>
+                          <a:spcPts val="0"/>
+                        </a:spcAft>
+                        <a:buNone/>
+                      </a:pPr>
+                      <a:r>
+                        <a:rPr lang="en"/>
+                        <a:t>Single + Multi XYZ hover</a:t>
+                      </a:r>
+                      <a:endParaRPr/>
+                    </a:p>
+                  </a:txBody>
+                  <a:tcPr marT="34300" marB="34300" marR="68600" marL="68600"/>
+                </a:tc>
+                <a:tc>
+                  <a:txBody>
+                    <a:bodyPr/>
+                    <a:lstStyle/>
+                    <a:p>
+                      <a:pPr indent="0" lvl="0" marL="0" marR="0" rtl="0" algn="l">
+                        <a:spcBef>
+                          <a:spcPts val="0"/>
+                        </a:spcBef>
+                        <a:spcAft>
+                          <a:spcPts val="0"/>
+                        </a:spcAft>
+                        <a:buNone/>
+                      </a:pPr>
+                      <a:r>
+                        <a:rPr lang="en"/>
+                        <a:t>Better multi-XYZ hover, testing on actual drones</a:t>
+                      </a:r>
+                      <a:endParaRPr/>
+                    </a:p>
+                  </a:txBody>
+                  <a:tcPr marT="34300" marB="34300" marR="68600" marL="68600"/>
+                </a:tc>
+                <a:tc>
+                  <a:txBody>
+                    <a:bodyPr/>
+                    <a:lstStyle/>
+                    <a:p>
+                      <a:pPr indent="0" lvl="0" marL="0" marR="0" rtl="0" algn="l">
+                        <a:spcBef>
+                          <a:spcPts val="0"/>
+                        </a:spcBef>
+                        <a:spcAft>
+                          <a:spcPts val="0"/>
+                        </a:spcAft>
+                        <a:buNone/>
+                      </a:pPr>
+                      <a:r>
+                        <a:t/>
+                      </a:r>
+                      <a:endParaRPr sz="1400"/>
+                    </a:p>
+                  </a:txBody>
+                  <a:tcPr marT="34300" marB="34300" marR="68600" marL="68600"/>
+                </a:tc>
+              </a:tr>
+            </a:tbl>
+          </a:graphicData>
+        </a:graphic>
+      </p:graphicFrame>
     </p:spTree>
   </p:cSld>
   <p:clrMapOvr>
@@ -24923,7 +29033,7 @@
             <a:tbl>
               <a:tblPr bandRow="1" firstRow="1">
                 <a:noFill/>
-                <a:tableStyleId>{1B8563D4-BB8A-4F7E-A35C-4C2900C004D8}</a:tableStyleId>
+                <a:tableStyleId>{33C79BD9-4D4F-410C-A80E-0E65E8C5DBDC}</a:tableStyleId>
               </a:tblPr>
               <a:tblGrid>
                 <a:gridCol w="1531600"/>
@@ -25510,285 +29620,6 @@
 </file>
 
 <file path=ppt/theme/theme1.xml><?xml version="1.0" encoding="utf-8"?>
-<a:theme xmlns:a="http://schemas.openxmlformats.org/drawingml/2006/main" xmlns:r="http://schemas.openxmlformats.org/officeDocument/2006/relationships" name="office theme">
-  <a:themeElements>
-    <a:clrScheme name="Office">
-      <a:dk1>
-        <a:srgbClr val="000000"/>
-      </a:dk1>
-      <a:lt1>
-        <a:srgbClr val="FFFFFF"/>
-      </a:lt1>
-      <a:dk2>
-        <a:srgbClr val="0E2841"/>
-      </a:dk2>
-      <a:lt2>
-        <a:srgbClr val="E8E8E8"/>
-      </a:lt2>
-      <a:accent1>
-        <a:srgbClr val="156082"/>
-      </a:accent1>
-      <a:accent2>
-        <a:srgbClr val="E97132"/>
-      </a:accent2>
-      <a:accent3>
-        <a:srgbClr val="196B24"/>
-      </a:accent3>
-      <a:accent4>
-        <a:srgbClr val="0F9ED5"/>
-      </a:accent4>
-      <a:accent5>
-        <a:srgbClr val="A02B93"/>
-      </a:accent5>
-      <a:accent6>
-        <a:srgbClr val="4EA72E"/>
-      </a:accent6>
-      <a:hlink>
-        <a:srgbClr val="467886"/>
-      </a:hlink>
-      <a:folHlink>
-        <a:srgbClr val="96607D"/>
-      </a:folHlink>
-    </a:clrScheme>
-    <a:fontScheme name="Office">
-      <a:majorFont>
-        <a:latin typeface="Arial"/>
-        <a:ea typeface=""/>
-        <a:cs typeface=""/>
-        <a:font script="Jpan" typeface="ＭＳ Ｐゴシック"/>
-        <a:font script="Hang" typeface="맑은 고딕"/>
-        <a:font script="Hans" typeface="宋体"/>
-        <a:font script="Hant" typeface="新細明體"/>
-        <a:font script="Arab" typeface="Times New Roman"/>
-        <a:font script="Hebr" typeface="Times New Roman"/>
-        <a:font script="Thai" typeface="Angsana New"/>
-        <a:font script="Ethi" typeface="Nyala"/>
-        <a:font script="Beng" typeface="Vrinda"/>
-        <a:font script="Gujr" typeface="Shruti"/>
-        <a:font script="Khmr" typeface="MoolBoran"/>
-        <a:font script="Knda" typeface="Tunga"/>
-        <a:font script="Guru" typeface="Raavi"/>
-        <a:font script="Cans" typeface="Euphemia"/>
-        <a:font script="Cher" typeface="Plantagenet Cherokee"/>
-        <a:font script="Yiii" typeface="Microsoft Yi Baiti"/>
-        <a:font script="Tibt" typeface="Microsoft Himalaya"/>
-        <a:font script="Thaa" typeface="MV Boli"/>
-        <a:font script="Deva" typeface="Mangal"/>
-        <a:font script="Telu" typeface="Gautami"/>
-        <a:font script="Taml" typeface="Latha"/>
-        <a:font script="Syrc" typeface="Estrangelo Edessa"/>
-        <a:font script="Orya" typeface="Kalinga"/>
-        <a:font script="Mlym" typeface="Kartika"/>
-        <a:font script="Laoo" typeface="DokChampa"/>
-        <a:font script="Sinh" typeface="Iskoola Pota"/>
-        <a:font script="Mong" typeface="Mongolian Baiti"/>
-        <a:font script="Viet" typeface="Times New Roman"/>
-        <a:font script="Uigh" typeface="Microsoft Uighur"/>
-        <a:font script="Geor" typeface="Sylfaen"/>
-      </a:majorFont>
-      <a:minorFont>
-        <a:latin typeface="Arial"/>
-        <a:ea typeface=""/>
-        <a:cs typeface=""/>
-        <a:font script="Jpan" typeface="ＭＳ Ｐゴシック"/>
-        <a:font script="Hang" typeface="맑은 고딕"/>
-        <a:font script="Hans" typeface="宋体"/>
-        <a:font script="Hant" typeface="新細明體"/>
-        <a:font script="Arab" typeface="Arial"/>
-        <a:font script="Hebr" typeface="Arial"/>
-        <a:font script="Thai" typeface="Cordia New"/>
-        <a:font script="Ethi" typeface="Nyala"/>
-        <a:font script="Beng" typeface="Vrinda"/>
-        <a:font script="Gujr" typeface="Shruti"/>
-        <a:font script="Khmr" typeface="DaunPenh"/>
-        <a:font script="Knda" typeface="Tunga"/>
-        <a:font script="Guru" typeface="Raavi"/>
-        <a:font script="Cans" typeface="Euphemia"/>
-        <a:font script="Cher" typeface="Plantagenet Cherokee"/>
-        <a:font script="Yiii" typeface="Microsoft Yi Baiti"/>
-        <a:font script="Tibt" typeface="Microsoft Himalaya"/>
-        <a:font script="Thaa" typeface="MV Boli"/>
-        <a:font script="Deva" typeface="Mangal"/>
-        <a:font script="Telu" typeface="Gautami"/>
-        <a:font script="Taml" typeface="Latha"/>
-        <a:font script="Syrc" typeface="Estrangelo Edessa"/>
-        <a:font script="Orya" typeface="Kalinga"/>
-        <a:font script="Mlym" typeface="Kartika"/>
-        <a:font script="Laoo" typeface="DokChampa"/>
-        <a:font script="Sinh" typeface="Iskoola Pota"/>
-        <a:font script="Mong" typeface="Mongolian Baiti"/>
-        <a:font script="Viet" typeface="Arial"/>
-        <a:font script="Uigh" typeface="Microsoft Uighur"/>
-        <a:font script="Geor" typeface="Sylfaen"/>
-      </a:minorFont>
-    </a:fontScheme>
-    <a:fmtScheme name="Office">
-      <a:fillStyleLst>
-        <a:solidFill>
-          <a:schemeClr val="phClr"/>
-        </a:solidFill>
-        <a:gradFill rotWithShape="1">
-          <a:gsLst>
-            <a:gs pos="0">
-              <a:schemeClr val="phClr">
-                <a:tint val="50000"/>
-                <a:satMod val="300000"/>
-              </a:schemeClr>
-            </a:gs>
-            <a:gs pos="35000">
-              <a:schemeClr val="phClr">
-                <a:tint val="37000"/>
-                <a:satMod val="300000"/>
-              </a:schemeClr>
-            </a:gs>
-            <a:gs pos="100000">
-              <a:schemeClr val="phClr">
-                <a:tint val="15000"/>
-                <a:satMod val="350000"/>
-              </a:schemeClr>
-            </a:gs>
-          </a:gsLst>
-          <a:lin ang="16200000" scaled="1"/>
-        </a:gradFill>
-        <a:gradFill rotWithShape="1">
-          <a:gsLst>
-            <a:gs pos="0">
-              <a:schemeClr val="phClr">
-                <a:tint val="100000"/>
-                <a:shade val="100000"/>
-                <a:satMod val="130000"/>
-              </a:schemeClr>
-            </a:gs>
-            <a:gs pos="100000">
-              <a:schemeClr val="phClr">
-                <a:tint val="50000"/>
-                <a:shade val="100000"/>
-                <a:satMod val="350000"/>
-              </a:schemeClr>
-            </a:gs>
-          </a:gsLst>
-          <a:lin ang="16200000" scaled="0"/>
-        </a:gradFill>
-      </a:fillStyleLst>
-      <a:lnStyleLst>
-        <a:ln w="9525" cap="flat" cmpd="sng" algn="ctr">
-          <a:solidFill>
-            <a:schemeClr val="phClr">
-              <a:shade val="95000"/>
-              <a:satMod val="105000"/>
-            </a:schemeClr>
-          </a:solidFill>
-          <a:prstDash val="solid"/>
-        </a:ln>
-        <a:ln w="25400" cap="flat" cmpd="sng" algn="ctr">
-          <a:solidFill>
-            <a:schemeClr val="phClr"/>
-          </a:solidFill>
-          <a:prstDash val="solid"/>
-        </a:ln>
-        <a:ln w="38100" cap="flat" cmpd="sng" algn="ctr">
-          <a:solidFill>
-            <a:schemeClr val="phClr"/>
-          </a:solidFill>
-          <a:prstDash val="solid"/>
-        </a:ln>
-      </a:lnStyleLst>
-      <a:effectStyleLst>
-        <a:effectStyle>
-          <a:effectLst>
-            <a:outerShdw blurRad="40000" dist="20000" dir="5400000" rotWithShape="0">
-              <a:srgbClr val="000000">
-                <a:alpha val="38000"/>
-              </a:srgbClr>
-            </a:outerShdw>
-          </a:effectLst>
-        </a:effectStyle>
-        <a:effectStyle>
-          <a:effectLst>
-            <a:outerShdw blurRad="40000" dist="23000" dir="5400000" rotWithShape="0">
-              <a:srgbClr val="000000">
-                <a:alpha val="35000"/>
-              </a:srgbClr>
-            </a:outerShdw>
-          </a:effectLst>
-        </a:effectStyle>
-        <a:effectStyle>
-          <a:effectLst>
-            <a:outerShdw blurRad="40000" dist="23000" dir="5400000" rotWithShape="0">
-              <a:srgbClr val="000000">
-                <a:alpha val="35000"/>
-              </a:srgbClr>
-            </a:outerShdw>
-          </a:effectLst>
-          <a:scene3d>
-            <a:camera prst="orthographicFront">
-              <a:rot lat="0" lon="0" rev="0"/>
-            </a:camera>
-            <a:lightRig rig="threePt" dir="t">
-              <a:rot lat="0" lon="0" rev="1200000"/>
-            </a:lightRig>
-          </a:scene3d>
-          <a:sp3d>
-            <a:bevelT w="63500" h="25400"/>
-          </a:sp3d>
-        </a:effectStyle>
-      </a:effectStyleLst>
-      <a:bgFillStyleLst>
-        <a:solidFill>
-          <a:schemeClr val="phClr"/>
-        </a:solidFill>
-        <a:gradFill rotWithShape="1">
-          <a:gsLst>
-            <a:gs pos="0">
-              <a:schemeClr val="phClr">
-                <a:tint val="40000"/>
-                <a:satMod val="350000"/>
-              </a:schemeClr>
-            </a:gs>
-            <a:gs pos="40000">
-              <a:schemeClr val="phClr">
-                <a:tint val="45000"/>
-                <a:shade val="99000"/>
-                <a:satMod val="350000"/>
-              </a:schemeClr>
-            </a:gs>
-            <a:gs pos="100000">
-              <a:schemeClr val="phClr">
-                <a:shade val="20000"/>
-                <a:satMod val="255000"/>
-              </a:schemeClr>
-            </a:gs>
-          </a:gsLst>
-          <a:path path="circle">
-            <a:fillToRect l="50000" t="-80000" r="50000" b="180000"/>
-          </a:path>
-        </a:gradFill>
-        <a:gradFill rotWithShape="1">
-          <a:gsLst>
-            <a:gs pos="0">
-              <a:schemeClr val="phClr">
-                <a:tint val="80000"/>
-                <a:satMod val="300000"/>
-              </a:schemeClr>
-            </a:gs>
-            <a:gs pos="100000">
-              <a:schemeClr val="phClr">
-                <a:shade val="30000"/>
-                <a:satMod val="200000"/>
-              </a:schemeClr>
-            </a:gs>
-          </a:gsLst>
-          <a:path path="circle">
-            <a:fillToRect l="50000" t="50000" r="50000" b="50000"/>
-          </a:path>
-        </a:gradFill>
-      </a:bgFillStyleLst>
-    </a:fmtScheme>
-  </a:themeElements>
-</a:theme>
-</file>
-
-<file path=ppt/theme/theme2.xml><?xml version="1.0" encoding="utf-8"?>
 <a:theme xmlns:a="http://schemas.openxmlformats.org/drawingml/2006/main" xmlns:r="http://schemas.openxmlformats.org/officeDocument/2006/relationships" name="Simple Light">
   <a:themeElements>
     <a:clrScheme name="Simple Light">
@@ -26067,7 +29898,7 @@
 </a:theme>
 </file>
 
-<file path=ppt/theme/theme3.xml><?xml version="1.0" encoding="utf-8"?>
+<file path=ppt/theme/theme2.xml><?xml version="1.0" encoding="utf-8"?>
 <a:theme xmlns:a="http://schemas.openxmlformats.org/drawingml/2006/main" xmlns:r="http://schemas.openxmlformats.org/officeDocument/2006/relationships">
   <a:themeElements>
     <a:clrScheme name="Default">
@@ -26344,4 +30175,283 @@
     </a:fmtScheme>
   </a:themeElements>
 </a:theme>
+</file>
+
+<file path=ppt/theme/theme3.xml><?xml version="1.0" encoding="utf-8"?>
+<a:theme xmlns:a="http://schemas.openxmlformats.org/drawingml/2006/main" xmlns:r="http://schemas.openxmlformats.org/officeDocument/2006/relationships" name="office theme">
+  <a:themeElements>
+    <a:clrScheme name="Office">
+      <a:dk1>
+        <a:srgbClr val="000000"/>
+      </a:dk1>
+      <a:lt1>
+        <a:srgbClr val="FFFFFF"/>
+      </a:lt1>
+      <a:dk2>
+        <a:srgbClr val="0E2841"/>
+      </a:dk2>
+      <a:lt2>
+        <a:srgbClr val="E8E8E8"/>
+      </a:lt2>
+      <a:accent1>
+        <a:srgbClr val="156082"/>
+      </a:accent1>
+      <a:accent2>
+        <a:srgbClr val="E97132"/>
+      </a:accent2>
+      <a:accent3>
+        <a:srgbClr val="196B24"/>
+      </a:accent3>
+      <a:accent4>
+        <a:srgbClr val="0F9ED5"/>
+      </a:accent4>
+      <a:accent5>
+        <a:srgbClr val="A02B93"/>
+      </a:accent5>
+      <a:accent6>
+        <a:srgbClr val="4EA72E"/>
+      </a:accent6>
+      <a:hlink>
+        <a:srgbClr val="467886"/>
+      </a:hlink>
+      <a:folHlink>
+        <a:srgbClr val="96607D"/>
+      </a:folHlink>
+    </a:clrScheme>
+    <a:fontScheme name="Office">
+      <a:majorFont>
+        <a:latin typeface="Arial"/>
+        <a:ea typeface=""/>
+        <a:cs typeface=""/>
+        <a:font script="Jpan" typeface="ＭＳ Ｐゴシック"/>
+        <a:font script="Hang" typeface="맑은 고딕"/>
+        <a:font script="Hans" typeface="宋体"/>
+        <a:font script="Hant" typeface="新細明體"/>
+        <a:font script="Arab" typeface="Times New Roman"/>
+        <a:font script="Hebr" typeface="Times New Roman"/>
+        <a:font script="Thai" typeface="Angsana New"/>
+        <a:font script="Ethi" typeface="Nyala"/>
+        <a:font script="Beng" typeface="Vrinda"/>
+        <a:font script="Gujr" typeface="Shruti"/>
+        <a:font script="Khmr" typeface="MoolBoran"/>
+        <a:font script="Knda" typeface="Tunga"/>
+        <a:font script="Guru" typeface="Raavi"/>
+        <a:font script="Cans" typeface="Euphemia"/>
+        <a:font script="Cher" typeface="Plantagenet Cherokee"/>
+        <a:font script="Yiii" typeface="Microsoft Yi Baiti"/>
+        <a:font script="Tibt" typeface="Microsoft Himalaya"/>
+        <a:font script="Thaa" typeface="MV Boli"/>
+        <a:font script="Deva" typeface="Mangal"/>
+        <a:font script="Telu" typeface="Gautami"/>
+        <a:font script="Taml" typeface="Latha"/>
+        <a:font script="Syrc" typeface="Estrangelo Edessa"/>
+        <a:font script="Orya" typeface="Kalinga"/>
+        <a:font script="Mlym" typeface="Kartika"/>
+        <a:font script="Laoo" typeface="DokChampa"/>
+        <a:font script="Sinh" typeface="Iskoola Pota"/>
+        <a:font script="Mong" typeface="Mongolian Baiti"/>
+        <a:font script="Viet" typeface="Times New Roman"/>
+        <a:font script="Uigh" typeface="Microsoft Uighur"/>
+        <a:font script="Geor" typeface="Sylfaen"/>
+      </a:majorFont>
+      <a:minorFont>
+        <a:latin typeface="Arial"/>
+        <a:ea typeface=""/>
+        <a:cs typeface=""/>
+        <a:font script="Jpan" typeface="ＭＳ Ｐゴシック"/>
+        <a:font script="Hang" typeface="맑은 고딕"/>
+        <a:font script="Hans" typeface="宋体"/>
+        <a:font script="Hant" typeface="新細明體"/>
+        <a:font script="Arab" typeface="Arial"/>
+        <a:font script="Hebr" typeface="Arial"/>
+        <a:font script="Thai" typeface="Cordia New"/>
+        <a:font script="Ethi" typeface="Nyala"/>
+        <a:font script="Beng" typeface="Vrinda"/>
+        <a:font script="Gujr" typeface="Shruti"/>
+        <a:font script="Khmr" typeface="DaunPenh"/>
+        <a:font script="Knda" typeface="Tunga"/>
+        <a:font script="Guru" typeface="Raavi"/>
+        <a:font script="Cans" typeface="Euphemia"/>
+        <a:font script="Cher" typeface="Plantagenet Cherokee"/>
+        <a:font script="Yiii" typeface="Microsoft Yi Baiti"/>
+        <a:font script="Tibt" typeface="Microsoft Himalaya"/>
+        <a:font script="Thaa" typeface="MV Boli"/>
+        <a:font script="Deva" typeface="Mangal"/>
+        <a:font script="Telu" typeface="Gautami"/>
+        <a:font script="Taml" typeface="Latha"/>
+        <a:font script="Syrc" typeface="Estrangelo Edessa"/>
+        <a:font script="Orya" typeface="Kalinga"/>
+        <a:font script="Mlym" typeface="Kartika"/>
+        <a:font script="Laoo" typeface="DokChampa"/>
+        <a:font script="Sinh" typeface="Iskoola Pota"/>
+        <a:font script="Mong" typeface="Mongolian Baiti"/>
+        <a:font script="Viet" typeface="Arial"/>
+        <a:font script="Uigh" typeface="Microsoft Uighur"/>
+        <a:font script="Geor" typeface="Sylfaen"/>
+      </a:minorFont>
+    </a:fontScheme>
+    <a:fmtScheme name="Office">
+      <a:fillStyleLst>
+        <a:solidFill>
+          <a:schemeClr val="phClr"/>
+        </a:solidFill>
+        <a:gradFill rotWithShape="1">
+          <a:gsLst>
+            <a:gs pos="0">
+              <a:schemeClr val="phClr">
+                <a:tint val="50000"/>
+                <a:satMod val="300000"/>
+              </a:schemeClr>
+            </a:gs>
+            <a:gs pos="35000">
+              <a:schemeClr val="phClr">
+                <a:tint val="37000"/>
+                <a:satMod val="300000"/>
+              </a:schemeClr>
+            </a:gs>
+            <a:gs pos="100000">
+              <a:schemeClr val="phClr">
+                <a:tint val="15000"/>
+                <a:satMod val="350000"/>
+              </a:schemeClr>
+            </a:gs>
+          </a:gsLst>
+          <a:lin ang="16200000" scaled="1"/>
+        </a:gradFill>
+        <a:gradFill rotWithShape="1">
+          <a:gsLst>
+            <a:gs pos="0">
+              <a:schemeClr val="phClr">
+                <a:tint val="100000"/>
+                <a:shade val="100000"/>
+                <a:satMod val="130000"/>
+              </a:schemeClr>
+            </a:gs>
+            <a:gs pos="100000">
+              <a:schemeClr val="phClr">
+                <a:tint val="50000"/>
+                <a:shade val="100000"/>
+                <a:satMod val="350000"/>
+              </a:schemeClr>
+            </a:gs>
+          </a:gsLst>
+          <a:lin ang="16200000" scaled="0"/>
+        </a:gradFill>
+      </a:fillStyleLst>
+      <a:lnStyleLst>
+        <a:ln w="9525" cap="flat" cmpd="sng" algn="ctr">
+          <a:solidFill>
+            <a:schemeClr val="phClr">
+              <a:shade val="95000"/>
+              <a:satMod val="105000"/>
+            </a:schemeClr>
+          </a:solidFill>
+          <a:prstDash val="solid"/>
+        </a:ln>
+        <a:ln w="25400" cap="flat" cmpd="sng" algn="ctr">
+          <a:solidFill>
+            <a:schemeClr val="phClr"/>
+          </a:solidFill>
+          <a:prstDash val="solid"/>
+        </a:ln>
+        <a:ln w="38100" cap="flat" cmpd="sng" algn="ctr">
+          <a:solidFill>
+            <a:schemeClr val="phClr"/>
+          </a:solidFill>
+          <a:prstDash val="solid"/>
+        </a:ln>
+      </a:lnStyleLst>
+      <a:effectStyleLst>
+        <a:effectStyle>
+          <a:effectLst>
+            <a:outerShdw blurRad="40000" dist="20000" dir="5400000" rotWithShape="0">
+              <a:srgbClr val="000000">
+                <a:alpha val="38000"/>
+              </a:srgbClr>
+            </a:outerShdw>
+          </a:effectLst>
+        </a:effectStyle>
+        <a:effectStyle>
+          <a:effectLst>
+            <a:outerShdw blurRad="40000" dist="23000" dir="5400000" rotWithShape="0">
+              <a:srgbClr val="000000">
+                <a:alpha val="35000"/>
+              </a:srgbClr>
+            </a:outerShdw>
+          </a:effectLst>
+        </a:effectStyle>
+        <a:effectStyle>
+          <a:effectLst>
+            <a:outerShdw blurRad="40000" dist="23000" dir="5400000" rotWithShape="0">
+              <a:srgbClr val="000000">
+                <a:alpha val="35000"/>
+              </a:srgbClr>
+            </a:outerShdw>
+          </a:effectLst>
+          <a:scene3d>
+            <a:camera prst="orthographicFront">
+              <a:rot lat="0" lon="0" rev="0"/>
+            </a:camera>
+            <a:lightRig rig="threePt" dir="t">
+              <a:rot lat="0" lon="0" rev="1200000"/>
+            </a:lightRig>
+          </a:scene3d>
+          <a:sp3d>
+            <a:bevelT w="63500" h="25400"/>
+          </a:sp3d>
+        </a:effectStyle>
+      </a:effectStyleLst>
+      <a:bgFillStyleLst>
+        <a:solidFill>
+          <a:schemeClr val="phClr"/>
+        </a:solidFill>
+        <a:gradFill rotWithShape="1">
+          <a:gsLst>
+            <a:gs pos="0">
+              <a:schemeClr val="phClr">
+                <a:tint val="40000"/>
+                <a:satMod val="350000"/>
+              </a:schemeClr>
+            </a:gs>
+            <a:gs pos="40000">
+              <a:schemeClr val="phClr">
+                <a:tint val="45000"/>
+                <a:shade val="99000"/>
+                <a:satMod val="350000"/>
+              </a:schemeClr>
+            </a:gs>
+            <a:gs pos="100000">
+              <a:schemeClr val="phClr">
+                <a:shade val="20000"/>
+                <a:satMod val="255000"/>
+              </a:schemeClr>
+            </a:gs>
+          </a:gsLst>
+          <a:path path="circle">
+            <a:fillToRect l="50000" t="-80000" r="50000" b="180000"/>
+          </a:path>
+        </a:gradFill>
+        <a:gradFill rotWithShape="1">
+          <a:gsLst>
+            <a:gs pos="0">
+              <a:schemeClr val="phClr">
+                <a:tint val="80000"/>
+                <a:satMod val="300000"/>
+              </a:schemeClr>
+            </a:gs>
+            <a:gs pos="100000">
+              <a:schemeClr val="phClr">
+                <a:shade val="30000"/>
+                <a:satMod val="200000"/>
+              </a:schemeClr>
+            </a:gs>
+          </a:gsLst>
+          <a:path path="circle">
+            <a:fillToRect l="50000" t="50000" r="50000" b="50000"/>
+          </a:path>
+        </a:gradFill>
+      </a:bgFillStyleLst>
+    </a:fmtScheme>
+  </a:themeElements>
+</a:theme>
 </file>
--- a/docs/MIRL LAB Honours Project Bi-Weekly Update.pptx
+++ b/docs/MIRL LAB Honours Project Bi-Weekly Update.pptx
@@ -45,14 +45,23 @@
     <p:sldId id="289" r:id="rId41"/>
     <p:sldId id="290" r:id="rId42"/>
     <p:sldId id="291" r:id="rId43"/>
+    <p:sldId id="292" r:id="rId44"/>
+    <p:sldId id="293" r:id="rId45"/>
+    <p:sldId id="294" r:id="rId46"/>
+    <p:sldId id="295" r:id="rId47"/>
+    <p:sldId id="296" r:id="rId48"/>
+    <p:sldId id="297" r:id="rId49"/>
+    <p:sldId id="298" r:id="rId50"/>
+    <p:sldId id="299" r:id="rId51"/>
+    <p:sldId id="300" r:id="rId52"/>
   </p:sldIdLst>
   <p:sldSz cy="5143500" cx="9144000"/>
   <p:notesSz cx="6858000" cy="9144000"/>
   <p:embeddedFontLst>
     <p:embeddedFont>
       <p:font typeface="Play"/>
-      <p:regular r:id="rId44"/>
-      <p:bold r:id="rId45"/>
+      <p:regular r:id="rId53"/>
+      <p:bold r:id="rId54"/>
     </p:embeddedFont>
   </p:embeddedFontLst>
   <p:defaultTextStyle>
@@ -3025,7 +3034,7 @@
       </p:grpSpPr>
       <p:sp>
         <p:nvSpPr>
-          <p:cNvPr id="303" name="Google Shape;303;g39d8d293228_0_24:notes"/>
+          <p:cNvPr id="303" name="Google Shape;303;g39df608643e_2_0:notes"/>
           <p:cNvSpPr txBox="1"/>
           <p:nvPr>
             <p:ph idx="1" type="body"/>
@@ -3064,7 +3073,7 @@
       </p:sp>
       <p:sp>
         <p:nvSpPr>
-          <p:cNvPr id="304" name="Google Shape;304;g39d8d293228_0_24:notes"/>
+          <p:cNvPr id="304" name="Google Shape;304;g39df608643e_2_0:notes"/>
           <p:cNvSpPr/>
           <p:nvPr>
             <p:ph idx="2" type="sldImg"/>
@@ -3124,7 +3133,7 @@
       </p:grpSpPr>
       <p:sp>
         <p:nvSpPr>
-          <p:cNvPr id="309" name="Google Shape;309;g39d8d293228_0_29:notes"/>
+          <p:cNvPr id="309" name="Google Shape;309;g39d8d293228_0_24:notes"/>
           <p:cNvSpPr txBox="1"/>
           <p:nvPr>
             <p:ph idx="1" type="body"/>
@@ -3163,7 +3172,7 @@
       </p:sp>
       <p:sp>
         <p:nvSpPr>
-          <p:cNvPr id="310" name="Google Shape;310;g39d8d293228_0_29:notes"/>
+          <p:cNvPr id="310" name="Google Shape;310;g39d8d293228_0_24:notes"/>
           <p:cNvSpPr/>
           <p:nvPr>
             <p:ph idx="2" type="sldImg"/>
@@ -3223,7 +3232,7 @@
       </p:grpSpPr>
       <p:sp>
         <p:nvSpPr>
-          <p:cNvPr id="315" name="Google Shape;315;g39d8d293228_1_0:notes"/>
+          <p:cNvPr id="315" name="Google Shape;315;g39d8d293228_0_29:notes"/>
           <p:cNvSpPr txBox="1"/>
           <p:nvPr>
             <p:ph idx="1" type="body"/>
@@ -3262,7 +3271,7 @@
       </p:sp>
       <p:sp>
         <p:nvSpPr>
-          <p:cNvPr id="316" name="Google Shape;316;g39d8d293228_1_0:notes"/>
+          <p:cNvPr id="316" name="Google Shape;316;g39d8d293228_0_29:notes"/>
           <p:cNvSpPr/>
           <p:nvPr>
             <p:ph idx="2" type="sldImg"/>
@@ -3322,7 +3331,7 @@
       </p:grpSpPr>
       <p:sp>
         <p:nvSpPr>
-          <p:cNvPr id="321" name="Google Shape;321;g39d8d293228_0_34:notes"/>
+          <p:cNvPr id="321" name="Google Shape;321;g39d8d293228_1_0:notes"/>
           <p:cNvSpPr txBox="1"/>
           <p:nvPr>
             <p:ph idx="1" type="body"/>
@@ -3361,7 +3370,7 @@
       </p:sp>
       <p:sp>
         <p:nvSpPr>
-          <p:cNvPr id="322" name="Google Shape;322;g39d8d293228_0_34:notes"/>
+          <p:cNvPr id="322" name="Google Shape;322;g39d8d293228_1_0:notes"/>
           <p:cNvSpPr/>
           <p:nvPr>
             <p:ph idx="2" type="sldImg"/>
@@ -3421,7 +3430,106 @@
       </p:grpSpPr>
       <p:sp>
         <p:nvSpPr>
-          <p:cNvPr id="327" name="Google Shape;327;g39d8d293228_1_5:notes"/>
+          <p:cNvPr id="327" name="Google Shape;327;g39d8d293228_0_34:notes"/>
+          <p:cNvSpPr txBox="1"/>
+          <p:nvPr>
+            <p:ph idx="1" type="body"/>
+          </p:nvPr>
+        </p:nvSpPr>
+        <p:spPr>
+          <a:xfrm>
+            <a:off x="685800" y="4343400"/>
+            <a:ext cx="5486400" cy="4114800"/>
+          </a:xfrm>
+          <a:prstGeom prst="rect">
+            <a:avLst/>
+          </a:prstGeom>
+        </p:spPr>
+        <p:txBody>
+          <a:bodyPr anchorCtr="0" anchor="t" bIns="91425" lIns="91425" spcFirstLastPara="1" rIns="91425" wrap="square" tIns="91425">
+            <a:noAutofit/>
+          </a:bodyPr>
+          <a:lstStyle/>
+          <a:p>
+            <a:pPr indent="0" lvl="0" marL="0" rtl="0" algn="l">
+              <a:spcBef>
+                <a:spcPts val="0"/>
+              </a:spcBef>
+              <a:spcAft>
+                <a:spcPts val="0"/>
+              </a:spcAft>
+              <a:buNone/>
+            </a:pPr>
+            <a:r>
+              <a:t/>
+            </a:r>
+            <a:endParaRPr/>
+          </a:p>
+        </p:txBody>
+      </p:sp>
+      <p:sp>
+        <p:nvSpPr>
+          <p:cNvPr id="328" name="Google Shape;328;g39d8d293228_0_34:notes"/>
+          <p:cNvSpPr/>
+          <p:nvPr>
+            <p:ph idx="2" type="sldImg"/>
+          </p:nvPr>
+        </p:nvSpPr>
+        <p:spPr>
+          <a:xfrm>
+            <a:off x="1143225" y="685800"/>
+            <a:ext cx="4572300" cy="3429000"/>
+          </a:xfrm>
+          <a:custGeom>
+            <a:rect b="b" l="l" r="r" t="t"/>
+            <a:pathLst>
+              <a:path extrusionOk="0" h="120000" w="120000">
+                <a:moveTo>
+                  <a:pt x="0" y="0"/>
+                </a:moveTo>
+                <a:lnTo>
+                  <a:pt x="120000" y="0"/>
+                </a:lnTo>
+                <a:lnTo>
+                  <a:pt x="120000" y="120000"/>
+                </a:lnTo>
+                <a:lnTo>
+                  <a:pt x="0" y="120000"/>
+                </a:lnTo>
+                <a:close/>
+              </a:path>
+            </a:pathLst>
+          </a:custGeom>
+        </p:spPr>
+      </p:sp>
+    </p:spTree>
+  </p:cSld>
+  <p:clrMapOvr>
+    <a:masterClrMapping/>
+  </p:clrMapOvr>
+</p:notes>
+</file>
+
+<file path=ppt/notesSlides/notesSlide35.xml><?xml version="1.0" encoding="utf-8"?>
+<p:notes xmlns:a="http://schemas.openxmlformats.org/drawingml/2006/main" xmlns:r="http://schemas.openxmlformats.org/officeDocument/2006/relationships" xmlns:mc="http://schemas.openxmlformats.org/markup-compatibility/2006" xmlns:mv="urn:schemas-microsoft-com:mac:vml" xmlns:p="http://schemas.openxmlformats.org/presentationml/2006/main" xmlns:c="http://schemas.openxmlformats.org/drawingml/2006/chart" xmlns:dgm="http://schemas.openxmlformats.org/drawingml/2006/diagram" xmlns:o="urn:schemas-microsoft-com:office:office" xmlns:v="urn:schemas-microsoft-com:vml" xmlns:pvml="urn:schemas-microsoft-com:office:powerpoint" xmlns:com="http://schemas.openxmlformats.org/drawingml/2006/compatibility" xmlns:p14="http://schemas.microsoft.com/office/powerpoint/2010/main" xmlns:p15="http://schemas.microsoft.com/office/powerpoint/2012/main" xmlns:ahyp="http://schemas.microsoft.com/office/drawing/2018/hyperlinkcolor" showMasterPhAnim="0" showMasterSp="0">
+  <p:cSld>
+    <p:spTree>
+      <p:nvGrpSpPr>
+        <p:cNvPr id="332" name="Shape 332"/>
+        <p:cNvGrpSpPr/>
+        <p:nvPr/>
+      </p:nvGrpSpPr>
+      <p:grpSpPr>
+        <a:xfrm>
+          <a:off x="0" y="0"/>
+          <a:ext cx="0" cy="0"/>
+          <a:chOff x="0" y="0"/>
+          <a:chExt cx="0" cy="0"/>
+        </a:xfrm>
+      </p:grpSpPr>
+      <p:sp>
+        <p:nvSpPr>
+          <p:cNvPr id="333" name="Google Shape;333;g39d8d293228_1_5:notes"/>
           <p:cNvSpPr/>
           <p:nvPr>
             <p:ph idx="2" type="sldImg"/>
@@ -3456,7 +3564,7 @@
       </p:sp>
       <p:sp>
         <p:nvSpPr>
-          <p:cNvPr id="328" name="Google Shape;328;g39d8d293228_1_5:notes"/>
+          <p:cNvPr id="334" name="Google Shape;334;g39d8d293228_1_5:notes"/>
           <p:cNvSpPr txBox="1"/>
           <p:nvPr>
             <p:ph idx="1" type="body"/>
@@ -3501,12 +3609,12 @@
 </p:notes>
 </file>
 
-<file path=ppt/notesSlides/notesSlide35.xml><?xml version="1.0" encoding="utf-8"?>
+<file path=ppt/notesSlides/notesSlide36.xml><?xml version="1.0" encoding="utf-8"?>
 <p:notes xmlns:a="http://schemas.openxmlformats.org/drawingml/2006/main" xmlns:r="http://schemas.openxmlformats.org/officeDocument/2006/relationships" xmlns:mc="http://schemas.openxmlformats.org/markup-compatibility/2006" xmlns:mv="urn:schemas-microsoft-com:mac:vml" xmlns:p="http://schemas.openxmlformats.org/presentationml/2006/main" xmlns:c="http://schemas.openxmlformats.org/drawingml/2006/chart" xmlns:dgm="http://schemas.openxmlformats.org/drawingml/2006/diagram" xmlns:o="urn:schemas-microsoft-com:office:office" xmlns:v="urn:schemas-microsoft-com:vml" xmlns:pvml="urn:schemas-microsoft-com:office:powerpoint" xmlns:com="http://schemas.openxmlformats.org/drawingml/2006/compatibility" xmlns:p14="http://schemas.microsoft.com/office/powerpoint/2010/main" xmlns:p15="http://schemas.microsoft.com/office/powerpoint/2012/main" xmlns:ahyp="http://schemas.microsoft.com/office/drawing/2018/hyperlinkcolor" showMasterPhAnim="0" showMasterSp="0">
   <p:cSld>
     <p:spTree>
       <p:nvGrpSpPr>
-        <p:cNvPr id="332" name="Shape 332"/>
+        <p:cNvPr id="338" name="Shape 338"/>
         <p:cNvGrpSpPr/>
         <p:nvPr/>
       </p:nvGrpSpPr>
@@ -3520,7 +3628,7 @@
       </p:grpSpPr>
       <p:sp>
         <p:nvSpPr>
-          <p:cNvPr id="333" name="Google Shape;333;g36cfc18a1a3_0_5:notes"/>
+          <p:cNvPr id="339" name="Google Shape;339;g36cfc18a1a3_0_5:notes"/>
           <p:cNvSpPr/>
           <p:nvPr>
             <p:ph idx="2" type="sldImg"/>
@@ -3555,7 +3663,7 @@
       </p:sp>
       <p:sp>
         <p:nvSpPr>
-          <p:cNvPr id="334" name="Google Shape;334;g36cfc18a1a3_0_5:notes"/>
+          <p:cNvPr id="340" name="Google Shape;340;g36cfc18a1a3_0_5:notes"/>
           <p:cNvSpPr txBox="1"/>
           <p:nvPr>
             <p:ph idx="1" type="body"/>
@@ -3600,12 +3708,12 @@
 </p:notes>
 </file>
 
-<file path=ppt/notesSlides/notesSlide36.xml><?xml version="1.0" encoding="utf-8"?>
+<file path=ppt/notesSlides/notesSlide37.xml><?xml version="1.0" encoding="utf-8"?>
 <p:notes xmlns:a="http://schemas.openxmlformats.org/drawingml/2006/main" xmlns:r="http://schemas.openxmlformats.org/officeDocument/2006/relationships" xmlns:mc="http://schemas.openxmlformats.org/markup-compatibility/2006" xmlns:mv="urn:schemas-microsoft-com:mac:vml" xmlns:p="http://schemas.openxmlformats.org/presentationml/2006/main" xmlns:c="http://schemas.openxmlformats.org/drawingml/2006/chart" xmlns:dgm="http://schemas.openxmlformats.org/drawingml/2006/diagram" xmlns:o="urn:schemas-microsoft-com:office:office" xmlns:v="urn:schemas-microsoft-com:vml" xmlns:pvml="urn:schemas-microsoft-com:office:powerpoint" xmlns:com="http://schemas.openxmlformats.org/drawingml/2006/compatibility" xmlns:p14="http://schemas.microsoft.com/office/powerpoint/2010/main" xmlns:p15="http://schemas.microsoft.com/office/powerpoint/2012/main" xmlns:ahyp="http://schemas.microsoft.com/office/drawing/2018/hyperlinkcolor" showMasterPhAnim="0" showMasterSp="0">
   <p:cSld>
     <p:spTree>
       <p:nvGrpSpPr>
-        <p:cNvPr id="338" name="Shape 338"/>
+        <p:cNvPr id="344" name="Shape 344"/>
         <p:cNvGrpSpPr/>
         <p:nvPr/>
       </p:nvGrpSpPr>
@@ -3619,7 +3727,7 @@
       </p:grpSpPr>
       <p:sp>
         <p:nvSpPr>
-          <p:cNvPr id="339" name="Google Shape;339;g39d8d293228_0_39:notes"/>
+          <p:cNvPr id="345" name="Google Shape;345;g39d8d293228_0_39:notes"/>
           <p:cNvSpPr txBox="1"/>
           <p:nvPr>
             <p:ph idx="1" type="body"/>
@@ -3658,7 +3766,205 @@
       </p:sp>
       <p:sp>
         <p:nvSpPr>
-          <p:cNvPr id="340" name="Google Shape;340;g39d8d293228_0_39:notes"/>
+          <p:cNvPr id="346" name="Google Shape;346;g39d8d293228_0_39:notes"/>
+          <p:cNvSpPr/>
+          <p:nvPr>
+            <p:ph idx="2" type="sldImg"/>
+          </p:nvPr>
+        </p:nvSpPr>
+        <p:spPr>
+          <a:xfrm>
+            <a:off x="1143225" y="685800"/>
+            <a:ext cx="4572300" cy="3429000"/>
+          </a:xfrm>
+          <a:custGeom>
+            <a:rect b="b" l="l" r="r" t="t"/>
+            <a:pathLst>
+              <a:path extrusionOk="0" h="120000" w="120000">
+                <a:moveTo>
+                  <a:pt x="0" y="0"/>
+                </a:moveTo>
+                <a:lnTo>
+                  <a:pt x="120000" y="0"/>
+                </a:lnTo>
+                <a:lnTo>
+                  <a:pt x="120000" y="120000"/>
+                </a:lnTo>
+                <a:lnTo>
+                  <a:pt x="0" y="120000"/>
+                </a:lnTo>
+                <a:close/>
+              </a:path>
+            </a:pathLst>
+          </a:custGeom>
+        </p:spPr>
+      </p:sp>
+    </p:spTree>
+  </p:cSld>
+  <p:clrMapOvr>
+    <a:masterClrMapping/>
+  </p:clrMapOvr>
+</p:notes>
+</file>
+
+<file path=ppt/notesSlides/notesSlide38.xml><?xml version="1.0" encoding="utf-8"?>
+<p:notes xmlns:a="http://schemas.openxmlformats.org/drawingml/2006/main" xmlns:r="http://schemas.openxmlformats.org/officeDocument/2006/relationships" xmlns:mc="http://schemas.openxmlformats.org/markup-compatibility/2006" xmlns:mv="urn:schemas-microsoft-com:mac:vml" xmlns:p="http://schemas.openxmlformats.org/presentationml/2006/main" xmlns:c="http://schemas.openxmlformats.org/drawingml/2006/chart" xmlns:dgm="http://schemas.openxmlformats.org/drawingml/2006/diagram" xmlns:o="urn:schemas-microsoft-com:office:office" xmlns:v="urn:schemas-microsoft-com:vml" xmlns:pvml="urn:schemas-microsoft-com:office:powerpoint" xmlns:com="http://schemas.openxmlformats.org/drawingml/2006/compatibility" xmlns:p14="http://schemas.microsoft.com/office/powerpoint/2010/main" xmlns:p15="http://schemas.microsoft.com/office/powerpoint/2012/main" xmlns:ahyp="http://schemas.microsoft.com/office/drawing/2018/hyperlinkcolor" showMasterPhAnim="0" showMasterSp="0">
+  <p:cSld>
+    <p:spTree>
+      <p:nvGrpSpPr>
+        <p:cNvPr id="350" name="Shape 350"/>
+        <p:cNvGrpSpPr/>
+        <p:nvPr/>
+      </p:nvGrpSpPr>
+      <p:grpSpPr>
+        <a:xfrm>
+          <a:off x="0" y="0"/>
+          <a:ext cx="0" cy="0"/>
+          <a:chOff x="0" y="0"/>
+          <a:chExt cx="0" cy="0"/>
+        </a:xfrm>
+      </p:grpSpPr>
+      <p:sp>
+        <p:nvSpPr>
+          <p:cNvPr id="351" name="Google Shape;351;g3700e05a9de_0_0:notes"/>
+          <p:cNvSpPr/>
+          <p:nvPr>
+            <p:ph idx="2" type="sldImg"/>
+          </p:nvPr>
+        </p:nvSpPr>
+        <p:spPr>
+          <a:xfrm>
+            <a:off x="381300" y="685800"/>
+            <a:ext cx="6096000" cy="3429000"/>
+          </a:xfrm>
+          <a:custGeom>
+            <a:rect b="b" l="l" r="r" t="t"/>
+            <a:pathLst>
+              <a:path extrusionOk="0" h="120000" w="120000">
+                <a:moveTo>
+                  <a:pt x="0" y="0"/>
+                </a:moveTo>
+                <a:lnTo>
+                  <a:pt x="120000" y="0"/>
+                </a:lnTo>
+                <a:lnTo>
+                  <a:pt x="120000" y="120000"/>
+                </a:lnTo>
+                <a:lnTo>
+                  <a:pt x="0" y="120000"/>
+                </a:lnTo>
+                <a:close/>
+              </a:path>
+            </a:pathLst>
+          </a:custGeom>
+        </p:spPr>
+      </p:sp>
+      <p:sp>
+        <p:nvSpPr>
+          <p:cNvPr id="352" name="Google Shape;352;g3700e05a9de_0_0:notes"/>
+          <p:cNvSpPr txBox="1"/>
+          <p:nvPr>
+            <p:ph idx="1" type="body"/>
+          </p:nvPr>
+        </p:nvSpPr>
+        <p:spPr>
+          <a:xfrm>
+            <a:off x="685800" y="4343400"/>
+            <a:ext cx="5486400" cy="4114800"/>
+          </a:xfrm>
+          <a:prstGeom prst="rect">
+            <a:avLst/>
+          </a:prstGeom>
+        </p:spPr>
+        <p:txBody>
+          <a:bodyPr anchorCtr="0" anchor="t" bIns="91425" lIns="91425" spcFirstLastPara="1" rIns="91425" wrap="square" tIns="91425">
+            <a:noAutofit/>
+          </a:bodyPr>
+          <a:lstStyle/>
+          <a:p>
+            <a:pPr indent="0" lvl="0" marL="0" rtl="0" algn="l">
+              <a:spcBef>
+                <a:spcPts val="0"/>
+              </a:spcBef>
+              <a:spcAft>
+                <a:spcPts val="0"/>
+              </a:spcAft>
+              <a:buNone/>
+            </a:pPr>
+            <a:r>
+              <a:t/>
+            </a:r>
+            <a:endParaRPr/>
+          </a:p>
+        </p:txBody>
+      </p:sp>
+    </p:spTree>
+  </p:cSld>
+  <p:clrMapOvr>
+    <a:masterClrMapping/>
+  </p:clrMapOvr>
+</p:notes>
+</file>
+
+<file path=ppt/notesSlides/notesSlide39.xml><?xml version="1.0" encoding="utf-8"?>
+<p:notes xmlns:a="http://schemas.openxmlformats.org/drawingml/2006/main" xmlns:r="http://schemas.openxmlformats.org/officeDocument/2006/relationships" xmlns:mc="http://schemas.openxmlformats.org/markup-compatibility/2006" xmlns:mv="urn:schemas-microsoft-com:mac:vml" xmlns:p="http://schemas.openxmlformats.org/presentationml/2006/main" xmlns:c="http://schemas.openxmlformats.org/drawingml/2006/chart" xmlns:dgm="http://schemas.openxmlformats.org/drawingml/2006/diagram" xmlns:o="urn:schemas-microsoft-com:office:office" xmlns:v="urn:schemas-microsoft-com:vml" xmlns:pvml="urn:schemas-microsoft-com:office:powerpoint" xmlns:com="http://schemas.openxmlformats.org/drawingml/2006/compatibility" xmlns:p14="http://schemas.microsoft.com/office/powerpoint/2010/main" xmlns:p15="http://schemas.microsoft.com/office/powerpoint/2012/main" xmlns:ahyp="http://schemas.microsoft.com/office/drawing/2018/hyperlinkcolor" showMasterPhAnim="0" showMasterSp="0">
+  <p:cSld>
+    <p:spTree>
+      <p:nvGrpSpPr>
+        <p:cNvPr id="355" name="Shape 355"/>
+        <p:cNvGrpSpPr/>
+        <p:nvPr/>
+      </p:nvGrpSpPr>
+      <p:grpSpPr>
+        <a:xfrm>
+          <a:off x="0" y="0"/>
+          <a:ext cx="0" cy="0"/>
+          <a:chOff x="0" y="0"/>
+          <a:chExt cx="0" cy="0"/>
+        </a:xfrm>
+      </p:grpSpPr>
+      <p:sp>
+        <p:nvSpPr>
+          <p:cNvPr id="356" name="Google Shape;356;g3700e05a9de_0_4:notes"/>
+          <p:cNvSpPr txBox="1"/>
+          <p:nvPr>
+            <p:ph idx="1" type="body"/>
+          </p:nvPr>
+        </p:nvSpPr>
+        <p:spPr>
+          <a:xfrm>
+            <a:off x="685800" y="4343400"/>
+            <a:ext cx="5486400" cy="4114800"/>
+          </a:xfrm>
+          <a:prstGeom prst="rect">
+            <a:avLst/>
+          </a:prstGeom>
+        </p:spPr>
+        <p:txBody>
+          <a:bodyPr anchorCtr="0" anchor="t" bIns="91425" lIns="91425" spcFirstLastPara="1" rIns="91425" wrap="square" tIns="91425">
+            <a:noAutofit/>
+          </a:bodyPr>
+          <a:lstStyle/>
+          <a:p>
+            <a:pPr indent="0" lvl="0" marL="0" rtl="0" algn="l">
+              <a:spcBef>
+                <a:spcPts val="0"/>
+              </a:spcBef>
+              <a:spcAft>
+                <a:spcPts val="0"/>
+              </a:spcAft>
+              <a:buNone/>
+            </a:pPr>
+            <a:r>
+              <a:t/>
+            </a:r>
+            <a:endParaRPr/>
+          </a:p>
+        </p:txBody>
+      </p:sp>
+      <p:sp>
+        <p:nvSpPr>
+          <p:cNvPr id="357" name="Google Shape;357;g3700e05a9de_0_4:notes"/>
           <p:cNvSpPr/>
           <p:nvPr>
             <p:ph idx="2" type="sldImg"/>
@@ -3767,6 +4073,600 @@
           <a:xfrm>
             <a:off x="1143225" y="685800"/>
             <a:ext cx="4572225" cy="3429000"/>
+          </a:xfrm>
+          <a:custGeom>
+            <a:rect b="b" l="l" r="r" t="t"/>
+            <a:pathLst>
+              <a:path extrusionOk="0" h="120000" w="120000">
+                <a:moveTo>
+                  <a:pt x="0" y="0"/>
+                </a:moveTo>
+                <a:lnTo>
+                  <a:pt x="120000" y="0"/>
+                </a:lnTo>
+                <a:lnTo>
+                  <a:pt x="120000" y="120000"/>
+                </a:lnTo>
+                <a:lnTo>
+                  <a:pt x="0" y="120000"/>
+                </a:lnTo>
+                <a:close/>
+              </a:path>
+            </a:pathLst>
+          </a:custGeom>
+        </p:spPr>
+      </p:sp>
+    </p:spTree>
+  </p:cSld>
+  <p:clrMapOvr>
+    <a:masterClrMapping/>
+  </p:clrMapOvr>
+</p:notes>
+</file>
+
+<file path=ppt/notesSlides/notesSlide40.xml><?xml version="1.0" encoding="utf-8"?>
+<p:notes xmlns:a="http://schemas.openxmlformats.org/drawingml/2006/main" xmlns:r="http://schemas.openxmlformats.org/officeDocument/2006/relationships" xmlns:mc="http://schemas.openxmlformats.org/markup-compatibility/2006" xmlns:mv="urn:schemas-microsoft-com:mac:vml" xmlns:p="http://schemas.openxmlformats.org/presentationml/2006/main" xmlns:c="http://schemas.openxmlformats.org/drawingml/2006/chart" xmlns:dgm="http://schemas.openxmlformats.org/drawingml/2006/diagram" xmlns:o="urn:schemas-microsoft-com:office:office" xmlns:v="urn:schemas-microsoft-com:vml" xmlns:pvml="urn:schemas-microsoft-com:office:powerpoint" xmlns:com="http://schemas.openxmlformats.org/drawingml/2006/compatibility" xmlns:p14="http://schemas.microsoft.com/office/powerpoint/2010/main" xmlns:p15="http://schemas.microsoft.com/office/powerpoint/2012/main" xmlns:ahyp="http://schemas.microsoft.com/office/drawing/2018/hyperlinkcolor" showMasterPhAnim="0" showMasterSp="0">
+  <p:cSld>
+    <p:spTree>
+      <p:nvGrpSpPr>
+        <p:cNvPr id="361" name="Shape 361"/>
+        <p:cNvGrpSpPr/>
+        <p:nvPr/>
+      </p:nvGrpSpPr>
+      <p:grpSpPr>
+        <a:xfrm>
+          <a:off x="0" y="0"/>
+          <a:ext cx="0" cy="0"/>
+          <a:chOff x="0" y="0"/>
+          <a:chExt cx="0" cy="0"/>
+        </a:xfrm>
+      </p:grpSpPr>
+      <p:sp>
+        <p:nvSpPr>
+          <p:cNvPr id="362" name="Google Shape;362;g3700e05a9de_0_16:notes"/>
+          <p:cNvSpPr txBox="1"/>
+          <p:nvPr>
+            <p:ph idx="1" type="body"/>
+          </p:nvPr>
+        </p:nvSpPr>
+        <p:spPr>
+          <a:xfrm>
+            <a:off x="685800" y="4343400"/>
+            <a:ext cx="5486400" cy="4114800"/>
+          </a:xfrm>
+          <a:prstGeom prst="rect">
+            <a:avLst/>
+          </a:prstGeom>
+        </p:spPr>
+        <p:txBody>
+          <a:bodyPr anchorCtr="0" anchor="t" bIns="91425" lIns="91425" spcFirstLastPara="1" rIns="91425" wrap="square" tIns="91425">
+            <a:noAutofit/>
+          </a:bodyPr>
+          <a:lstStyle/>
+          <a:p>
+            <a:pPr indent="0" lvl="0" marL="0" rtl="0" algn="l">
+              <a:spcBef>
+                <a:spcPts val="0"/>
+              </a:spcBef>
+              <a:spcAft>
+                <a:spcPts val="0"/>
+              </a:spcAft>
+              <a:buNone/>
+            </a:pPr>
+            <a:r>
+              <a:t/>
+            </a:r>
+            <a:endParaRPr/>
+          </a:p>
+        </p:txBody>
+      </p:sp>
+      <p:sp>
+        <p:nvSpPr>
+          <p:cNvPr id="363" name="Google Shape;363;g3700e05a9de_0_16:notes"/>
+          <p:cNvSpPr/>
+          <p:nvPr>
+            <p:ph idx="2" type="sldImg"/>
+          </p:nvPr>
+        </p:nvSpPr>
+        <p:spPr>
+          <a:xfrm>
+            <a:off x="1143225" y="685800"/>
+            <a:ext cx="4572300" cy="3429000"/>
+          </a:xfrm>
+          <a:custGeom>
+            <a:rect b="b" l="l" r="r" t="t"/>
+            <a:pathLst>
+              <a:path extrusionOk="0" h="120000" w="120000">
+                <a:moveTo>
+                  <a:pt x="0" y="0"/>
+                </a:moveTo>
+                <a:lnTo>
+                  <a:pt x="120000" y="0"/>
+                </a:lnTo>
+                <a:lnTo>
+                  <a:pt x="120000" y="120000"/>
+                </a:lnTo>
+                <a:lnTo>
+                  <a:pt x="0" y="120000"/>
+                </a:lnTo>
+                <a:close/>
+              </a:path>
+            </a:pathLst>
+          </a:custGeom>
+        </p:spPr>
+      </p:sp>
+    </p:spTree>
+  </p:cSld>
+  <p:clrMapOvr>
+    <a:masterClrMapping/>
+  </p:clrMapOvr>
+</p:notes>
+</file>
+
+<file path=ppt/notesSlides/notesSlide41.xml><?xml version="1.0" encoding="utf-8"?>
+<p:notes xmlns:a="http://schemas.openxmlformats.org/drawingml/2006/main" xmlns:r="http://schemas.openxmlformats.org/officeDocument/2006/relationships" xmlns:mc="http://schemas.openxmlformats.org/markup-compatibility/2006" xmlns:mv="urn:schemas-microsoft-com:mac:vml" xmlns:p="http://schemas.openxmlformats.org/presentationml/2006/main" xmlns:c="http://schemas.openxmlformats.org/drawingml/2006/chart" xmlns:dgm="http://schemas.openxmlformats.org/drawingml/2006/diagram" xmlns:o="urn:schemas-microsoft-com:office:office" xmlns:v="urn:schemas-microsoft-com:vml" xmlns:pvml="urn:schemas-microsoft-com:office:powerpoint" xmlns:com="http://schemas.openxmlformats.org/drawingml/2006/compatibility" xmlns:p14="http://schemas.microsoft.com/office/powerpoint/2010/main" xmlns:p15="http://schemas.microsoft.com/office/powerpoint/2012/main" xmlns:ahyp="http://schemas.microsoft.com/office/drawing/2018/hyperlinkcolor" showMasterPhAnim="0" showMasterSp="0">
+  <p:cSld>
+    <p:spTree>
+      <p:nvGrpSpPr>
+        <p:cNvPr id="367" name="Shape 367"/>
+        <p:cNvGrpSpPr/>
+        <p:nvPr/>
+      </p:nvGrpSpPr>
+      <p:grpSpPr>
+        <a:xfrm>
+          <a:off x="0" y="0"/>
+          <a:ext cx="0" cy="0"/>
+          <a:chOff x="0" y="0"/>
+          <a:chExt cx="0" cy="0"/>
+        </a:xfrm>
+      </p:grpSpPr>
+      <p:sp>
+        <p:nvSpPr>
+          <p:cNvPr id="368" name="Google Shape;368;g3700e05a9de_0_26:notes"/>
+          <p:cNvSpPr txBox="1"/>
+          <p:nvPr>
+            <p:ph idx="1" type="body"/>
+          </p:nvPr>
+        </p:nvSpPr>
+        <p:spPr>
+          <a:xfrm>
+            <a:off x="685800" y="4343400"/>
+            <a:ext cx="5486400" cy="4114800"/>
+          </a:xfrm>
+          <a:prstGeom prst="rect">
+            <a:avLst/>
+          </a:prstGeom>
+        </p:spPr>
+        <p:txBody>
+          <a:bodyPr anchorCtr="0" anchor="t" bIns="91425" lIns="91425" spcFirstLastPara="1" rIns="91425" wrap="square" tIns="91425">
+            <a:noAutofit/>
+          </a:bodyPr>
+          <a:lstStyle/>
+          <a:p>
+            <a:pPr indent="0" lvl="0" marL="0" rtl="0" algn="l">
+              <a:spcBef>
+                <a:spcPts val="0"/>
+              </a:spcBef>
+              <a:spcAft>
+                <a:spcPts val="0"/>
+              </a:spcAft>
+              <a:buNone/>
+            </a:pPr>
+            <a:r>
+              <a:t/>
+            </a:r>
+            <a:endParaRPr/>
+          </a:p>
+        </p:txBody>
+      </p:sp>
+      <p:sp>
+        <p:nvSpPr>
+          <p:cNvPr id="369" name="Google Shape;369;g3700e05a9de_0_26:notes"/>
+          <p:cNvSpPr/>
+          <p:nvPr>
+            <p:ph idx="2" type="sldImg"/>
+          </p:nvPr>
+        </p:nvSpPr>
+        <p:spPr>
+          <a:xfrm>
+            <a:off x="1143225" y="685800"/>
+            <a:ext cx="4572300" cy="3429000"/>
+          </a:xfrm>
+          <a:custGeom>
+            <a:rect b="b" l="l" r="r" t="t"/>
+            <a:pathLst>
+              <a:path extrusionOk="0" h="120000" w="120000">
+                <a:moveTo>
+                  <a:pt x="0" y="0"/>
+                </a:moveTo>
+                <a:lnTo>
+                  <a:pt x="120000" y="0"/>
+                </a:lnTo>
+                <a:lnTo>
+                  <a:pt x="120000" y="120000"/>
+                </a:lnTo>
+                <a:lnTo>
+                  <a:pt x="0" y="120000"/>
+                </a:lnTo>
+                <a:close/>
+              </a:path>
+            </a:pathLst>
+          </a:custGeom>
+        </p:spPr>
+      </p:sp>
+    </p:spTree>
+  </p:cSld>
+  <p:clrMapOvr>
+    <a:masterClrMapping/>
+  </p:clrMapOvr>
+</p:notes>
+</file>
+
+<file path=ppt/notesSlides/notesSlide42.xml><?xml version="1.0" encoding="utf-8"?>
+<p:notes xmlns:a="http://schemas.openxmlformats.org/drawingml/2006/main" xmlns:r="http://schemas.openxmlformats.org/officeDocument/2006/relationships" xmlns:mc="http://schemas.openxmlformats.org/markup-compatibility/2006" xmlns:mv="urn:schemas-microsoft-com:mac:vml" xmlns:p="http://schemas.openxmlformats.org/presentationml/2006/main" xmlns:c="http://schemas.openxmlformats.org/drawingml/2006/chart" xmlns:dgm="http://schemas.openxmlformats.org/drawingml/2006/diagram" xmlns:o="urn:schemas-microsoft-com:office:office" xmlns:v="urn:schemas-microsoft-com:vml" xmlns:pvml="urn:schemas-microsoft-com:office:powerpoint" xmlns:com="http://schemas.openxmlformats.org/drawingml/2006/compatibility" xmlns:p14="http://schemas.microsoft.com/office/powerpoint/2010/main" xmlns:p15="http://schemas.microsoft.com/office/powerpoint/2012/main" xmlns:ahyp="http://schemas.microsoft.com/office/drawing/2018/hyperlinkcolor" showMasterPhAnim="0" showMasterSp="0">
+  <p:cSld>
+    <p:spTree>
+      <p:nvGrpSpPr>
+        <p:cNvPr id="373" name="Shape 373"/>
+        <p:cNvGrpSpPr/>
+        <p:nvPr/>
+      </p:nvGrpSpPr>
+      <p:grpSpPr>
+        <a:xfrm>
+          <a:off x="0" y="0"/>
+          <a:ext cx="0" cy="0"/>
+          <a:chOff x="0" y="0"/>
+          <a:chExt cx="0" cy="0"/>
+        </a:xfrm>
+      </p:grpSpPr>
+      <p:sp>
+        <p:nvSpPr>
+          <p:cNvPr id="374" name="Google Shape;374;g3700e05a9de_0_31:notes"/>
+          <p:cNvSpPr txBox="1"/>
+          <p:nvPr>
+            <p:ph idx="1" type="body"/>
+          </p:nvPr>
+        </p:nvSpPr>
+        <p:spPr>
+          <a:xfrm>
+            <a:off x="685800" y="4343400"/>
+            <a:ext cx="5486400" cy="4114800"/>
+          </a:xfrm>
+          <a:prstGeom prst="rect">
+            <a:avLst/>
+          </a:prstGeom>
+        </p:spPr>
+        <p:txBody>
+          <a:bodyPr anchorCtr="0" anchor="t" bIns="91425" lIns="91425" spcFirstLastPara="1" rIns="91425" wrap="square" tIns="91425">
+            <a:noAutofit/>
+          </a:bodyPr>
+          <a:lstStyle/>
+          <a:p>
+            <a:pPr indent="0" lvl="0" marL="0" rtl="0" algn="l">
+              <a:spcBef>
+                <a:spcPts val="0"/>
+              </a:spcBef>
+              <a:spcAft>
+                <a:spcPts val="0"/>
+              </a:spcAft>
+              <a:buNone/>
+            </a:pPr>
+            <a:r>
+              <a:t/>
+            </a:r>
+            <a:endParaRPr/>
+          </a:p>
+        </p:txBody>
+      </p:sp>
+      <p:sp>
+        <p:nvSpPr>
+          <p:cNvPr id="375" name="Google Shape;375;g3700e05a9de_0_31:notes"/>
+          <p:cNvSpPr/>
+          <p:nvPr>
+            <p:ph idx="2" type="sldImg"/>
+          </p:nvPr>
+        </p:nvSpPr>
+        <p:spPr>
+          <a:xfrm>
+            <a:off x="1143225" y="685800"/>
+            <a:ext cx="4572300" cy="3429000"/>
+          </a:xfrm>
+          <a:custGeom>
+            <a:rect b="b" l="l" r="r" t="t"/>
+            <a:pathLst>
+              <a:path extrusionOk="0" h="120000" w="120000">
+                <a:moveTo>
+                  <a:pt x="0" y="0"/>
+                </a:moveTo>
+                <a:lnTo>
+                  <a:pt x="120000" y="0"/>
+                </a:lnTo>
+                <a:lnTo>
+                  <a:pt x="120000" y="120000"/>
+                </a:lnTo>
+                <a:lnTo>
+                  <a:pt x="0" y="120000"/>
+                </a:lnTo>
+                <a:close/>
+              </a:path>
+            </a:pathLst>
+          </a:custGeom>
+        </p:spPr>
+      </p:sp>
+    </p:spTree>
+  </p:cSld>
+  <p:clrMapOvr>
+    <a:masterClrMapping/>
+  </p:clrMapOvr>
+</p:notes>
+</file>
+
+<file path=ppt/notesSlides/notesSlide43.xml><?xml version="1.0" encoding="utf-8"?>
+<p:notes xmlns:a="http://schemas.openxmlformats.org/drawingml/2006/main" xmlns:r="http://schemas.openxmlformats.org/officeDocument/2006/relationships" xmlns:mc="http://schemas.openxmlformats.org/markup-compatibility/2006" xmlns:mv="urn:schemas-microsoft-com:mac:vml" xmlns:p="http://schemas.openxmlformats.org/presentationml/2006/main" xmlns:c="http://schemas.openxmlformats.org/drawingml/2006/chart" xmlns:dgm="http://schemas.openxmlformats.org/drawingml/2006/diagram" xmlns:o="urn:schemas-microsoft-com:office:office" xmlns:v="urn:schemas-microsoft-com:vml" xmlns:pvml="urn:schemas-microsoft-com:office:powerpoint" xmlns:com="http://schemas.openxmlformats.org/drawingml/2006/compatibility" xmlns:p14="http://schemas.microsoft.com/office/powerpoint/2010/main" xmlns:p15="http://schemas.microsoft.com/office/powerpoint/2012/main" xmlns:ahyp="http://schemas.microsoft.com/office/drawing/2018/hyperlinkcolor" showMasterPhAnim="0" showMasterSp="0">
+  <p:cSld>
+    <p:spTree>
+      <p:nvGrpSpPr>
+        <p:cNvPr id="379" name="Shape 379"/>
+        <p:cNvGrpSpPr/>
+        <p:nvPr/>
+      </p:nvGrpSpPr>
+      <p:grpSpPr>
+        <a:xfrm>
+          <a:off x="0" y="0"/>
+          <a:ext cx="0" cy="0"/>
+          <a:chOff x="0" y="0"/>
+          <a:chExt cx="0" cy="0"/>
+        </a:xfrm>
+      </p:grpSpPr>
+      <p:sp>
+        <p:nvSpPr>
+          <p:cNvPr id="380" name="Google Shape;380;g3700e05a9de_0_36:notes"/>
+          <p:cNvSpPr txBox="1"/>
+          <p:nvPr>
+            <p:ph idx="1" type="body"/>
+          </p:nvPr>
+        </p:nvSpPr>
+        <p:spPr>
+          <a:xfrm>
+            <a:off x="685800" y="4343400"/>
+            <a:ext cx="5486400" cy="4114800"/>
+          </a:xfrm>
+          <a:prstGeom prst="rect">
+            <a:avLst/>
+          </a:prstGeom>
+        </p:spPr>
+        <p:txBody>
+          <a:bodyPr anchorCtr="0" anchor="t" bIns="91425" lIns="91425" spcFirstLastPara="1" rIns="91425" wrap="square" tIns="91425">
+            <a:noAutofit/>
+          </a:bodyPr>
+          <a:lstStyle/>
+          <a:p>
+            <a:pPr indent="0" lvl="0" marL="0" rtl="0" algn="l">
+              <a:spcBef>
+                <a:spcPts val="0"/>
+              </a:spcBef>
+              <a:spcAft>
+                <a:spcPts val="0"/>
+              </a:spcAft>
+              <a:buNone/>
+            </a:pPr>
+            <a:r>
+              <a:t/>
+            </a:r>
+            <a:endParaRPr/>
+          </a:p>
+        </p:txBody>
+      </p:sp>
+      <p:sp>
+        <p:nvSpPr>
+          <p:cNvPr id="381" name="Google Shape;381;g3700e05a9de_0_36:notes"/>
+          <p:cNvSpPr/>
+          <p:nvPr>
+            <p:ph idx="2" type="sldImg"/>
+          </p:nvPr>
+        </p:nvSpPr>
+        <p:spPr>
+          <a:xfrm>
+            <a:off x="1143225" y="685800"/>
+            <a:ext cx="4572300" cy="3429000"/>
+          </a:xfrm>
+          <a:custGeom>
+            <a:rect b="b" l="l" r="r" t="t"/>
+            <a:pathLst>
+              <a:path extrusionOk="0" h="120000" w="120000">
+                <a:moveTo>
+                  <a:pt x="0" y="0"/>
+                </a:moveTo>
+                <a:lnTo>
+                  <a:pt x="120000" y="0"/>
+                </a:lnTo>
+                <a:lnTo>
+                  <a:pt x="120000" y="120000"/>
+                </a:lnTo>
+                <a:lnTo>
+                  <a:pt x="0" y="120000"/>
+                </a:lnTo>
+                <a:close/>
+              </a:path>
+            </a:pathLst>
+          </a:custGeom>
+        </p:spPr>
+      </p:sp>
+    </p:spTree>
+  </p:cSld>
+  <p:clrMapOvr>
+    <a:masterClrMapping/>
+  </p:clrMapOvr>
+</p:notes>
+</file>
+
+<file path=ppt/notesSlides/notesSlide44.xml><?xml version="1.0" encoding="utf-8"?>
+<p:notes xmlns:a="http://schemas.openxmlformats.org/drawingml/2006/main" xmlns:r="http://schemas.openxmlformats.org/officeDocument/2006/relationships" xmlns:mc="http://schemas.openxmlformats.org/markup-compatibility/2006" xmlns:mv="urn:schemas-microsoft-com:mac:vml" xmlns:p="http://schemas.openxmlformats.org/presentationml/2006/main" xmlns:c="http://schemas.openxmlformats.org/drawingml/2006/chart" xmlns:dgm="http://schemas.openxmlformats.org/drawingml/2006/diagram" xmlns:o="urn:schemas-microsoft-com:office:office" xmlns:v="urn:schemas-microsoft-com:vml" xmlns:pvml="urn:schemas-microsoft-com:office:powerpoint" xmlns:com="http://schemas.openxmlformats.org/drawingml/2006/compatibility" xmlns:p14="http://schemas.microsoft.com/office/powerpoint/2010/main" xmlns:p15="http://schemas.microsoft.com/office/powerpoint/2012/main" xmlns:ahyp="http://schemas.microsoft.com/office/drawing/2018/hyperlinkcolor" showMasterPhAnim="0" showMasterSp="0">
+  <p:cSld>
+    <p:spTree>
+      <p:nvGrpSpPr>
+        <p:cNvPr id="385" name="Shape 385"/>
+        <p:cNvGrpSpPr/>
+        <p:nvPr/>
+      </p:nvGrpSpPr>
+      <p:grpSpPr>
+        <a:xfrm>
+          <a:off x="0" y="0"/>
+          <a:ext cx="0" cy="0"/>
+          <a:chOff x="0" y="0"/>
+          <a:chExt cx="0" cy="0"/>
+        </a:xfrm>
+      </p:grpSpPr>
+      <p:sp>
+        <p:nvSpPr>
+          <p:cNvPr id="386" name="Google Shape;386;g3700e05a9de_0_46:notes"/>
+          <p:cNvSpPr txBox="1"/>
+          <p:nvPr>
+            <p:ph idx="1" type="body"/>
+          </p:nvPr>
+        </p:nvSpPr>
+        <p:spPr>
+          <a:xfrm>
+            <a:off x="685800" y="4343400"/>
+            <a:ext cx="5486400" cy="4114800"/>
+          </a:xfrm>
+          <a:prstGeom prst="rect">
+            <a:avLst/>
+          </a:prstGeom>
+        </p:spPr>
+        <p:txBody>
+          <a:bodyPr anchorCtr="0" anchor="t" bIns="91425" lIns="91425" spcFirstLastPara="1" rIns="91425" wrap="square" tIns="91425">
+            <a:noAutofit/>
+          </a:bodyPr>
+          <a:lstStyle/>
+          <a:p>
+            <a:pPr indent="0" lvl="0" marL="0" rtl="0" algn="l">
+              <a:spcBef>
+                <a:spcPts val="0"/>
+              </a:spcBef>
+              <a:spcAft>
+                <a:spcPts val="0"/>
+              </a:spcAft>
+              <a:buNone/>
+            </a:pPr>
+            <a:r>
+              <a:t/>
+            </a:r>
+            <a:endParaRPr/>
+          </a:p>
+        </p:txBody>
+      </p:sp>
+      <p:sp>
+        <p:nvSpPr>
+          <p:cNvPr id="387" name="Google Shape;387;g3700e05a9de_0_46:notes"/>
+          <p:cNvSpPr/>
+          <p:nvPr>
+            <p:ph idx="2" type="sldImg"/>
+          </p:nvPr>
+        </p:nvSpPr>
+        <p:spPr>
+          <a:xfrm>
+            <a:off x="1143225" y="685800"/>
+            <a:ext cx="4572300" cy="3429000"/>
+          </a:xfrm>
+          <a:custGeom>
+            <a:rect b="b" l="l" r="r" t="t"/>
+            <a:pathLst>
+              <a:path extrusionOk="0" h="120000" w="120000">
+                <a:moveTo>
+                  <a:pt x="0" y="0"/>
+                </a:moveTo>
+                <a:lnTo>
+                  <a:pt x="120000" y="0"/>
+                </a:lnTo>
+                <a:lnTo>
+                  <a:pt x="120000" y="120000"/>
+                </a:lnTo>
+                <a:lnTo>
+                  <a:pt x="0" y="120000"/>
+                </a:lnTo>
+                <a:close/>
+              </a:path>
+            </a:pathLst>
+          </a:custGeom>
+        </p:spPr>
+      </p:sp>
+    </p:spTree>
+  </p:cSld>
+  <p:clrMapOvr>
+    <a:masterClrMapping/>
+  </p:clrMapOvr>
+</p:notes>
+</file>
+
+<file path=ppt/notesSlides/notesSlide45.xml><?xml version="1.0" encoding="utf-8"?>
+<p:notes xmlns:a="http://schemas.openxmlformats.org/drawingml/2006/main" xmlns:r="http://schemas.openxmlformats.org/officeDocument/2006/relationships" xmlns:mc="http://schemas.openxmlformats.org/markup-compatibility/2006" xmlns:mv="urn:schemas-microsoft-com:mac:vml" xmlns:p="http://schemas.openxmlformats.org/presentationml/2006/main" xmlns:c="http://schemas.openxmlformats.org/drawingml/2006/chart" xmlns:dgm="http://schemas.openxmlformats.org/drawingml/2006/diagram" xmlns:o="urn:schemas-microsoft-com:office:office" xmlns:v="urn:schemas-microsoft-com:vml" xmlns:pvml="urn:schemas-microsoft-com:office:powerpoint" xmlns:com="http://schemas.openxmlformats.org/drawingml/2006/compatibility" xmlns:p14="http://schemas.microsoft.com/office/powerpoint/2010/main" xmlns:p15="http://schemas.microsoft.com/office/powerpoint/2012/main" xmlns:ahyp="http://schemas.microsoft.com/office/drawing/2018/hyperlinkcolor" showMasterPhAnim="0" showMasterSp="0">
+  <p:cSld>
+    <p:spTree>
+      <p:nvGrpSpPr>
+        <p:cNvPr id="391" name="Shape 391"/>
+        <p:cNvGrpSpPr/>
+        <p:nvPr/>
+      </p:nvGrpSpPr>
+      <p:grpSpPr>
+        <a:xfrm>
+          <a:off x="0" y="0"/>
+          <a:ext cx="0" cy="0"/>
+          <a:chOff x="0" y="0"/>
+          <a:chExt cx="0" cy="0"/>
+        </a:xfrm>
+      </p:grpSpPr>
+      <p:sp>
+        <p:nvSpPr>
+          <p:cNvPr id="392" name="Google Shape;392;g3700e05a9de_0_51:notes"/>
+          <p:cNvSpPr txBox="1"/>
+          <p:nvPr>
+            <p:ph idx="1" type="body"/>
+          </p:nvPr>
+        </p:nvSpPr>
+        <p:spPr>
+          <a:xfrm>
+            <a:off x="685800" y="4343400"/>
+            <a:ext cx="5486400" cy="4114800"/>
+          </a:xfrm>
+          <a:prstGeom prst="rect">
+            <a:avLst/>
+          </a:prstGeom>
+        </p:spPr>
+        <p:txBody>
+          <a:bodyPr anchorCtr="0" anchor="t" bIns="91425" lIns="91425" spcFirstLastPara="1" rIns="91425" wrap="square" tIns="91425">
+            <a:noAutofit/>
+          </a:bodyPr>
+          <a:lstStyle/>
+          <a:p>
+            <a:pPr indent="0" lvl="0" marL="0" rtl="0" algn="l">
+              <a:spcBef>
+                <a:spcPts val="0"/>
+              </a:spcBef>
+              <a:spcAft>
+                <a:spcPts val="0"/>
+              </a:spcAft>
+              <a:buNone/>
+            </a:pPr>
+            <a:r>
+              <a:t/>
+            </a:r>
+            <a:endParaRPr/>
+          </a:p>
+        </p:txBody>
+      </p:sp>
+      <p:sp>
+        <p:nvSpPr>
+          <p:cNvPr id="393" name="Google Shape;393;g3700e05a9de_0_51:notes"/>
+          <p:cNvSpPr/>
+          <p:nvPr>
+            <p:ph idx="2" type="sldImg"/>
+          </p:nvPr>
+        </p:nvSpPr>
+        <p:spPr>
+          <a:xfrm>
+            <a:off x="1143225" y="685800"/>
+            <a:ext cx="4572300" cy="3429000"/>
           </a:xfrm>
           <a:custGeom>
             <a:rect b="b" l="l" r="r" t="t"/>
@@ -20862,7 +21762,7 @@
             <a:tbl>
               <a:tblPr bandRow="1" firstRow="1">
                 <a:noFill/>
-                <a:tableStyleId>{33C79BD9-4D4F-410C-A80E-0E65E8C5DBDC}</a:tableStyleId>
+                <a:tableStyleId>{039D4BB7-C18A-48B2-AB24-E2AFBFED9E2B}</a:tableStyleId>
               </a:tblPr>
               <a:tblGrid>
                 <a:gridCol w="1531600"/>
@@ -23495,7 +24395,7 @@
             <a:tbl>
               <a:tblPr bandRow="1" firstRow="1">
                 <a:noFill/>
-                <a:tableStyleId>{33C79BD9-4D4F-410C-A80E-0E65E8C5DBDC}</a:tableStyleId>
+                <a:tableStyleId>{039D4BB7-C18A-48B2-AB24-E2AFBFED9E2B}</a:tableStyleId>
               </a:tblPr>
               <a:tblGrid>
                 <a:gridCol w="1531600"/>
@@ -24719,15 +25619,7 @@
             </a:pPr>
             <a:r>
               <a:rPr lang="en" sz="1800"/>
-              <a:t>Baseline MAPPO </a:t>
-            </a:r>
-            <a:r>
-              <a:rPr lang="en" sz="1800"/>
-              <a:t>implementation</a:t>
-            </a:r>
-            <a:r>
-              <a:rPr lang="en" sz="1800"/>
-              <a:t> with sparse success rates</a:t>
+              <a:t>Baseline MAPPO implementation with sparse success rates</a:t>
             </a:r>
             <a:endParaRPr sz="1800"/>
           </a:p>
@@ -25348,7 +26240,7 @@
             </a:pPr>
             <a:r>
               <a:rPr lang="en"/>
-              <a:t>Plan for the Next Two Weeks</a:t>
+              <a:t>Progress Since Last Meeting (cont.) </a:t>
             </a:r>
             <a:endParaRPr/>
           </a:p>
@@ -25364,8 +26256,8 @@
         </p:nvSpPr>
         <p:spPr>
           <a:xfrm>
-            <a:off x="628650" y="1369219"/>
-            <a:ext cx="7886700" cy="3263400"/>
+            <a:off x="511650" y="1268050"/>
+            <a:ext cx="8119200" cy="3660000"/>
           </a:xfrm>
           <a:prstGeom prst="rect">
             <a:avLst/>
@@ -25377,57 +26269,56 @@
         </p:spPr>
         <p:txBody>
           <a:bodyPr anchorCtr="0" anchor="t" bIns="34275" lIns="68575" spcFirstLastPara="1" rIns="68575" wrap="square" tIns="34275">
-            <a:normAutofit/>
+            <a:noAutofit/>
           </a:bodyPr>
           <a:lstStyle/>
           <a:p>
-            <a:pPr indent="0" lvl="0" marL="0" rtl="0" algn="l">
-              <a:lnSpc>
-                <a:spcPct val="90000"/>
-              </a:lnSpc>
-              <a:spcBef>
-                <a:spcPts val="0"/>
-              </a:spcBef>
-              <a:spcAft>
-                <a:spcPts val="0"/>
-              </a:spcAft>
-              <a:buNone/>
-            </a:pPr>
-            <a:r>
-              <a:t/>
+            <a:pPr indent="-342900" lvl="0" marL="457200" rtl="0" algn="l">
+              <a:lnSpc>
+                <a:spcPct val="115000"/>
+              </a:lnSpc>
+              <a:spcBef>
+                <a:spcPts val="800"/>
+              </a:spcBef>
+              <a:spcAft>
+                <a:spcPts val="0"/>
+              </a:spcAft>
+              <a:buSzPts val="1800"/>
+              <a:buChar char="●"/>
+            </a:pPr>
+            <a:r>
+              <a:rPr b="1" lang="en" sz="1800"/>
+              <a:t>Domain Randomization</a:t>
+            </a:r>
+            <a:endParaRPr b="1" sz="1800"/>
+          </a:p>
+          <a:p>
+            <a:pPr indent="-342900" lvl="1" marL="914400" rtl="0" algn="l">
+              <a:lnSpc>
+                <a:spcPct val="115000"/>
+              </a:lnSpc>
+              <a:spcBef>
+                <a:spcPts val="0"/>
+              </a:spcBef>
+              <a:spcAft>
+                <a:spcPts val="0"/>
+              </a:spcAft>
+              <a:buSzPts val="1800"/>
+              <a:buChar char="○"/>
+            </a:pPr>
+            <a:r>
+              <a:rPr lang="en"/>
+              <a:t>Adding noise to sensor readings like position, orientation, velocity</a:t>
             </a:r>
             <a:endParaRPr/>
           </a:p>
           <a:p>
-            <a:pPr indent="-171450" lvl="0" marL="177800" rtl="0" algn="l">
-              <a:lnSpc>
-                <a:spcPct val="90000"/>
-              </a:lnSpc>
-              <a:spcBef>
-                <a:spcPts val="800"/>
-              </a:spcBef>
-              <a:spcAft>
-                <a:spcPts val="0"/>
-              </a:spcAft>
-              <a:buClr>
-                <a:schemeClr val="dk1"/>
-              </a:buClr>
-              <a:buSzPts val="2100"/>
-              <a:buChar char="●"/>
-            </a:pPr>
-            <a:r>
-              <a:rPr lang="en"/>
-              <a:t>Goals</a:t>
-            </a:r>
-            <a:endParaRPr/>
-          </a:p>
-          <a:p>
-            <a:pPr indent="-177800" lvl="1" marL="520700" rtl="0" algn="l">
-              <a:lnSpc>
-                <a:spcPct val="90000"/>
-              </a:lnSpc>
-              <a:spcBef>
-                <a:spcPts val="800"/>
+            <a:pPr indent="-317500" lvl="1" marL="914400" rtl="0" algn="l">
+              <a:lnSpc>
+                <a:spcPct val="115000"/>
+              </a:lnSpc>
+              <a:spcBef>
+                <a:spcPts val="0"/>
               </a:spcBef>
               <a:spcAft>
                 <a:spcPts val="0"/>
@@ -25437,37 +26328,17 @@
             </a:pPr>
             <a:r>
               <a:rPr lang="en"/>
-              <a:t>Successful MARL for 2 drones (hovering at a target without colliding)</a:t>
+              <a:t>Adding latency to sensor inputs, occasionally dropping readings</a:t>
             </a:r>
             <a:endParaRPr/>
           </a:p>
           <a:p>
-            <a:pPr indent="-177800" lvl="2" marL="863600" rtl="0" algn="l">
-              <a:lnSpc>
-                <a:spcPct val="90000"/>
-              </a:lnSpc>
-              <a:spcBef>
-                <a:spcPts val="800"/>
-              </a:spcBef>
-              <a:spcAft>
-                <a:spcPts val="0"/>
-              </a:spcAft>
-              <a:buSzPts val="1400"/>
-              <a:buChar char="■"/>
-            </a:pPr>
-            <a:r>
-              <a:rPr lang="en"/>
-              <a:t>Possibly adding / testing with domain randomization as well</a:t>
-            </a:r>
-            <a:endParaRPr/>
-          </a:p>
-          <a:p>
-            <a:pPr indent="-177800" lvl="1" marL="520700" rtl="0" algn="l">
-              <a:lnSpc>
-                <a:spcPct val="90000"/>
-              </a:lnSpc>
-              <a:spcBef>
-                <a:spcPts val="800"/>
+            <a:pPr indent="-317500" lvl="1" marL="914400" rtl="0" algn="l">
+              <a:lnSpc>
+                <a:spcPct val="115000"/>
+              </a:lnSpc>
+              <a:spcBef>
+                <a:spcPts val="0"/>
               </a:spcBef>
               <a:spcAft>
                 <a:spcPts val="0"/>
@@ -25477,70 +26348,7 @@
             </a:pPr>
             <a:r>
               <a:rPr lang="en"/>
-              <a:t>Prepare to test on actual drones</a:t>
-            </a:r>
-            <a:endParaRPr/>
-          </a:p>
-          <a:p>
-            <a:pPr indent="-177800" lvl="2" marL="863600" rtl="0" algn="l">
-              <a:lnSpc>
-                <a:spcPct val="90000"/>
-              </a:lnSpc>
-              <a:spcBef>
-                <a:spcPts val="800"/>
-              </a:spcBef>
-              <a:spcAft>
-                <a:spcPts val="0"/>
-              </a:spcAft>
-              <a:buSzPts val="1400"/>
-              <a:buChar char="■"/>
-            </a:pPr>
-            <a:r>
-              <a:rPr lang="en"/>
-              <a:t>Maybe test single-agent hover on actual drone</a:t>
-            </a:r>
-            <a:endParaRPr/>
-          </a:p>
-          <a:p>
-            <a:pPr indent="-171450" lvl="0" marL="177800" rtl="0" algn="l">
-              <a:lnSpc>
-                <a:spcPct val="90000"/>
-              </a:lnSpc>
-              <a:spcBef>
-                <a:spcPts val="800"/>
-              </a:spcBef>
-              <a:spcAft>
-                <a:spcPts val="0"/>
-              </a:spcAft>
-              <a:buClr>
-                <a:schemeClr val="dk1"/>
-              </a:buClr>
-              <a:buSzPts val="2100"/>
-              <a:buChar char="●"/>
-            </a:pPr>
-            <a:r>
-              <a:rPr lang="en"/>
-              <a:t>Dependencies</a:t>
-            </a:r>
-            <a:endParaRPr/>
-          </a:p>
-          <a:p>
-            <a:pPr indent="-177800" lvl="1" marL="520700" rtl="0" algn="l">
-              <a:lnSpc>
-                <a:spcPct val="90000"/>
-              </a:lnSpc>
-              <a:spcBef>
-                <a:spcPts val="800"/>
-              </a:spcBef>
-              <a:spcAft>
-                <a:spcPts val="0"/>
-              </a:spcAft>
-              <a:buSzPts val="1400"/>
-              <a:buChar char="○"/>
-            </a:pPr>
-            <a:r>
-              <a:rPr lang="en"/>
-              <a:t>None</a:t>
+              <a:t>Still need to implement accurate polling rate</a:t>
             </a:r>
             <a:endParaRPr/>
           </a:p>
@@ -25617,7 +26425,7 @@
             </a:pPr>
             <a:r>
               <a:rPr lang="en"/>
-              <a:t>Roadmap Checkpoint</a:t>
+              <a:t>Plan for the Next Two Weeks</a:t>
             </a:r>
             <a:endParaRPr/>
           </a:p>
@@ -25633,8 +26441,8 @@
         </p:nvSpPr>
         <p:spPr>
           <a:xfrm>
-            <a:off x="628650" y="1369226"/>
-            <a:ext cx="7886700" cy="3545400"/>
+            <a:off x="628650" y="1369219"/>
+            <a:ext cx="7886700" cy="3263400"/>
           </a:xfrm>
           <a:prstGeom prst="rect">
             <a:avLst/>
@@ -25646,13 +26454,31 @@
         </p:spPr>
         <p:txBody>
           <a:bodyPr anchorCtr="0" anchor="t" bIns="34275" lIns="68575" spcFirstLastPara="1" rIns="68575" wrap="square" tIns="34275">
-            <a:noAutofit/>
+            <a:normAutofit/>
           </a:bodyPr>
           <a:lstStyle/>
           <a:p>
-            <a:pPr indent="-342900" lvl="0" marL="457200" rtl="0" algn="l">
-              <a:lnSpc>
-                <a:spcPct val="115000"/>
+            <a:pPr indent="0" lvl="0" marL="0" rtl="0" algn="l">
+              <a:lnSpc>
+                <a:spcPct val="90000"/>
+              </a:lnSpc>
+              <a:spcBef>
+                <a:spcPts val="0"/>
+              </a:spcBef>
+              <a:spcAft>
+                <a:spcPts val="0"/>
+              </a:spcAft>
+              <a:buNone/>
+            </a:pPr>
+            <a:r>
+              <a:t/>
+            </a:r>
+            <a:endParaRPr/>
+          </a:p>
+          <a:p>
+            <a:pPr indent="-171450" lvl="0" marL="177800" rtl="0" algn="l">
+              <a:lnSpc>
+                <a:spcPct val="90000"/>
               </a:lnSpc>
               <a:spcBef>
                 <a:spcPts val="800"/>
@@ -25660,182 +26486,140 @@
               <a:spcAft>
                 <a:spcPts val="0"/>
               </a:spcAft>
-              <a:buSzPts val="1800"/>
+              <a:buClr>
+                <a:schemeClr val="dk1"/>
+              </a:buClr>
+              <a:buSzPts val="2100"/>
               <a:buChar char="●"/>
             </a:pPr>
             <a:r>
-              <a:rPr lang="en" sz="1800"/>
-              <a:t>Week 2: Imperfect single agent hovering at target on Z axis</a:t>
-            </a:r>
-            <a:endParaRPr sz="1800"/>
-          </a:p>
-          <a:p>
-            <a:pPr indent="-342900" lvl="0" marL="457200" rtl="0" algn="l">
-              <a:lnSpc>
-                <a:spcPct val="115000"/>
-              </a:lnSpc>
-              <a:spcBef>
-                <a:spcPts val="0"/>
-              </a:spcBef>
-              <a:spcAft>
-                <a:spcPts val="0"/>
-              </a:spcAft>
-              <a:buSzPts val="1800"/>
+              <a:rPr lang="en"/>
+              <a:t>Goals</a:t>
+            </a:r>
+            <a:endParaRPr/>
+          </a:p>
+          <a:p>
+            <a:pPr indent="-177800" lvl="1" marL="520700" rtl="0" algn="l">
+              <a:lnSpc>
+                <a:spcPct val="90000"/>
+              </a:lnSpc>
+              <a:spcBef>
+                <a:spcPts val="800"/>
+              </a:spcBef>
+              <a:spcAft>
+                <a:spcPts val="0"/>
+              </a:spcAft>
+              <a:buSzPts val="1400"/>
+              <a:buChar char="○"/>
+            </a:pPr>
+            <a:r>
+              <a:rPr lang="en"/>
+              <a:t>Successful MARL for 2 drones (hovering at a target without colliding)</a:t>
+            </a:r>
+            <a:endParaRPr/>
+          </a:p>
+          <a:p>
+            <a:pPr indent="-177800" lvl="2" marL="863600" rtl="0" algn="l">
+              <a:lnSpc>
+                <a:spcPct val="90000"/>
+              </a:lnSpc>
+              <a:spcBef>
+                <a:spcPts val="800"/>
+              </a:spcBef>
+              <a:spcAft>
+                <a:spcPts val="0"/>
+              </a:spcAft>
+              <a:buSzPts val="1400"/>
+              <a:buChar char="■"/>
+            </a:pPr>
+            <a:r>
+              <a:rPr lang="en"/>
+              <a:t>Possibly adding / testing with domain randomization as well</a:t>
+            </a:r>
+            <a:endParaRPr/>
+          </a:p>
+          <a:p>
+            <a:pPr indent="-177800" lvl="1" marL="520700" rtl="0" algn="l">
+              <a:lnSpc>
+                <a:spcPct val="90000"/>
+              </a:lnSpc>
+              <a:spcBef>
+                <a:spcPts val="800"/>
+              </a:spcBef>
+              <a:spcAft>
+                <a:spcPts val="0"/>
+              </a:spcAft>
+              <a:buSzPts val="1400"/>
+              <a:buChar char="○"/>
+            </a:pPr>
+            <a:r>
+              <a:rPr lang="en"/>
+              <a:t>Prepare to test on actual drones</a:t>
+            </a:r>
+            <a:endParaRPr/>
+          </a:p>
+          <a:p>
+            <a:pPr indent="-177800" lvl="2" marL="863600" rtl="0" algn="l">
+              <a:lnSpc>
+                <a:spcPct val="90000"/>
+              </a:lnSpc>
+              <a:spcBef>
+                <a:spcPts val="800"/>
+              </a:spcBef>
+              <a:spcAft>
+                <a:spcPts val="0"/>
+              </a:spcAft>
+              <a:buSzPts val="1400"/>
+              <a:buChar char="■"/>
+            </a:pPr>
+            <a:r>
+              <a:rPr lang="en"/>
+              <a:t>Maybe test single-agent hover on actual drone</a:t>
+            </a:r>
+            <a:endParaRPr/>
+          </a:p>
+          <a:p>
+            <a:pPr indent="-171450" lvl="0" marL="177800" rtl="0" algn="l">
+              <a:lnSpc>
+                <a:spcPct val="90000"/>
+              </a:lnSpc>
+              <a:spcBef>
+                <a:spcPts val="800"/>
+              </a:spcBef>
+              <a:spcAft>
+                <a:spcPts val="0"/>
+              </a:spcAft>
+              <a:buClr>
+                <a:schemeClr val="dk1"/>
+              </a:buClr>
+              <a:buSzPts val="2100"/>
               <a:buChar char="●"/>
             </a:pPr>
             <a:r>
-              <a:rPr lang="en" sz="1800"/>
-              <a:t>Week 4: Successful [0, 0, Z] hover, imperfect [0, Y, Z] hover</a:t>
-            </a:r>
-            <a:endParaRPr sz="1800"/>
-          </a:p>
-          <a:p>
-            <a:pPr indent="-342900" lvl="0" marL="457200" rtl="0" algn="l">
-              <a:lnSpc>
-                <a:spcPct val="115000"/>
-              </a:lnSpc>
-              <a:spcBef>
-                <a:spcPts val="0"/>
-              </a:spcBef>
-              <a:spcAft>
-                <a:spcPts val="0"/>
-              </a:spcAft>
-              <a:buSzPts val="1800"/>
-              <a:buChar char="●"/>
-            </a:pPr>
-            <a:r>
-              <a:rPr lang="en" sz="1800"/>
-              <a:t>Week 6: Successful XYZ hover within small ranges</a:t>
-            </a:r>
-            <a:endParaRPr sz="1800"/>
-          </a:p>
-          <a:p>
-            <a:pPr indent="-342900" lvl="0" marL="457200" rtl="0" algn="l">
-              <a:lnSpc>
-                <a:spcPct val="115000"/>
-              </a:lnSpc>
-              <a:spcBef>
-                <a:spcPts val="0"/>
-              </a:spcBef>
-              <a:spcAft>
-                <a:spcPts val="0"/>
-              </a:spcAft>
-              <a:buSzPts val="1800"/>
-              <a:buChar char="●"/>
-            </a:pPr>
-            <a:r>
-              <a:rPr lang="en" sz="1800"/>
-              <a:t>Week 8: Successful XYZ hover within most ranges, </a:t>
-            </a:r>
-            <a:r>
-              <a:rPr lang="en" sz="1800"/>
-              <a:t>baseline</a:t>
-            </a:r>
-            <a:r>
-              <a:rPr lang="en" sz="1800"/>
-              <a:t> MARL</a:t>
-            </a:r>
-            <a:endParaRPr sz="1800"/>
-          </a:p>
-          <a:p>
-            <a:pPr indent="-342900" lvl="0" marL="457200" rtl="0" algn="l">
-              <a:lnSpc>
-                <a:spcPct val="115000"/>
-              </a:lnSpc>
-              <a:spcBef>
-                <a:spcPts val="0"/>
-              </a:spcBef>
-              <a:spcAft>
-                <a:spcPts val="0"/>
-              </a:spcAft>
-              <a:buSzPts val="1800"/>
-              <a:buChar char="●"/>
-            </a:pPr>
-            <a:r>
-              <a:rPr lang="en" sz="1800"/>
-              <a:t>Week 10: …</a:t>
-            </a:r>
-            <a:endParaRPr sz="1800"/>
-          </a:p>
-          <a:p>
-            <a:pPr indent="-342900" lvl="0" marL="457200" rtl="0" algn="l">
-              <a:lnSpc>
-                <a:spcPct val="115000"/>
-              </a:lnSpc>
-              <a:spcBef>
-                <a:spcPts val="0"/>
-              </a:spcBef>
-              <a:spcAft>
-                <a:spcPts val="0"/>
-              </a:spcAft>
-              <a:buSzPts val="1800"/>
-              <a:buChar char="●"/>
-            </a:pPr>
-            <a:r>
-              <a:rPr lang="en" sz="1800"/>
-              <a:t>Final deadline: Deliverables (e.g., report, demo, paper draft)</a:t>
-            </a:r>
-            <a:endParaRPr sz="1800"/>
-          </a:p>
-          <a:p>
-            <a:pPr indent="-342900" lvl="1" marL="914400" rtl="0" algn="l">
-              <a:lnSpc>
-                <a:spcPct val="115000"/>
-              </a:lnSpc>
-              <a:spcBef>
-                <a:spcPts val="0"/>
-              </a:spcBef>
-              <a:spcAft>
-                <a:spcPts val="0"/>
-              </a:spcAft>
-              <a:buSzPts val="1800"/>
+              <a:rPr lang="en"/>
+              <a:t>Dependencies</a:t>
+            </a:r>
+            <a:endParaRPr/>
+          </a:p>
+          <a:p>
+            <a:pPr indent="-177800" lvl="1" marL="520700" rtl="0" algn="l">
+              <a:lnSpc>
+                <a:spcPct val="90000"/>
+              </a:lnSpc>
+              <a:spcBef>
+                <a:spcPts val="800"/>
+              </a:spcBef>
+              <a:spcAft>
+                <a:spcPts val="0"/>
+              </a:spcAft>
+              <a:buSzPts val="1400"/>
               <a:buChar char="○"/>
             </a:pPr>
             <a:r>
-              <a:rPr lang="en" sz="1800"/>
-              <a:t>Early December</a:t>
-            </a:r>
-            <a:endParaRPr sz="1800"/>
-          </a:p>
-          <a:p>
-            <a:pPr indent="-342900" lvl="0" marL="457200" rtl="0" algn="l">
-              <a:lnSpc>
-                <a:spcPct val="115000"/>
-              </a:lnSpc>
-              <a:spcBef>
-                <a:spcPts val="0"/>
-              </a:spcBef>
-              <a:spcAft>
-                <a:spcPts val="0"/>
-              </a:spcAft>
-              <a:buSzPts val="1800"/>
-              <a:buChar char="●"/>
-            </a:pPr>
-            <a:r>
-              <a:rPr lang="en" sz="1800"/>
-              <a:t>Shifts in schedule</a:t>
-            </a:r>
-            <a:endParaRPr sz="1800"/>
-          </a:p>
-          <a:p>
-            <a:pPr indent="-342900" lvl="1" marL="914400" rtl="0" algn="l">
-              <a:lnSpc>
-                <a:spcPct val="115000"/>
-              </a:lnSpc>
-              <a:spcBef>
-                <a:spcPts val="0"/>
-              </a:spcBef>
-              <a:spcAft>
-                <a:spcPts val="0"/>
-              </a:spcAft>
-              <a:buSzPts val="1800"/>
-              <a:buChar char="○"/>
-            </a:pPr>
-            <a:r>
               <a:rPr lang="en"/>
-              <a:t>On track</a:t>
-            </a:r>
-            <a:endParaRPr sz="1800"/>
+              <a:t>None</a:t>
+            </a:r>
+            <a:endParaRPr/>
           </a:p>
         </p:txBody>
       </p:sp>
@@ -25910,7 +26694,7 @@
             </a:pPr>
             <a:r>
               <a:rPr lang="en"/>
-              <a:t>Projected Progress for Final Meeting</a:t>
+              <a:t>Roadmap Checkpoint</a:t>
             </a:r>
             <a:endParaRPr/>
           </a:p>
@@ -25958,7 +26742,115 @@
             </a:pPr>
             <a:r>
               <a:rPr lang="en" sz="1800"/>
-              <a:t>Now (end of October)</a:t>
+              <a:t>Week 2: Imperfect single agent hovering at target on Z axis</a:t>
+            </a:r>
+            <a:endParaRPr sz="1800"/>
+          </a:p>
+          <a:p>
+            <a:pPr indent="-342900" lvl="0" marL="457200" rtl="0" algn="l">
+              <a:lnSpc>
+                <a:spcPct val="115000"/>
+              </a:lnSpc>
+              <a:spcBef>
+                <a:spcPts val="0"/>
+              </a:spcBef>
+              <a:spcAft>
+                <a:spcPts val="0"/>
+              </a:spcAft>
+              <a:buSzPts val="1800"/>
+              <a:buChar char="●"/>
+            </a:pPr>
+            <a:r>
+              <a:rPr lang="en" sz="1800"/>
+              <a:t>Week 4: Successful [0, 0, Z] hover, imperfect [0, Y, Z] hover</a:t>
+            </a:r>
+            <a:endParaRPr sz="1800"/>
+          </a:p>
+          <a:p>
+            <a:pPr indent="-342900" lvl="0" marL="457200" rtl="0" algn="l">
+              <a:lnSpc>
+                <a:spcPct val="115000"/>
+              </a:lnSpc>
+              <a:spcBef>
+                <a:spcPts val="0"/>
+              </a:spcBef>
+              <a:spcAft>
+                <a:spcPts val="0"/>
+              </a:spcAft>
+              <a:buSzPts val="1800"/>
+              <a:buChar char="●"/>
+            </a:pPr>
+            <a:r>
+              <a:rPr lang="en" sz="1800"/>
+              <a:t>Week 6: Successful XYZ hover within small ranges</a:t>
+            </a:r>
+            <a:endParaRPr sz="1800"/>
+          </a:p>
+          <a:p>
+            <a:pPr indent="-342900" lvl="0" marL="457200" rtl="0" algn="l">
+              <a:lnSpc>
+                <a:spcPct val="115000"/>
+              </a:lnSpc>
+              <a:spcBef>
+                <a:spcPts val="0"/>
+              </a:spcBef>
+              <a:spcAft>
+                <a:spcPts val="0"/>
+              </a:spcAft>
+              <a:buSzPts val="1800"/>
+              <a:buChar char="●"/>
+            </a:pPr>
+            <a:r>
+              <a:rPr lang="en" sz="1800"/>
+              <a:t>Week 8: Successful XYZ hover within most ranges, </a:t>
+            </a:r>
+            <a:r>
+              <a:rPr lang="en" sz="1800"/>
+              <a:t>baseline</a:t>
+            </a:r>
+            <a:r>
+              <a:rPr lang="en" sz="1800"/>
+              <a:t> MARL</a:t>
+            </a:r>
+            <a:endParaRPr sz="1800"/>
+          </a:p>
+          <a:p>
+            <a:pPr indent="-342900" lvl="0" marL="457200" rtl="0" algn="l">
+              <a:lnSpc>
+                <a:spcPct val="115000"/>
+              </a:lnSpc>
+              <a:spcBef>
+                <a:spcPts val="0"/>
+              </a:spcBef>
+              <a:spcAft>
+                <a:spcPts val="0"/>
+              </a:spcAft>
+              <a:buSzPts val="1800"/>
+              <a:buChar char="●"/>
+            </a:pPr>
+            <a:r>
+              <a:rPr lang="en" sz="1800"/>
+              <a:t>Week 10: …</a:t>
+            </a:r>
+            <a:endParaRPr sz="1800"/>
+          </a:p>
+          <a:p>
+            <a:pPr indent="-342900" lvl="0" marL="457200" rtl="0" algn="l">
+              <a:lnSpc>
+                <a:spcPct val="115000"/>
+              </a:lnSpc>
+              <a:spcBef>
+                <a:spcPts val="0"/>
+              </a:spcBef>
+              <a:spcAft>
+                <a:spcPts val="0"/>
+              </a:spcAft>
+              <a:buSzPts val="1800"/>
+              <a:buChar char="●"/>
+            </a:pPr>
+            <a:r>
+              <a:rPr lang="en" sz="1800"/>
+              <a:t>Final deadline: Deliverables (e.g., report, demo, paper draft)</a:t>
             </a:r>
             <a:endParaRPr sz="1800"/>
           </a:p>
@@ -25977,10 +26869,10 @@
               <a:buChar char="○"/>
             </a:pPr>
             <a:r>
-              <a:rPr lang="en"/>
-              <a:t>In simulation, getting semi-successful multi-agent hover (getting successful hover might just be a compute issue)</a:t>
-            </a:r>
-            <a:endParaRPr/>
+              <a:rPr lang="en" sz="1800"/>
+              <a:t>Early December</a:t>
+            </a:r>
+            <a:endParaRPr sz="1800"/>
           </a:p>
           <a:p>
             <a:pPr indent="-342900" lvl="0" marL="457200" rtl="0" algn="l">
@@ -25998,7 +26890,7 @@
             </a:pPr>
             <a:r>
               <a:rPr lang="en" sz="1800"/>
-              <a:t>Final meeting (end of November)</a:t>
+              <a:t>Shifts in schedule</a:t>
             </a:r>
             <a:endParaRPr sz="1800"/>
           </a:p>
@@ -26018,7 +26910,7 @@
             </a:pPr>
             <a:r>
               <a:rPr lang="en"/>
-              <a:t>Successful multi-agent (2 drones) hover at a target in XYZ in simulation → Testing (and possibly success) on 2 real drones</a:t>
+              <a:t>On track</a:t>
             </a:r>
             <a:endParaRPr sz="1800"/>
           </a:p>
@@ -26095,7 +26987,7 @@
             </a:pPr>
             <a:r>
               <a:rPr lang="en"/>
-              <a:t>Discussion Points / Questions </a:t>
+              <a:t>Projected Progress for Final Meeting</a:t>
             </a:r>
             <a:endParaRPr/>
           </a:p>
@@ -26111,8 +27003,8 @@
         </p:nvSpPr>
         <p:spPr>
           <a:xfrm>
-            <a:off x="628650" y="1171425"/>
-            <a:ext cx="7886700" cy="3648900"/>
+            <a:off x="628650" y="1369226"/>
+            <a:ext cx="7886700" cy="3545400"/>
           </a:xfrm>
           <a:prstGeom prst="rect">
             <a:avLst/>
@@ -26124,31 +27016,47 @@
         </p:spPr>
         <p:txBody>
           <a:bodyPr anchorCtr="0" anchor="t" bIns="34275" lIns="68575" spcFirstLastPara="1" rIns="68575" wrap="square" tIns="34275">
-            <a:normAutofit lnSpcReduction="10000"/>
+            <a:noAutofit/>
           </a:bodyPr>
           <a:lstStyle/>
           <a:p>
-            <a:pPr indent="-209550" lvl="0" marL="177800" rtl="0" algn="l">
+            <a:pPr indent="-342900" lvl="0" marL="457200" rtl="0" algn="l">
               <a:lnSpc>
                 <a:spcPct val="115000"/>
               </a:lnSpc>
               <a:spcBef>
-                <a:spcPts val="0"/>
-              </a:spcBef>
-              <a:spcAft>
-                <a:spcPts val="0"/>
-              </a:spcAft>
-              <a:buSzPts val="1900"/>
+                <a:spcPts val="800"/>
+              </a:spcBef>
+              <a:spcAft>
+                <a:spcPts val="0"/>
+              </a:spcAft>
+              <a:buSzPts val="1800"/>
               <a:buChar char="●"/>
             </a:pPr>
             <a:r>
-              <a:rPr b="1" lang="en" sz="1900"/>
-              <a:t>Testing on actual drones</a:t>
-            </a:r>
-            <a:endParaRPr b="1" sz="1900"/>
-          </a:p>
-          <a:p>
-            <a:pPr indent="-209550" lvl="1" marL="520700" rtl="0" algn="l">
+              <a:rPr lang="en" sz="1800"/>
+              <a:t>Now (</a:t>
+            </a:r>
+            <a:r>
+              <a:rPr lang="en" sz="1800"/>
+              <a:t>end</a:t>
+            </a:r>
+            <a:r>
+              <a:rPr lang="en" sz="1800"/>
+              <a:t> of </a:t>
+            </a:r>
+            <a:r>
+              <a:rPr lang="en" sz="1800"/>
+              <a:t>October</a:t>
+            </a:r>
+            <a:r>
+              <a:rPr lang="en" sz="1800"/>
+              <a:t>)</a:t>
+            </a:r>
+            <a:endParaRPr sz="1800"/>
+          </a:p>
+          <a:p>
+            <a:pPr indent="-342900" lvl="1" marL="914400" rtl="0" algn="l">
               <a:lnSpc>
                 <a:spcPct val="115000"/>
               </a:lnSpc>
@@ -26158,25 +27066,29 @@
               <a:spcAft>
                 <a:spcPts val="0"/>
               </a:spcAft>
-              <a:buSzPts val="1900"/>
+              <a:buSzPts val="1800"/>
               <a:buChar char="○"/>
             </a:pPr>
             <a:r>
-              <a:rPr lang="en" sz="1900"/>
-              <a:t>Booking </a:t>
-            </a:r>
-            <a:r>
-              <a:rPr lang="en" sz="1900"/>
-              <a:t>time slots</a:t>
-            </a:r>
-            <a:r>
-              <a:rPr lang="en" sz="1900"/>
-              <a:t> (how / what is the setup like)?</a:t>
-            </a:r>
-            <a:endParaRPr sz="1900"/>
-          </a:p>
-          <a:p>
-            <a:pPr indent="-209550" lvl="1" marL="520700" rtl="0" algn="l">
+              <a:rPr lang="en"/>
+              <a:t>In simulation, getting </a:t>
+            </a:r>
+            <a:r>
+              <a:rPr lang="en"/>
+              <a:t>semi-</a:t>
+            </a:r>
+            <a:r>
+              <a:rPr lang="en"/>
+              <a:t>successful multi-agent hover</a:t>
+            </a:r>
+            <a:r>
+              <a:rPr lang="en"/>
+              <a:t> (getting successful hover might just be a compute issue)</a:t>
+            </a:r>
+            <a:endParaRPr/>
+          </a:p>
+          <a:p>
+            <a:pPr indent="-342900" lvl="0" marL="457200" rtl="0" algn="l">
               <a:lnSpc>
                 <a:spcPct val="115000"/>
               </a:lnSpc>
@@ -26186,174 +27098,34 @@
               <a:spcAft>
                 <a:spcPts val="0"/>
               </a:spcAft>
-              <a:buSzPts val="1900"/>
+              <a:buSzPts val="1800"/>
+              <a:buChar char="●"/>
+            </a:pPr>
+            <a:r>
+              <a:rPr lang="en" sz="1800"/>
+              <a:t>Final meeting (end of November)</a:t>
+            </a:r>
+            <a:endParaRPr sz="1800"/>
+          </a:p>
+          <a:p>
+            <a:pPr indent="-342900" lvl="1" marL="914400" rtl="0" algn="l">
+              <a:lnSpc>
+                <a:spcPct val="115000"/>
+              </a:lnSpc>
+              <a:spcBef>
+                <a:spcPts val="0"/>
+              </a:spcBef>
+              <a:spcAft>
+                <a:spcPts val="0"/>
+              </a:spcAft>
+              <a:buSzPts val="1800"/>
               <a:buChar char="○"/>
             </a:pPr>
             <a:r>
-              <a:rPr lang="en" sz="1900"/>
-              <a:t>Safety considerations</a:t>
-            </a:r>
-            <a:endParaRPr sz="1900"/>
-          </a:p>
-          <a:p>
-            <a:pPr indent="-209550" lvl="2" marL="863600" rtl="0" algn="l">
-              <a:lnSpc>
-                <a:spcPct val="115000"/>
-              </a:lnSpc>
-              <a:spcBef>
-                <a:spcPts val="0"/>
-              </a:spcBef>
-              <a:spcAft>
-                <a:spcPts val="0"/>
-              </a:spcAft>
-              <a:buSzPts val="1900"/>
-              <a:buChar char="■"/>
-            </a:pPr>
-            <a:r>
-              <a:rPr lang="en" sz="1900"/>
-              <a:t>What kind of fallbacks should we program into the agent?</a:t>
-            </a:r>
-            <a:endParaRPr sz="1900"/>
-          </a:p>
-          <a:p>
-            <a:pPr indent="-209550" lvl="3" marL="1206500" rtl="0" algn="l">
-              <a:lnSpc>
-                <a:spcPct val="115000"/>
-              </a:lnSpc>
-              <a:spcBef>
-                <a:spcPts val="0"/>
-              </a:spcBef>
-              <a:spcAft>
-                <a:spcPts val="0"/>
-              </a:spcAft>
-              <a:buSzPts val="1900"/>
-              <a:buChar char="●"/>
-            </a:pPr>
-            <a:r>
-              <a:rPr lang="en" sz="1900"/>
-              <a:t>E.g. if pos/rot/vel &gt; n → Apply neutral hover control?</a:t>
-            </a:r>
-            <a:endParaRPr sz="1900"/>
-          </a:p>
-          <a:p>
-            <a:pPr indent="-209550" lvl="3" marL="1206500" rtl="0" algn="l">
-              <a:lnSpc>
-                <a:spcPct val="115000"/>
-              </a:lnSpc>
-              <a:spcBef>
-                <a:spcPts val="0"/>
-              </a:spcBef>
-              <a:spcAft>
-                <a:spcPts val="0"/>
-              </a:spcAft>
-              <a:buSzPts val="1900"/>
-              <a:buChar char="●"/>
-            </a:pPr>
-            <a:r>
-              <a:rPr lang="en" sz="1900"/>
-              <a:t>Physical safety constraints e.g. tether to drone?</a:t>
-            </a:r>
-            <a:endParaRPr sz="1900"/>
-          </a:p>
-          <a:p>
-            <a:pPr indent="-209550" lvl="2" marL="863600" rtl="0" algn="l">
-              <a:lnSpc>
-                <a:spcPct val="115000"/>
-              </a:lnSpc>
-              <a:spcBef>
-                <a:spcPts val="0"/>
-              </a:spcBef>
-              <a:spcAft>
-                <a:spcPts val="0"/>
-              </a:spcAft>
-              <a:buSzPts val="1900"/>
-              <a:buChar char="■"/>
-            </a:pPr>
-            <a:r>
-              <a:rPr lang="en" sz="1900"/>
-              <a:t>Landing → Run for t seconds then apply sub-neutral thrust?</a:t>
-            </a:r>
-            <a:endParaRPr sz="1900"/>
-          </a:p>
-          <a:p>
-            <a:pPr indent="-209550" lvl="3" marL="1206500" rtl="0" algn="l">
-              <a:lnSpc>
-                <a:spcPct val="115000"/>
-              </a:lnSpc>
-              <a:spcBef>
-                <a:spcPts val="0"/>
-              </a:spcBef>
-              <a:spcAft>
-                <a:spcPts val="0"/>
-              </a:spcAft>
-              <a:buSzPts val="1900"/>
-              <a:buChar char="●"/>
-            </a:pPr>
-            <a:r>
-              <a:rPr lang="en" sz="1900"/>
-              <a:t>E.g. after 10 seconds, apply (hover thrust - 0.01)?</a:t>
-            </a:r>
-            <a:endParaRPr sz="1900"/>
-          </a:p>
-          <a:p>
-            <a:pPr indent="-209550" lvl="0" marL="177800" rtl="0" algn="l">
-              <a:lnSpc>
-                <a:spcPct val="115000"/>
-              </a:lnSpc>
-              <a:spcBef>
-                <a:spcPts val="0"/>
-              </a:spcBef>
-              <a:spcAft>
-                <a:spcPts val="0"/>
-              </a:spcAft>
-              <a:buSzPts val="1900"/>
-              <a:buChar char="●"/>
-            </a:pPr>
-            <a:r>
-              <a:rPr b="1" lang="en" sz="1900"/>
-              <a:t>Multi-XYZ success → Improvement suggestions?</a:t>
-            </a:r>
-            <a:endParaRPr b="1" sz="1900"/>
-          </a:p>
-          <a:p>
-            <a:pPr indent="-209550" lvl="1" marL="520700" rtl="0" algn="l">
-              <a:lnSpc>
-                <a:spcPct val="115000"/>
-              </a:lnSpc>
-              <a:spcBef>
-                <a:spcPts val="0"/>
-              </a:spcBef>
-              <a:spcAft>
-                <a:spcPts val="0"/>
-              </a:spcAft>
-              <a:buSzPts val="1900"/>
-              <a:buChar char="○"/>
-            </a:pPr>
-            <a:r>
-              <a:rPr lang="en" sz="1900"/>
-              <a:t>Any other suggestions / ideas?</a:t>
-            </a:r>
-            <a:endParaRPr sz="1900"/>
-          </a:p>
-          <a:p>
-            <a:pPr indent="-209550" lvl="1" marL="520700" rtl="0" algn="l">
-              <a:lnSpc>
-                <a:spcPct val="115000"/>
-              </a:lnSpc>
-              <a:spcBef>
-                <a:spcPts val="0"/>
-              </a:spcBef>
-              <a:spcAft>
-                <a:spcPts val="0"/>
-              </a:spcAft>
-              <a:buSzPts val="1900"/>
-              <a:buChar char="○"/>
-            </a:pPr>
-            <a:r>
-              <a:rPr lang="en" sz="1900"/>
-              <a:t>Currently has ~50% success rate at best, see next slides</a:t>
-            </a:r>
-            <a:endParaRPr sz="1900"/>
+              <a:rPr lang="en"/>
+              <a:t>Successful multi-agent (2 drones) hover at a target in XYZ in simulation → Testing (and possibly success) on 2 real drones</a:t>
+            </a:r>
+            <a:endParaRPr sz="1800"/>
           </a:p>
         </p:txBody>
       </p:sp>
@@ -26392,54 +27164,8 @@
         </p:nvSpPr>
         <p:spPr>
           <a:xfrm>
-            <a:off x="628650" y="273850"/>
-            <a:ext cx="8055900" cy="994200"/>
-          </a:xfrm>
-          <a:prstGeom prst="rect">
-            <a:avLst/>
-          </a:prstGeom>
-        </p:spPr>
-        <p:txBody>
-          <a:bodyPr anchorCtr="0" anchor="ctr" bIns="34275" lIns="68575" spcFirstLastPara="1" rIns="68575" wrap="square" tIns="34275">
-            <a:normAutofit/>
-          </a:bodyPr>
-          <a:lstStyle/>
-          <a:p>
-            <a:pPr indent="0" lvl="0" marL="0" rtl="0" algn="l">
-              <a:spcBef>
-                <a:spcPts val="0"/>
-              </a:spcBef>
-              <a:spcAft>
-                <a:spcPts val="0"/>
-              </a:spcAft>
-              <a:buNone/>
-            </a:pPr>
-            <a:r>
-              <a:rPr lang="en" sz="2400"/>
-              <a:t>Multi-Agent training, 40 envs, 600k steps per → ~2hrs</a:t>
-            </a:r>
-            <a:endParaRPr sz="2400"/>
-          </a:p>
-        </p:txBody>
-      </p:sp>
-      <p:pic>
-        <p:nvPicPr>
-          <p:cNvPr id="331" name="Google Shape;331;p58" title="multi_40env.png"/>
-          <p:cNvPicPr preferRelativeResize="0"/>
-          <p:nvPr/>
-        </p:nvPicPr>
-        <p:blipFill>
-          <a:blip r:embed="rId3">
-            <a:alphaModFix/>
-          </a:blip>
-          <a:stretch>
-            <a:fillRect/>
-          </a:stretch>
-        </p:blipFill>
-        <p:spPr>
-          <a:xfrm>
-            <a:off x="741213" y="1097300"/>
-            <a:ext cx="7661575" cy="3830775"/>
+            <a:off x="628650" y="273844"/>
+            <a:ext cx="7886700" cy="994200"/>
           </a:xfrm>
           <a:prstGeom prst="rect">
             <a:avLst/>
@@ -26449,7 +27175,293 @@
             <a:noFill/>
           </a:ln>
         </p:spPr>
-      </p:pic>
+        <p:txBody>
+          <a:bodyPr anchorCtr="0" anchor="ctr" bIns="34275" lIns="68575" spcFirstLastPara="1" rIns="68575" wrap="square" tIns="34275">
+            <a:normAutofit/>
+          </a:bodyPr>
+          <a:lstStyle/>
+          <a:p>
+            <a:pPr indent="0" lvl="0" marL="0" rtl="0" algn="l">
+              <a:lnSpc>
+                <a:spcPct val="90000"/>
+              </a:lnSpc>
+              <a:spcBef>
+                <a:spcPts val="0"/>
+              </a:spcBef>
+              <a:spcAft>
+                <a:spcPts val="0"/>
+              </a:spcAft>
+              <a:buClr>
+                <a:schemeClr val="dk1"/>
+              </a:buClr>
+              <a:buSzPts val="3300"/>
+              <a:buFont typeface="Play"/>
+              <a:buNone/>
+            </a:pPr>
+            <a:r>
+              <a:rPr lang="en"/>
+              <a:t>Discussion Points / Questions </a:t>
+            </a:r>
+            <a:endParaRPr/>
+          </a:p>
+        </p:txBody>
+      </p:sp>
+      <p:sp>
+        <p:nvSpPr>
+          <p:cNvPr id="331" name="Google Shape;331;p58"/>
+          <p:cNvSpPr txBox="1"/>
+          <p:nvPr>
+            <p:ph idx="1" type="body"/>
+          </p:nvPr>
+        </p:nvSpPr>
+        <p:spPr>
+          <a:xfrm>
+            <a:off x="628650" y="1171425"/>
+            <a:ext cx="7886700" cy="3648900"/>
+          </a:xfrm>
+          <a:prstGeom prst="rect">
+            <a:avLst/>
+          </a:prstGeom>
+          <a:noFill/>
+          <a:ln>
+            <a:noFill/>
+          </a:ln>
+        </p:spPr>
+        <p:txBody>
+          <a:bodyPr anchorCtr="0" anchor="t" bIns="34275" lIns="68575" spcFirstLastPara="1" rIns="68575" wrap="square" tIns="34275">
+            <a:normAutofit lnSpcReduction="10000"/>
+          </a:bodyPr>
+          <a:lstStyle/>
+          <a:p>
+            <a:pPr indent="-209550" lvl="0" marL="177800" rtl="0" algn="l">
+              <a:lnSpc>
+                <a:spcPct val="115000"/>
+              </a:lnSpc>
+              <a:spcBef>
+                <a:spcPts val="0"/>
+              </a:spcBef>
+              <a:spcAft>
+                <a:spcPts val="0"/>
+              </a:spcAft>
+              <a:buSzPts val="1900"/>
+              <a:buChar char="●"/>
+            </a:pPr>
+            <a:r>
+              <a:rPr b="1" lang="en" sz="1900"/>
+              <a:t>Testing on actual drones</a:t>
+            </a:r>
+            <a:endParaRPr b="1" sz="1900"/>
+          </a:p>
+          <a:p>
+            <a:pPr indent="-209550" lvl="1" marL="520700" rtl="0" algn="l">
+              <a:lnSpc>
+                <a:spcPct val="115000"/>
+              </a:lnSpc>
+              <a:spcBef>
+                <a:spcPts val="0"/>
+              </a:spcBef>
+              <a:spcAft>
+                <a:spcPts val="0"/>
+              </a:spcAft>
+              <a:buSzPts val="1900"/>
+              <a:buChar char="○"/>
+            </a:pPr>
+            <a:r>
+              <a:rPr lang="en" sz="1900"/>
+              <a:t>Booking </a:t>
+            </a:r>
+            <a:r>
+              <a:rPr lang="en" sz="1900"/>
+              <a:t>time slots</a:t>
+            </a:r>
+            <a:r>
+              <a:rPr lang="en" sz="1900"/>
+              <a:t> (how / what is the setup like)?</a:t>
+            </a:r>
+            <a:endParaRPr sz="1900"/>
+          </a:p>
+          <a:p>
+            <a:pPr indent="-209550" lvl="1" marL="520700" rtl="0" algn="l">
+              <a:lnSpc>
+                <a:spcPct val="115000"/>
+              </a:lnSpc>
+              <a:spcBef>
+                <a:spcPts val="0"/>
+              </a:spcBef>
+              <a:spcAft>
+                <a:spcPts val="0"/>
+              </a:spcAft>
+              <a:buSzPts val="1900"/>
+              <a:buChar char="○"/>
+            </a:pPr>
+            <a:r>
+              <a:rPr lang="en" sz="1900"/>
+              <a:t>Safety considerations</a:t>
+            </a:r>
+            <a:endParaRPr sz="1900"/>
+          </a:p>
+          <a:p>
+            <a:pPr indent="-209550" lvl="2" marL="863600" rtl="0" algn="l">
+              <a:lnSpc>
+                <a:spcPct val="115000"/>
+              </a:lnSpc>
+              <a:spcBef>
+                <a:spcPts val="0"/>
+              </a:spcBef>
+              <a:spcAft>
+                <a:spcPts val="0"/>
+              </a:spcAft>
+              <a:buSzPts val="1900"/>
+              <a:buChar char="■"/>
+            </a:pPr>
+            <a:r>
+              <a:rPr lang="en" sz="1900"/>
+              <a:t>What kind of fallbacks should we program into the agent?</a:t>
+            </a:r>
+            <a:endParaRPr sz="1900"/>
+          </a:p>
+          <a:p>
+            <a:pPr indent="-209550" lvl="3" marL="1206500" rtl="0" algn="l">
+              <a:lnSpc>
+                <a:spcPct val="115000"/>
+              </a:lnSpc>
+              <a:spcBef>
+                <a:spcPts val="0"/>
+              </a:spcBef>
+              <a:spcAft>
+                <a:spcPts val="0"/>
+              </a:spcAft>
+              <a:buSzPts val="1900"/>
+              <a:buChar char="●"/>
+            </a:pPr>
+            <a:r>
+              <a:rPr lang="en" sz="1900"/>
+              <a:t>E.g. if pos/rot/vel &gt; n → Apply neutral hover control?</a:t>
+            </a:r>
+            <a:endParaRPr sz="1900"/>
+          </a:p>
+          <a:p>
+            <a:pPr indent="-209550" lvl="3" marL="1206500" rtl="0" algn="l">
+              <a:lnSpc>
+                <a:spcPct val="115000"/>
+              </a:lnSpc>
+              <a:spcBef>
+                <a:spcPts val="0"/>
+              </a:spcBef>
+              <a:spcAft>
+                <a:spcPts val="0"/>
+              </a:spcAft>
+              <a:buSzPts val="1900"/>
+              <a:buChar char="●"/>
+            </a:pPr>
+            <a:r>
+              <a:rPr lang="en" sz="1900"/>
+              <a:t>Physical safety constraints e.g. tether to drone?</a:t>
+            </a:r>
+            <a:endParaRPr sz="1900"/>
+          </a:p>
+          <a:p>
+            <a:pPr indent="-209550" lvl="2" marL="863600" rtl="0" algn="l">
+              <a:lnSpc>
+                <a:spcPct val="115000"/>
+              </a:lnSpc>
+              <a:spcBef>
+                <a:spcPts val="0"/>
+              </a:spcBef>
+              <a:spcAft>
+                <a:spcPts val="0"/>
+              </a:spcAft>
+              <a:buSzPts val="1900"/>
+              <a:buChar char="■"/>
+            </a:pPr>
+            <a:r>
+              <a:rPr lang="en" sz="1900"/>
+              <a:t>Landing → Run for t seconds then apply sub-neutral thrust?</a:t>
+            </a:r>
+            <a:endParaRPr sz="1900"/>
+          </a:p>
+          <a:p>
+            <a:pPr indent="-209550" lvl="3" marL="1206500" rtl="0" algn="l">
+              <a:lnSpc>
+                <a:spcPct val="115000"/>
+              </a:lnSpc>
+              <a:spcBef>
+                <a:spcPts val="0"/>
+              </a:spcBef>
+              <a:spcAft>
+                <a:spcPts val="0"/>
+              </a:spcAft>
+              <a:buSzPts val="1900"/>
+              <a:buChar char="●"/>
+            </a:pPr>
+            <a:r>
+              <a:rPr lang="en" sz="1900"/>
+              <a:t>E.g. after 10 seconds, apply (hover thrust - 0.01)?</a:t>
+            </a:r>
+            <a:endParaRPr sz="1900"/>
+          </a:p>
+          <a:p>
+            <a:pPr indent="-209550" lvl="0" marL="177800" rtl="0" algn="l">
+              <a:lnSpc>
+                <a:spcPct val="115000"/>
+              </a:lnSpc>
+              <a:spcBef>
+                <a:spcPts val="0"/>
+              </a:spcBef>
+              <a:spcAft>
+                <a:spcPts val="0"/>
+              </a:spcAft>
+              <a:buSzPts val="1900"/>
+              <a:buChar char="●"/>
+            </a:pPr>
+            <a:r>
+              <a:rPr b="1" lang="en" sz="1900"/>
+              <a:t>Multi-XYZ success → Improvement suggestions?</a:t>
+            </a:r>
+            <a:endParaRPr b="1" sz="1900"/>
+          </a:p>
+          <a:p>
+            <a:pPr indent="-209550" lvl="1" marL="520700" rtl="0" algn="l">
+              <a:lnSpc>
+                <a:spcPct val="115000"/>
+              </a:lnSpc>
+              <a:spcBef>
+                <a:spcPts val="0"/>
+              </a:spcBef>
+              <a:spcAft>
+                <a:spcPts val="0"/>
+              </a:spcAft>
+              <a:buSzPts val="1900"/>
+              <a:buChar char="○"/>
+            </a:pPr>
+            <a:r>
+              <a:rPr lang="en" sz="1900"/>
+              <a:t>Any other suggestions / ideas?</a:t>
+            </a:r>
+            <a:endParaRPr sz="1900"/>
+          </a:p>
+          <a:p>
+            <a:pPr indent="-209550" lvl="1" marL="520700" rtl="0" algn="l">
+              <a:lnSpc>
+                <a:spcPct val="115000"/>
+              </a:lnSpc>
+              <a:spcBef>
+                <a:spcPts val="0"/>
+              </a:spcBef>
+              <a:spcAft>
+                <a:spcPts val="0"/>
+              </a:spcAft>
+              <a:buSzPts val="1900"/>
+              <a:buChar char="○"/>
+            </a:pPr>
+            <a:r>
+              <a:rPr lang="en" sz="1900"/>
+              <a:t>Currently has ~50% success rate at best, see next slides</a:t>
+            </a:r>
+            <a:endParaRPr sz="1900"/>
+          </a:p>
+        </p:txBody>
+      </p:sp>
     </p:spTree>
   </p:cSld>
   <p:clrMapOvr>
@@ -26509,7 +27521,7 @@
             </a:pPr>
             <a:r>
               <a:rPr lang="en" sz="2400"/>
-              <a:t>Multi-Agent training, 40 envs, 2.4mil steps per → ~8hrs</a:t>
+              <a:t>Multi-Agent training, 40 envs, 600k steps per → ~2hrs</a:t>
             </a:r>
             <a:endParaRPr sz="2400"/>
           </a:p>
@@ -26517,7 +27529,7 @@
       </p:sp>
       <p:pic>
         <p:nvPicPr>
-          <p:cNvPr id="337" name="Google Shape;337;p59" title="40env_2mil_400k_step.png"/>
+          <p:cNvPr id="337" name="Google Shape;337;p59" title="multi_40env.png"/>
           <p:cNvPicPr preferRelativeResize="0"/>
           <p:nvPr/>
         </p:nvPicPr>
@@ -26531,8 +27543,8 @@
         </p:blipFill>
         <p:spPr>
           <a:xfrm>
-            <a:off x="1001350" y="1164625"/>
-            <a:ext cx="7141300" cy="3570650"/>
+            <a:off x="741213" y="1097300"/>
+            <a:ext cx="7661575" cy="3830775"/>
           </a:xfrm>
           <a:prstGeom prst="rect">
             <a:avLst/>
@@ -26578,6 +27590,99 @@
         </p:nvSpPr>
         <p:spPr>
           <a:xfrm>
+            <a:off x="628650" y="273850"/>
+            <a:ext cx="8055900" cy="994200"/>
+          </a:xfrm>
+          <a:prstGeom prst="rect">
+            <a:avLst/>
+          </a:prstGeom>
+        </p:spPr>
+        <p:txBody>
+          <a:bodyPr anchorCtr="0" anchor="ctr" bIns="34275" lIns="68575" spcFirstLastPara="1" rIns="68575" wrap="square" tIns="34275">
+            <a:normAutofit/>
+          </a:bodyPr>
+          <a:lstStyle/>
+          <a:p>
+            <a:pPr indent="0" lvl="0" marL="0" rtl="0" algn="l">
+              <a:spcBef>
+                <a:spcPts val="0"/>
+              </a:spcBef>
+              <a:spcAft>
+                <a:spcPts val="0"/>
+              </a:spcAft>
+              <a:buNone/>
+            </a:pPr>
+            <a:r>
+              <a:rPr lang="en" sz="2400"/>
+              <a:t>Multi-Agent training, 40 envs, 2.4mil steps per → ~8hrs</a:t>
+            </a:r>
+            <a:endParaRPr sz="2400"/>
+          </a:p>
+        </p:txBody>
+      </p:sp>
+      <p:pic>
+        <p:nvPicPr>
+          <p:cNvPr id="343" name="Google Shape;343;p60" title="40env_2mil_400k_step.png"/>
+          <p:cNvPicPr preferRelativeResize="0"/>
+          <p:nvPr/>
+        </p:nvPicPr>
+        <p:blipFill>
+          <a:blip r:embed="rId3">
+            <a:alphaModFix/>
+          </a:blip>
+          <a:stretch>
+            <a:fillRect/>
+          </a:stretch>
+        </p:blipFill>
+        <p:spPr>
+          <a:xfrm>
+            <a:off x="1001350" y="1164625"/>
+            <a:ext cx="7141300" cy="3570650"/>
+          </a:xfrm>
+          <a:prstGeom prst="rect">
+            <a:avLst/>
+          </a:prstGeom>
+          <a:noFill/>
+          <a:ln>
+            <a:noFill/>
+          </a:ln>
+        </p:spPr>
+      </p:pic>
+    </p:spTree>
+  </p:cSld>
+  <p:clrMapOvr>
+    <a:masterClrMapping/>
+  </p:clrMapOvr>
+</p:sld>
+</file>
+
+<file path=ppt/slides/slide37.xml><?xml version="1.0" encoding="utf-8"?>
+<p:sld xmlns:a="http://schemas.openxmlformats.org/drawingml/2006/main" xmlns:r="http://schemas.openxmlformats.org/officeDocument/2006/relationships" xmlns:mc="http://schemas.openxmlformats.org/markup-compatibility/2006" xmlns:mv="urn:schemas-microsoft-com:mac:vml" xmlns:p="http://schemas.openxmlformats.org/presentationml/2006/main" xmlns:c="http://schemas.openxmlformats.org/drawingml/2006/chart" xmlns:dgm="http://schemas.openxmlformats.org/drawingml/2006/diagram" xmlns:o="urn:schemas-microsoft-com:office:office" xmlns:v="urn:schemas-microsoft-com:vml" xmlns:pvml="urn:schemas-microsoft-com:office:powerpoint" xmlns:com="http://schemas.openxmlformats.org/drawingml/2006/compatibility" xmlns:p14="http://schemas.microsoft.com/office/powerpoint/2010/main" xmlns:p15="http://schemas.microsoft.com/office/powerpoint/2012/main" xmlns:ahyp="http://schemas.microsoft.com/office/drawing/2018/hyperlinkcolor">
+  <p:cSld>
+    <p:spTree>
+      <p:nvGrpSpPr>
+        <p:cNvPr id="347" name="Shape 347"/>
+        <p:cNvGrpSpPr/>
+        <p:nvPr/>
+      </p:nvGrpSpPr>
+      <p:grpSpPr>
+        <a:xfrm>
+          <a:off x="0" y="0"/>
+          <a:ext cx="0" cy="0"/>
+          <a:chOff x="0" y="0"/>
+          <a:chExt cx="0" cy="0"/>
+        </a:xfrm>
+      </p:grpSpPr>
+      <p:sp>
+        <p:nvSpPr>
+          <p:cNvPr id="348" name="Google Shape;348;p61"/>
+          <p:cNvSpPr txBox="1"/>
+          <p:nvPr>
+            <p:ph type="title"/>
+          </p:nvPr>
+        </p:nvSpPr>
+        <p:spPr>
+          <a:xfrm>
             <a:off x="628650" y="152123"/>
             <a:ext cx="7886700" cy="696300"/>
           </a:xfrm>
@@ -26622,7 +27727,7 @@
       </p:sp>
       <p:graphicFrame>
         <p:nvGraphicFramePr>
-          <p:cNvPr id="343" name="Google Shape;343;p60"/>
+          <p:cNvPr id="349" name="Google Shape;349;p61"/>
           <p:cNvGraphicFramePr/>
           <p:nvPr/>
         </p:nvGraphicFramePr>
@@ -26635,7 +27740,7 @@
             <a:tbl>
               <a:tblPr bandRow="1" firstRow="1">
                 <a:noFill/>
-                <a:tableStyleId>{33C79BD9-4D4F-410C-A80E-0E65E8C5DBDC}</a:tableStyleId>
+                <a:tableStyleId>{039D4BB7-C18A-48B2-AB24-E2AFBFED9E2B}</a:tableStyleId>
               </a:tblPr>
               <a:tblGrid>
                 <a:gridCol w="1531600"/>
@@ -27343,6 +28448,371 @@
 </p:sld>
 </file>
 
+<file path=ppt/slides/slide38.xml><?xml version="1.0" encoding="utf-8"?>
+<p:sld xmlns:a="http://schemas.openxmlformats.org/drawingml/2006/main" xmlns:r="http://schemas.openxmlformats.org/officeDocument/2006/relationships" xmlns:mc="http://schemas.openxmlformats.org/markup-compatibility/2006" xmlns:mv="urn:schemas-microsoft-com:mac:vml" xmlns:p="http://schemas.openxmlformats.org/presentationml/2006/main" xmlns:c="http://schemas.openxmlformats.org/drawingml/2006/chart" xmlns:dgm="http://schemas.openxmlformats.org/drawingml/2006/diagram" xmlns:o="urn:schemas-microsoft-com:office:office" xmlns:v="urn:schemas-microsoft-com:vml" xmlns:pvml="urn:schemas-microsoft-com:office:powerpoint" xmlns:com="http://schemas.openxmlformats.org/drawingml/2006/compatibility" xmlns:p14="http://schemas.microsoft.com/office/powerpoint/2010/main" xmlns:p15="http://schemas.microsoft.com/office/powerpoint/2012/main" xmlns:ahyp="http://schemas.microsoft.com/office/drawing/2018/hyperlinkcolor">
+  <p:cSld>
+    <p:bg>
+      <p:bgPr>
+        <a:solidFill>
+          <a:schemeClr val="dk1"/>
+        </a:solidFill>
+      </p:bgPr>
+    </p:bg>
+    <p:spTree>
+      <p:nvGrpSpPr>
+        <p:cNvPr id="353" name="Shape 353"/>
+        <p:cNvGrpSpPr/>
+        <p:nvPr/>
+      </p:nvGrpSpPr>
+      <p:grpSpPr>
+        <a:xfrm>
+          <a:off x="0" y="0"/>
+          <a:ext cx="0" cy="0"/>
+          <a:chOff x="0" y="0"/>
+          <a:chExt cx="0" cy="0"/>
+        </a:xfrm>
+      </p:grpSpPr>
+      <p:sp>
+        <p:nvSpPr>
+          <p:cNvPr id="354" name="Google Shape;354;p62"/>
+          <p:cNvSpPr txBox="1"/>
+          <p:nvPr>
+            <p:ph idx="1" type="body"/>
+          </p:nvPr>
+        </p:nvSpPr>
+        <p:spPr>
+          <a:xfrm>
+            <a:off x="628650" y="1369219"/>
+            <a:ext cx="7886700" cy="3263400"/>
+          </a:xfrm>
+          <a:prstGeom prst="rect">
+            <a:avLst/>
+          </a:prstGeom>
+        </p:spPr>
+        <p:txBody>
+          <a:bodyPr anchorCtr="0" anchor="t" bIns="34275" lIns="68575" spcFirstLastPara="1" rIns="68575" wrap="square" tIns="34275">
+            <a:normAutofit/>
+          </a:bodyPr>
+          <a:lstStyle/>
+          <a:p>
+            <a:pPr indent="0" lvl="0" marL="0" rtl="0" algn="ctr">
+              <a:spcBef>
+                <a:spcPts val="800"/>
+              </a:spcBef>
+              <a:spcAft>
+                <a:spcPts val="0"/>
+              </a:spcAft>
+              <a:buNone/>
+            </a:pPr>
+            <a:r>
+              <a:rPr lang="en" sz="4200">
+                <a:solidFill>
+                  <a:schemeClr val="lt1"/>
+                </a:solidFill>
+              </a:rPr>
+              <a:t>Week 8-10</a:t>
+            </a:r>
+            <a:endParaRPr sz="4200">
+              <a:solidFill>
+                <a:schemeClr val="lt1"/>
+              </a:solidFill>
+            </a:endParaRPr>
+          </a:p>
+          <a:p>
+            <a:pPr indent="0" lvl="0" marL="0" rtl="0" algn="ctr">
+              <a:spcBef>
+                <a:spcPts val="800"/>
+              </a:spcBef>
+              <a:spcAft>
+                <a:spcPts val="0"/>
+              </a:spcAft>
+              <a:buNone/>
+            </a:pPr>
+            <a:r>
+              <a:t/>
+            </a:r>
+            <a:endParaRPr sz="4200">
+              <a:solidFill>
+                <a:schemeClr val="lt1"/>
+              </a:solidFill>
+            </a:endParaRPr>
+          </a:p>
+          <a:p>
+            <a:pPr indent="0" lvl="0" marL="0" rtl="0" algn="ctr">
+              <a:spcBef>
+                <a:spcPts val="800"/>
+              </a:spcBef>
+              <a:spcAft>
+                <a:spcPts val="0"/>
+              </a:spcAft>
+              <a:buNone/>
+            </a:pPr>
+            <a:r>
+              <a:rPr lang="en" sz="4200">
+                <a:solidFill>
+                  <a:schemeClr val="lt1"/>
+                </a:solidFill>
+              </a:rPr>
+              <a:t>XYZ hover using MuJoCo MJX GPU training</a:t>
+            </a:r>
+            <a:endParaRPr sz="4200">
+              <a:solidFill>
+                <a:schemeClr val="lt1"/>
+              </a:solidFill>
+            </a:endParaRPr>
+          </a:p>
+        </p:txBody>
+      </p:sp>
+    </p:spTree>
+  </p:cSld>
+  <p:clrMapOvr>
+    <a:masterClrMapping/>
+  </p:clrMapOvr>
+</p:sld>
+</file>
+
+<file path=ppt/slides/slide39.xml><?xml version="1.0" encoding="utf-8"?>
+<p:sld xmlns:a="http://schemas.openxmlformats.org/drawingml/2006/main" xmlns:r="http://schemas.openxmlformats.org/officeDocument/2006/relationships" xmlns:mc="http://schemas.openxmlformats.org/markup-compatibility/2006" xmlns:mv="urn:schemas-microsoft-com:mac:vml" xmlns:p="http://schemas.openxmlformats.org/presentationml/2006/main" xmlns:c="http://schemas.openxmlformats.org/drawingml/2006/chart" xmlns:dgm="http://schemas.openxmlformats.org/drawingml/2006/diagram" xmlns:o="urn:schemas-microsoft-com:office:office" xmlns:v="urn:schemas-microsoft-com:vml" xmlns:pvml="urn:schemas-microsoft-com:office:powerpoint" xmlns:com="http://schemas.openxmlformats.org/drawingml/2006/compatibility" xmlns:p14="http://schemas.microsoft.com/office/powerpoint/2010/main" xmlns:p15="http://schemas.microsoft.com/office/powerpoint/2012/main" xmlns:ahyp="http://schemas.microsoft.com/office/drawing/2018/hyperlinkcolor">
+  <p:cSld>
+    <p:spTree>
+      <p:nvGrpSpPr>
+        <p:cNvPr id="358" name="Shape 358"/>
+        <p:cNvGrpSpPr/>
+        <p:nvPr/>
+      </p:nvGrpSpPr>
+      <p:grpSpPr>
+        <a:xfrm>
+          <a:off x="0" y="0"/>
+          <a:ext cx="0" cy="0"/>
+          <a:chOff x="0" y="0"/>
+          <a:chExt cx="0" cy="0"/>
+        </a:xfrm>
+      </p:grpSpPr>
+      <p:sp>
+        <p:nvSpPr>
+          <p:cNvPr id="359" name="Google Shape;359;p63"/>
+          <p:cNvSpPr txBox="1"/>
+          <p:nvPr>
+            <p:ph type="ctrTitle"/>
+          </p:nvPr>
+        </p:nvSpPr>
+        <p:spPr>
+          <a:xfrm>
+            <a:off x="1143000" y="841772"/>
+            <a:ext cx="6858000" cy="1790700"/>
+          </a:xfrm>
+          <a:prstGeom prst="rect">
+            <a:avLst/>
+          </a:prstGeom>
+          <a:noFill/>
+          <a:ln>
+            <a:noFill/>
+          </a:ln>
+        </p:spPr>
+        <p:txBody>
+          <a:bodyPr anchorCtr="0" anchor="b" bIns="34275" lIns="68575" spcFirstLastPara="1" rIns="68575" wrap="square" tIns="34275">
+            <a:normAutofit fontScale="90000"/>
+          </a:bodyPr>
+          <a:lstStyle/>
+          <a:p>
+            <a:pPr indent="0" lvl="0" marL="0" rtl="0" algn="ctr">
+              <a:lnSpc>
+                <a:spcPct val="90000"/>
+              </a:lnSpc>
+              <a:spcBef>
+                <a:spcPts val="0"/>
+              </a:spcBef>
+              <a:spcAft>
+                <a:spcPts val="0"/>
+              </a:spcAft>
+              <a:buClr>
+                <a:schemeClr val="dk1"/>
+              </a:buClr>
+              <a:buSzPct val="100000"/>
+              <a:buFont typeface="Play"/>
+              <a:buNone/>
+            </a:pPr>
+            <a:r>
+              <a:rPr lang="en"/>
+              <a:t>MIRL LAB Honours Project Bi-Weekly Update</a:t>
+            </a:r>
+            <a:endParaRPr/>
+          </a:p>
+          <a:p>
+            <a:pPr indent="0" lvl="0" marL="0" rtl="0" algn="ctr">
+              <a:lnSpc>
+                <a:spcPct val="90000"/>
+              </a:lnSpc>
+              <a:spcBef>
+                <a:spcPts val="0"/>
+              </a:spcBef>
+              <a:spcAft>
+                <a:spcPts val="0"/>
+              </a:spcAft>
+              <a:buClr>
+                <a:schemeClr val="dk1"/>
+              </a:buClr>
+              <a:buSzPct val="100000"/>
+              <a:buFont typeface="Play"/>
+              <a:buNone/>
+            </a:pPr>
+            <a:r>
+              <a:t/>
+            </a:r>
+            <a:endParaRPr/>
+          </a:p>
+        </p:txBody>
+      </p:sp>
+      <p:sp>
+        <p:nvSpPr>
+          <p:cNvPr id="360" name="Google Shape;360;p63"/>
+          <p:cNvSpPr txBox="1"/>
+          <p:nvPr>
+            <p:ph idx="1" type="subTitle"/>
+          </p:nvPr>
+        </p:nvSpPr>
+        <p:spPr>
+          <a:xfrm>
+            <a:off x="961950" y="2701524"/>
+            <a:ext cx="7220100" cy="1790700"/>
+          </a:xfrm>
+          <a:prstGeom prst="rect">
+            <a:avLst/>
+          </a:prstGeom>
+          <a:noFill/>
+          <a:ln>
+            <a:noFill/>
+          </a:ln>
+        </p:spPr>
+        <p:txBody>
+          <a:bodyPr anchorCtr="0" anchor="t" bIns="34275" lIns="68575" spcFirstLastPara="1" rIns="68575" wrap="square" tIns="34275">
+            <a:noAutofit/>
+          </a:bodyPr>
+          <a:lstStyle/>
+          <a:p>
+            <a:pPr indent="0" lvl="0" marL="0" rtl="0" algn="ctr">
+              <a:lnSpc>
+                <a:spcPct val="90000"/>
+              </a:lnSpc>
+              <a:spcBef>
+                <a:spcPts val="0"/>
+              </a:spcBef>
+              <a:spcAft>
+                <a:spcPts val="0"/>
+              </a:spcAft>
+              <a:buClr>
+                <a:schemeClr val="dk1"/>
+              </a:buClr>
+              <a:buSzPts val="1200"/>
+              <a:buNone/>
+            </a:pPr>
+            <a:r>
+              <a:rPr lang="en" sz="1700"/>
+              <a:t>MARL Crazyflie</a:t>
+            </a:r>
+            <a:endParaRPr sz="1700"/>
+          </a:p>
+          <a:p>
+            <a:pPr indent="0" lvl="0" marL="0" rtl="0" algn="ctr">
+              <a:lnSpc>
+                <a:spcPct val="90000"/>
+              </a:lnSpc>
+              <a:spcBef>
+                <a:spcPts val="800"/>
+              </a:spcBef>
+              <a:spcAft>
+                <a:spcPts val="0"/>
+              </a:spcAft>
+              <a:buClr>
+                <a:schemeClr val="dk1"/>
+              </a:buClr>
+              <a:buSzPts val="1200"/>
+              <a:buNone/>
+            </a:pPr>
+            <a:r>
+              <a:rPr lang="en" sz="1700"/>
+              <a:t>Michael O’Sullivan, Aydin Yalcinkaya</a:t>
+            </a:r>
+            <a:endParaRPr sz="1700"/>
+          </a:p>
+          <a:p>
+            <a:pPr indent="0" lvl="0" marL="0" rtl="0" algn="ctr">
+              <a:lnSpc>
+                <a:spcPct val="90000"/>
+              </a:lnSpc>
+              <a:spcBef>
+                <a:spcPts val="800"/>
+              </a:spcBef>
+              <a:spcAft>
+                <a:spcPts val="0"/>
+              </a:spcAft>
+              <a:buClr>
+                <a:schemeClr val="dk1"/>
+              </a:buClr>
+              <a:buSzPts val="1200"/>
+              <a:buNone/>
+            </a:pPr>
+            <a:r>
+              <a:rPr lang="en" sz="1700"/>
+              <a:t>Using MARL to learn safe take-off and hover policies for Crazyflie drones</a:t>
+            </a:r>
+            <a:endParaRPr sz="1700"/>
+          </a:p>
+          <a:p>
+            <a:pPr indent="0" lvl="0" marL="0" rtl="0" algn="ctr">
+              <a:lnSpc>
+                <a:spcPct val="90000"/>
+              </a:lnSpc>
+              <a:spcBef>
+                <a:spcPts val="800"/>
+              </a:spcBef>
+              <a:spcAft>
+                <a:spcPts val="0"/>
+              </a:spcAft>
+              <a:buClr>
+                <a:schemeClr val="dk1"/>
+              </a:buClr>
+              <a:buSzPts val="1200"/>
+              <a:buNone/>
+            </a:pPr>
+            <a:r>
+              <a:rPr lang="en" sz="1700"/>
+              <a:t>CrazyFlie, MuJuCo, Gymnasium, PyTorch</a:t>
+            </a:r>
+            <a:endParaRPr sz="1700"/>
+          </a:p>
+          <a:p>
+            <a:pPr indent="0" lvl="0" marL="0" rtl="0" algn="ctr">
+              <a:lnSpc>
+                <a:spcPct val="90000"/>
+              </a:lnSpc>
+              <a:spcBef>
+                <a:spcPts val="800"/>
+              </a:spcBef>
+              <a:spcAft>
+                <a:spcPts val="0"/>
+              </a:spcAft>
+              <a:buClr>
+                <a:schemeClr val="dk1"/>
+              </a:buClr>
+              <a:buSzPts val="1800"/>
+              <a:buNone/>
+            </a:pPr>
+            <a:r>
+              <a:t/>
+            </a:r>
+            <a:endParaRPr sz="1100"/>
+          </a:p>
+        </p:txBody>
+      </p:sp>
+    </p:spTree>
+  </p:cSld>
+  <p:clrMapOvr>
+    <a:masterClrMapping/>
+  </p:clrMapOvr>
+</p:sld>
+</file>
+
 <file path=ppt/slides/slide4.xml><?xml version="1.0" encoding="utf-8"?>
 <p:sld xmlns:a="http://schemas.openxmlformats.org/drawingml/2006/main" xmlns:r="http://schemas.openxmlformats.org/officeDocument/2006/relationships" xmlns:mc="http://schemas.openxmlformats.org/markup-compatibility/2006" xmlns:mv="urn:schemas-microsoft-com:mac:vml" xmlns:p="http://schemas.openxmlformats.org/presentationml/2006/main" xmlns:c="http://schemas.openxmlformats.org/drawingml/2006/chart" xmlns:dgm="http://schemas.openxmlformats.org/drawingml/2006/diagram" xmlns:o="urn:schemas-microsoft-com:office:office" xmlns:v="urn:schemas-microsoft-com:vml" xmlns:pvml="urn:schemas-microsoft-com:office:powerpoint" xmlns:com="http://schemas.openxmlformats.org/drawingml/2006/compatibility" xmlns:p14="http://schemas.microsoft.com/office/powerpoint/2010/main" xmlns:p15="http://schemas.microsoft.com/office/powerpoint/2012/main" xmlns:ahyp="http://schemas.microsoft.com/office/drawing/2018/hyperlinkcolor">
   <p:cSld>
@@ -27644,6 +29114,2484 @@
           </a:p>
         </p:txBody>
       </p:sp>
+    </p:spTree>
+  </p:cSld>
+  <p:clrMapOvr>
+    <a:masterClrMapping/>
+  </p:clrMapOvr>
+</p:sld>
+</file>
+
+<file path=ppt/slides/slide40.xml><?xml version="1.0" encoding="utf-8"?>
+<p:sld xmlns:a="http://schemas.openxmlformats.org/drawingml/2006/main" xmlns:r="http://schemas.openxmlformats.org/officeDocument/2006/relationships" xmlns:mc="http://schemas.openxmlformats.org/markup-compatibility/2006" xmlns:mv="urn:schemas-microsoft-com:mac:vml" xmlns:p="http://schemas.openxmlformats.org/presentationml/2006/main" xmlns:c="http://schemas.openxmlformats.org/drawingml/2006/chart" xmlns:dgm="http://schemas.openxmlformats.org/drawingml/2006/diagram" xmlns:o="urn:schemas-microsoft-com:office:office" xmlns:v="urn:schemas-microsoft-com:vml" xmlns:pvml="urn:schemas-microsoft-com:office:powerpoint" xmlns:com="http://schemas.openxmlformats.org/drawingml/2006/compatibility" xmlns:p14="http://schemas.microsoft.com/office/powerpoint/2010/main" xmlns:p15="http://schemas.microsoft.com/office/powerpoint/2012/main" xmlns:ahyp="http://schemas.microsoft.com/office/drawing/2018/hyperlinkcolor">
+  <p:cSld>
+    <p:spTree>
+      <p:nvGrpSpPr>
+        <p:cNvPr id="364" name="Shape 364"/>
+        <p:cNvGrpSpPr/>
+        <p:nvPr/>
+      </p:nvGrpSpPr>
+      <p:grpSpPr>
+        <a:xfrm>
+          <a:off x="0" y="0"/>
+          <a:ext cx="0" cy="0"/>
+          <a:chOff x="0" y="0"/>
+          <a:chExt cx="0" cy="0"/>
+        </a:xfrm>
+      </p:grpSpPr>
+      <p:sp>
+        <p:nvSpPr>
+          <p:cNvPr id="365" name="Google Shape;365;p64"/>
+          <p:cNvSpPr txBox="1"/>
+          <p:nvPr>
+            <p:ph type="title"/>
+          </p:nvPr>
+        </p:nvSpPr>
+        <p:spPr>
+          <a:xfrm>
+            <a:off x="628650" y="273844"/>
+            <a:ext cx="7886700" cy="994200"/>
+          </a:xfrm>
+          <a:prstGeom prst="rect">
+            <a:avLst/>
+          </a:prstGeom>
+          <a:noFill/>
+          <a:ln>
+            <a:noFill/>
+          </a:ln>
+        </p:spPr>
+        <p:txBody>
+          <a:bodyPr anchorCtr="0" anchor="ctr" bIns="34275" lIns="68575" spcFirstLastPara="1" rIns="68575" wrap="square" tIns="34275">
+            <a:normAutofit/>
+          </a:bodyPr>
+          <a:lstStyle/>
+          <a:p>
+            <a:pPr indent="0" lvl="0" marL="0" rtl="0" algn="l">
+              <a:lnSpc>
+                <a:spcPct val="90000"/>
+              </a:lnSpc>
+              <a:spcBef>
+                <a:spcPts val="0"/>
+              </a:spcBef>
+              <a:spcAft>
+                <a:spcPts val="0"/>
+              </a:spcAft>
+              <a:buClr>
+                <a:schemeClr val="dk1"/>
+              </a:buClr>
+              <a:buSzPts val="3300"/>
+              <a:buFont typeface="Play"/>
+              <a:buNone/>
+            </a:pPr>
+            <a:r>
+              <a:rPr lang="en"/>
+              <a:t>Progress Recap</a:t>
+            </a:r>
+            <a:endParaRPr/>
+          </a:p>
+        </p:txBody>
+      </p:sp>
+      <p:sp>
+        <p:nvSpPr>
+          <p:cNvPr id="366" name="Google Shape;366;p64"/>
+          <p:cNvSpPr txBox="1"/>
+          <p:nvPr>
+            <p:ph idx="1" type="body"/>
+          </p:nvPr>
+        </p:nvSpPr>
+        <p:spPr>
+          <a:xfrm>
+            <a:off x="417400" y="1369225"/>
+            <a:ext cx="8267400" cy="3263400"/>
+          </a:xfrm>
+          <a:prstGeom prst="rect">
+            <a:avLst/>
+          </a:prstGeom>
+          <a:noFill/>
+          <a:ln>
+            <a:noFill/>
+          </a:ln>
+        </p:spPr>
+        <p:txBody>
+          <a:bodyPr anchorCtr="0" anchor="t" bIns="34275" lIns="68575" spcFirstLastPara="1" rIns="68575" wrap="square" tIns="34275">
+            <a:normAutofit fontScale="92500" lnSpcReduction="20000"/>
+          </a:bodyPr>
+          <a:lstStyle/>
+          <a:p>
+            <a:pPr indent="0" lvl="0" marL="0" rtl="0" algn="l">
+              <a:spcBef>
+                <a:spcPts val="800"/>
+              </a:spcBef>
+              <a:spcAft>
+                <a:spcPts val="0"/>
+              </a:spcAft>
+              <a:buNone/>
+            </a:pPr>
+            <a:r>
+              <a:rPr b="1" lang="en" sz="1800"/>
+              <a:t>Goal</a:t>
+            </a:r>
+            <a:r>
+              <a:rPr lang="en" sz="1800"/>
+              <a:t>: Implementing MARL on Crazyflie drones for safe hovering and navigation</a:t>
+            </a:r>
+            <a:endParaRPr sz="1800"/>
+          </a:p>
+          <a:p>
+            <a:pPr indent="0" lvl="0" marL="0" rtl="0" algn="l">
+              <a:spcBef>
+                <a:spcPts val="800"/>
+              </a:spcBef>
+              <a:spcAft>
+                <a:spcPts val="0"/>
+              </a:spcAft>
+              <a:buNone/>
+            </a:pPr>
+            <a:r>
+              <a:t/>
+            </a:r>
+            <a:endParaRPr sz="1800"/>
+          </a:p>
+          <a:p>
+            <a:pPr indent="0" lvl="0" marL="0" rtl="0" algn="l">
+              <a:spcBef>
+                <a:spcPts val="800"/>
+              </a:spcBef>
+              <a:spcAft>
+                <a:spcPts val="0"/>
+              </a:spcAft>
+              <a:buNone/>
+            </a:pPr>
+            <a:r>
+              <a:rPr lang="en" sz="1800"/>
+              <a:t>Progress</a:t>
+            </a:r>
+            <a:endParaRPr sz="1800"/>
+          </a:p>
+          <a:p>
+            <a:pPr indent="-340201" lvl="0" marL="457200" rtl="0" algn="l">
+              <a:lnSpc>
+                <a:spcPct val="115000"/>
+              </a:lnSpc>
+              <a:spcBef>
+                <a:spcPts val="800"/>
+              </a:spcBef>
+              <a:spcAft>
+                <a:spcPts val="0"/>
+              </a:spcAft>
+              <a:buSzPct val="100000"/>
+              <a:buChar char="●"/>
+            </a:pPr>
+            <a:r>
+              <a:rPr lang="en" sz="1900"/>
+              <a:t>Re-implement environment using MuJoCo MJX to allow for GPU training</a:t>
+            </a:r>
+            <a:endParaRPr sz="1900"/>
+          </a:p>
+          <a:p>
+            <a:pPr indent="-340201" lvl="1" marL="914400" rtl="0" algn="l">
+              <a:lnSpc>
+                <a:spcPct val="115000"/>
+              </a:lnSpc>
+              <a:spcBef>
+                <a:spcPts val="0"/>
+              </a:spcBef>
+              <a:spcAft>
+                <a:spcPts val="0"/>
+              </a:spcAft>
+              <a:buSzPct val="100000"/>
+              <a:buChar char="○"/>
+            </a:pPr>
+            <a:r>
+              <a:rPr lang="en" sz="1900"/>
+              <a:t>Done via MuJoCo playground + Brax + Jax</a:t>
+            </a:r>
+            <a:endParaRPr sz="1900"/>
+          </a:p>
+          <a:p>
+            <a:pPr indent="-340201" lvl="1" marL="914400" rtl="0" algn="l">
+              <a:lnSpc>
+                <a:spcPct val="115000"/>
+              </a:lnSpc>
+              <a:spcBef>
+                <a:spcPts val="0"/>
+              </a:spcBef>
+              <a:spcAft>
+                <a:spcPts val="0"/>
+              </a:spcAft>
+              <a:buSzPct val="100000"/>
+              <a:buChar char="○"/>
+            </a:pPr>
+            <a:r>
+              <a:rPr lang="en" sz="1900"/>
+              <a:t>Running on Google Colab (Jax GPU is built for Linux)</a:t>
+            </a:r>
+            <a:endParaRPr sz="1900"/>
+          </a:p>
+          <a:p>
+            <a:pPr indent="-340201" lvl="2" marL="1371600" rtl="0" algn="l">
+              <a:lnSpc>
+                <a:spcPct val="115000"/>
+              </a:lnSpc>
+              <a:spcBef>
+                <a:spcPts val="0"/>
+              </a:spcBef>
+              <a:spcAft>
+                <a:spcPts val="0"/>
+              </a:spcAft>
+              <a:buSzPct val="100000"/>
+              <a:buChar char="■"/>
+            </a:pPr>
+            <a:r>
+              <a:rPr lang="en" sz="1900"/>
+              <a:t>Not easily ran from Windows and can’t run from mac</a:t>
+            </a:r>
+            <a:endParaRPr sz="1900"/>
+          </a:p>
+          <a:p>
+            <a:pPr indent="-340201" lvl="1" marL="914400" rtl="0" algn="l">
+              <a:lnSpc>
+                <a:spcPct val="115000"/>
+              </a:lnSpc>
+              <a:spcBef>
+                <a:spcPts val="0"/>
+              </a:spcBef>
+              <a:spcAft>
+                <a:spcPts val="0"/>
+              </a:spcAft>
+              <a:buSzPct val="100000"/>
+              <a:buChar char="○"/>
+            </a:pPr>
+            <a:r>
+              <a:rPr lang="en" sz="1900"/>
+              <a:t>Motivation: Semi-successful multi-agent training was taking ~8 hours</a:t>
+            </a:r>
+            <a:endParaRPr sz="1900"/>
+          </a:p>
+          <a:p>
+            <a:pPr indent="-340201" lvl="2" marL="1371600" rtl="0" algn="l">
+              <a:lnSpc>
+                <a:spcPct val="115000"/>
+              </a:lnSpc>
+              <a:spcBef>
+                <a:spcPts val="0"/>
+              </a:spcBef>
+              <a:spcAft>
+                <a:spcPts val="0"/>
+              </a:spcAft>
+              <a:buSzPct val="100000"/>
+              <a:buChar char="■"/>
+            </a:pPr>
+            <a:r>
+              <a:rPr lang="en" sz="1900"/>
+              <a:t>Difficult to iterate upon and experiment with, need faster training</a:t>
+            </a:r>
+            <a:endParaRPr sz="1900"/>
+          </a:p>
+          <a:p>
+            <a:pPr indent="-340201" lvl="2" marL="1371600" rtl="0" algn="l">
+              <a:lnSpc>
+                <a:spcPct val="115000"/>
+              </a:lnSpc>
+              <a:spcBef>
+                <a:spcPts val="0"/>
+              </a:spcBef>
+              <a:spcAft>
+                <a:spcPts val="0"/>
+              </a:spcAft>
+              <a:buSzPct val="100000"/>
+              <a:buChar char="■"/>
+            </a:pPr>
+            <a:r>
+              <a:rPr lang="en" sz="1900"/>
+              <a:t>Also possible that successful MARL simply requires more compute</a:t>
+            </a:r>
+            <a:endParaRPr sz="1900"/>
+          </a:p>
+          <a:p>
+            <a:pPr indent="-340201" lvl="0" marL="457200" rtl="0" algn="l">
+              <a:lnSpc>
+                <a:spcPct val="115000"/>
+              </a:lnSpc>
+              <a:spcBef>
+                <a:spcPts val="0"/>
+              </a:spcBef>
+              <a:spcAft>
+                <a:spcPts val="0"/>
+              </a:spcAft>
+              <a:buSzPct val="100000"/>
+              <a:buChar char="●"/>
+            </a:pPr>
+            <a:r>
+              <a:rPr lang="en" sz="1900"/>
+              <a:t>Put together model -&gt; hardware runner file</a:t>
+            </a:r>
+            <a:endParaRPr sz="1900"/>
+          </a:p>
+          <a:p>
+            <a:pPr indent="0" lvl="0" marL="457200" rtl="0" algn="l">
+              <a:spcBef>
+                <a:spcPts val="800"/>
+              </a:spcBef>
+              <a:spcAft>
+                <a:spcPts val="0"/>
+              </a:spcAft>
+              <a:buNone/>
+            </a:pPr>
+            <a:r>
+              <a:t/>
+            </a:r>
+            <a:endParaRPr b="1" sz="1800"/>
+          </a:p>
+        </p:txBody>
+      </p:sp>
+    </p:spTree>
+  </p:cSld>
+  <p:clrMapOvr>
+    <a:masterClrMapping/>
+  </p:clrMapOvr>
+</p:sld>
+</file>
+
+<file path=ppt/slides/slide41.xml><?xml version="1.0" encoding="utf-8"?>
+<p:sld xmlns:a="http://schemas.openxmlformats.org/drawingml/2006/main" xmlns:r="http://schemas.openxmlformats.org/officeDocument/2006/relationships" xmlns:mc="http://schemas.openxmlformats.org/markup-compatibility/2006" xmlns:mv="urn:schemas-microsoft-com:mac:vml" xmlns:p="http://schemas.openxmlformats.org/presentationml/2006/main" xmlns:c="http://schemas.openxmlformats.org/drawingml/2006/chart" xmlns:dgm="http://schemas.openxmlformats.org/drawingml/2006/diagram" xmlns:o="urn:schemas-microsoft-com:office:office" xmlns:v="urn:schemas-microsoft-com:vml" xmlns:pvml="urn:schemas-microsoft-com:office:powerpoint" xmlns:com="http://schemas.openxmlformats.org/drawingml/2006/compatibility" xmlns:p14="http://schemas.microsoft.com/office/powerpoint/2010/main" xmlns:p15="http://schemas.microsoft.com/office/powerpoint/2012/main" xmlns:ahyp="http://schemas.microsoft.com/office/drawing/2018/hyperlinkcolor">
+  <p:cSld>
+    <p:spTree>
+      <p:nvGrpSpPr>
+        <p:cNvPr id="370" name="Shape 370"/>
+        <p:cNvGrpSpPr/>
+        <p:nvPr/>
+      </p:nvGrpSpPr>
+      <p:grpSpPr>
+        <a:xfrm>
+          <a:off x="0" y="0"/>
+          <a:ext cx="0" cy="0"/>
+          <a:chOff x="0" y="0"/>
+          <a:chExt cx="0" cy="0"/>
+        </a:xfrm>
+      </p:grpSpPr>
+      <p:sp>
+        <p:nvSpPr>
+          <p:cNvPr id="371" name="Google Shape;371;p65"/>
+          <p:cNvSpPr txBox="1"/>
+          <p:nvPr>
+            <p:ph type="title"/>
+          </p:nvPr>
+        </p:nvSpPr>
+        <p:spPr>
+          <a:xfrm>
+            <a:off x="628650" y="273844"/>
+            <a:ext cx="7886700" cy="994200"/>
+          </a:xfrm>
+          <a:prstGeom prst="rect">
+            <a:avLst/>
+          </a:prstGeom>
+          <a:noFill/>
+          <a:ln>
+            <a:noFill/>
+          </a:ln>
+        </p:spPr>
+        <p:txBody>
+          <a:bodyPr anchorCtr="0" anchor="ctr" bIns="34275" lIns="68575" spcFirstLastPara="1" rIns="68575" wrap="square" tIns="34275">
+            <a:normAutofit/>
+          </a:bodyPr>
+          <a:lstStyle/>
+          <a:p>
+            <a:pPr indent="0" lvl="0" marL="0" rtl="0" algn="l">
+              <a:lnSpc>
+                <a:spcPct val="90000"/>
+              </a:lnSpc>
+              <a:spcBef>
+                <a:spcPts val="0"/>
+              </a:spcBef>
+              <a:spcAft>
+                <a:spcPts val="0"/>
+              </a:spcAft>
+              <a:buClr>
+                <a:schemeClr val="dk1"/>
+              </a:buClr>
+              <a:buSzPts val="3300"/>
+              <a:buFont typeface="Play"/>
+              <a:buNone/>
+            </a:pPr>
+            <a:r>
+              <a:rPr lang="en"/>
+              <a:t>Progress Since Last Meeting </a:t>
+            </a:r>
+            <a:endParaRPr/>
+          </a:p>
+        </p:txBody>
+      </p:sp>
+      <p:sp>
+        <p:nvSpPr>
+          <p:cNvPr id="372" name="Google Shape;372;p65"/>
+          <p:cNvSpPr txBox="1"/>
+          <p:nvPr>
+            <p:ph idx="1" type="body"/>
+          </p:nvPr>
+        </p:nvSpPr>
+        <p:spPr>
+          <a:xfrm>
+            <a:off x="396150" y="1268050"/>
+            <a:ext cx="8328900" cy="3660000"/>
+          </a:xfrm>
+          <a:prstGeom prst="rect">
+            <a:avLst/>
+          </a:prstGeom>
+          <a:noFill/>
+          <a:ln>
+            <a:noFill/>
+          </a:ln>
+        </p:spPr>
+        <p:txBody>
+          <a:bodyPr anchorCtr="0" anchor="t" bIns="34275" lIns="68575" spcFirstLastPara="1" rIns="68575" wrap="square" tIns="34275">
+            <a:noAutofit/>
+          </a:bodyPr>
+          <a:lstStyle/>
+          <a:p>
+            <a:pPr indent="-323850" lvl="0" marL="457200" rtl="0" algn="l">
+              <a:lnSpc>
+                <a:spcPct val="115000"/>
+              </a:lnSpc>
+              <a:spcBef>
+                <a:spcPts val="800"/>
+              </a:spcBef>
+              <a:spcAft>
+                <a:spcPts val="0"/>
+              </a:spcAft>
+              <a:buSzPts val="1500"/>
+              <a:buChar char="●"/>
+            </a:pPr>
+            <a:r>
+              <a:rPr lang="en" sz="1800"/>
+              <a:t>Create Google Collab notebook for MuJoCo MJX + Jax</a:t>
+            </a:r>
+            <a:endParaRPr sz="1800"/>
+          </a:p>
+          <a:p>
+            <a:pPr indent="-298450" lvl="1" marL="914400" rtl="0" algn="l">
+              <a:lnSpc>
+                <a:spcPct val="115000"/>
+              </a:lnSpc>
+              <a:spcBef>
+                <a:spcPts val="0"/>
+              </a:spcBef>
+              <a:spcAft>
+                <a:spcPts val="0"/>
+              </a:spcAft>
+              <a:buSzPts val="1100"/>
+              <a:buChar char="○"/>
+            </a:pPr>
+            <a:r>
+              <a:rPr lang="en" sz="1500"/>
+              <a:t>Setup environment for n drones (can run with 1 or 2 right now)</a:t>
+            </a:r>
+            <a:endParaRPr sz="1500"/>
+          </a:p>
+          <a:p>
+            <a:pPr indent="-298450" lvl="0" marL="457200" rtl="0" algn="l">
+              <a:lnSpc>
+                <a:spcPct val="115000"/>
+              </a:lnSpc>
+              <a:spcBef>
+                <a:spcPts val="0"/>
+              </a:spcBef>
+              <a:spcAft>
+                <a:spcPts val="0"/>
+              </a:spcAft>
+              <a:buSzPts val="1100"/>
+              <a:buChar char="●"/>
+            </a:pPr>
+            <a:r>
+              <a:rPr lang="en" sz="1800"/>
+              <a:t>Results</a:t>
+            </a:r>
+            <a:endParaRPr sz="1800"/>
+          </a:p>
+          <a:p>
+            <a:pPr indent="-311150" lvl="1" marL="914400" rtl="0" algn="l">
+              <a:lnSpc>
+                <a:spcPct val="115000"/>
+              </a:lnSpc>
+              <a:spcBef>
+                <a:spcPts val="0"/>
+              </a:spcBef>
+              <a:spcAft>
+                <a:spcPts val="0"/>
+              </a:spcAft>
+              <a:buSzPts val="1300"/>
+              <a:buChar char="○"/>
+            </a:pPr>
+            <a:r>
+              <a:rPr lang="en" sz="1700"/>
+              <a:t>Very stable XYZ hover (single drone)</a:t>
+            </a:r>
+            <a:endParaRPr sz="1700"/>
+          </a:p>
+          <a:p>
+            <a:pPr indent="-317500" lvl="2" marL="1371600" rtl="0" algn="l">
+              <a:lnSpc>
+                <a:spcPct val="115000"/>
+              </a:lnSpc>
+              <a:spcBef>
+                <a:spcPts val="0"/>
+              </a:spcBef>
+              <a:spcAft>
+                <a:spcPts val="0"/>
+              </a:spcAft>
+              <a:buSzPts val="1400"/>
+              <a:buChar char="■"/>
+            </a:pPr>
+            <a:r>
+              <a:rPr lang="en"/>
+              <a:t>2048 envs, 75 million </a:t>
+            </a:r>
+            <a:r>
+              <a:rPr lang="en"/>
+              <a:t>steps ~ 20 minutes in Collab</a:t>
+            </a:r>
+            <a:endParaRPr/>
+          </a:p>
+          <a:p>
+            <a:pPr indent="-317500" lvl="2" marL="1371600" rtl="0" algn="l">
+              <a:lnSpc>
+                <a:spcPct val="115000"/>
+              </a:lnSpc>
+              <a:spcBef>
+                <a:spcPts val="0"/>
+              </a:spcBef>
+              <a:spcAft>
+                <a:spcPts val="0"/>
+              </a:spcAft>
+              <a:buSzPts val="1400"/>
+              <a:buChar char="■"/>
+            </a:pPr>
+            <a:r>
+              <a:rPr lang="en"/>
+              <a:t>Minimal obs → High compute reduces need for engineered features</a:t>
+            </a:r>
+            <a:endParaRPr/>
+          </a:p>
+          <a:p>
+            <a:pPr indent="-317500" lvl="3" marL="1828800" rtl="0" algn="l">
+              <a:lnSpc>
+                <a:spcPct val="115000"/>
+              </a:lnSpc>
+              <a:spcBef>
+                <a:spcPts val="0"/>
+              </a:spcBef>
+              <a:spcAft>
+                <a:spcPts val="0"/>
+              </a:spcAft>
+              <a:buSzPts val="1400"/>
+              <a:buChar char="●"/>
+            </a:pPr>
+            <a:r>
+              <a:rPr lang="en"/>
+              <a:t>Pos, Rot matrix, Vel, Ang vel + Rel target pos in body &amp; vel in body &amp; act history</a:t>
+            </a:r>
+            <a:endParaRPr/>
+          </a:p>
+          <a:p>
+            <a:pPr indent="-311150" lvl="1" marL="914400" rtl="0" algn="l">
+              <a:lnSpc>
+                <a:spcPct val="115000"/>
+              </a:lnSpc>
+              <a:spcBef>
+                <a:spcPts val="0"/>
+              </a:spcBef>
+              <a:spcAft>
+                <a:spcPts val="0"/>
+              </a:spcAft>
+              <a:buSzPts val="1300"/>
+              <a:buChar char="○"/>
+            </a:pPr>
+            <a:r>
+              <a:rPr lang="en" sz="1700"/>
+              <a:t>Unsuccessful 2-drone hover for now (drones thrust then fall)</a:t>
+            </a:r>
+            <a:endParaRPr sz="1700"/>
+          </a:p>
+          <a:p>
+            <a:pPr indent="-317500" lvl="2" marL="1371600" rtl="0" algn="l">
+              <a:lnSpc>
+                <a:spcPct val="115000"/>
+              </a:lnSpc>
+              <a:spcBef>
+                <a:spcPts val="0"/>
+              </a:spcBef>
+              <a:spcAft>
+                <a:spcPts val="0"/>
+              </a:spcAft>
+              <a:buSzPts val="1400"/>
+              <a:buChar char="■"/>
+            </a:pPr>
+            <a:r>
+              <a:rPr lang="en"/>
+              <a:t>Tested with 150 million steps, will investigate more</a:t>
+            </a:r>
+            <a:endParaRPr/>
+          </a:p>
+          <a:p>
+            <a:pPr indent="-317500" lvl="2" marL="1371600" rtl="0" algn="l">
+              <a:lnSpc>
+                <a:spcPct val="115000"/>
+              </a:lnSpc>
+              <a:spcBef>
+                <a:spcPts val="0"/>
+              </a:spcBef>
+              <a:spcAft>
+                <a:spcPts val="0"/>
+              </a:spcAft>
+              <a:buSzPts val="1400"/>
+              <a:buChar char="■"/>
+            </a:pPr>
+            <a:r>
+              <a:rPr lang="en"/>
+              <a:t>Multi-agent approach uses centralized PPO instead of MAPPO (basically single-agent where a “dispatcher” sees both drone obs and controls both)</a:t>
+            </a:r>
+            <a:endParaRPr/>
+          </a:p>
+          <a:p>
+            <a:pPr indent="-317500" lvl="3" marL="1828800" rtl="0" algn="l">
+              <a:lnSpc>
+                <a:spcPct val="115000"/>
+              </a:lnSpc>
+              <a:spcBef>
+                <a:spcPts val="0"/>
+              </a:spcBef>
+              <a:spcAft>
+                <a:spcPts val="0"/>
+              </a:spcAft>
+              <a:buSzPts val="1400"/>
+              <a:buChar char="●"/>
+            </a:pPr>
+            <a:r>
+              <a:rPr lang="en"/>
+              <a:t>Using Brax for training (Jax wrapper) which does not support MAPPO (in which agents act on their individual obs with a centralized critic)</a:t>
+            </a:r>
+            <a:endParaRPr/>
+          </a:p>
+        </p:txBody>
+      </p:sp>
+    </p:spTree>
+  </p:cSld>
+  <p:clrMapOvr>
+    <a:masterClrMapping/>
+  </p:clrMapOvr>
+</p:sld>
+</file>
+
+<file path=ppt/slides/slide42.xml><?xml version="1.0" encoding="utf-8"?>
+<p:sld xmlns:a="http://schemas.openxmlformats.org/drawingml/2006/main" xmlns:r="http://schemas.openxmlformats.org/officeDocument/2006/relationships" xmlns:mc="http://schemas.openxmlformats.org/markup-compatibility/2006" xmlns:mv="urn:schemas-microsoft-com:mac:vml" xmlns:p="http://schemas.openxmlformats.org/presentationml/2006/main" xmlns:c="http://schemas.openxmlformats.org/drawingml/2006/chart" xmlns:dgm="http://schemas.openxmlformats.org/drawingml/2006/diagram" xmlns:o="urn:schemas-microsoft-com:office:office" xmlns:v="urn:schemas-microsoft-com:vml" xmlns:pvml="urn:schemas-microsoft-com:office:powerpoint" xmlns:com="http://schemas.openxmlformats.org/drawingml/2006/compatibility" xmlns:p14="http://schemas.microsoft.com/office/powerpoint/2010/main" xmlns:p15="http://schemas.microsoft.com/office/powerpoint/2012/main" xmlns:ahyp="http://schemas.microsoft.com/office/drawing/2018/hyperlinkcolor">
+  <p:cSld>
+    <p:spTree>
+      <p:nvGrpSpPr>
+        <p:cNvPr id="376" name="Shape 376"/>
+        <p:cNvGrpSpPr/>
+        <p:nvPr/>
+      </p:nvGrpSpPr>
+      <p:grpSpPr>
+        <a:xfrm>
+          <a:off x="0" y="0"/>
+          <a:ext cx="0" cy="0"/>
+          <a:chOff x="0" y="0"/>
+          <a:chExt cx="0" cy="0"/>
+        </a:xfrm>
+      </p:grpSpPr>
+      <p:sp>
+        <p:nvSpPr>
+          <p:cNvPr id="377" name="Google Shape;377;p66"/>
+          <p:cNvSpPr txBox="1"/>
+          <p:nvPr>
+            <p:ph type="title"/>
+          </p:nvPr>
+        </p:nvSpPr>
+        <p:spPr>
+          <a:xfrm>
+            <a:off x="628650" y="273844"/>
+            <a:ext cx="7886700" cy="994200"/>
+          </a:xfrm>
+          <a:prstGeom prst="rect">
+            <a:avLst/>
+          </a:prstGeom>
+          <a:noFill/>
+          <a:ln>
+            <a:noFill/>
+          </a:ln>
+        </p:spPr>
+        <p:txBody>
+          <a:bodyPr anchorCtr="0" anchor="ctr" bIns="34275" lIns="68575" spcFirstLastPara="1" rIns="68575" wrap="square" tIns="34275">
+            <a:normAutofit/>
+          </a:bodyPr>
+          <a:lstStyle/>
+          <a:p>
+            <a:pPr indent="0" lvl="0" marL="0" rtl="0" algn="l">
+              <a:lnSpc>
+                <a:spcPct val="90000"/>
+              </a:lnSpc>
+              <a:spcBef>
+                <a:spcPts val="0"/>
+              </a:spcBef>
+              <a:spcAft>
+                <a:spcPts val="0"/>
+              </a:spcAft>
+              <a:buClr>
+                <a:schemeClr val="dk1"/>
+              </a:buClr>
+              <a:buSzPts val="3300"/>
+              <a:buFont typeface="Play"/>
+              <a:buNone/>
+            </a:pPr>
+            <a:r>
+              <a:rPr lang="en"/>
+              <a:t>Plan for the Next Two Weeks</a:t>
+            </a:r>
+            <a:endParaRPr/>
+          </a:p>
+        </p:txBody>
+      </p:sp>
+      <p:sp>
+        <p:nvSpPr>
+          <p:cNvPr id="378" name="Google Shape;378;p66"/>
+          <p:cNvSpPr txBox="1"/>
+          <p:nvPr>
+            <p:ph idx="1" type="body"/>
+          </p:nvPr>
+        </p:nvSpPr>
+        <p:spPr>
+          <a:xfrm>
+            <a:off x="628650" y="1369219"/>
+            <a:ext cx="7886700" cy="3263400"/>
+          </a:xfrm>
+          <a:prstGeom prst="rect">
+            <a:avLst/>
+          </a:prstGeom>
+          <a:noFill/>
+          <a:ln>
+            <a:noFill/>
+          </a:ln>
+        </p:spPr>
+        <p:txBody>
+          <a:bodyPr anchorCtr="0" anchor="t" bIns="34275" lIns="68575" spcFirstLastPara="1" rIns="68575" wrap="square" tIns="34275">
+            <a:normAutofit/>
+          </a:bodyPr>
+          <a:lstStyle/>
+          <a:p>
+            <a:pPr indent="0" lvl="0" marL="0" rtl="0" algn="l">
+              <a:lnSpc>
+                <a:spcPct val="90000"/>
+              </a:lnSpc>
+              <a:spcBef>
+                <a:spcPts val="0"/>
+              </a:spcBef>
+              <a:spcAft>
+                <a:spcPts val="0"/>
+              </a:spcAft>
+              <a:buNone/>
+            </a:pPr>
+            <a:r>
+              <a:t/>
+            </a:r>
+            <a:endParaRPr/>
+          </a:p>
+          <a:p>
+            <a:pPr indent="-171450" lvl="0" marL="177800" rtl="0" algn="l">
+              <a:lnSpc>
+                <a:spcPct val="90000"/>
+              </a:lnSpc>
+              <a:spcBef>
+                <a:spcPts val="800"/>
+              </a:spcBef>
+              <a:spcAft>
+                <a:spcPts val="0"/>
+              </a:spcAft>
+              <a:buClr>
+                <a:schemeClr val="dk1"/>
+              </a:buClr>
+              <a:buSzPts val="2100"/>
+              <a:buChar char="●"/>
+            </a:pPr>
+            <a:r>
+              <a:rPr lang="en"/>
+              <a:t>Goals</a:t>
+            </a:r>
+            <a:endParaRPr/>
+          </a:p>
+          <a:p>
+            <a:pPr indent="-177800" lvl="1" marL="520700" rtl="0" algn="l">
+              <a:lnSpc>
+                <a:spcPct val="90000"/>
+              </a:lnSpc>
+              <a:spcBef>
+                <a:spcPts val="800"/>
+              </a:spcBef>
+              <a:spcAft>
+                <a:spcPts val="0"/>
+              </a:spcAft>
+              <a:buSzPts val="1400"/>
+              <a:buChar char="○"/>
+            </a:pPr>
+            <a:r>
+              <a:rPr lang="en"/>
+              <a:t>Get successful 2-drone hover using MuJoCo MJX</a:t>
+            </a:r>
+            <a:endParaRPr/>
+          </a:p>
+          <a:p>
+            <a:pPr indent="-177800" lvl="1" marL="520700" rtl="0" algn="l">
+              <a:lnSpc>
+                <a:spcPct val="90000"/>
+              </a:lnSpc>
+              <a:spcBef>
+                <a:spcPts val="800"/>
+              </a:spcBef>
+              <a:spcAft>
+                <a:spcPts val="0"/>
+              </a:spcAft>
+              <a:buSzPts val="1400"/>
+              <a:buChar char="○"/>
+            </a:pPr>
+            <a:r>
+              <a:rPr lang="en"/>
+              <a:t>Prepare to test on actual drones (cf2 API + safety constraints)</a:t>
+            </a:r>
+            <a:endParaRPr/>
+          </a:p>
+          <a:p>
+            <a:pPr indent="-177800" lvl="1" marL="520700" rtl="0" algn="l">
+              <a:lnSpc>
+                <a:spcPct val="90000"/>
+              </a:lnSpc>
+              <a:spcBef>
+                <a:spcPts val="800"/>
+              </a:spcBef>
+              <a:spcAft>
+                <a:spcPts val="0"/>
+              </a:spcAft>
+              <a:buSzPts val="1400"/>
+              <a:buChar char="○"/>
+            </a:pPr>
+            <a:r>
+              <a:rPr lang="en"/>
+              <a:t>Test on actual drones</a:t>
+            </a:r>
+            <a:endParaRPr/>
+          </a:p>
+          <a:p>
+            <a:pPr indent="-177800" lvl="2" marL="863600" rtl="0" algn="l">
+              <a:lnSpc>
+                <a:spcPct val="90000"/>
+              </a:lnSpc>
+              <a:spcBef>
+                <a:spcPts val="800"/>
+              </a:spcBef>
+              <a:spcAft>
+                <a:spcPts val="0"/>
+              </a:spcAft>
+              <a:buSzPts val="1400"/>
+              <a:buChar char="■"/>
+            </a:pPr>
+            <a:r>
+              <a:rPr lang="en"/>
+              <a:t>Maybe test single-agent hover on actual drone if multi-agent not successful</a:t>
+            </a:r>
+            <a:endParaRPr/>
+          </a:p>
+          <a:p>
+            <a:pPr indent="-171450" lvl="0" marL="177800" rtl="0" algn="l">
+              <a:lnSpc>
+                <a:spcPct val="90000"/>
+              </a:lnSpc>
+              <a:spcBef>
+                <a:spcPts val="800"/>
+              </a:spcBef>
+              <a:spcAft>
+                <a:spcPts val="0"/>
+              </a:spcAft>
+              <a:buClr>
+                <a:schemeClr val="dk1"/>
+              </a:buClr>
+              <a:buSzPts val="2100"/>
+              <a:buChar char="●"/>
+            </a:pPr>
+            <a:r>
+              <a:rPr lang="en"/>
+              <a:t>Dependencies</a:t>
+            </a:r>
+            <a:endParaRPr/>
+          </a:p>
+          <a:p>
+            <a:pPr indent="-177800" lvl="1" marL="520700" rtl="0" algn="l">
+              <a:lnSpc>
+                <a:spcPct val="90000"/>
+              </a:lnSpc>
+              <a:spcBef>
+                <a:spcPts val="800"/>
+              </a:spcBef>
+              <a:spcAft>
+                <a:spcPts val="0"/>
+              </a:spcAft>
+              <a:buSzPts val="1400"/>
+              <a:buChar char="○"/>
+            </a:pPr>
+            <a:r>
+              <a:rPr lang="en"/>
+              <a:t>Access to physical drones</a:t>
+            </a:r>
+            <a:endParaRPr/>
+          </a:p>
+          <a:p>
+            <a:pPr indent="-177800" lvl="2" marL="863600" rtl="0" algn="l">
+              <a:lnSpc>
+                <a:spcPct val="90000"/>
+              </a:lnSpc>
+              <a:spcBef>
+                <a:spcPts val="800"/>
+              </a:spcBef>
+              <a:spcAft>
+                <a:spcPts val="0"/>
+              </a:spcAft>
+              <a:buSzPts val="1400"/>
+              <a:buChar char="■"/>
+            </a:pPr>
+            <a:r>
+              <a:rPr lang="en"/>
+              <a:t>Link to WHMIS training that needs to be taken</a:t>
+            </a:r>
+            <a:endParaRPr/>
+          </a:p>
+        </p:txBody>
+      </p:sp>
+    </p:spTree>
+  </p:cSld>
+  <p:clrMapOvr>
+    <a:masterClrMapping/>
+  </p:clrMapOvr>
+</p:sld>
+</file>
+
+<file path=ppt/slides/slide43.xml><?xml version="1.0" encoding="utf-8"?>
+<p:sld xmlns:a="http://schemas.openxmlformats.org/drawingml/2006/main" xmlns:r="http://schemas.openxmlformats.org/officeDocument/2006/relationships" xmlns:mc="http://schemas.openxmlformats.org/markup-compatibility/2006" xmlns:mv="urn:schemas-microsoft-com:mac:vml" xmlns:p="http://schemas.openxmlformats.org/presentationml/2006/main" xmlns:c="http://schemas.openxmlformats.org/drawingml/2006/chart" xmlns:dgm="http://schemas.openxmlformats.org/drawingml/2006/diagram" xmlns:o="urn:schemas-microsoft-com:office:office" xmlns:v="urn:schemas-microsoft-com:vml" xmlns:pvml="urn:schemas-microsoft-com:office:powerpoint" xmlns:com="http://schemas.openxmlformats.org/drawingml/2006/compatibility" xmlns:p14="http://schemas.microsoft.com/office/powerpoint/2010/main" xmlns:p15="http://schemas.microsoft.com/office/powerpoint/2012/main" xmlns:ahyp="http://schemas.microsoft.com/office/drawing/2018/hyperlinkcolor">
+  <p:cSld>
+    <p:spTree>
+      <p:nvGrpSpPr>
+        <p:cNvPr id="382" name="Shape 382"/>
+        <p:cNvGrpSpPr/>
+        <p:nvPr/>
+      </p:nvGrpSpPr>
+      <p:grpSpPr>
+        <a:xfrm>
+          <a:off x="0" y="0"/>
+          <a:ext cx="0" cy="0"/>
+          <a:chOff x="0" y="0"/>
+          <a:chExt cx="0" cy="0"/>
+        </a:xfrm>
+      </p:grpSpPr>
+      <p:sp>
+        <p:nvSpPr>
+          <p:cNvPr id="383" name="Google Shape;383;p67"/>
+          <p:cNvSpPr txBox="1"/>
+          <p:nvPr>
+            <p:ph type="title"/>
+          </p:nvPr>
+        </p:nvSpPr>
+        <p:spPr>
+          <a:xfrm>
+            <a:off x="628650" y="273844"/>
+            <a:ext cx="7886700" cy="994200"/>
+          </a:xfrm>
+          <a:prstGeom prst="rect">
+            <a:avLst/>
+          </a:prstGeom>
+          <a:noFill/>
+          <a:ln>
+            <a:noFill/>
+          </a:ln>
+        </p:spPr>
+        <p:txBody>
+          <a:bodyPr anchorCtr="0" anchor="ctr" bIns="34275" lIns="68575" spcFirstLastPara="1" rIns="68575" wrap="square" tIns="34275">
+            <a:normAutofit/>
+          </a:bodyPr>
+          <a:lstStyle/>
+          <a:p>
+            <a:pPr indent="0" lvl="0" marL="0" rtl="0" algn="l">
+              <a:lnSpc>
+                <a:spcPct val="90000"/>
+              </a:lnSpc>
+              <a:spcBef>
+                <a:spcPts val="0"/>
+              </a:spcBef>
+              <a:spcAft>
+                <a:spcPts val="0"/>
+              </a:spcAft>
+              <a:buClr>
+                <a:schemeClr val="dk1"/>
+              </a:buClr>
+              <a:buSzPts val="3300"/>
+              <a:buFont typeface="Play"/>
+              <a:buNone/>
+            </a:pPr>
+            <a:r>
+              <a:rPr lang="en"/>
+              <a:t>Roadmap Checkpoint</a:t>
+            </a:r>
+            <a:endParaRPr/>
+          </a:p>
+        </p:txBody>
+      </p:sp>
+      <p:sp>
+        <p:nvSpPr>
+          <p:cNvPr id="384" name="Google Shape;384;p67"/>
+          <p:cNvSpPr txBox="1"/>
+          <p:nvPr>
+            <p:ph idx="1" type="body"/>
+          </p:nvPr>
+        </p:nvSpPr>
+        <p:spPr>
+          <a:xfrm>
+            <a:off x="628650" y="1369226"/>
+            <a:ext cx="7886700" cy="3545400"/>
+          </a:xfrm>
+          <a:prstGeom prst="rect">
+            <a:avLst/>
+          </a:prstGeom>
+          <a:noFill/>
+          <a:ln>
+            <a:noFill/>
+          </a:ln>
+        </p:spPr>
+        <p:txBody>
+          <a:bodyPr anchorCtr="0" anchor="t" bIns="34275" lIns="68575" spcFirstLastPara="1" rIns="68575" wrap="square" tIns="34275">
+            <a:noAutofit/>
+          </a:bodyPr>
+          <a:lstStyle/>
+          <a:p>
+            <a:pPr indent="-342900" lvl="0" marL="457200" rtl="0" algn="l">
+              <a:lnSpc>
+                <a:spcPct val="115000"/>
+              </a:lnSpc>
+              <a:spcBef>
+                <a:spcPts val="800"/>
+              </a:spcBef>
+              <a:spcAft>
+                <a:spcPts val="0"/>
+              </a:spcAft>
+              <a:buSzPts val="1800"/>
+              <a:buChar char="●"/>
+            </a:pPr>
+            <a:r>
+              <a:rPr lang="en" sz="1800"/>
+              <a:t>Week 2: Imperfect single agent hovering at target on Z axis</a:t>
+            </a:r>
+            <a:endParaRPr sz="1800"/>
+          </a:p>
+          <a:p>
+            <a:pPr indent="-342900" lvl="0" marL="457200" rtl="0" algn="l">
+              <a:lnSpc>
+                <a:spcPct val="115000"/>
+              </a:lnSpc>
+              <a:spcBef>
+                <a:spcPts val="0"/>
+              </a:spcBef>
+              <a:spcAft>
+                <a:spcPts val="0"/>
+              </a:spcAft>
+              <a:buSzPts val="1800"/>
+              <a:buChar char="●"/>
+            </a:pPr>
+            <a:r>
+              <a:rPr lang="en" sz="1800"/>
+              <a:t>Week 4: Successful [0, 0, Z] hover, imperfect [0, Y, Z] hover</a:t>
+            </a:r>
+            <a:endParaRPr sz="1800"/>
+          </a:p>
+          <a:p>
+            <a:pPr indent="-342900" lvl="0" marL="457200" rtl="0" algn="l">
+              <a:lnSpc>
+                <a:spcPct val="115000"/>
+              </a:lnSpc>
+              <a:spcBef>
+                <a:spcPts val="0"/>
+              </a:spcBef>
+              <a:spcAft>
+                <a:spcPts val="0"/>
+              </a:spcAft>
+              <a:buSzPts val="1800"/>
+              <a:buChar char="●"/>
+            </a:pPr>
+            <a:r>
+              <a:rPr lang="en" sz="1800"/>
+              <a:t>Week 6: Successful XYZ hover within small ranges</a:t>
+            </a:r>
+            <a:endParaRPr sz="1800"/>
+          </a:p>
+          <a:p>
+            <a:pPr indent="-342900" lvl="0" marL="457200" rtl="0" algn="l">
+              <a:lnSpc>
+                <a:spcPct val="115000"/>
+              </a:lnSpc>
+              <a:spcBef>
+                <a:spcPts val="0"/>
+              </a:spcBef>
+              <a:spcAft>
+                <a:spcPts val="0"/>
+              </a:spcAft>
+              <a:buSzPts val="1800"/>
+              <a:buChar char="●"/>
+            </a:pPr>
+            <a:r>
+              <a:rPr lang="en" sz="1800"/>
+              <a:t>Week 8: Successful XYZ hover within most ranges, baseline MARL</a:t>
+            </a:r>
+            <a:endParaRPr sz="1800"/>
+          </a:p>
+          <a:p>
+            <a:pPr indent="-342900" lvl="0" marL="457200" rtl="0" algn="l">
+              <a:lnSpc>
+                <a:spcPct val="115000"/>
+              </a:lnSpc>
+              <a:spcBef>
+                <a:spcPts val="0"/>
+              </a:spcBef>
+              <a:spcAft>
+                <a:spcPts val="0"/>
+              </a:spcAft>
+              <a:buSzPts val="1800"/>
+              <a:buChar char="●"/>
+            </a:pPr>
+            <a:r>
+              <a:rPr lang="en" sz="1800"/>
+              <a:t>Week 10: Successful single XYZ hover using MJX, MARL not there yet</a:t>
+            </a:r>
+            <a:endParaRPr sz="1800"/>
+          </a:p>
+          <a:p>
+            <a:pPr indent="-342900" lvl="0" marL="457200" rtl="0" algn="l">
+              <a:lnSpc>
+                <a:spcPct val="115000"/>
+              </a:lnSpc>
+              <a:spcBef>
+                <a:spcPts val="0"/>
+              </a:spcBef>
+              <a:spcAft>
+                <a:spcPts val="0"/>
+              </a:spcAft>
+              <a:buSzPts val="1800"/>
+              <a:buChar char="●"/>
+            </a:pPr>
+            <a:r>
+              <a:rPr lang="en" sz="1800"/>
+              <a:t>Week 12: __</a:t>
+            </a:r>
+            <a:endParaRPr sz="1800"/>
+          </a:p>
+          <a:p>
+            <a:pPr indent="-342900" lvl="0" marL="457200" rtl="0" algn="l">
+              <a:lnSpc>
+                <a:spcPct val="115000"/>
+              </a:lnSpc>
+              <a:spcBef>
+                <a:spcPts val="0"/>
+              </a:spcBef>
+              <a:spcAft>
+                <a:spcPts val="0"/>
+              </a:spcAft>
+              <a:buSzPts val="1800"/>
+              <a:buChar char="●"/>
+            </a:pPr>
+            <a:r>
+              <a:rPr lang="en" sz="1800"/>
+              <a:t>Final deadline: Deliverables (e.g., report, demo, paper draft)</a:t>
+            </a:r>
+            <a:endParaRPr sz="1800"/>
+          </a:p>
+          <a:p>
+            <a:pPr indent="-342900" lvl="1" marL="914400" rtl="0" algn="l">
+              <a:lnSpc>
+                <a:spcPct val="115000"/>
+              </a:lnSpc>
+              <a:spcBef>
+                <a:spcPts val="0"/>
+              </a:spcBef>
+              <a:spcAft>
+                <a:spcPts val="0"/>
+              </a:spcAft>
+              <a:buSzPts val="1800"/>
+              <a:buChar char="○"/>
+            </a:pPr>
+            <a:r>
+              <a:rPr lang="en" sz="1800"/>
+              <a:t>Early December</a:t>
+            </a:r>
+            <a:endParaRPr sz="1800"/>
+          </a:p>
+          <a:p>
+            <a:pPr indent="-342900" lvl="0" marL="457200" rtl="0" algn="l">
+              <a:lnSpc>
+                <a:spcPct val="115000"/>
+              </a:lnSpc>
+              <a:spcBef>
+                <a:spcPts val="0"/>
+              </a:spcBef>
+              <a:spcAft>
+                <a:spcPts val="0"/>
+              </a:spcAft>
+              <a:buSzPts val="1800"/>
+              <a:buChar char="●"/>
+            </a:pPr>
+            <a:r>
+              <a:rPr lang="en" sz="1800"/>
+              <a:t>Shifts in schedule</a:t>
+            </a:r>
+            <a:endParaRPr sz="1800"/>
+          </a:p>
+          <a:p>
+            <a:pPr indent="-342900" lvl="1" marL="914400" rtl="0" algn="l">
+              <a:lnSpc>
+                <a:spcPct val="115000"/>
+              </a:lnSpc>
+              <a:spcBef>
+                <a:spcPts val="0"/>
+              </a:spcBef>
+              <a:spcAft>
+                <a:spcPts val="0"/>
+              </a:spcAft>
+              <a:buSzPts val="1800"/>
+              <a:buChar char="○"/>
+            </a:pPr>
+            <a:r>
+              <a:rPr lang="en"/>
+              <a:t>On track</a:t>
+            </a:r>
+            <a:endParaRPr sz="1800"/>
+          </a:p>
+        </p:txBody>
+      </p:sp>
+    </p:spTree>
+  </p:cSld>
+  <p:clrMapOvr>
+    <a:masterClrMapping/>
+  </p:clrMapOvr>
+</p:sld>
+</file>
+
+<file path=ppt/slides/slide44.xml><?xml version="1.0" encoding="utf-8"?>
+<p:sld xmlns:a="http://schemas.openxmlformats.org/drawingml/2006/main" xmlns:r="http://schemas.openxmlformats.org/officeDocument/2006/relationships" xmlns:mc="http://schemas.openxmlformats.org/markup-compatibility/2006" xmlns:mv="urn:schemas-microsoft-com:mac:vml" xmlns:p="http://schemas.openxmlformats.org/presentationml/2006/main" xmlns:c="http://schemas.openxmlformats.org/drawingml/2006/chart" xmlns:dgm="http://schemas.openxmlformats.org/drawingml/2006/diagram" xmlns:o="urn:schemas-microsoft-com:office:office" xmlns:v="urn:schemas-microsoft-com:vml" xmlns:pvml="urn:schemas-microsoft-com:office:powerpoint" xmlns:com="http://schemas.openxmlformats.org/drawingml/2006/compatibility" xmlns:p14="http://schemas.microsoft.com/office/powerpoint/2010/main" xmlns:p15="http://schemas.microsoft.com/office/powerpoint/2012/main" xmlns:ahyp="http://schemas.microsoft.com/office/drawing/2018/hyperlinkcolor">
+  <p:cSld>
+    <p:spTree>
+      <p:nvGrpSpPr>
+        <p:cNvPr id="388" name="Shape 388"/>
+        <p:cNvGrpSpPr/>
+        <p:nvPr/>
+      </p:nvGrpSpPr>
+      <p:grpSpPr>
+        <a:xfrm>
+          <a:off x="0" y="0"/>
+          <a:ext cx="0" cy="0"/>
+          <a:chOff x="0" y="0"/>
+          <a:chExt cx="0" cy="0"/>
+        </a:xfrm>
+      </p:grpSpPr>
+      <p:sp>
+        <p:nvSpPr>
+          <p:cNvPr id="389" name="Google Shape;389;p68"/>
+          <p:cNvSpPr txBox="1"/>
+          <p:nvPr>
+            <p:ph type="title"/>
+          </p:nvPr>
+        </p:nvSpPr>
+        <p:spPr>
+          <a:xfrm>
+            <a:off x="628650" y="152123"/>
+            <a:ext cx="7886700" cy="696300"/>
+          </a:xfrm>
+          <a:prstGeom prst="rect">
+            <a:avLst/>
+          </a:prstGeom>
+          <a:noFill/>
+          <a:ln>
+            <a:noFill/>
+          </a:ln>
+        </p:spPr>
+        <p:txBody>
+          <a:bodyPr anchorCtr="0" anchor="ctr" bIns="34275" lIns="68575" spcFirstLastPara="1" rIns="68575" wrap="square" tIns="34275">
+            <a:normAutofit/>
+          </a:bodyPr>
+          <a:lstStyle/>
+          <a:p>
+            <a:pPr indent="0" lvl="0" marL="0" rtl="0" algn="l">
+              <a:lnSpc>
+                <a:spcPct val="90000"/>
+              </a:lnSpc>
+              <a:spcBef>
+                <a:spcPts val="0"/>
+              </a:spcBef>
+              <a:spcAft>
+                <a:spcPts val="0"/>
+              </a:spcAft>
+              <a:buClr>
+                <a:schemeClr val="dk1"/>
+              </a:buClr>
+              <a:buSzPts val="3300"/>
+              <a:buFont typeface="Play"/>
+              <a:buNone/>
+            </a:pPr>
+            <a:r>
+              <a:rPr lang="en" sz="2400"/>
+              <a:t>Log Snapshot (Cumulative)</a:t>
+            </a:r>
+            <a:endParaRPr sz="2400"/>
+          </a:p>
+        </p:txBody>
+      </p:sp>
+      <p:graphicFrame>
+        <p:nvGraphicFramePr>
+          <p:cNvPr id="390" name="Google Shape;390;p68"/>
+          <p:cNvGraphicFramePr/>
+          <p:nvPr/>
+        </p:nvGraphicFramePr>
+        <p:xfrm>
+          <a:off x="1071015" y="848436"/>
+          <a:ext cx="3000000" cy="3000000"/>
+        </p:xfrm>
+        <a:graphic>
+          <a:graphicData uri="http://schemas.openxmlformats.org/drawingml/2006/table">
+            <a:tbl>
+              <a:tblPr bandRow="1" firstRow="1">
+                <a:noFill/>
+                <a:tableStyleId>{039D4BB7-C18A-48B2-AB24-E2AFBFED9E2B}</a:tableStyleId>
+              </a:tblPr>
+              <a:tblGrid>
+                <a:gridCol w="1531600"/>
+                <a:gridCol w="1531600"/>
+                <a:gridCol w="1531600"/>
+                <a:gridCol w="1531600"/>
+              </a:tblGrid>
+              <a:tr h="602150">
+                <a:tc>
+                  <a:txBody>
+                    <a:bodyPr/>
+                    <a:lstStyle/>
+                    <a:p>
+                      <a:pPr indent="0" lvl="0" marL="0" marR="0" rtl="0" algn="ctr">
+                        <a:lnSpc>
+                          <a:spcPct val="100000"/>
+                        </a:lnSpc>
+                        <a:spcBef>
+                          <a:spcPts val="0"/>
+                        </a:spcBef>
+                        <a:spcAft>
+                          <a:spcPts val="0"/>
+                        </a:spcAft>
+                        <a:buClr>
+                          <a:schemeClr val="dk1"/>
+                        </a:buClr>
+                        <a:buSzPts val="1400"/>
+                        <a:buFont typeface="Arial"/>
+                        <a:buNone/>
+                      </a:pPr>
+                      <a:r>
+                        <a:rPr b="1" lang="en" sz="1400" u="none" cap="none" strike="noStrike"/>
+                        <a:t>Date</a:t>
+                      </a:r>
+                      <a:endParaRPr sz="1400" u="none" cap="none" strike="noStrike"/>
+                    </a:p>
+                  </a:txBody>
+                  <a:tcPr marT="34300" marB="34300" marR="68600" marL="68600"/>
+                </a:tc>
+                <a:tc>
+                  <a:txBody>
+                    <a:bodyPr/>
+                    <a:lstStyle/>
+                    <a:p>
+                      <a:pPr indent="0" lvl="0" marL="0" marR="0" rtl="0" algn="l">
+                        <a:spcBef>
+                          <a:spcPts val="0"/>
+                        </a:spcBef>
+                        <a:spcAft>
+                          <a:spcPts val="0"/>
+                        </a:spcAft>
+                        <a:buClr>
+                          <a:srgbClr val="FFFFFF"/>
+                        </a:buClr>
+                        <a:buSzPts val="1400"/>
+                        <a:buFont typeface="Arial"/>
+                        <a:buNone/>
+                      </a:pPr>
+                      <a:r>
+                        <a:rPr b="1" i="0" lang="en" sz="1400" u="none" cap="none" strike="noStrike">
+                          <a:solidFill>
+                            <a:srgbClr val="FFFFFF"/>
+                          </a:solidFill>
+                          <a:latin typeface="Arial"/>
+                          <a:ea typeface="Arial"/>
+                          <a:cs typeface="Arial"/>
+                          <a:sym typeface="Arial"/>
+                        </a:rPr>
+                        <a:t>Progress  Summary</a:t>
+                      </a:r>
+                      <a:endParaRPr sz="1100"/>
+                    </a:p>
+                  </a:txBody>
+                  <a:tcPr marT="34300" marB="34300" marR="68600" marL="68600"/>
+                </a:tc>
+                <a:tc>
+                  <a:txBody>
+                    <a:bodyPr/>
+                    <a:lstStyle/>
+                    <a:p>
+                      <a:pPr indent="0" lvl="0" marL="0" marR="0" rtl="0" algn="ctr">
+                        <a:lnSpc>
+                          <a:spcPct val="100000"/>
+                        </a:lnSpc>
+                        <a:spcBef>
+                          <a:spcPts val="0"/>
+                        </a:spcBef>
+                        <a:spcAft>
+                          <a:spcPts val="0"/>
+                        </a:spcAft>
+                        <a:buClr>
+                          <a:srgbClr val="FFFFFF"/>
+                        </a:buClr>
+                        <a:buSzPts val="1400"/>
+                        <a:buFont typeface="Arial"/>
+                        <a:buNone/>
+                      </a:pPr>
+                      <a:r>
+                        <a:rPr b="1" i="0" lang="en" sz="1400" u="none" cap="none" strike="noStrike">
+                          <a:solidFill>
+                            <a:srgbClr val="FFFFFF"/>
+                          </a:solidFill>
+                          <a:latin typeface="Arial"/>
+                          <a:ea typeface="Arial"/>
+                          <a:cs typeface="Arial"/>
+                          <a:sym typeface="Arial"/>
+                        </a:rPr>
+                        <a:t>Next Steps</a:t>
+                      </a:r>
+                      <a:endParaRPr sz="1100"/>
+                    </a:p>
+                    <a:p>
+                      <a:pPr indent="0" lvl="0" marL="0" marR="0" rtl="0" algn="l">
+                        <a:spcBef>
+                          <a:spcPts val="0"/>
+                        </a:spcBef>
+                        <a:spcAft>
+                          <a:spcPts val="0"/>
+                        </a:spcAft>
+                        <a:buClr>
+                          <a:schemeClr val="dk1"/>
+                        </a:buClr>
+                        <a:buSzPts val="1400"/>
+                        <a:buFont typeface="Arial"/>
+                        <a:buNone/>
+                      </a:pPr>
+                      <a:r>
+                        <a:t/>
+                      </a:r>
+                      <a:endParaRPr sz="1400" u="none" cap="none" strike="noStrike"/>
+                    </a:p>
+                  </a:txBody>
+                  <a:tcPr marT="34300" marB="34300" marR="68600" marL="68600"/>
+                </a:tc>
+                <a:tc>
+                  <a:txBody>
+                    <a:bodyPr/>
+                    <a:lstStyle/>
+                    <a:p>
+                      <a:pPr indent="0" lvl="0" marL="0" marR="0" rtl="0" algn="l">
+                        <a:spcBef>
+                          <a:spcPts val="0"/>
+                        </a:spcBef>
+                        <a:spcAft>
+                          <a:spcPts val="0"/>
+                        </a:spcAft>
+                        <a:buClr>
+                          <a:srgbClr val="FFFFFF"/>
+                        </a:buClr>
+                        <a:buSzPts val="1400"/>
+                        <a:buFont typeface="Arial"/>
+                        <a:buNone/>
+                      </a:pPr>
+                      <a:r>
+                        <a:rPr b="1" i="0" lang="en" sz="1400" u="none" cap="none" strike="noStrike">
+                          <a:solidFill>
+                            <a:srgbClr val="FFFFFF"/>
+                          </a:solidFill>
+                          <a:latin typeface="Arial"/>
+                          <a:ea typeface="Arial"/>
+                          <a:cs typeface="Arial"/>
+                          <a:sym typeface="Arial"/>
+                        </a:rPr>
+                        <a:t>Notes</a:t>
+                      </a:r>
+                      <a:endParaRPr sz="1400" u="none" cap="none" strike="noStrike"/>
+                    </a:p>
+                  </a:txBody>
+                  <a:tcPr marT="34300" marB="34300" marR="68600" marL="68600"/>
+                </a:tc>
+              </a:tr>
+              <a:tr h="823275">
+                <a:tc>
+                  <a:txBody>
+                    <a:bodyPr/>
+                    <a:lstStyle/>
+                    <a:p>
+                      <a:pPr indent="0" lvl="0" marL="0" marR="0" rtl="0" algn="l">
+                        <a:spcBef>
+                          <a:spcPts val="0"/>
+                        </a:spcBef>
+                        <a:spcAft>
+                          <a:spcPts val="0"/>
+                        </a:spcAft>
+                        <a:buClr>
+                          <a:schemeClr val="dk1"/>
+                        </a:buClr>
+                        <a:buSzPts val="1400"/>
+                        <a:buFont typeface="Arial"/>
+                        <a:buNone/>
+                      </a:pPr>
+                      <a:r>
+                        <a:rPr lang="en" sz="1400" u="none" cap="none" strike="noStrike"/>
+                        <a:t>Sept. 1</a:t>
+                      </a:r>
+                      <a:r>
+                        <a:rPr lang="en"/>
+                        <a:t>6</a:t>
+                      </a:r>
+                      <a:endParaRPr sz="1100"/>
+                    </a:p>
+                  </a:txBody>
+                  <a:tcPr marT="34300" marB="34300" marR="68600" marL="68600"/>
+                </a:tc>
+                <a:tc>
+                  <a:txBody>
+                    <a:bodyPr/>
+                    <a:lstStyle/>
+                    <a:p>
+                      <a:pPr indent="0" lvl="0" marL="0" marR="0" rtl="0" algn="l">
+                        <a:lnSpc>
+                          <a:spcPct val="100000"/>
+                        </a:lnSpc>
+                        <a:spcBef>
+                          <a:spcPts val="0"/>
+                        </a:spcBef>
+                        <a:spcAft>
+                          <a:spcPts val="0"/>
+                        </a:spcAft>
+                        <a:buClr>
+                          <a:schemeClr val="dk1"/>
+                        </a:buClr>
+                        <a:buSzPts val="1400"/>
+                        <a:buFont typeface="Arial"/>
+                        <a:buNone/>
+                      </a:pPr>
+                      <a:r>
+                        <a:rPr lang="en" sz="1400" u="none" cap="none" strike="noStrike"/>
+                        <a:t>Set up MuJoCo sim; baseline PPO-Clip training</a:t>
+                      </a:r>
+                      <a:endParaRPr sz="1100"/>
+                    </a:p>
+                    <a:p>
+                      <a:pPr indent="0" lvl="0" marL="0" marR="0" rtl="0" algn="l">
+                        <a:spcBef>
+                          <a:spcPts val="0"/>
+                        </a:spcBef>
+                        <a:spcAft>
+                          <a:spcPts val="0"/>
+                        </a:spcAft>
+                        <a:buClr>
+                          <a:schemeClr val="dk1"/>
+                        </a:buClr>
+                        <a:buSzPts val="1400"/>
+                        <a:buFont typeface="Arial"/>
+                        <a:buNone/>
+                      </a:pPr>
+                      <a:r>
+                        <a:t/>
+                      </a:r>
+                      <a:endParaRPr sz="1400" u="none" cap="none" strike="noStrike"/>
+                    </a:p>
+                  </a:txBody>
+                  <a:tcPr marT="34300" marB="34300" marR="68600" marL="68600"/>
+                </a:tc>
+                <a:tc>
+                  <a:txBody>
+                    <a:bodyPr/>
+                    <a:lstStyle/>
+                    <a:p>
+                      <a:pPr indent="0" lvl="0" marL="0" marR="0" rtl="0" algn="l">
+                        <a:lnSpc>
+                          <a:spcPct val="100000"/>
+                        </a:lnSpc>
+                        <a:spcBef>
+                          <a:spcPts val="0"/>
+                        </a:spcBef>
+                        <a:spcAft>
+                          <a:spcPts val="0"/>
+                        </a:spcAft>
+                        <a:buClr>
+                          <a:schemeClr val="dk1"/>
+                        </a:buClr>
+                        <a:buSzPts val="1400"/>
+                        <a:buFont typeface="Arial"/>
+                        <a:buNone/>
+                      </a:pPr>
+                      <a:r>
+                        <a:rPr lang="en">
+                          <a:latin typeface="Arial"/>
+                          <a:ea typeface="Arial"/>
+                          <a:cs typeface="Arial"/>
+                          <a:sym typeface="Arial"/>
+                        </a:rPr>
+                        <a:t>Refine current setup, explore MAPPO theory</a:t>
+                      </a:r>
+                      <a:endParaRPr sz="1100"/>
+                    </a:p>
+                    <a:p>
+                      <a:pPr indent="0" lvl="0" marL="0" marR="0" rtl="0" algn="l">
+                        <a:spcBef>
+                          <a:spcPts val="0"/>
+                        </a:spcBef>
+                        <a:spcAft>
+                          <a:spcPts val="0"/>
+                        </a:spcAft>
+                        <a:buClr>
+                          <a:schemeClr val="dk1"/>
+                        </a:buClr>
+                        <a:buSzPts val="1400"/>
+                        <a:buFont typeface="Arial"/>
+                        <a:buNone/>
+                      </a:pPr>
+                      <a:r>
+                        <a:t/>
+                      </a:r>
+                      <a:endParaRPr sz="1400" u="none" cap="none" strike="noStrike"/>
+                    </a:p>
+                  </a:txBody>
+                  <a:tcPr marT="34300" marB="34300" marR="68600" marL="68600"/>
+                </a:tc>
+                <a:tc>
+                  <a:txBody>
+                    <a:bodyPr/>
+                    <a:lstStyle/>
+                    <a:p>
+                      <a:pPr indent="0" lvl="0" marL="0" marR="0" rtl="0" algn="l">
+                        <a:lnSpc>
+                          <a:spcPct val="100000"/>
+                        </a:lnSpc>
+                        <a:spcBef>
+                          <a:spcPts val="0"/>
+                        </a:spcBef>
+                        <a:spcAft>
+                          <a:spcPts val="0"/>
+                        </a:spcAft>
+                        <a:buClr>
+                          <a:schemeClr val="dk1"/>
+                        </a:buClr>
+                        <a:buSzPts val="1400"/>
+                        <a:buFont typeface="Arial"/>
+                        <a:buNone/>
+                      </a:pPr>
+                      <a:r>
+                        <a:rPr lang="en">
+                          <a:latin typeface="Arial"/>
+                          <a:ea typeface="Arial"/>
+                          <a:cs typeface="Arial"/>
+                          <a:sym typeface="Arial"/>
+                        </a:rPr>
+                        <a:t>Policy / env is current imperfect / inconsistent</a:t>
+                      </a:r>
+                      <a:endParaRPr sz="1100"/>
+                    </a:p>
+                    <a:p>
+                      <a:pPr indent="0" lvl="0" marL="0" marR="0" rtl="0" algn="l">
+                        <a:spcBef>
+                          <a:spcPts val="0"/>
+                        </a:spcBef>
+                        <a:spcAft>
+                          <a:spcPts val="0"/>
+                        </a:spcAft>
+                        <a:buClr>
+                          <a:schemeClr val="dk1"/>
+                        </a:buClr>
+                        <a:buSzPts val="1400"/>
+                        <a:buFont typeface="Arial"/>
+                        <a:buNone/>
+                      </a:pPr>
+                      <a:r>
+                        <a:t/>
+                      </a:r>
+                      <a:endParaRPr sz="1400" u="none" cap="none" strike="noStrike"/>
+                    </a:p>
+                  </a:txBody>
+                  <a:tcPr marT="34300" marB="34300" marR="68600" marL="68600"/>
+                </a:tc>
+              </a:tr>
+              <a:tr h="811225">
+                <a:tc>
+                  <a:txBody>
+                    <a:bodyPr/>
+                    <a:lstStyle/>
+                    <a:p>
+                      <a:pPr indent="0" lvl="0" marL="0" marR="0" rtl="0" algn="l">
+                        <a:spcBef>
+                          <a:spcPts val="0"/>
+                        </a:spcBef>
+                        <a:spcAft>
+                          <a:spcPts val="0"/>
+                        </a:spcAft>
+                        <a:buNone/>
+                      </a:pPr>
+                      <a:r>
+                        <a:rPr lang="en" sz="1400" u="none" cap="none" strike="noStrike"/>
+                        <a:t>Sept. 30</a:t>
+                      </a:r>
+                      <a:endParaRPr sz="1100"/>
+                    </a:p>
+                  </a:txBody>
+                  <a:tcPr marT="34300" marB="34300" marR="68600" marL="68600"/>
+                </a:tc>
+                <a:tc>
+                  <a:txBody>
+                    <a:bodyPr/>
+                    <a:lstStyle/>
+                    <a:p>
+                      <a:pPr indent="0" lvl="0" marL="0" marR="0" rtl="0" algn="l">
+                        <a:lnSpc>
+                          <a:spcPct val="100000"/>
+                        </a:lnSpc>
+                        <a:spcBef>
+                          <a:spcPts val="0"/>
+                        </a:spcBef>
+                        <a:spcAft>
+                          <a:spcPts val="0"/>
+                        </a:spcAft>
+                        <a:buClr>
+                          <a:schemeClr val="dk1"/>
+                        </a:buClr>
+                        <a:buSzPts val="1400"/>
+                        <a:buFont typeface="Arial"/>
+                        <a:buNone/>
+                      </a:pPr>
+                      <a:r>
+                        <a:rPr lang="en"/>
+                        <a:t>Successful Z hover.</a:t>
+                      </a:r>
+                      <a:endParaRPr/>
+                    </a:p>
+                    <a:p>
+                      <a:pPr indent="0" lvl="0" marL="0" marR="0" rtl="0" algn="l">
+                        <a:lnSpc>
+                          <a:spcPct val="100000"/>
+                        </a:lnSpc>
+                        <a:spcBef>
+                          <a:spcPts val="0"/>
+                        </a:spcBef>
+                        <a:spcAft>
+                          <a:spcPts val="0"/>
+                        </a:spcAft>
+                        <a:buClr>
+                          <a:schemeClr val="dk1"/>
+                        </a:buClr>
+                        <a:buSzPts val="1400"/>
+                        <a:buFont typeface="Arial"/>
+                        <a:buNone/>
+                      </a:pPr>
+                      <a:r>
+                        <a:rPr lang="en"/>
+                        <a:t>Semi-successful YZ hover</a:t>
+                      </a:r>
+                      <a:endParaRPr/>
+                    </a:p>
+                  </a:txBody>
+                  <a:tcPr marT="34300" marB="34300" marR="68600" marL="68600"/>
+                </a:tc>
+                <a:tc>
+                  <a:txBody>
+                    <a:bodyPr/>
+                    <a:lstStyle/>
+                    <a:p>
+                      <a:pPr indent="0" lvl="0" marL="0" marR="0" rtl="0" algn="l">
+                        <a:lnSpc>
+                          <a:spcPct val="100000"/>
+                        </a:lnSpc>
+                        <a:spcBef>
+                          <a:spcPts val="0"/>
+                        </a:spcBef>
+                        <a:spcAft>
+                          <a:spcPts val="0"/>
+                        </a:spcAft>
+                        <a:buClr>
+                          <a:schemeClr val="dk1"/>
+                        </a:buClr>
+                        <a:buSzPts val="1400"/>
+                        <a:buFont typeface="Arial"/>
+                        <a:buNone/>
+                      </a:pPr>
+                      <a:r>
+                        <a:rPr lang="en"/>
+                        <a:t>Refine YZ hover and move to XYZ, explore MAPPO theory</a:t>
+                      </a:r>
+                      <a:endParaRPr/>
+                    </a:p>
+                  </a:txBody>
+                  <a:tcPr marT="34300" marB="34300" marR="68600" marL="68600"/>
+                </a:tc>
+                <a:tc>
+                  <a:txBody>
+                    <a:bodyPr/>
+                    <a:lstStyle/>
+                    <a:p>
+                      <a:pPr indent="0" lvl="0" marL="0" marR="0" rtl="0" algn="l">
+                        <a:lnSpc>
+                          <a:spcPct val="100000"/>
+                        </a:lnSpc>
+                        <a:spcBef>
+                          <a:spcPts val="0"/>
+                        </a:spcBef>
+                        <a:spcAft>
+                          <a:spcPts val="0"/>
+                        </a:spcAft>
+                        <a:buClr>
+                          <a:schemeClr val="dk1"/>
+                        </a:buClr>
+                        <a:buSzPts val="1400"/>
+                        <a:buFont typeface="Arial"/>
+                        <a:buNone/>
+                      </a:pPr>
+                      <a:r>
+                        <a:t/>
+                      </a:r>
+                      <a:endParaRPr sz="1100"/>
+                    </a:p>
+                  </a:txBody>
+                  <a:tcPr marT="34300" marB="34300" marR="68600" marL="68600"/>
+                </a:tc>
+              </a:tr>
+              <a:tr h="342775">
+                <a:tc>
+                  <a:txBody>
+                    <a:bodyPr/>
+                    <a:lstStyle/>
+                    <a:p>
+                      <a:pPr indent="0" lvl="0" marL="0" marR="0" rtl="0" algn="l">
+                        <a:spcBef>
+                          <a:spcPts val="0"/>
+                        </a:spcBef>
+                        <a:spcAft>
+                          <a:spcPts val="0"/>
+                        </a:spcAft>
+                        <a:buNone/>
+                      </a:pPr>
+                      <a:r>
+                        <a:rPr lang="en"/>
+                        <a:t>Oct. 14</a:t>
+                      </a:r>
+                      <a:endParaRPr sz="1400"/>
+                    </a:p>
+                  </a:txBody>
+                  <a:tcPr marT="34300" marB="34300" marR="68600" marL="68600"/>
+                </a:tc>
+                <a:tc>
+                  <a:txBody>
+                    <a:bodyPr/>
+                    <a:lstStyle/>
+                    <a:p>
+                      <a:pPr indent="0" lvl="0" marL="0" marR="0" rtl="0" algn="l">
+                        <a:spcBef>
+                          <a:spcPts val="0"/>
+                        </a:spcBef>
+                        <a:spcAft>
+                          <a:spcPts val="0"/>
+                        </a:spcAft>
+                        <a:buNone/>
+                      </a:pPr>
+                      <a:r>
+                        <a:rPr lang="en"/>
+                        <a:t>Small XYZ hover</a:t>
+                      </a:r>
+                      <a:endParaRPr sz="1400"/>
+                    </a:p>
+                  </a:txBody>
+                  <a:tcPr marT="34300" marB="34300" marR="68600" marL="68600"/>
+                </a:tc>
+                <a:tc>
+                  <a:txBody>
+                    <a:bodyPr/>
+                    <a:lstStyle/>
+                    <a:p>
+                      <a:pPr indent="0" lvl="0" marL="0" marR="0" rtl="0" algn="l">
+                        <a:spcBef>
+                          <a:spcPts val="0"/>
+                        </a:spcBef>
+                        <a:spcAft>
+                          <a:spcPts val="0"/>
+                        </a:spcAft>
+                        <a:buNone/>
+                      </a:pPr>
+                      <a:r>
+                        <a:rPr lang="en"/>
+                        <a:t>Full XYZ hover and MAPPO implementation</a:t>
+                      </a:r>
+                      <a:endParaRPr sz="1400"/>
+                    </a:p>
+                  </a:txBody>
+                  <a:tcPr marT="34300" marB="34300" marR="68600" marL="68600"/>
+                </a:tc>
+                <a:tc>
+                  <a:txBody>
+                    <a:bodyPr/>
+                    <a:lstStyle/>
+                    <a:p>
+                      <a:pPr indent="0" lvl="0" marL="0" marR="0" rtl="0" algn="l">
+                        <a:spcBef>
+                          <a:spcPts val="0"/>
+                        </a:spcBef>
+                        <a:spcAft>
+                          <a:spcPts val="0"/>
+                        </a:spcAft>
+                        <a:buNone/>
+                      </a:pPr>
+                      <a:r>
+                        <a:t/>
+                      </a:r>
+                      <a:endParaRPr sz="1400"/>
+                    </a:p>
+                  </a:txBody>
+                  <a:tcPr marT="34300" marB="34300" marR="68600" marL="68600"/>
+                </a:tc>
+              </a:tr>
+              <a:tr h="342775">
+                <a:tc>
+                  <a:txBody>
+                    <a:bodyPr/>
+                    <a:lstStyle/>
+                    <a:p>
+                      <a:pPr indent="0" lvl="0" marL="0" marR="0" rtl="0" algn="l">
+                        <a:spcBef>
+                          <a:spcPts val="0"/>
+                        </a:spcBef>
+                        <a:spcAft>
+                          <a:spcPts val="0"/>
+                        </a:spcAft>
+                        <a:buNone/>
+                      </a:pPr>
+                      <a:r>
+                        <a:rPr lang="en"/>
+                        <a:t>Oct 28</a:t>
+                      </a:r>
+                      <a:endParaRPr/>
+                    </a:p>
+                  </a:txBody>
+                  <a:tcPr marT="34300" marB="34300" marR="68600" marL="68600"/>
+                </a:tc>
+                <a:tc>
+                  <a:txBody>
+                    <a:bodyPr/>
+                    <a:lstStyle/>
+                    <a:p>
+                      <a:pPr indent="0" lvl="0" marL="0" marR="0" rtl="0" algn="l">
+                        <a:spcBef>
+                          <a:spcPts val="0"/>
+                        </a:spcBef>
+                        <a:spcAft>
+                          <a:spcPts val="0"/>
+                        </a:spcAft>
+                        <a:buNone/>
+                      </a:pPr>
+                      <a:r>
+                        <a:rPr lang="en"/>
+                        <a:t>Single + Multi XYZ hover</a:t>
+                      </a:r>
+                      <a:endParaRPr/>
+                    </a:p>
+                  </a:txBody>
+                  <a:tcPr marT="34300" marB="34300" marR="68600" marL="68600"/>
+                </a:tc>
+                <a:tc>
+                  <a:txBody>
+                    <a:bodyPr/>
+                    <a:lstStyle/>
+                    <a:p>
+                      <a:pPr indent="0" lvl="0" marL="0" marR="0" rtl="0" algn="l">
+                        <a:spcBef>
+                          <a:spcPts val="0"/>
+                        </a:spcBef>
+                        <a:spcAft>
+                          <a:spcPts val="0"/>
+                        </a:spcAft>
+                        <a:buNone/>
+                      </a:pPr>
+                      <a:r>
+                        <a:rPr lang="en"/>
+                        <a:t>Better multi-XYZ hover, testing on actual drones</a:t>
+                      </a:r>
+                      <a:endParaRPr/>
+                    </a:p>
+                  </a:txBody>
+                  <a:tcPr marT="34300" marB="34300" marR="68600" marL="68600"/>
+                </a:tc>
+                <a:tc>
+                  <a:txBody>
+                    <a:bodyPr/>
+                    <a:lstStyle/>
+                    <a:p>
+                      <a:pPr indent="0" lvl="0" marL="0" marR="0" rtl="0" algn="l">
+                        <a:spcBef>
+                          <a:spcPts val="0"/>
+                        </a:spcBef>
+                        <a:spcAft>
+                          <a:spcPts val="0"/>
+                        </a:spcAft>
+                        <a:buNone/>
+                      </a:pPr>
+                      <a:r>
+                        <a:t/>
+                      </a:r>
+                      <a:endParaRPr sz="1400"/>
+                    </a:p>
+                  </a:txBody>
+                  <a:tcPr marT="34300" marB="34300" marR="68600" marL="68600"/>
+                </a:tc>
+              </a:tr>
+            </a:tbl>
+          </a:graphicData>
+        </a:graphic>
+      </p:graphicFrame>
+    </p:spTree>
+  </p:cSld>
+  <p:clrMapOvr>
+    <a:masterClrMapping/>
+  </p:clrMapOvr>
+</p:sld>
+</file>
+
+<file path=ppt/slides/slide45.xml><?xml version="1.0" encoding="utf-8"?>
+<p:sld xmlns:a="http://schemas.openxmlformats.org/drawingml/2006/main" xmlns:r="http://schemas.openxmlformats.org/officeDocument/2006/relationships" xmlns:mc="http://schemas.openxmlformats.org/markup-compatibility/2006" xmlns:mv="urn:schemas-microsoft-com:mac:vml" xmlns:p="http://schemas.openxmlformats.org/presentationml/2006/main" xmlns:c="http://schemas.openxmlformats.org/drawingml/2006/chart" xmlns:dgm="http://schemas.openxmlformats.org/drawingml/2006/diagram" xmlns:o="urn:schemas-microsoft-com:office:office" xmlns:v="urn:schemas-microsoft-com:vml" xmlns:pvml="urn:schemas-microsoft-com:office:powerpoint" xmlns:com="http://schemas.openxmlformats.org/drawingml/2006/compatibility" xmlns:p14="http://schemas.microsoft.com/office/powerpoint/2010/main" xmlns:p15="http://schemas.microsoft.com/office/powerpoint/2012/main" xmlns:ahyp="http://schemas.microsoft.com/office/drawing/2018/hyperlinkcolor">
+  <p:cSld>
+    <p:spTree>
+      <p:nvGrpSpPr>
+        <p:cNvPr id="394" name="Shape 394"/>
+        <p:cNvGrpSpPr/>
+        <p:nvPr/>
+      </p:nvGrpSpPr>
+      <p:grpSpPr>
+        <a:xfrm>
+          <a:off x="0" y="0"/>
+          <a:ext cx="0" cy="0"/>
+          <a:chOff x="0" y="0"/>
+          <a:chExt cx="0" cy="0"/>
+        </a:xfrm>
+      </p:grpSpPr>
+      <p:sp>
+        <p:nvSpPr>
+          <p:cNvPr id="395" name="Google Shape;395;p69"/>
+          <p:cNvSpPr txBox="1"/>
+          <p:nvPr>
+            <p:ph type="title"/>
+          </p:nvPr>
+        </p:nvSpPr>
+        <p:spPr>
+          <a:xfrm>
+            <a:off x="628650" y="152123"/>
+            <a:ext cx="7886700" cy="696300"/>
+          </a:xfrm>
+          <a:prstGeom prst="rect">
+            <a:avLst/>
+          </a:prstGeom>
+          <a:noFill/>
+          <a:ln>
+            <a:noFill/>
+          </a:ln>
+        </p:spPr>
+        <p:txBody>
+          <a:bodyPr anchorCtr="0" anchor="ctr" bIns="34275" lIns="68575" spcFirstLastPara="1" rIns="68575" wrap="square" tIns="34275">
+            <a:normAutofit/>
+          </a:bodyPr>
+          <a:lstStyle/>
+          <a:p>
+            <a:pPr indent="0" lvl="0" marL="0" rtl="0" algn="l">
+              <a:lnSpc>
+                <a:spcPct val="90000"/>
+              </a:lnSpc>
+              <a:spcBef>
+                <a:spcPts val="0"/>
+              </a:spcBef>
+              <a:spcAft>
+                <a:spcPts val="0"/>
+              </a:spcAft>
+              <a:buClr>
+                <a:schemeClr val="dk1"/>
+              </a:buClr>
+              <a:buSzPts val="3300"/>
+              <a:buFont typeface="Play"/>
+              <a:buNone/>
+            </a:pPr>
+            <a:r>
+              <a:rPr lang="en" sz="2400"/>
+              <a:t>Log Snapshot (Cumulative)</a:t>
+            </a:r>
+            <a:endParaRPr sz="2400"/>
+          </a:p>
+        </p:txBody>
+      </p:sp>
+      <p:graphicFrame>
+        <p:nvGraphicFramePr>
+          <p:cNvPr id="396" name="Google Shape;396;p69"/>
+          <p:cNvGraphicFramePr/>
+          <p:nvPr/>
+        </p:nvGraphicFramePr>
+        <p:xfrm>
+          <a:off x="1071015" y="848436"/>
+          <a:ext cx="3000000" cy="3000000"/>
+        </p:xfrm>
+        <a:graphic>
+          <a:graphicData uri="http://schemas.openxmlformats.org/drawingml/2006/table">
+            <a:tbl>
+              <a:tblPr bandRow="1" firstRow="1">
+                <a:noFill/>
+                <a:tableStyleId>{039D4BB7-C18A-48B2-AB24-E2AFBFED9E2B}</a:tableStyleId>
+              </a:tblPr>
+              <a:tblGrid>
+                <a:gridCol w="1531600"/>
+                <a:gridCol w="1531600"/>
+                <a:gridCol w="1531600"/>
+                <a:gridCol w="1531600"/>
+              </a:tblGrid>
+              <a:tr h="602150">
+                <a:tc>
+                  <a:txBody>
+                    <a:bodyPr/>
+                    <a:lstStyle/>
+                    <a:p>
+                      <a:pPr indent="0" lvl="0" marL="0" marR="0" rtl="0" algn="ctr">
+                        <a:lnSpc>
+                          <a:spcPct val="100000"/>
+                        </a:lnSpc>
+                        <a:spcBef>
+                          <a:spcPts val="0"/>
+                        </a:spcBef>
+                        <a:spcAft>
+                          <a:spcPts val="0"/>
+                        </a:spcAft>
+                        <a:buClr>
+                          <a:schemeClr val="dk1"/>
+                        </a:buClr>
+                        <a:buSzPts val="1400"/>
+                        <a:buFont typeface="Arial"/>
+                        <a:buNone/>
+                      </a:pPr>
+                      <a:r>
+                        <a:rPr b="1" lang="en" sz="1400" u="none" cap="none" strike="noStrike"/>
+                        <a:t>Date</a:t>
+                      </a:r>
+                      <a:endParaRPr sz="1400" u="none" cap="none" strike="noStrike"/>
+                    </a:p>
+                  </a:txBody>
+                  <a:tcPr marT="34300" marB="34300" marR="68600" marL="68600"/>
+                </a:tc>
+                <a:tc>
+                  <a:txBody>
+                    <a:bodyPr/>
+                    <a:lstStyle/>
+                    <a:p>
+                      <a:pPr indent="0" lvl="0" marL="0" marR="0" rtl="0" algn="l">
+                        <a:spcBef>
+                          <a:spcPts val="0"/>
+                        </a:spcBef>
+                        <a:spcAft>
+                          <a:spcPts val="0"/>
+                        </a:spcAft>
+                        <a:buClr>
+                          <a:srgbClr val="FFFFFF"/>
+                        </a:buClr>
+                        <a:buSzPts val="1400"/>
+                        <a:buFont typeface="Arial"/>
+                        <a:buNone/>
+                      </a:pPr>
+                      <a:r>
+                        <a:rPr b="1" i="0" lang="en" sz="1400" u="none" cap="none" strike="noStrike">
+                          <a:solidFill>
+                            <a:srgbClr val="FFFFFF"/>
+                          </a:solidFill>
+                          <a:latin typeface="Arial"/>
+                          <a:ea typeface="Arial"/>
+                          <a:cs typeface="Arial"/>
+                          <a:sym typeface="Arial"/>
+                        </a:rPr>
+                        <a:t>Progress  Summary</a:t>
+                      </a:r>
+                      <a:endParaRPr sz="1100"/>
+                    </a:p>
+                  </a:txBody>
+                  <a:tcPr marT="34300" marB="34300" marR="68600" marL="68600"/>
+                </a:tc>
+                <a:tc>
+                  <a:txBody>
+                    <a:bodyPr/>
+                    <a:lstStyle/>
+                    <a:p>
+                      <a:pPr indent="0" lvl="0" marL="0" marR="0" rtl="0" algn="ctr">
+                        <a:lnSpc>
+                          <a:spcPct val="100000"/>
+                        </a:lnSpc>
+                        <a:spcBef>
+                          <a:spcPts val="0"/>
+                        </a:spcBef>
+                        <a:spcAft>
+                          <a:spcPts val="0"/>
+                        </a:spcAft>
+                        <a:buClr>
+                          <a:srgbClr val="FFFFFF"/>
+                        </a:buClr>
+                        <a:buSzPts val="1400"/>
+                        <a:buFont typeface="Arial"/>
+                        <a:buNone/>
+                      </a:pPr>
+                      <a:r>
+                        <a:rPr b="1" i="0" lang="en" sz="1400" u="none" cap="none" strike="noStrike">
+                          <a:solidFill>
+                            <a:srgbClr val="FFFFFF"/>
+                          </a:solidFill>
+                          <a:latin typeface="Arial"/>
+                          <a:ea typeface="Arial"/>
+                          <a:cs typeface="Arial"/>
+                          <a:sym typeface="Arial"/>
+                        </a:rPr>
+                        <a:t>Next Steps</a:t>
+                      </a:r>
+                      <a:endParaRPr sz="1100"/>
+                    </a:p>
+                    <a:p>
+                      <a:pPr indent="0" lvl="0" marL="0" marR="0" rtl="0" algn="l">
+                        <a:spcBef>
+                          <a:spcPts val="0"/>
+                        </a:spcBef>
+                        <a:spcAft>
+                          <a:spcPts val="0"/>
+                        </a:spcAft>
+                        <a:buClr>
+                          <a:schemeClr val="dk1"/>
+                        </a:buClr>
+                        <a:buSzPts val="1400"/>
+                        <a:buFont typeface="Arial"/>
+                        <a:buNone/>
+                      </a:pPr>
+                      <a:r>
+                        <a:t/>
+                      </a:r>
+                      <a:endParaRPr sz="1400" u="none" cap="none" strike="noStrike"/>
+                    </a:p>
+                  </a:txBody>
+                  <a:tcPr marT="34300" marB="34300" marR="68600" marL="68600"/>
+                </a:tc>
+                <a:tc>
+                  <a:txBody>
+                    <a:bodyPr/>
+                    <a:lstStyle/>
+                    <a:p>
+                      <a:pPr indent="0" lvl="0" marL="0" marR="0" rtl="0" algn="l">
+                        <a:spcBef>
+                          <a:spcPts val="0"/>
+                        </a:spcBef>
+                        <a:spcAft>
+                          <a:spcPts val="0"/>
+                        </a:spcAft>
+                        <a:buClr>
+                          <a:srgbClr val="FFFFFF"/>
+                        </a:buClr>
+                        <a:buSzPts val="1400"/>
+                        <a:buFont typeface="Arial"/>
+                        <a:buNone/>
+                      </a:pPr>
+                      <a:r>
+                        <a:rPr b="1" i="0" lang="en" sz="1400" u="none" cap="none" strike="noStrike">
+                          <a:solidFill>
+                            <a:srgbClr val="FFFFFF"/>
+                          </a:solidFill>
+                          <a:latin typeface="Arial"/>
+                          <a:ea typeface="Arial"/>
+                          <a:cs typeface="Arial"/>
+                          <a:sym typeface="Arial"/>
+                        </a:rPr>
+                        <a:t>Notes</a:t>
+                      </a:r>
+                      <a:endParaRPr sz="1400" u="none" cap="none" strike="noStrike"/>
+                    </a:p>
+                  </a:txBody>
+                  <a:tcPr marT="34300" marB="34300" marR="68600" marL="68600"/>
+                </a:tc>
+              </a:tr>
+              <a:tr h="823275">
+                <a:tc>
+                  <a:txBody>
+                    <a:bodyPr/>
+                    <a:lstStyle/>
+                    <a:p>
+                      <a:pPr indent="0" lvl="0" marL="0" marR="0" rtl="0" algn="l">
+                        <a:spcBef>
+                          <a:spcPts val="0"/>
+                        </a:spcBef>
+                        <a:spcAft>
+                          <a:spcPts val="0"/>
+                        </a:spcAft>
+                        <a:buClr>
+                          <a:schemeClr val="dk1"/>
+                        </a:buClr>
+                        <a:buSzPts val="1400"/>
+                        <a:buFont typeface="Arial"/>
+                        <a:buNone/>
+                      </a:pPr>
+                      <a:r>
+                        <a:rPr lang="en"/>
+                        <a:t>Nov. 11</a:t>
+                      </a:r>
+                      <a:endParaRPr sz="1100"/>
+                    </a:p>
+                  </a:txBody>
+                  <a:tcPr marT="34300" marB="34300" marR="68600" marL="68600"/>
+                </a:tc>
+                <a:tc>
+                  <a:txBody>
+                    <a:bodyPr/>
+                    <a:lstStyle/>
+                    <a:p>
+                      <a:pPr indent="0" lvl="0" marL="0" marR="0" rtl="0" algn="l">
+                        <a:lnSpc>
+                          <a:spcPct val="100000"/>
+                        </a:lnSpc>
+                        <a:spcBef>
+                          <a:spcPts val="0"/>
+                        </a:spcBef>
+                        <a:spcAft>
+                          <a:spcPts val="0"/>
+                        </a:spcAft>
+                        <a:buClr>
+                          <a:schemeClr val="dk1"/>
+                        </a:buClr>
+                        <a:buSzPts val="1400"/>
+                        <a:buFont typeface="Arial"/>
+                        <a:buNone/>
+                      </a:pPr>
+                      <a:r>
+                        <a:rPr lang="en"/>
+                        <a:t>Pivoted to MJX for more compute-intense training</a:t>
+                      </a:r>
+                      <a:endParaRPr sz="1100"/>
+                    </a:p>
+                    <a:p>
+                      <a:pPr indent="0" lvl="0" marL="0" marR="0" rtl="0" algn="l">
+                        <a:spcBef>
+                          <a:spcPts val="0"/>
+                        </a:spcBef>
+                        <a:spcAft>
+                          <a:spcPts val="0"/>
+                        </a:spcAft>
+                        <a:buClr>
+                          <a:schemeClr val="dk1"/>
+                        </a:buClr>
+                        <a:buSzPts val="1400"/>
+                        <a:buFont typeface="Arial"/>
+                        <a:buNone/>
+                      </a:pPr>
+                      <a:r>
+                        <a:t/>
+                      </a:r>
+                      <a:endParaRPr sz="1400" u="none" cap="none" strike="noStrike"/>
+                    </a:p>
+                  </a:txBody>
+                  <a:tcPr marT="34300" marB="34300" marR="68600" marL="68600"/>
+                </a:tc>
+                <a:tc>
+                  <a:txBody>
+                    <a:bodyPr/>
+                    <a:lstStyle/>
+                    <a:p>
+                      <a:pPr indent="0" lvl="0" marL="0" marR="0" rtl="0" algn="l">
+                        <a:lnSpc>
+                          <a:spcPct val="100000"/>
+                        </a:lnSpc>
+                        <a:spcBef>
+                          <a:spcPts val="0"/>
+                        </a:spcBef>
+                        <a:spcAft>
+                          <a:spcPts val="0"/>
+                        </a:spcAft>
+                        <a:buClr>
+                          <a:schemeClr val="dk1"/>
+                        </a:buClr>
+                        <a:buSzPts val="1400"/>
+                        <a:buFont typeface="Arial"/>
+                        <a:buNone/>
+                      </a:pPr>
+                      <a:r>
+                        <a:rPr lang="en">
+                          <a:latin typeface="Arial"/>
+                          <a:ea typeface="Arial"/>
+                          <a:cs typeface="Arial"/>
+                          <a:sym typeface="Arial"/>
+                        </a:rPr>
+                        <a:t>Fix 2 agent, prepare for testing on hardware</a:t>
+                      </a:r>
+                      <a:endParaRPr sz="1100"/>
+                    </a:p>
+                    <a:p>
+                      <a:pPr indent="0" lvl="0" marL="0" marR="0" rtl="0" algn="l">
+                        <a:spcBef>
+                          <a:spcPts val="0"/>
+                        </a:spcBef>
+                        <a:spcAft>
+                          <a:spcPts val="0"/>
+                        </a:spcAft>
+                        <a:buClr>
+                          <a:schemeClr val="dk1"/>
+                        </a:buClr>
+                        <a:buSzPts val="1400"/>
+                        <a:buFont typeface="Arial"/>
+                        <a:buNone/>
+                      </a:pPr>
+                      <a:r>
+                        <a:t/>
+                      </a:r>
+                      <a:endParaRPr sz="1400" u="none" cap="none" strike="noStrike"/>
+                    </a:p>
+                  </a:txBody>
+                  <a:tcPr marT="34300" marB="34300" marR="68600" marL="68600"/>
+                </a:tc>
+                <a:tc>
+                  <a:txBody>
+                    <a:bodyPr/>
+                    <a:lstStyle/>
+                    <a:p>
+                      <a:pPr indent="0" lvl="0" marL="0" marR="0" rtl="0" algn="l">
+                        <a:spcBef>
+                          <a:spcPts val="0"/>
+                        </a:spcBef>
+                        <a:spcAft>
+                          <a:spcPts val="0"/>
+                        </a:spcAft>
+                        <a:buClr>
+                          <a:schemeClr val="dk1"/>
+                        </a:buClr>
+                        <a:buSzPts val="1400"/>
+                        <a:buFont typeface="Arial"/>
+                        <a:buNone/>
+                      </a:pPr>
+                      <a:r>
+                        <a:t/>
+                      </a:r>
+                      <a:endParaRPr sz="1400" u="none" cap="none" strike="noStrike"/>
+                    </a:p>
+                  </a:txBody>
+                  <a:tcPr marT="34300" marB="34300" marR="68600" marL="68600"/>
+                </a:tc>
+              </a:tr>
+            </a:tbl>
+          </a:graphicData>
+        </a:graphic>
+      </p:graphicFrame>
     </p:spTree>
   </p:cSld>
   <p:clrMapOvr>
@@ -29033,7 +32981,7 @@
             <a:tbl>
               <a:tblPr bandRow="1" firstRow="1">
                 <a:noFill/>
-                <a:tableStyleId>{33C79BD9-4D4F-410C-A80E-0E65E8C5DBDC}</a:tableStyleId>
+                <a:tableStyleId>{039D4BB7-C18A-48B2-AB24-E2AFBFED9E2B}</a:tableStyleId>
               </a:tblPr>
               <a:tblGrid>
                 <a:gridCol w="1531600"/>
